--- a/Introduccion a la Ingenieria/Clases/Clase 9 - Estrategias de innovacion en Ingenieria/Presentacion.pptx
+++ b/Introduccion a la Ingenieria/Clases/Clase 9 - Estrategias de innovacion en Ingenieria/Presentacion.pptx
@@ -18,6 +18,16 @@
     <p:sldId id="266" r:id="rId17"/>
     <p:sldId id="267" r:id="rId18"/>
     <p:sldId id="268" r:id="rId19"/>
+    <p:sldId id="269" r:id="rId20"/>
+    <p:sldId id="270" r:id="rId21"/>
+    <p:sldId id="271" r:id="rId22"/>
+    <p:sldId id="272" r:id="rId23"/>
+    <p:sldId id="273" r:id="rId24"/>
+    <p:sldId id="274" r:id="rId25"/>
+    <p:sldId id="275" r:id="rId26"/>
+    <p:sldId id="276" r:id="rId27"/>
+    <p:sldId id="277" r:id="rId28"/>
+    <p:sldId id="278" r:id="rId29"/>
   </p:sldIdLst>
   <p:sldSz cx="12191695" cy="6858000" type="screen4x3"/>
   <p:notesSz cx="6858000" cy="9144000"/>
@@ -3512,7 +3522,7 @@
         <p:spPr>
           <a:xfrm>
             <a:off x="0" y="0"/>
-            <a:ext cx="12191695" cy="1170432"/>
+            <a:ext cx="12191695" cy="960120"/>
           </a:xfrm>
           <a:prstGeom prst="rect">
             <a:avLst/>
@@ -3554,7 +3564,7 @@
         </p:nvSpPr>
         <p:spPr>
           <a:xfrm>
-            <a:off x="0" y="1170432"/>
+            <a:off x="0" y="960120"/>
             <a:ext cx="12191695" cy="41148"/>
           </a:xfrm>
           <a:prstGeom prst="rect">
@@ -3598,7 +3608,7 @@
         <p:spPr>
           <a:xfrm>
             <a:off x="457200" y="164592"/>
-            <a:ext cx="11277295" cy="384048"/>
+            <a:ext cx="11277295" cy="502920"/>
           </a:xfrm>
           <a:prstGeom prst="rect">
             <a:avLst/>
@@ -3618,7 +3628,7 @@
                 </a:solidFill>
                 <a:latin typeface="Calibri"/>
               </a:rPr>
-              <a:t>Taller de hoy: Antecedentes y propuesta de mejora</a:t>
+              <a:t>La pregunta de entrada: si no existe en ningún lado, probablemente no buscaron</a:t>
             </a:r>
           </a:p>
         </p:txBody>
@@ -3631,8 +3641,8 @@
         </p:nvSpPr>
         <p:spPr>
           <a:xfrm>
-            <a:off x="457200" y="566928"/>
-            <a:ext cx="11277295" cy="411480"/>
+            <a:off x="457200" y="1170432"/>
+            <a:ext cx="11277295" cy="5230368"/>
           </a:xfrm>
           <a:prstGeom prst="rect">
             <a:avLst/>
@@ -3645,963 +3655,156 @@
           </a:bodyPr>
           <a:lstStyle/>
           <a:p>
-            <a:r>
-              <a:rPr sz="1400" b="0" i="0">
-                <a:solidFill>
-                  <a:srgbClr val="B8D8EE"/>
-                </a:solidFill>
-                <a:latin typeface="Calibri"/>
-              </a:rPr>
-              <a:t>17 min en equipos · búsqueda repartida: 2 académico · 2 soluciones reales · 1 normas · tres fichas de antecedentes + propuesta de mejora + mapa en Excalidraw</a:t>
-            </a:r>
-          </a:p>
-        </p:txBody>
-      </p:sp>
-      <p:sp>
-        <p:nvSpPr>
-          <p:cNvPr id="6" name="Rounded Rectangle 5"/>
-          <p:cNvSpPr/>
-          <p:nvPr/>
-        </p:nvSpPr>
-        <p:spPr>
-          <a:xfrm>
-            <a:off x="457200" y="1472184"/>
-            <a:ext cx="11277295" cy="566928"/>
-          </a:xfrm>
-          <a:prstGeom prst="roundRect">
-            <a:avLst>
-              <a:gd name="adj" fmla="val 12000"/>
-            </a:avLst>
-          </a:prstGeom>
-          <a:solidFill>
-            <a:srgbClr val="F2F2F2"/>
-          </a:solidFill>
-          <a:ln>
-            <a:noFill/>
-          </a:ln>
-        </p:spPr>
-        <p:style>
-          <a:lnRef idx="1">
-            <a:schemeClr val="accent1"/>
-          </a:lnRef>
-          <a:fillRef idx="3">
-            <a:schemeClr val="accent1"/>
-          </a:fillRef>
-          <a:effectRef idx="2">
-            <a:schemeClr val="accent1"/>
-          </a:effectRef>
-          <a:fontRef idx="minor">
-            <a:schemeClr val="lt1"/>
-          </a:fontRef>
-        </p:style>
-        <p:txBody>
-          <a:bodyPr rtlCol="0" anchor="ctr"/>
-          <a:lstStyle/>
-          <a:p>
-            <a:pPr algn="ctr"/>
-          </a:p>
-        </p:txBody>
-      </p:sp>
-      <p:sp>
-        <p:nvSpPr>
-          <p:cNvPr id="7" name="Rectangle 6"/>
-          <p:cNvSpPr/>
-          <p:nvPr/>
-        </p:nvSpPr>
-        <p:spPr>
-          <a:xfrm>
-            <a:off x="640080" y="1618487"/>
-            <a:ext cx="274320" cy="274320"/>
-          </a:xfrm>
-          <a:prstGeom prst="rect">
-            <a:avLst/>
-          </a:prstGeom>
-          <a:solidFill>
-            <a:srgbClr val="FFFFFF"/>
-          </a:solidFill>
-          <a:ln>
-            <a:solidFill>
-              <a:srgbClr val="333333"/>
-            </a:solidFill>
-          </a:ln>
-        </p:spPr>
-        <p:style>
-          <a:lnRef idx="1">
-            <a:schemeClr val="accent1"/>
-          </a:lnRef>
-          <a:fillRef idx="3">
-            <a:schemeClr val="accent1"/>
-          </a:fillRef>
-          <a:effectRef idx="2">
-            <a:schemeClr val="accent1"/>
-          </a:effectRef>
-          <a:fontRef idx="minor">
-            <a:schemeClr val="lt1"/>
-          </a:fontRef>
-        </p:style>
-        <p:txBody>
-          <a:bodyPr rtlCol="0" anchor="ctr"/>
-          <a:lstStyle/>
-          <a:p>
-            <a:pPr algn="ctr"/>
-          </a:p>
-        </p:txBody>
-      </p:sp>
-      <p:sp>
-        <p:nvSpPr>
-          <p:cNvPr id="8" name="Rectangle 7"/>
-          <p:cNvSpPr/>
-          <p:nvPr/>
-        </p:nvSpPr>
-        <p:spPr>
-          <a:xfrm>
-            <a:off x="640080" y="1618487"/>
-            <a:ext cx="73152" cy="274320"/>
-          </a:xfrm>
-          <a:prstGeom prst="rect">
-            <a:avLst/>
-          </a:prstGeom>
-          <a:solidFill>
-            <a:srgbClr val="269CCB"/>
-          </a:solidFill>
-          <a:ln>
-            <a:noFill/>
-          </a:ln>
-        </p:spPr>
-        <p:style>
-          <a:lnRef idx="1">
-            <a:schemeClr val="accent1"/>
-          </a:lnRef>
-          <a:fillRef idx="3">
-            <a:schemeClr val="accent1"/>
-          </a:fillRef>
-          <a:effectRef idx="2">
-            <a:schemeClr val="accent1"/>
-          </a:effectRef>
-          <a:fontRef idx="minor">
-            <a:schemeClr val="lt1"/>
-          </a:fontRef>
-        </p:style>
-        <p:txBody>
-          <a:bodyPr rtlCol="0" anchor="ctr"/>
-          <a:lstStyle/>
-          <a:p>
-            <a:pPr algn="ctr"/>
-          </a:p>
-        </p:txBody>
-      </p:sp>
-      <p:sp>
-        <p:nvSpPr>
-          <p:cNvPr id="9" name="TextBox 8"/>
-          <p:cNvSpPr txBox="1"/>
-          <p:nvPr/>
-        </p:nvSpPr>
-        <p:spPr>
-          <a:xfrm>
-            <a:off x="1097280" y="1563624"/>
-            <a:ext cx="10362895" cy="402336"/>
-          </a:xfrm>
-          <a:prstGeom prst="rect">
-            <a:avLst/>
-          </a:prstGeom>
-          <a:noFill/>
-        </p:spPr>
-        <p:txBody>
-          <a:bodyPr wrap="square" anchor="ctr"/>
-          <a:lstStyle/>
-          <a:p>
-            <a:r>
-              <a:rPr sz="1500" b="1" i="0">
-                <a:solidFill>
-                  <a:srgbClr val="333333"/>
-                </a:solidFill>
-                <a:latin typeface="Calibri"/>
-              </a:rPr>
-              <a:t>LA PREGUNTA DE BÚSQUEDA</a:t>
-            </a:r>
-            <a:r>
-              <a:rPr sz="1500" b="0" i="0">
-                <a:solidFill>
-                  <a:srgbClr val="333333"/>
-                </a:solidFill>
-                <a:latin typeface="Calibri"/>
-              </a:rPr>
-              <a:t> — Una </a:t>
-            </a:r>
-            <a:r>
-              <a:rPr sz="1500" b="1" i="0">
-                <a:solidFill>
-                  <a:srgbClr val="333333"/>
-                </a:solidFill>
-                <a:latin typeface="Calibri"/>
-              </a:rPr>
-              <a:t>pregunta</a:t>
-            </a:r>
-            <a:r>
-              <a:rPr sz="1500" b="0" i="0">
-                <a:solidFill>
-                  <a:srgbClr val="333333"/>
-                </a:solidFill>
-                <a:latin typeface="Calibri"/>
-              </a:rPr>
-              <a:t>, no una palabra, y sus términos de búsqueda en dos o tres versiones — incluida una en inglés.</a:t>
-            </a:r>
-          </a:p>
-        </p:txBody>
-      </p:sp>
-      <p:sp>
-        <p:nvSpPr>
-          <p:cNvPr id="10" name="Rounded Rectangle 9"/>
-          <p:cNvSpPr/>
-          <p:nvPr/>
-        </p:nvSpPr>
-        <p:spPr>
-          <a:xfrm>
-            <a:off x="457200" y="2148839"/>
-            <a:ext cx="11277295" cy="566928"/>
-          </a:xfrm>
-          <a:prstGeom prst="roundRect">
-            <a:avLst>
-              <a:gd name="adj" fmla="val 12000"/>
-            </a:avLst>
-          </a:prstGeom>
-          <a:solidFill>
-            <a:srgbClr val="F2F2F2"/>
-          </a:solidFill>
-          <a:ln>
-            <a:noFill/>
-          </a:ln>
-        </p:spPr>
-        <p:style>
-          <a:lnRef idx="1">
-            <a:schemeClr val="accent1"/>
-          </a:lnRef>
-          <a:fillRef idx="3">
-            <a:schemeClr val="accent1"/>
-          </a:fillRef>
-          <a:effectRef idx="2">
-            <a:schemeClr val="accent1"/>
-          </a:effectRef>
-          <a:fontRef idx="minor">
-            <a:schemeClr val="lt1"/>
-          </a:fontRef>
-        </p:style>
-        <p:txBody>
-          <a:bodyPr rtlCol="0" anchor="ctr"/>
-          <a:lstStyle/>
-          <a:p>
-            <a:pPr algn="ctr"/>
-          </a:p>
-        </p:txBody>
-      </p:sp>
-      <p:sp>
-        <p:nvSpPr>
-          <p:cNvPr id="11" name="Rectangle 10"/>
-          <p:cNvSpPr/>
-          <p:nvPr/>
-        </p:nvSpPr>
-        <p:spPr>
-          <a:xfrm>
-            <a:off x="640080" y="2295144"/>
-            <a:ext cx="274320" cy="274320"/>
-          </a:xfrm>
-          <a:prstGeom prst="rect">
-            <a:avLst/>
-          </a:prstGeom>
-          <a:solidFill>
-            <a:srgbClr val="FFFFFF"/>
-          </a:solidFill>
-          <a:ln>
-            <a:solidFill>
-              <a:srgbClr val="333333"/>
-            </a:solidFill>
-          </a:ln>
-        </p:spPr>
-        <p:style>
-          <a:lnRef idx="1">
-            <a:schemeClr val="accent1"/>
-          </a:lnRef>
-          <a:fillRef idx="3">
-            <a:schemeClr val="accent1"/>
-          </a:fillRef>
-          <a:effectRef idx="2">
-            <a:schemeClr val="accent1"/>
-          </a:effectRef>
-          <a:fontRef idx="minor">
-            <a:schemeClr val="lt1"/>
-          </a:fontRef>
-        </p:style>
-        <p:txBody>
-          <a:bodyPr rtlCol="0" anchor="ctr"/>
-          <a:lstStyle/>
-          <a:p>
-            <a:pPr algn="ctr"/>
-          </a:p>
-        </p:txBody>
-      </p:sp>
-      <p:sp>
-        <p:nvSpPr>
-          <p:cNvPr id="12" name="Rectangle 11"/>
-          <p:cNvSpPr/>
-          <p:nvPr/>
-        </p:nvSpPr>
-        <p:spPr>
-          <a:xfrm>
-            <a:off x="640080" y="2295144"/>
-            <a:ext cx="73152" cy="274320"/>
-          </a:xfrm>
-          <a:prstGeom prst="rect">
-            <a:avLst/>
-          </a:prstGeom>
-          <a:solidFill>
-            <a:srgbClr val="269CCB"/>
-          </a:solidFill>
-          <a:ln>
-            <a:noFill/>
-          </a:ln>
-        </p:spPr>
-        <p:style>
-          <a:lnRef idx="1">
-            <a:schemeClr val="accent1"/>
-          </a:lnRef>
-          <a:fillRef idx="3">
-            <a:schemeClr val="accent1"/>
-          </a:fillRef>
-          <a:effectRef idx="2">
-            <a:schemeClr val="accent1"/>
-          </a:effectRef>
-          <a:fontRef idx="minor">
-            <a:schemeClr val="lt1"/>
-          </a:fontRef>
-        </p:style>
-        <p:txBody>
-          <a:bodyPr rtlCol="0" anchor="ctr"/>
-          <a:lstStyle/>
-          <a:p>
-            <a:pPr algn="ctr"/>
-          </a:p>
-        </p:txBody>
-      </p:sp>
-      <p:sp>
-        <p:nvSpPr>
-          <p:cNvPr id="13" name="TextBox 12"/>
-          <p:cNvSpPr txBox="1"/>
-          <p:nvPr/>
-        </p:nvSpPr>
-        <p:spPr>
-          <a:xfrm>
-            <a:off x="1097280" y="2240279"/>
-            <a:ext cx="10362895" cy="402336"/>
-          </a:xfrm>
-          <a:prstGeom prst="rect">
-            <a:avLst/>
-          </a:prstGeom>
-          <a:noFill/>
-        </p:spPr>
-        <p:txBody>
-          <a:bodyPr wrap="square" anchor="ctr"/>
-          <a:lstStyle/>
-          <a:p>
-            <a:r>
-              <a:rPr sz="1500" b="1" i="0">
-                <a:solidFill>
-                  <a:srgbClr val="333333"/>
-                </a:solidFill>
-                <a:latin typeface="Calibri"/>
-              </a:rPr>
-              <a:t>TRES ANTECEDENTES FICHADOS</a:t>
-            </a:r>
-            <a:r>
-              <a:rPr sz="1500" b="0" i="0">
-                <a:solidFill>
-                  <a:srgbClr val="333333"/>
-                </a:solidFill>
-                <a:latin typeface="Calibri"/>
-              </a:rPr>
-              <a:t> — Tres fichas con los seis campos: </a:t>
-            </a:r>
-            <a:r>
-              <a:rPr sz="1500" b="1" i="0">
-                <a:solidFill>
-                  <a:srgbClr val="333333"/>
-                </a:solidFill>
-                <a:latin typeface="Calibri"/>
-              </a:rPr>
-              <a:t>autor o responsable · año · dónde · qué hace · qué le falta para nuestro caso · enlace</a:t>
-            </a:r>
-            <a:r>
-              <a:rPr sz="1500" b="0" i="0">
-                <a:solidFill>
-                  <a:srgbClr val="333333"/>
-                </a:solidFill>
-                <a:latin typeface="Calibri"/>
-              </a:rPr>
-              <a:t>. Al menos una fuente académica o normativa.</a:t>
-            </a:r>
-          </a:p>
-        </p:txBody>
-      </p:sp>
-      <p:sp>
-        <p:nvSpPr>
-          <p:cNvPr id="14" name="Rounded Rectangle 13"/>
-          <p:cNvSpPr/>
-          <p:nvPr/>
-        </p:nvSpPr>
-        <p:spPr>
-          <a:xfrm>
-            <a:off x="457200" y="2825496"/>
-            <a:ext cx="11277295" cy="566928"/>
-          </a:xfrm>
-          <a:prstGeom prst="roundRect">
-            <a:avLst>
-              <a:gd name="adj" fmla="val 12000"/>
-            </a:avLst>
-          </a:prstGeom>
-          <a:solidFill>
-            <a:srgbClr val="F2F2F2"/>
-          </a:solidFill>
-          <a:ln>
-            <a:noFill/>
-          </a:ln>
-        </p:spPr>
-        <p:style>
-          <a:lnRef idx="1">
-            <a:schemeClr val="accent1"/>
-          </a:lnRef>
-          <a:fillRef idx="3">
-            <a:schemeClr val="accent1"/>
-          </a:fillRef>
-          <a:effectRef idx="2">
-            <a:schemeClr val="accent1"/>
-          </a:effectRef>
-          <a:fontRef idx="minor">
-            <a:schemeClr val="lt1"/>
-          </a:fontRef>
-        </p:style>
-        <p:txBody>
-          <a:bodyPr rtlCol="0" anchor="ctr"/>
-          <a:lstStyle/>
-          <a:p>
-            <a:pPr algn="ctr"/>
-          </a:p>
-        </p:txBody>
-      </p:sp>
-      <p:sp>
-        <p:nvSpPr>
-          <p:cNvPr id="15" name="Rectangle 14"/>
-          <p:cNvSpPr/>
-          <p:nvPr/>
-        </p:nvSpPr>
-        <p:spPr>
-          <a:xfrm>
-            <a:off x="640080" y="2971800"/>
-            <a:ext cx="274320" cy="274320"/>
-          </a:xfrm>
-          <a:prstGeom prst="rect">
-            <a:avLst/>
-          </a:prstGeom>
-          <a:solidFill>
-            <a:srgbClr val="FFFFFF"/>
-          </a:solidFill>
-          <a:ln>
-            <a:solidFill>
-              <a:srgbClr val="333333"/>
-            </a:solidFill>
-          </a:ln>
-        </p:spPr>
-        <p:style>
-          <a:lnRef idx="1">
-            <a:schemeClr val="accent1"/>
-          </a:lnRef>
-          <a:fillRef idx="3">
-            <a:schemeClr val="accent1"/>
-          </a:fillRef>
-          <a:effectRef idx="2">
-            <a:schemeClr val="accent1"/>
-          </a:effectRef>
-          <a:fontRef idx="minor">
-            <a:schemeClr val="lt1"/>
-          </a:fontRef>
-        </p:style>
-        <p:txBody>
-          <a:bodyPr rtlCol="0" anchor="ctr"/>
-          <a:lstStyle/>
-          <a:p>
-            <a:pPr algn="ctr"/>
-          </a:p>
-        </p:txBody>
-      </p:sp>
-      <p:sp>
-        <p:nvSpPr>
-          <p:cNvPr id="16" name="Rectangle 15"/>
-          <p:cNvSpPr/>
-          <p:nvPr/>
-        </p:nvSpPr>
-        <p:spPr>
-          <a:xfrm>
-            <a:off x="640080" y="2971800"/>
-            <a:ext cx="73152" cy="274320"/>
-          </a:xfrm>
-          <a:prstGeom prst="rect">
-            <a:avLst/>
-          </a:prstGeom>
-          <a:solidFill>
-            <a:srgbClr val="269CCB"/>
-          </a:solidFill>
-          <a:ln>
-            <a:noFill/>
-          </a:ln>
-        </p:spPr>
-        <p:style>
-          <a:lnRef idx="1">
-            <a:schemeClr val="accent1"/>
-          </a:lnRef>
-          <a:fillRef idx="3">
-            <a:schemeClr val="accent1"/>
-          </a:fillRef>
-          <a:effectRef idx="2">
-            <a:schemeClr val="accent1"/>
-          </a:effectRef>
-          <a:fontRef idx="minor">
-            <a:schemeClr val="lt1"/>
-          </a:fontRef>
-        </p:style>
-        <p:txBody>
-          <a:bodyPr rtlCol="0" anchor="ctr"/>
-          <a:lstStyle/>
-          <a:p>
-            <a:pPr algn="ctr"/>
-          </a:p>
-        </p:txBody>
-      </p:sp>
-      <p:sp>
-        <p:nvSpPr>
-          <p:cNvPr id="17" name="TextBox 16"/>
-          <p:cNvSpPr txBox="1"/>
-          <p:nvPr/>
-        </p:nvSpPr>
-        <p:spPr>
-          <a:xfrm>
-            <a:off x="1097280" y="2916936"/>
-            <a:ext cx="10362895" cy="402336"/>
-          </a:xfrm>
-          <a:prstGeom prst="rect">
-            <a:avLst/>
-          </a:prstGeom>
-          <a:noFill/>
-        </p:spPr>
-        <p:txBody>
-          <a:bodyPr wrap="square" anchor="ctr"/>
-          <a:lstStyle/>
-          <a:p>
-            <a:r>
-              <a:rPr sz="1500" b="1" i="0">
-                <a:solidFill>
-                  <a:srgbClr val="333333"/>
-                </a:solidFill>
-                <a:latin typeface="Calibri"/>
-              </a:rPr>
-              <a:t>QUÉ BUSCAMOS Y NO ENCONTRAMOS</a:t>
-            </a:r>
-            <a:r>
-              <a:rPr sz="1500" b="0" i="0">
-                <a:solidFill>
-                  <a:srgbClr val="333333"/>
-                </a:solidFill>
-                <a:latin typeface="Calibri"/>
-              </a:rPr>
-              <a:t> — Qué buscaron, con qué términos, en qué sitios, y </a:t>
-            </a:r>
-            <a:r>
-              <a:rPr sz="1500" b="1" i="0">
-                <a:solidFill>
-                  <a:srgbClr val="333333"/>
-                </a:solidFill>
-                <a:latin typeface="Calibri"/>
-              </a:rPr>
-              <a:t>qué fue lo más cercano</a:t>
-            </a:r>
-            <a:r>
-              <a:rPr sz="1500" b="0" i="0">
-                <a:solidFill>
-                  <a:srgbClr val="333333"/>
-                </a:solidFill>
-                <a:latin typeface="Calibri"/>
-              </a:rPr>
-              <a:t> que apareció. «No encontramos nada» bien escrito es un hallazgo.</a:t>
-            </a:r>
-          </a:p>
-        </p:txBody>
-      </p:sp>
-      <p:sp>
-        <p:nvSpPr>
-          <p:cNvPr id="18" name="Rounded Rectangle 17"/>
-          <p:cNvSpPr/>
-          <p:nvPr/>
-        </p:nvSpPr>
-        <p:spPr>
-          <a:xfrm>
-            <a:off x="457200" y="3502152"/>
-            <a:ext cx="11277295" cy="566928"/>
-          </a:xfrm>
-          <a:prstGeom prst="roundRect">
-            <a:avLst>
-              <a:gd name="adj" fmla="val 12000"/>
-            </a:avLst>
-          </a:prstGeom>
-          <a:solidFill>
-            <a:srgbClr val="F2F2F2"/>
-          </a:solidFill>
-          <a:ln>
-            <a:noFill/>
-          </a:ln>
-        </p:spPr>
-        <p:style>
-          <a:lnRef idx="1">
-            <a:schemeClr val="accent1"/>
-          </a:lnRef>
-          <a:fillRef idx="3">
-            <a:schemeClr val="accent1"/>
-          </a:fillRef>
-          <a:effectRef idx="2">
-            <a:schemeClr val="accent1"/>
-          </a:effectRef>
-          <a:fontRef idx="minor">
-            <a:schemeClr val="lt1"/>
-          </a:fontRef>
-        </p:style>
-        <p:txBody>
-          <a:bodyPr rtlCol="0" anchor="ctr"/>
-          <a:lstStyle/>
-          <a:p>
-            <a:pPr algn="ctr"/>
-          </a:p>
-        </p:txBody>
-      </p:sp>
-      <p:sp>
-        <p:nvSpPr>
-          <p:cNvPr id="19" name="Rectangle 18"/>
-          <p:cNvSpPr/>
-          <p:nvPr/>
-        </p:nvSpPr>
-        <p:spPr>
-          <a:xfrm>
-            <a:off x="640080" y="3648456"/>
-            <a:ext cx="274320" cy="274320"/>
-          </a:xfrm>
-          <a:prstGeom prst="rect">
-            <a:avLst/>
-          </a:prstGeom>
-          <a:solidFill>
-            <a:srgbClr val="FFFFFF"/>
-          </a:solidFill>
-          <a:ln>
-            <a:solidFill>
-              <a:srgbClr val="333333"/>
-            </a:solidFill>
-          </a:ln>
-        </p:spPr>
-        <p:style>
-          <a:lnRef idx="1">
-            <a:schemeClr val="accent1"/>
-          </a:lnRef>
-          <a:fillRef idx="3">
-            <a:schemeClr val="accent1"/>
-          </a:fillRef>
-          <a:effectRef idx="2">
-            <a:schemeClr val="accent1"/>
-          </a:effectRef>
-          <a:fontRef idx="minor">
-            <a:schemeClr val="lt1"/>
-          </a:fontRef>
-        </p:style>
-        <p:txBody>
-          <a:bodyPr rtlCol="0" anchor="ctr"/>
-          <a:lstStyle/>
-          <a:p>
-            <a:pPr algn="ctr"/>
-          </a:p>
-        </p:txBody>
-      </p:sp>
-      <p:sp>
-        <p:nvSpPr>
-          <p:cNvPr id="20" name="Rectangle 19"/>
-          <p:cNvSpPr/>
-          <p:nvPr/>
-        </p:nvSpPr>
-        <p:spPr>
-          <a:xfrm>
-            <a:off x="640080" y="3648456"/>
-            <a:ext cx="73152" cy="274320"/>
-          </a:xfrm>
-          <a:prstGeom prst="rect">
-            <a:avLst/>
-          </a:prstGeom>
-          <a:solidFill>
-            <a:srgbClr val="269CCB"/>
-          </a:solidFill>
-          <a:ln>
-            <a:noFill/>
-          </a:ln>
-        </p:spPr>
-        <p:style>
-          <a:lnRef idx="1">
-            <a:schemeClr val="accent1"/>
-          </a:lnRef>
-          <a:fillRef idx="3">
-            <a:schemeClr val="accent1"/>
-          </a:fillRef>
-          <a:effectRef idx="2">
-            <a:schemeClr val="accent1"/>
-          </a:effectRef>
-          <a:fontRef idx="minor">
-            <a:schemeClr val="lt1"/>
-          </a:fontRef>
-        </p:style>
-        <p:txBody>
-          <a:bodyPr rtlCol="0" anchor="ctr"/>
-          <a:lstStyle/>
-          <a:p>
-            <a:pPr algn="ctr"/>
-          </a:p>
-        </p:txBody>
-      </p:sp>
-      <p:sp>
-        <p:nvSpPr>
-          <p:cNvPr id="21" name="TextBox 20"/>
-          <p:cNvSpPr txBox="1"/>
-          <p:nvPr/>
-        </p:nvSpPr>
-        <p:spPr>
-          <a:xfrm>
-            <a:off x="1097280" y="3593592"/>
-            <a:ext cx="10362895" cy="402336"/>
-          </a:xfrm>
-          <a:prstGeom prst="rect">
-            <a:avLst/>
-          </a:prstGeom>
-          <a:noFill/>
-        </p:spPr>
-        <p:txBody>
-          <a:bodyPr wrap="square" anchor="ctr"/>
-          <a:lstStyle/>
-          <a:p>
-            <a:r>
-              <a:rPr sz="1500" b="1" i="0">
-                <a:solidFill>
-                  <a:srgbClr val="333333"/>
-                </a:solidFill>
-                <a:latin typeface="Calibri"/>
-              </a:rPr>
-              <a:t>LA PROPUESTA DE MEJORA</a:t>
-            </a:r>
-            <a:r>
-              <a:rPr sz="1500" b="0" i="0">
-                <a:solidFill>
-                  <a:srgbClr val="333333"/>
-                </a:solidFill>
-                <a:latin typeface="Calibri"/>
-              </a:rPr>
-              <a:t> — Qué van a hacer distinto respecto a lo fichado, </a:t>
-            </a:r>
-            <a:r>
-              <a:rPr sz="1500" b="1" i="0">
-                <a:solidFill>
-                  <a:srgbClr val="333333"/>
-                </a:solidFill>
-                <a:latin typeface="Calibri"/>
-              </a:rPr>
-              <a:t>con cuál de las cuatro operaciones</a:t>
-            </a:r>
-            <a:r>
-              <a:rPr sz="1500" b="0" i="0">
-                <a:solidFill>
-                  <a:srgbClr val="333333"/>
-                </a:solidFill>
-                <a:latin typeface="Calibri"/>
-              </a:rPr>
-              <a:t> (quitar, combinar, invertir, adaptar), y por qué eso importa en su contexto.</a:t>
-            </a:r>
-          </a:p>
-        </p:txBody>
-      </p:sp>
-      <p:sp>
-        <p:nvSpPr>
-          <p:cNvPr id="22" name="Rounded Rectangle 21"/>
-          <p:cNvSpPr/>
-          <p:nvPr/>
-        </p:nvSpPr>
-        <p:spPr>
-          <a:xfrm>
-            <a:off x="457200" y="4178808"/>
-            <a:ext cx="11277295" cy="566928"/>
-          </a:xfrm>
-          <a:prstGeom prst="roundRect">
-            <a:avLst>
-              <a:gd name="adj" fmla="val 12000"/>
-            </a:avLst>
-          </a:prstGeom>
-          <a:solidFill>
-            <a:srgbClr val="F2F2F2"/>
-          </a:solidFill>
-          <a:ln>
-            <a:noFill/>
-          </a:ln>
-        </p:spPr>
-        <p:style>
-          <a:lnRef idx="1">
-            <a:schemeClr val="accent1"/>
-          </a:lnRef>
-          <a:fillRef idx="3">
-            <a:schemeClr val="accent1"/>
-          </a:fillRef>
-          <a:effectRef idx="2">
-            <a:schemeClr val="accent1"/>
-          </a:effectRef>
-          <a:fontRef idx="minor">
-            <a:schemeClr val="lt1"/>
-          </a:fontRef>
-        </p:style>
-        <p:txBody>
-          <a:bodyPr rtlCol="0" anchor="ctr"/>
-          <a:lstStyle/>
-          <a:p>
-            <a:pPr algn="ctr"/>
-          </a:p>
-        </p:txBody>
-      </p:sp>
-      <p:sp>
-        <p:nvSpPr>
-          <p:cNvPr id="23" name="Rectangle 22"/>
-          <p:cNvSpPr/>
-          <p:nvPr/>
-        </p:nvSpPr>
-        <p:spPr>
-          <a:xfrm>
-            <a:off x="640080" y="4325112"/>
-            <a:ext cx="274320" cy="274320"/>
-          </a:xfrm>
-          <a:prstGeom prst="rect">
-            <a:avLst/>
-          </a:prstGeom>
-          <a:solidFill>
-            <a:srgbClr val="FFFFFF"/>
-          </a:solidFill>
-          <a:ln>
-            <a:solidFill>
-              <a:srgbClr val="333333"/>
-            </a:solidFill>
-          </a:ln>
-        </p:spPr>
-        <p:style>
-          <a:lnRef idx="1">
-            <a:schemeClr val="accent1"/>
-          </a:lnRef>
-          <a:fillRef idx="3">
-            <a:schemeClr val="accent1"/>
-          </a:fillRef>
-          <a:effectRef idx="2">
-            <a:schemeClr val="accent1"/>
-          </a:effectRef>
-          <a:fontRef idx="minor">
-            <a:schemeClr val="lt1"/>
-          </a:fontRef>
-        </p:style>
-        <p:txBody>
-          <a:bodyPr rtlCol="0" anchor="ctr"/>
-          <a:lstStyle/>
-          <a:p>
-            <a:pPr algn="ctr"/>
-          </a:p>
-        </p:txBody>
-      </p:sp>
-      <p:sp>
-        <p:nvSpPr>
-          <p:cNvPr id="24" name="Rectangle 23"/>
-          <p:cNvSpPr/>
-          <p:nvPr/>
-        </p:nvSpPr>
-        <p:spPr>
-          <a:xfrm>
-            <a:off x="640080" y="4325112"/>
-            <a:ext cx="73152" cy="274320"/>
-          </a:xfrm>
-          <a:prstGeom prst="rect">
-            <a:avLst/>
-          </a:prstGeom>
-          <a:solidFill>
-            <a:srgbClr val="269CCB"/>
-          </a:solidFill>
-          <a:ln>
-            <a:noFill/>
-          </a:ln>
-        </p:spPr>
-        <p:style>
-          <a:lnRef idx="1">
-            <a:schemeClr val="accent1"/>
-          </a:lnRef>
-          <a:fillRef idx="3">
-            <a:schemeClr val="accent1"/>
-          </a:fillRef>
-          <a:effectRef idx="2">
-            <a:schemeClr val="accent1"/>
-          </a:effectRef>
-          <a:fontRef idx="minor">
-            <a:schemeClr val="lt1"/>
-          </a:fontRef>
-        </p:style>
-        <p:txBody>
-          <a:bodyPr rtlCol="0" anchor="ctr"/>
-          <a:lstStyle/>
-          <a:p>
-            <a:pPr algn="ctr"/>
-          </a:p>
-        </p:txBody>
-      </p:sp>
-      <p:sp>
-        <p:nvSpPr>
-          <p:cNvPr id="25" name="TextBox 24"/>
-          <p:cNvSpPr txBox="1"/>
-          <p:nvPr/>
-        </p:nvSpPr>
-        <p:spPr>
-          <a:xfrm>
-            <a:off x="1097280" y="4270248"/>
-            <a:ext cx="10362895" cy="402336"/>
-          </a:xfrm>
-          <a:prstGeom prst="rect">
-            <a:avLst/>
-          </a:prstGeom>
-          <a:noFill/>
-        </p:spPr>
-        <p:txBody>
-          <a:bodyPr wrap="square" anchor="ctr"/>
-          <a:lstStyle/>
-          <a:p>
-            <a:r>
-              <a:rPr sz="1500" b="1" i="0">
-                <a:solidFill>
-                  <a:srgbClr val="333333"/>
-                </a:solidFill>
-                <a:latin typeface="Calibri"/>
-              </a:rPr>
-              <a:t>LO QUE VAMOS A REUSAR</a:t>
-            </a:r>
-            <a:r>
-              <a:rPr sz="1500" b="0" i="0">
-                <a:solidFill>
-                  <a:srgbClr val="333333"/>
-                </a:solidFill>
-                <a:latin typeface="Calibri"/>
-              </a:rPr>
-              <a:t> — Qué de lo que ya existe piensan aprovechar: una idea de diseño, una forma de organizar los datos, una herramienta, una lista de errores conocidos.</a:t>
-            </a:r>
-          </a:p>
-        </p:txBody>
-      </p:sp>
-      <p:sp>
-        <p:nvSpPr>
-          <p:cNvPr id="26" name="TextBox 25"/>
+            <a:pPr>
+              <a:spcAft>
+                <a:spcPts val="800"/>
+              </a:spcAft>
+            </a:pPr>
+            <a:r>
+              <a:rPr sz="1900" b="0" i="0">
+                <a:solidFill>
+                  <a:srgbClr val="333333"/>
+                </a:solidFill>
+                <a:latin typeface="Calibri"/>
+              </a:rPr>
+              <a:t>–   La pregunta es deliberadamente incómoda y funciona porque casi todos los equipos llegan a esta altura del semestre convencidos de que su solución es original.</a:t>
+            </a:r>
+          </a:p>
+          <a:p>
+            <a:pPr>
+              <a:spcAft>
+                <a:spcPts val="800"/>
+              </a:spcAft>
+            </a:pPr>
+            <a:r>
+              <a:rPr sz="1900" b="0" i="0">
+                <a:solidFill>
+                  <a:srgbClr val="333333"/>
+                </a:solidFill>
+                <a:latin typeface="Calibri"/>
+              </a:rPr>
+              <a:t>–   La respuesta estadística es dura: en un mundo con millones de ingenieros y cincuenta años de software publicado, la probabilidad de que un problema común —disponibilidad, inventario, turnos, avisos— no tenga antecedentes es prácticamente cero.</a:t>
+            </a:r>
+          </a:p>
+          <a:p>
+            <a:pPr>
+              <a:spcAft>
+                <a:spcPts val="800"/>
+              </a:spcAft>
+            </a:pPr>
+            <a:r>
+              <a:rPr sz="1900" b="0" i="0">
+                <a:solidFill>
+                  <a:srgbClr val="333333"/>
+                </a:solidFill>
+                <a:latin typeface="Calibri"/>
+              </a:rPr>
+              <a:t>–   Lo que hay que evitar es que el grupo lo lea como un desaire.</a:t>
+            </a:r>
+          </a:p>
+          <a:p>
+            <a:pPr>
+              <a:spcAft>
+                <a:spcPts val="800"/>
+              </a:spcAft>
+            </a:pPr>
+            <a:r>
+              <a:rPr sz="1900" b="0" i="0">
+                <a:solidFill>
+                  <a:srgbClr val="333333"/>
+                </a:solidFill>
+                <a:latin typeface="Calibri"/>
+              </a:rPr>
+              <a:t>–   El encuadre que funciona: </a:t>
+            </a:r>
+            <a:r>
+              <a:rPr sz="1900" b="1" i="0">
+                <a:solidFill>
+                  <a:srgbClr val="333333"/>
+                </a:solidFill>
+                <a:latin typeface="Calibri"/>
+              </a:rPr>
+              <a:t>buscar antecedentes no le quita mérito al proyecto, le da argumento</a:t>
+            </a:r>
+            <a:r>
+              <a:rPr sz="1900" b="0" i="0">
+                <a:solidFill>
+                  <a:srgbClr val="333333"/>
+                </a:solidFill>
+                <a:latin typeface="Calibri"/>
+              </a:rPr>
+              <a:t>.</a:t>
+            </a:r>
+          </a:p>
+          <a:p>
+            <a:pPr>
+              <a:spcAft>
+                <a:spcPts val="800"/>
+              </a:spcAft>
+            </a:pPr>
+            <a:r>
+              <a:rPr sz="1900" b="0" i="0">
+                <a:solidFill>
+                  <a:srgbClr val="333333"/>
+                </a:solidFill>
+                <a:latin typeface="Calibri"/>
+              </a:rPr>
+              <a:t>–   Un equipo que dice «esto no existe» está apostando; un equipo que dice «existen estas tres soluciones, ninguna funciona sin computador en el mostrador, y nosotros resolvemos justamente eso» tiene una posición defendible ante cualquiera.</a:t>
+            </a:r>
+          </a:p>
+          <a:p>
+            <a:pPr>
+              <a:spcAft>
+                <a:spcPts val="800"/>
+              </a:spcAft>
+            </a:pPr>
+            <a:r>
+              <a:rPr sz="1900" b="0" i="0">
+                <a:solidFill>
+                  <a:srgbClr val="333333"/>
+                </a:solidFill>
+                <a:latin typeface="Calibri"/>
+              </a:rPr>
+              <a:t>–   La segunda frase es la que se califica en la Clase 15.</a:t>
+            </a:r>
+          </a:p>
+          <a:p>
+            <a:pPr>
+              <a:spcAft>
+                <a:spcPts val="800"/>
+              </a:spcAft>
+            </a:pPr>
+            <a:r>
+              <a:rPr sz="1900" b="0" i="0">
+                <a:solidFill>
+                  <a:srgbClr val="333333"/>
+                </a:solidFill>
+                <a:latin typeface="Calibri"/>
+              </a:rPr>
+              <a:t>–   Aproveche el muro para recoger las respuestas y luego voltee la pregunta: *¿qué sería peor, descubrir hoy que ya existe</a:t>
+            </a:r>
+          </a:p>
+          <a:p>
+            <a:pPr>
+              <a:spcAft>
+                <a:spcPts val="800"/>
+              </a:spcAft>
+            </a:pPr>
+            <a:r>
+              <a:rPr sz="1900" b="0" i="0">
+                <a:solidFill>
+                  <a:srgbClr val="333333"/>
+                </a:solidFill>
+                <a:latin typeface="Calibri"/>
+              </a:rPr>
+              <a:t>–   O descubrirlo el día de la exposición final cuando alguien del público lo diga?* Esa reformulación convierte la sesión en una protección y no en una tarea.</a:t>
+            </a:r>
+          </a:p>
+        </p:txBody>
+      </p:sp>
+      <p:sp>
+        <p:nvSpPr>
+          <p:cNvPr id="6" name="TextBox 5"/>
           <p:cNvSpPr txBox="1"/>
           <p:nvPr/>
         </p:nvSpPr>
@@ -4669,7 +3872,7 @@
         <p:spPr>
           <a:xfrm>
             <a:off x="0" y="0"/>
-            <a:ext cx="12191695" cy="1170432"/>
+            <a:ext cx="12191695" cy="960120"/>
           </a:xfrm>
           <a:prstGeom prst="rect">
             <a:avLst/>
@@ -4711,7 +3914,7 @@
         </p:nvSpPr>
         <p:spPr>
           <a:xfrm>
-            <a:off x="0" y="1170432"/>
+            <a:off x="0" y="960120"/>
             <a:ext cx="12191695" cy="41148"/>
           </a:xfrm>
           <a:prstGeom prst="rect">
@@ -4755,7 +3958,7 @@
         <p:spPr>
           <a:xfrm>
             <a:off x="457200" y="164592"/>
-            <a:ext cx="11277295" cy="384048"/>
+            <a:ext cx="11277295" cy="502920"/>
           </a:xfrm>
           <a:prstGeom prst="rect">
             <a:avLst/>
@@ -4775,7 +3978,7 @@
                 </a:solidFill>
                 <a:latin typeface="Calibri"/>
               </a:rPr>
-              <a:t>Cómo se expone en 3 minutos</a:t>
+              <a:t>Innovación: por qué la adopción es lo que decide (1/2)</a:t>
             </a:r>
           </a:p>
         </p:txBody>
@@ -4788,8 +3991,8 @@
         </p:nvSpPr>
         <p:spPr>
           <a:xfrm>
-            <a:off x="457200" y="566928"/>
-            <a:ext cx="11277295" cy="411480"/>
+            <a:off x="457200" y="1170432"/>
+            <a:ext cx="11277295" cy="5230368"/>
           </a:xfrm>
           <a:prstGeom prst="rect">
             <a:avLst/>
@@ -4802,368 +4005,81 @@
           </a:bodyPr>
           <a:lstStyle/>
           <a:p>
-            <a:r>
-              <a:rPr sz="1400" b="0" i="0">
-                <a:solidFill>
-                  <a:srgbClr val="B8D8EE"/>
-                </a:solidFill>
-                <a:latin typeface="Calibri"/>
-              </a:rPr>
-              <a:t>Habla el vocero con la pantalla ya compartida · cronómetro en pantalla · se corta al llegar a cero</a:t>
-            </a:r>
-          </a:p>
-        </p:txBody>
-      </p:sp>
-      <p:sp>
-        <p:nvSpPr>
-          <p:cNvPr id="6" name="Rounded Rectangle 5"/>
-          <p:cNvSpPr/>
-          <p:nvPr/>
-        </p:nvSpPr>
-        <p:spPr>
-          <a:xfrm>
-            <a:off x="457200" y="1444752"/>
-            <a:ext cx="11277295" cy="908913"/>
-          </a:xfrm>
-          <a:prstGeom prst="roundRect">
-            <a:avLst>
-              <a:gd name="adj" fmla="val 12000"/>
-            </a:avLst>
-          </a:prstGeom>
-          <a:solidFill>
-            <a:srgbClr val="F2F2F2"/>
-          </a:solidFill>
-          <a:ln>
-            <a:noFill/>
-          </a:ln>
-        </p:spPr>
-        <p:style>
-          <a:lnRef idx="1">
-            <a:schemeClr val="accent1"/>
-          </a:lnRef>
-          <a:fillRef idx="3">
-            <a:schemeClr val="accent1"/>
-          </a:fillRef>
-          <a:effectRef idx="2">
-            <a:schemeClr val="accent1"/>
-          </a:effectRef>
-          <a:fontRef idx="minor">
-            <a:schemeClr val="lt1"/>
-          </a:fontRef>
-        </p:style>
-        <p:txBody>
-          <a:bodyPr rtlCol="0" anchor="ctr"/>
-          <a:lstStyle/>
-          <a:p>
-            <a:pPr algn="ctr"/>
-          </a:p>
-        </p:txBody>
-      </p:sp>
-      <p:sp>
-        <p:nvSpPr>
-          <p:cNvPr id="7" name="Rounded Rectangle 6"/>
-          <p:cNvSpPr/>
-          <p:nvPr/>
-        </p:nvSpPr>
-        <p:spPr>
-          <a:xfrm>
-            <a:off x="594360" y="1679752"/>
-            <a:ext cx="438912" cy="438912"/>
-          </a:xfrm>
-          <a:prstGeom prst="roundRect">
-            <a:avLst>
-              <a:gd name="adj" fmla="val 12000"/>
-            </a:avLst>
-          </a:prstGeom>
-          <a:solidFill>
-            <a:srgbClr val="095292"/>
-          </a:solidFill>
-          <a:ln>
-            <a:noFill/>
-          </a:ln>
-        </p:spPr>
-        <p:style>
-          <a:lnRef idx="1">
-            <a:schemeClr val="accent1"/>
-          </a:lnRef>
-          <a:fillRef idx="3">
-            <a:schemeClr val="accent1"/>
-          </a:fillRef>
-          <a:effectRef idx="2">
-            <a:schemeClr val="accent1"/>
-          </a:effectRef>
-          <a:fontRef idx="minor">
-            <a:schemeClr val="lt1"/>
-          </a:fontRef>
-        </p:style>
-        <p:txBody>
-          <a:bodyPr rtlCol="0" anchor="ctr"/>
-          <a:lstStyle/>
-          <a:p>
-            <a:pPr algn="ctr"/>
-          </a:p>
-        </p:txBody>
-      </p:sp>
-      <p:sp>
-        <p:nvSpPr>
-          <p:cNvPr id="8" name="TextBox 7"/>
-          <p:cNvSpPr txBox="1"/>
-          <p:nvPr/>
-        </p:nvSpPr>
-        <p:spPr>
-          <a:xfrm>
-            <a:off x="594360" y="1679752"/>
-            <a:ext cx="438912" cy="438912"/>
-          </a:xfrm>
-          <a:prstGeom prst="rect">
-            <a:avLst/>
-          </a:prstGeom>
-          <a:noFill/>
-        </p:spPr>
-        <p:txBody>
-          <a:bodyPr wrap="square" anchor="ctr"/>
-          <a:lstStyle/>
-          <a:p>
-            <a:pPr algn="ctr"/>
-            <a:r>
-              <a:rPr sz="1600" b="1" i="0">
-                <a:solidFill>
-                  <a:srgbClr val="FFFFFF"/>
-                </a:solidFill>
-                <a:latin typeface="Calibri"/>
-              </a:rPr>
-              <a:t>1</a:t>
-            </a:r>
-          </a:p>
-        </p:txBody>
-      </p:sp>
-      <p:sp>
-        <p:nvSpPr>
-          <p:cNvPr id="9" name="TextBox 8"/>
-          <p:cNvSpPr txBox="1"/>
-          <p:nvPr/>
-        </p:nvSpPr>
-        <p:spPr>
-          <a:xfrm>
-            <a:off x="1188720" y="1536192"/>
-            <a:ext cx="10271455" cy="744321"/>
-          </a:xfrm>
-          <a:prstGeom prst="rect">
-            <a:avLst/>
-          </a:prstGeom>
-          <a:noFill/>
-        </p:spPr>
-        <p:txBody>
-          <a:bodyPr wrap="square" anchor="ctr"/>
-          <a:lstStyle/>
-          <a:p>
-            <a:r>
-              <a:rPr sz="1500" b="1" i="0">
-                <a:solidFill>
-                  <a:srgbClr val="095292"/>
-                </a:solidFill>
-                <a:latin typeface="Calibri"/>
-              </a:rPr>
-              <a:t>25 s · La pregunta de búsqueda</a:t>
-            </a:r>
-          </a:p>
-          <a:p>
             <a:pPr>
-              <a:spcBef>
-                <a:spcPts val="200"/>
-              </a:spcBef>
+              <a:spcAft>
+                <a:spcPts val="800"/>
+              </a:spcAft>
             </a:pPr>
             <a:r>
-              <a:rPr sz="1300" b="0" i="0">
-                <a:solidFill>
-                  <a:srgbClr val="333333"/>
-                </a:solidFill>
-                <a:latin typeface="Calibri"/>
-              </a:rPr>
-              <a:t>Leída tal cual, con un término en inglés.</a:t>
-            </a:r>
-          </a:p>
-        </p:txBody>
-      </p:sp>
-      <p:sp>
-        <p:nvSpPr>
-          <p:cNvPr id="10" name="Rounded Rectangle 9"/>
-          <p:cNvSpPr/>
-          <p:nvPr/>
-        </p:nvSpPr>
-        <p:spPr>
-          <a:xfrm>
-            <a:off x="457200" y="2445105"/>
-            <a:ext cx="11277295" cy="908913"/>
-          </a:xfrm>
-          <a:prstGeom prst="roundRect">
-            <a:avLst>
-              <a:gd name="adj" fmla="val 12000"/>
-            </a:avLst>
-          </a:prstGeom>
-          <a:solidFill>
-            <a:srgbClr val="E8F4FA"/>
-          </a:solidFill>
-          <a:ln>
-            <a:noFill/>
-          </a:ln>
-        </p:spPr>
-        <p:style>
-          <a:lnRef idx="1">
-            <a:schemeClr val="accent1"/>
-          </a:lnRef>
-          <a:fillRef idx="3">
-            <a:schemeClr val="accent1"/>
-          </a:fillRef>
-          <a:effectRef idx="2">
-            <a:schemeClr val="accent1"/>
-          </a:effectRef>
-          <a:fontRef idx="minor">
-            <a:schemeClr val="lt1"/>
-          </a:fontRef>
-        </p:style>
-        <p:txBody>
-          <a:bodyPr rtlCol="0" anchor="ctr"/>
-          <a:lstStyle/>
-          <a:p>
-            <a:pPr algn="ctr"/>
-          </a:p>
-        </p:txBody>
-      </p:sp>
-      <p:sp>
-        <p:nvSpPr>
-          <p:cNvPr id="11" name="Rounded Rectangle 10"/>
-          <p:cNvSpPr/>
-          <p:nvPr/>
-        </p:nvSpPr>
-        <p:spPr>
-          <a:xfrm>
-            <a:off x="594360" y="2680106"/>
-            <a:ext cx="438912" cy="438912"/>
-          </a:xfrm>
-          <a:prstGeom prst="roundRect">
-            <a:avLst>
-              <a:gd name="adj" fmla="val 12000"/>
-            </a:avLst>
-          </a:prstGeom>
-          <a:solidFill>
-            <a:srgbClr val="095292"/>
-          </a:solidFill>
-          <a:ln>
-            <a:noFill/>
-          </a:ln>
-        </p:spPr>
-        <p:style>
-          <a:lnRef idx="1">
-            <a:schemeClr val="accent1"/>
-          </a:lnRef>
-          <a:fillRef idx="3">
-            <a:schemeClr val="accent1"/>
-          </a:fillRef>
-          <a:effectRef idx="2">
-            <a:schemeClr val="accent1"/>
-          </a:effectRef>
-          <a:fontRef idx="minor">
-            <a:schemeClr val="lt1"/>
-          </a:fontRef>
-        </p:style>
-        <p:txBody>
-          <a:bodyPr rtlCol="0" anchor="ctr"/>
-          <a:lstStyle/>
-          <a:p>
-            <a:pPr algn="ctr"/>
-          </a:p>
-        </p:txBody>
-      </p:sp>
-      <p:sp>
-        <p:nvSpPr>
-          <p:cNvPr id="12" name="TextBox 11"/>
-          <p:cNvSpPr txBox="1"/>
-          <p:nvPr/>
-        </p:nvSpPr>
-        <p:spPr>
-          <a:xfrm>
-            <a:off x="594360" y="2680106"/>
-            <a:ext cx="438912" cy="438912"/>
-          </a:xfrm>
-          <a:prstGeom prst="rect">
-            <a:avLst/>
-          </a:prstGeom>
-          <a:noFill/>
-        </p:spPr>
-        <p:txBody>
-          <a:bodyPr wrap="square" anchor="ctr"/>
-          <a:lstStyle/>
-          <a:p>
-            <a:pPr algn="ctr"/>
-            <a:r>
-              <a:rPr sz="1600" b="1" i="0">
-                <a:solidFill>
-                  <a:srgbClr val="FFFFFF"/>
-                </a:solidFill>
-                <a:latin typeface="Calibri"/>
-              </a:rPr>
-              <a:t>2</a:t>
-            </a:r>
-          </a:p>
-        </p:txBody>
-      </p:sp>
-      <p:sp>
-        <p:nvSpPr>
-          <p:cNvPr id="13" name="TextBox 12"/>
-          <p:cNvSpPr txBox="1"/>
-          <p:nvPr/>
-        </p:nvSpPr>
-        <p:spPr>
-          <a:xfrm>
-            <a:off x="1188720" y="2536545"/>
-            <a:ext cx="10271455" cy="744321"/>
-          </a:xfrm>
-          <a:prstGeom prst="rect">
-            <a:avLst/>
-          </a:prstGeom>
-          <a:noFill/>
-        </p:spPr>
-        <p:txBody>
-          <a:bodyPr wrap="square" anchor="ctr"/>
-          <a:lstStyle/>
-          <a:p>
-            <a:r>
-              <a:rPr sz="1500" b="1" i="0">
-                <a:solidFill>
-                  <a:srgbClr val="095292"/>
-                </a:solidFill>
-                <a:latin typeface="Calibri"/>
-              </a:rPr>
-              <a:t>50 s · El antecedente más útil</a:t>
+              <a:rPr sz="2000" b="0" i="0">
+                <a:solidFill>
+                  <a:srgbClr val="333333"/>
+                </a:solidFill>
+                <a:latin typeface="Calibri"/>
+              </a:rPr>
+              <a:t>–   La confusión que hay que desarmar en primer semestre es </a:t>
+            </a:r>
+            <a:r>
+              <a:rPr sz="2000" b="1" i="0">
+                <a:solidFill>
+                  <a:srgbClr val="333333"/>
+                </a:solidFill>
+                <a:latin typeface="Calibri"/>
+              </a:rPr>
+              <a:t>innovación = tecnología nueva</a:t>
+            </a:r>
+            <a:r>
+              <a:rPr sz="2000" b="0" i="0">
+                <a:solidFill>
+                  <a:srgbClr val="333333"/>
+                </a:solidFill>
+                <a:latin typeface="Calibri"/>
+              </a:rPr>
+              <a:t>.</a:t>
             </a:r>
           </a:p>
           <a:p>
             <a:pPr>
-              <a:spcBef>
-                <a:spcPts val="200"/>
-              </a:spcBef>
+              <a:spcAft>
+                <a:spcPts val="800"/>
+              </a:spcAft>
             </a:pPr>
             <a:r>
-              <a:rPr sz="1300" b="0" i="0">
-                <a:solidFill>
-                  <a:srgbClr val="333333"/>
-                </a:solidFill>
-                <a:latin typeface="Calibri"/>
-              </a:rPr>
-              <a:t>Cuál es, de qué año, y </a:t>
-            </a:r>
-            <a:r>
-              <a:rPr sz="1300" b="1" i="0">
-                <a:solidFill>
-                  <a:srgbClr val="333333"/>
-                </a:solidFill>
-                <a:latin typeface="Calibri"/>
-              </a:rPr>
-              <a:t>muéstrenlo en pantalla</a:t>
-            </a:r>
-            <a:r>
-              <a:rPr sz="1300" b="0" i="0">
+              <a:rPr sz="2000" b="0" i="0">
+                <a:solidFill>
+                  <a:srgbClr val="333333"/>
+                </a:solidFill>
+                <a:latin typeface="Calibri"/>
+              </a:rPr>
+              <a:t>–   Con esa definición, un equipo se siente obligado a meter inteligencia artificial, blockchain o lo que esté de moda en un proyecto que no lo necesita, y el resultado es peor que la solución simple.</a:t>
+            </a:r>
+          </a:p>
+          <a:p>
+            <a:pPr>
+              <a:spcAft>
+                <a:spcPts val="800"/>
+              </a:spcAft>
+            </a:pPr>
+            <a:r>
+              <a:rPr sz="2000" b="0" i="0">
+                <a:solidFill>
+                  <a:srgbClr val="333333"/>
+                </a:solidFill>
+                <a:latin typeface="Calibri"/>
+              </a:rPr>
+              <a:t>–   La definición útil: </a:t>
+            </a:r>
+            <a:r>
+              <a:rPr sz="2000" b="1" i="0">
+                <a:solidFill>
+                  <a:srgbClr val="333333"/>
+                </a:solidFill>
+                <a:latin typeface="Calibri"/>
+              </a:rPr>
+              <a:t>innovación es una solución que alguien adopta y que cambia algo en la práctica</a:t>
+            </a:r>
+            <a:r>
+              <a:rPr sz="2000" b="0" i="0">
                 <a:solidFill>
                   <a:srgbClr val="333333"/>
                 </a:solidFill>
@@ -5172,524 +4088,77 @@
               <a:t>.</a:t>
             </a:r>
           </a:p>
-        </p:txBody>
-      </p:sp>
-      <p:sp>
-        <p:nvSpPr>
-          <p:cNvPr id="14" name="Rounded Rectangle 13"/>
-          <p:cNvSpPr/>
-          <p:nvPr/>
-        </p:nvSpPr>
-        <p:spPr>
-          <a:xfrm>
-            <a:off x="457200" y="3445459"/>
-            <a:ext cx="11277295" cy="908913"/>
-          </a:xfrm>
-          <a:prstGeom prst="roundRect">
-            <a:avLst>
-              <a:gd name="adj" fmla="val 12000"/>
-            </a:avLst>
-          </a:prstGeom>
-          <a:solidFill>
-            <a:srgbClr val="F2F2F2"/>
-          </a:solidFill>
-          <a:ln>
-            <a:noFill/>
-          </a:ln>
-        </p:spPr>
-        <p:style>
-          <a:lnRef idx="1">
-            <a:schemeClr val="accent1"/>
-          </a:lnRef>
-          <a:fillRef idx="3">
-            <a:schemeClr val="accent1"/>
-          </a:fillRef>
-          <a:effectRef idx="2">
-            <a:schemeClr val="accent1"/>
-          </a:effectRef>
-          <a:fontRef idx="minor">
-            <a:schemeClr val="lt1"/>
-          </a:fontRef>
-        </p:style>
-        <p:txBody>
-          <a:bodyPr rtlCol="0" anchor="ctr"/>
-          <a:lstStyle/>
-          <a:p>
-            <a:pPr algn="ctr"/>
-          </a:p>
-        </p:txBody>
-      </p:sp>
-      <p:sp>
-        <p:nvSpPr>
-          <p:cNvPr id="15" name="Rounded Rectangle 14"/>
-          <p:cNvSpPr/>
-          <p:nvPr/>
-        </p:nvSpPr>
-        <p:spPr>
-          <a:xfrm>
-            <a:off x="594360" y="3680460"/>
-            <a:ext cx="438912" cy="438912"/>
-          </a:xfrm>
-          <a:prstGeom prst="roundRect">
-            <a:avLst>
-              <a:gd name="adj" fmla="val 12000"/>
-            </a:avLst>
-          </a:prstGeom>
-          <a:solidFill>
-            <a:srgbClr val="095292"/>
-          </a:solidFill>
-          <a:ln>
-            <a:noFill/>
-          </a:ln>
-        </p:spPr>
-        <p:style>
-          <a:lnRef idx="1">
-            <a:schemeClr val="accent1"/>
-          </a:lnRef>
-          <a:fillRef idx="3">
-            <a:schemeClr val="accent1"/>
-          </a:fillRef>
-          <a:effectRef idx="2">
-            <a:schemeClr val="accent1"/>
-          </a:effectRef>
-          <a:fontRef idx="minor">
-            <a:schemeClr val="lt1"/>
-          </a:fontRef>
-        </p:style>
-        <p:txBody>
-          <a:bodyPr rtlCol="0" anchor="ctr"/>
-          <a:lstStyle/>
-          <a:p>
-            <a:pPr algn="ctr"/>
-          </a:p>
-        </p:txBody>
-      </p:sp>
-      <p:sp>
-        <p:nvSpPr>
-          <p:cNvPr id="16" name="TextBox 15"/>
-          <p:cNvSpPr txBox="1"/>
-          <p:nvPr/>
-        </p:nvSpPr>
-        <p:spPr>
-          <a:xfrm>
-            <a:off x="594360" y="3680460"/>
-            <a:ext cx="438912" cy="438912"/>
-          </a:xfrm>
-          <a:prstGeom prst="rect">
-            <a:avLst/>
-          </a:prstGeom>
-          <a:noFill/>
-        </p:spPr>
-        <p:txBody>
-          <a:bodyPr wrap="square" anchor="ctr"/>
-          <a:lstStyle/>
-          <a:p>
-            <a:pPr algn="ctr"/>
-            <a:r>
-              <a:rPr sz="1600" b="1" i="0">
-                <a:solidFill>
-                  <a:srgbClr val="FFFFFF"/>
-                </a:solidFill>
-                <a:latin typeface="Calibri"/>
-              </a:rPr>
-              <a:t>3</a:t>
-            </a:r>
-          </a:p>
-        </p:txBody>
-      </p:sp>
-      <p:sp>
-        <p:nvSpPr>
-          <p:cNvPr id="17" name="TextBox 16"/>
-          <p:cNvSpPr txBox="1"/>
-          <p:nvPr/>
-        </p:nvSpPr>
-        <p:spPr>
-          <a:xfrm>
-            <a:off x="1188720" y="3536899"/>
-            <a:ext cx="10271455" cy="744321"/>
-          </a:xfrm>
-          <a:prstGeom prst="rect">
-            <a:avLst/>
-          </a:prstGeom>
-          <a:noFill/>
-        </p:spPr>
-        <p:txBody>
-          <a:bodyPr wrap="square" anchor="ctr"/>
-          <a:lstStyle/>
-          <a:p>
-            <a:r>
-              <a:rPr sz="1500" b="1" i="0">
-                <a:solidFill>
-                  <a:srgbClr val="095292"/>
-                </a:solidFill>
-                <a:latin typeface="Calibri"/>
-              </a:rPr>
-              <a:t>50 s · Qué le falta</a:t>
-            </a:r>
-          </a:p>
           <a:p>
             <a:pPr>
-              <a:spcBef>
-                <a:spcPts val="200"/>
-              </a:spcBef>
+              <a:spcAft>
+                <a:spcPts val="800"/>
+              </a:spcAft>
             </a:pPr>
             <a:r>
-              <a:rPr sz="1300" b="0" i="0">
-                <a:solidFill>
-                  <a:srgbClr val="333333"/>
-                </a:solidFill>
-                <a:latin typeface="Calibri"/>
-              </a:rPr>
-              <a:t>La brecha respecto a su caso. Es el minuto obligatorio.</a:t>
-            </a:r>
-          </a:p>
-        </p:txBody>
-      </p:sp>
-      <p:sp>
-        <p:nvSpPr>
-          <p:cNvPr id="18" name="Rounded Rectangle 17"/>
-          <p:cNvSpPr/>
-          <p:nvPr/>
-        </p:nvSpPr>
-        <p:spPr>
-          <a:xfrm>
-            <a:off x="457200" y="4445812"/>
-            <a:ext cx="11277295" cy="908913"/>
-          </a:xfrm>
-          <a:prstGeom prst="roundRect">
-            <a:avLst>
-              <a:gd name="adj" fmla="val 12000"/>
-            </a:avLst>
-          </a:prstGeom>
-          <a:solidFill>
-            <a:srgbClr val="E8F4FA"/>
-          </a:solidFill>
-          <a:ln>
-            <a:noFill/>
-          </a:ln>
-        </p:spPr>
-        <p:style>
-          <a:lnRef idx="1">
-            <a:schemeClr val="accent1"/>
-          </a:lnRef>
-          <a:fillRef idx="3">
-            <a:schemeClr val="accent1"/>
-          </a:fillRef>
-          <a:effectRef idx="2">
-            <a:schemeClr val="accent1"/>
-          </a:effectRef>
-          <a:fontRef idx="minor">
-            <a:schemeClr val="lt1"/>
-          </a:fontRef>
-        </p:style>
-        <p:txBody>
-          <a:bodyPr rtlCol="0" anchor="ctr"/>
-          <a:lstStyle/>
-          <a:p>
-            <a:pPr algn="ctr"/>
-          </a:p>
-        </p:txBody>
-      </p:sp>
-      <p:sp>
-        <p:nvSpPr>
-          <p:cNvPr id="19" name="Rounded Rectangle 18"/>
-          <p:cNvSpPr/>
-          <p:nvPr/>
-        </p:nvSpPr>
-        <p:spPr>
-          <a:xfrm>
-            <a:off x="594360" y="4680813"/>
-            <a:ext cx="438912" cy="438912"/>
-          </a:xfrm>
-          <a:prstGeom prst="roundRect">
-            <a:avLst>
-              <a:gd name="adj" fmla="val 12000"/>
-            </a:avLst>
-          </a:prstGeom>
-          <a:solidFill>
-            <a:srgbClr val="095292"/>
-          </a:solidFill>
-          <a:ln>
-            <a:noFill/>
-          </a:ln>
-        </p:spPr>
-        <p:style>
-          <a:lnRef idx="1">
-            <a:schemeClr val="accent1"/>
-          </a:lnRef>
-          <a:fillRef idx="3">
-            <a:schemeClr val="accent1"/>
-          </a:fillRef>
-          <a:effectRef idx="2">
-            <a:schemeClr val="accent1"/>
-          </a:effectRef>
-          <a:fontRef idx="minor">
-            <a:schemeClr val="lt1"/>
-          </a:fontRef>
-        </p:style>
-        <p:txBody>
-          <a:bodyPr rtlCol="0" anchor="ctr"/>
-          <a:lstStyle/>
-          <a:p>
-            <a:pPr algn="ctr"/>
-          </a:p>
-        </p:txBody>
-      </p:sp>
-      <p:sp>
-        <p:nvSpPr>
-          <p:cNvPr id="20" name="TextBox 19"/>
-          <p:cNvSpPr txBox="1"/>
-          <p:nvPr/>
-        </p:nvSpPr>
-        <p:spPr>
-          <a:xfrm>
-            <a:off x="594360" y="4680813"/>
-            <a:ext cx="438912" cy="438912"/>
-          </a:xfrm>
-          <a:prstGeom prst="rect">
-            <a:avLst/>
-          </a:prstGeom>
-          <a:noFill/>
-        </p:spPr>
-        <p:txBody>
-          <a:bodyPr wrap="square" anchor="ctr"/>
-          <a:lstStyle/>
-          <a:p>
-            <a:pPr algn="ctr"/>
-            <a:r>
-              <a:rPr sz="1600" b="1" i="0">
-                <a:solidFill>
-                  <a:srgbClr val="FFFFFF"/>
-                </a:solidFill>
-                <a:latin typeface="Calibri"/>
-              </a:rPr>
-              <a:t>4</a:t>
-            </a:r>
-          </a:p>
-        </p:txBody>
-      </p:sp>
-      <p:sp>
-        <p:nvSpPr>
-          <p:cNvPr id="21" name="TextBox 20"/>
-          <p:cNvSpPr txBox="1"/>
-          <p:nvPr/>
-        </p:nvSpPr>
-        <p:spPr>
-          <a:xfrm>
-            <a:off x="1188720" y="4537252"/>
-            <a:ext cx="10271455" cy="744321"/>
-          </a:xfrm>
-          <a:prstGeom prst="rect">
-            <a:avLst/>
-          </a:prstGeom>
-          <a:noFill/>
-        </p:spPr>
-        <p:txBody>
-          <a:bodyPr wrap="square" anchor="ctr"/>
-          <a:lstStyle/>
-          <a:p>
-            <a:r>
-              <a:rPr sz="1500" b="1" i="0">
-                <a:solidFill>
-                  <a:srgbClr val="095292"/>
-                </a:solidFill>
-                <a:latin typeface="Calibri"/>
-              </a:rPr>
-              <a:t>40 s · La propuesta de mejora</a:t>
+              <a:rPr sz="2000" b="0" i="0">
+                <a:solidFill>
+                  <a:srgbClr val="333333"/>
+                </a:solidFill>
+                <a:latin typeface="Calibri"/>
+              </a:rPr>
+              <a:t>–   La palabra clave es *adopta*.</a:t>
             </a:r>
           </a:p>
           <a:p>
             <a:pPr>
-              <a:spcBef>
-                <a:spcPts val="200"/>
-              </a:spcBef>
+              <a:spcAft>
+                <a:spcPts val="800"/>
+              </a:spcAft>
             </a:pPr>
             <a:r>
-              <a:rPr sz="1300" b="0" i="0">
-                <a:solidFill>
-                  <a:srgbClr val="333333"/>
-                </a:solidFill>
-                <a:latin typeface="Calibri"/>
-              </a:rPr>
-              <a:t>Qué hacen distinto y con cuál de las cuatro operaciones.</a:t>
-            </a:r>
-          </a:p>
-        </p:txBody>
-      </p:sp>
-      <p:sp>
-        <p:nvSpPr>
-          <p:cNvPr id="22" name="Rounded Rectangle 21"/>
-          <p:cNvSpPr/>
-          <p:nvPr/>
-        </p:nvSpPr>
-        <p:spPr>
-          <a:xfrm>
-            <a:off x="457200" y="5446166"/>
-            <a:ext cx="11277295" cy="908913"/>
-          </a:xfrm>
-          <a:prstGeom prst="roundRect">
-            <a:avLst>
-              <a:gd name="adj" fmla="val 12000"/>
-            </a:avLst>
-          </a:prstGeom>
-          <a:solidFill>
-            <a:srgbClr val="F2F2F2"/>
-          </a:solidFill>
-          <a:ln>
-            <a:noFill/>
-          </a:ln>
-        </p:spPr>
-        <p:style>
-          <a:lnRef idx="1">
-            <a:schemeClr val="accent1"/>
-          </a:lnRef>
-          <a:fillRef idx="3">
-            <a:schemeClr val="accent1"/>
-          </a:fillRef>
-          <a:effectRef idx="2">
-            <a:schemeClr val="accent1"/>
-          </a:effectRef>
-          <a:fontRef idx="minor">
-            <a:schemeClr val="lt1"/>
-          </a:fontRef>
-        </p:style>
-        <p:txBody>
-          <a:bodyPr rtlCol="0" anchor="ctr"/>
-          <a:lstStyle/>
-          <a:p>
-            <a:pPr algn="ctr"/>
-          </a:p>
-        </p:txBody>
-      </p:sp>
-      <p:sp>
-        <p:nvSpPr>
-          <p:cNvPr id="23" name="Rounded Rectangle 22"/>
-          <p:cNvSpPr/>
-          <p:nvPr/>
-        </p:nvSpPr>
-        <p:spPr>
-          <a:xfrm>
-            <a:off x="594360" y="5681167"/>
-            <a:ext cx="438912" cy="438912"/>
-          </a:xfrm>
-          <a:prstGeom prst="roundRect">
-            <a:avLst>
-              <a:gd name="adj" fmla="val 12000"/>
-            </a:avLst>
-          </a:prstGeom>
-          <a:solidFill>
-            <a:srgbClr val="095292"/>
-          </a:solidFill>
-          <a:ln>
-            <a:noFill/>
-          </a:ln>
-        </p:spPr>
-        <p:style>
-          <a:lnRef idx="1">
-            <a:schemeClr val="accent1"/>
-          </a:lnRef>
-          <a:fillRef idx="3">
-            <a:schemeClr val="accent1"/>
-          </a:fillRef>
-          <a:effectRef idx="2">
-            <a:schemeClr val="accent1"/>
-          </a:effectRef>
-          <a:fontRef idx="minor">
-            <a:schemeClr val="lt1"/>
-          </a:fontRef>
-        </p:style>
-        <p:txBody>
-          <a:bodyPr rtlCol="0" anchor="ctr"/>
-          <a:lstStyle/>
-          <a:p>
-            <a:pPr algn="ctr"/>
-          </a:p>
-        </p:txBody>
-      </p:sp>
-      <p:sp>
-        <p:nvSpPr>
-          <p:cNvPr id="24" name="TextBox 23"/>
-          <p:cNvSpPr txBox="1"/>
-          <p:nvPr/>
-        </p:nvSpPr>
-        <p:spPr>
-          <a:xfrm>
-            <a:off x="594360" y="5681167"/>
-            <a:ext cx="438912" cy="438912"/>
-          </a:xfrm>
-          <a:prstGeom prst="rect">
-            <a:avLst/>
-          </a:prstGeom>
-          <a:noFill/>
-        </p:spPr>
-        <p:txBody>
-          <a:bodyPr wrap="square" anchor="ctr"/>
-          <a:lstStyle/>
-          <a:p>
-            <a:pPr algn="ctr"/>
-            <a:r>
-              <a:rPr sz="1600" b="1" i="0">
-                <a:solidFill>
-                  <a:srgbClr val="FFFFFF"/>
-                </a:solidFill>
-                <a:latin typeface="Calibri"/>
-              </a:rPr>
-              <a:t>5</a:t>
-            </a:r>
-          </a:p>
-        </p:txBody>
-      </p:sp>
-      <p:sp>
-        <p:nvSpPr>
-          <p:cNvPr id="25" name="TextBox 24"/>
-          <p:cNvSpPr txBox="1"/>
-          <p:nvPr/>
-        </p:nvSpPr>
-        <p:spPr>
-          <a:xfrm>
-            <a:off x="1188720" y="5537606"/>
-            <a:ext cx="10271455" cy="744321"/>
-          </a:xfrm>
-          <a:prstGeom prst="rect">
-            <a:avLst/>
-          </a:prstGeom>
-          <a:noFill/>
-        </p:spPr>
-        <p:txBody>
-          <a:bodyPr wrap="square" anchor="ctr"/>
-          <a:lstStyle/>
-          <a:p>
-            <a:r>
-              <a:rPr sz="1500" b="1" i="0">
-                <a:solidFill>
-                  <a:srgbClr val="095292"/>
-                </a:solidFill>
-                <a:latin typeface="Calibri"/>
-              </a:rPr>
-              <a:t>15 s · Qué reusan</a:t>
+              <a:rPr sz="2000" b="0" i="0">
+                <a:solidFill>
+                  <a:srgbClr val="333333"/>
+                </a:solidFill>
+                <a:latin typeface="Calibri"/>
+              </a:rPr>
+              <a:t>–   Si nadie la usa, fue un experimento — respetable, pero no innovación.</a:t>
             </a:r>
           </a:p>
           <a:p>
             <a:pPr>
-              <a:spcBef>
-                <a:spcPts val="200"/>
-              </a:spcBef>
+              <a:spcAft>
+                <a:spcPts val="800"/>
+              </a:spcAft>
             </a:pPr>
             <a:r>
-              <a:rPr sz="1300" b="0" i="0">
-                <a:solidFill>
-                  <a:srgbClr val="333333"/>
-                </a:solidFill>
-                <a:latin typeface="Calibri"/>
-              </a:rPr>
-              <a:t>Una cosa concreta que aprovechan de lo que ya existe.</a:t>
-            </a:r>
-          </a:p>
-        </p:txBody>
-      </p:sp>
-      <p:sp>
-        <p:nvSpPr>
-          <p:cNvPr id="26" name="TextBox 25"/>
+              <a:rPr sz="2000" b="0" i="0">
+                <a:solidFill>
+                  <a:srgbClr val="333333"/>
+                </a:solidFill>
+                <a:latin typeface="Calibri"/>
+              </a:rPr>
+              <a:t>–   Esto tiene una consecuencia directa sobre sus proyectos y conviene decirla: la biblioteca que empieza a usar una lista publicada es más innovadora que la aplicación perfecta que quedó en el computador del equipo. </a:t>
+            </a:r>
+            <a:r>
+              <a:rPr sz="2000" b="1" i="0">
+                <a:solidFill>
+                  <a:srgbClr val="333333"/>
+                </a:solidFill>
+                <a:latin typeface="Calibri"/>
+              </a:rPr>
+              <a:t>Incremental y radical.</a:t>
+            </a:r>
+            <a:r>
+              <a:rPr sz="2000" b="0" i="0">
+                <a:solidFill>
+                  <a:srgbClr val="333333"/>
+                </a:solidFill>
+                <a:latin typeface="Calibri"/>
+              </a:rPr>
+              <a:t> Lo incremental —mejorar algo que ya funciona, un paso a la vez— es lo que ocurre casi siempre y lo único que cabe en un semestre.</a:t>
+            </a:r>
+          </a:p>
+        </p:txBody>
+      </p:sp>
+      <p:sp>
+        <p:nvSpPr>
+          <p:cNvPr id="6" name="TextBox 5"/>
           <p:cNvSpPr txBox="1"/>
           <p:nvPr/>
         </p:nvSpPr>
@@ -5863,7 +4332,7 @@
                 </a:solidFill>
                 <a:latin typeface="Calibri"/>
               </a:rPr>
-              <a:t>Para la Clase 10</a:t>
+              <a:t>Innovación: por qué la adopción es lo que decide (2/2)</a:t>
             </a:r>
           </a:p>
         </p:txBody>
@@ -5902,43 +4371,7 @@
                 </a:solidFill>
                 <a:latin typeface="Calibri"/>
               </a:rPr>
-              <a:t>–   </a:t>
-            </a:r>
-            <a:r>
-              <a:rPr sz="2000" b="1" i="0">
-                <a:solidFill>
-                  <a:srgbClr val="333333"/>
-                </a:solidFill>
-                <a:latin typeface="Calibri"/>
-              </a:rPr>
-              <a:t>Trabajo dirigido:</a:t>
-            </a:r>
-            <a:r>
-              <a:rPr sz="2000" b="0" i="0">
-                <a:solidFill>
-                  <a:srgbClr val="333333"/>
-                </a:solidFill>
-                <a:latin typeface="Calibri"/>
-              </a:rPr>
-              <a:t> Revisión bibliográfica — completar las tres fichas con los seis campos y </a:t>
-            </a:r>
-            <a:r>
-              <a:rPr sz="2000" b="1" i="0">
-                <a:solidFill>
-                  <a:srgbClr val="333333"/>
-                </a:solidFill>
-                <a:latin typeface="Calibri"/>
-              </a:rPr>
-              <a:t>abrir cada enlace</a:t>
-            </a:r>
-            <a:r>
-              <a:rPr sz="2000" b="0" i="0">
-                <a:solidFill>
-                  <a:srgbClr val="333333"/>
-                </a:solidFill>
-                <a:latin typeface="Calibri"/>
-              </a:rPr>
-              <a:t> para confirmar que sirve, anotando la fecha de consulta.</a:t>
+              <a:t>–   Si un equipo tiene un proyecto de gestión sin pantallas, este es su lugar en la sesión.</a:t>
             </a:r>
           </a:p>
           <a:p>
@@ -5954,7 +4387,7 @@
                 </a:solidFill>
                 <a:latin typeface="Calibri"/>
               </a:rPr>
-              <a:t>–   </a:t>
+              <a:t>–   Y el punto que abre el resto de la clase: </a:t>
             </a:r>
             <a:r>
               <a:rPr sz="2000" b="1" i="0">
@@ -5963,7 +4396,7 @@
                 </a:solidFill>
                 <a:latin typeface="Calibri"/>
               </a:rPr>
-              <a:t>Trabajo independiente:</a:t>
+              <a:t>casi toda innovación es una recombinación</a:t>
             </a:r>
             <a:r>
               <a:rPr sz="2000" b="0" i="0">
@@ -5972,7 +4405,7 @@
                 </a:solidFill>
                 <a:latin typeface="Calibri"/>
               </a:rPr>
-              <a:t> Propuesta de mejora escrita en el documento del equipo: la brecha, la operación usada y por qué importa en su contexto. Máximo una página.</a:t>
+              <a:t> de cosas que ya existían, traídas a un contexto donde no estaban.</a:t>
             </a:r>
           </a:p>
           <a:p>
@@ -5988,43 +4421,7 @@
                 </a:solidFill>
                 <a:latin typeface="Calibri"/>
               </a:rPr>
-              <a:t>–   </a:t>
-            </a:r>
-            <a:r>
-              <a:rPr sz="2000" b="1" i="0">
-                <a:solidFill>
-                  <a:srgbClr val="333333"/>
-                </a:solidFill>
-                <a:latin typeface="Calibri"/>
-              </a:rPr>
-              <a:t>Clase 10 · Herramientas digitales aplicadas a la Ingeniería</a:t>
-            </a:r>
-            <a:r>
-              <a:rPr sz="2000" b="0" i="0">
-                <a:solidFill>
-                  <a:srgbClr val="333333"/>
-                </a:solidFill>
-                <a:latin typeface="Calibri"/>
-              </a:rPr>
-              <a:t> — </a:t>
-            </a:r>
-            <a:r>
-              <a:rPr sz="2000" b="1" i="0">
-                <a:solidFill>
-                  <a:srgbClr val="333333"/>
-                </a:solidFill>
-                <a:latin typeface="Calibri"/>
-              </a:rPr>
-              <a:t>prototipado</a:t>
-            </a:r>
-            <a:r>
-              <a:rPr sz="2000" b="0" i="0">
-                <a:solidFill>
-                  <a:srgbClr val="333333"/>
-                </a:solidFill>
-                <a:latin typeface="Calibri"/>
-              </a:rPr>
-              <a:t>: qué es un prototipo y qué no, los niveles de fidelidad, y por qué el dibujo a mano da mejor retroalimentación que la pantalla terminada.</a:t>
+              <a:t>–   Eso convierte la búsqueda de antecedentes en la materia prima del proyecto, y no en un requisito académico.</a:t>
             </a:r>
           </a:p>
           <a:p>
@@ -6040,77 +4437,7 @@
                 </a:solidFill>
                 <a:latin typeface="Calibri"/>
               </a:rPr>
-              <a:t>–   </a:t>
-            </a:r>
-            <a:r>
-              <a:rPr sz="2000" b="1" i="0">
-                <a:solidFill>
-                  <a:srgbClr val="333333"/>
-                </a:solidFill>
-                <a:latin typeface="Calibri"/>
-              </a:rPr>
-              <a:t>Aviso:</a:t>
-            </a:r>
-            <a:r>
-              <a:rPr sz="2000" b="0" i="0">
-                <a:solidFill>
-                  <a:srgbClr val="333333"/>
-                </a:solidFill>
-                <a:latin typeface="Calibri"/>
-              </a:rPr>
-              <a:t> Para la sesión 10 traigan la propuesta de mejora escrita y el </a:t>
-            </a:r>
-            <a:r>
-              <a:rPr sz="2000" b="1" i="0">
-                <a:solidFill>
-                  <a:srgbClr val="333333"/>
-                </a:solidFill>
-                <a:latin typeface="Calibri"/>
-              </a:rPr>
-              <a:t>alcance mínimo de la sesión 8</a:t>
-            </a:r>
-            <a:r>
-              <a:rPr sz="2000" b="0" i="0">
-                <a:solidFill>
-                  <a:srgbClr val="333333"/>
-                </a:solidFill>
-                <a:latin typeface="Calibri"/>
-              </a:rPr>
-              <a:t> a la vista. Se van a dibujar las tres pantallas o pasos del flujo principal, y de las fichas de hoy sale el diseño.</a:t>
-            </a:r>
-          </a:p>
-          <a:p>
-            <a:pPr>
-              <a:spcAft>
-                <a:spcPts val="800"/>
-              </a:spcAft>
-            </a:pPr>
-            <a:r>
-              <a:rPr sz="2000" b="0" i="0">
-                <a:solidFill>
-                  <a:srgbClr val="333333"/>
-                </a:solidFill>
-                <a:latin typeface="Calibri"/>
-              </a:rPr>
-              <a:t>–   </a:t>
-            </a:r>
-            <a:r>
-              <a:rPr sz="2000" b="1" i="0">
-                <a:solidFill>
-                  <a:srgbClr val="333333"/>
-                </a:solidFill>
-                <a:latin typeface="Calibri"/>
-              </a:rPr>
-              <a:t>Antes de salir:</a:t>
-            </a:r>
-            <a:r>
-              <a:rPr sz="2000" b="0" i="0">
-                <a:solidFill>
-                  <a:srgbClr val="333333"/>
-                </a:solidFill>
-                <a:latin typeface="Calibri"/>
-              </a:rPr>
-              <a:t> el enlace del documento del equipo en el chat, con permiso de lectura para el docente, y el nombre del vocero de hoy.</a:t>
+              <a:t>–   Sin antecedentes no hay con qué recombinar.</a:t>
             </a:r>
           </a:p>
         </p:txBody>
@@ -6185,13 +4512,13 @@
         <p:spPr>
           <a:xfrm>
             <a:off x="0" y="0"/>
-            <a:ext cx="12191695" cy="164592"/>
+            <a:ext cx="12191695" cy="960120"/>
           </a:xfrm>
           <a:prstGeom prst="rect">
             <a:avLst/>
           </a:prstGeom>
           <a:solidFill>
-            <a:srgbClr val="269CCB"/>
+            <a:srgbClr val="095292"/>
           </a:solidFill>
           <a:ln>
             <a:noFill/>
@@ -6219,30 +4546,49 @@
           </a:p>
         </p:txBody>
       </p:sp>
-      <p:pic>
-        <p:nvPicPr>
-          <p:cNvPr id="3" name="Picture 2" descr="logo_uniajc_color.png"/>
-          <p:cNvPicPr>
-            <a:picLocks noChangeAspect="1"/>
-          </p:cNvPicPr>
-          <p:nvPr/>
-        </p:nvPicPr>
-        <p:blipFill>
-          <a:blip r:embed="rId2"/>
-          <a:stretch>
-            <a:fillRect/>
-          </a:stretch>
-        </p:blipFill>
-        <p:spPr>
-          <a:xfrm>
-            <a:off x="10271455" y="5998464"/>
-            <a:ext cx="1463040" cy="643233"/>
-          </a:xfrm>
-          <a:prstGeom prst="rect">
-            <a:avLst/>
-          </a:prstGeom>
-        </p:spPr>
-      </p:pic>
+      <p:sp>
+        <p:nvSpPr>
+          <p:cNvPr id="3" name="Rectangle 2"/>
+          <p:cNvSpPr/>
+          <p:nvPr/>
+        </p:nvSpPr>
+        <p:spPr>
+          <a:xfrm>
+            <a:off x="0" y="960120"/>
+            <a:ext cx="12191695" cy="41148"/>
+          </a:xfrm>
+          <a:prstGeom prst="rect">
+            <a:avLst/>
+          </a:prstGeom>
+          <a:solidFill>
+            <a:srgbClr val="FFD000"/>
+          </a:solidFill>
+          <a:ln>
+            <a:noFill/>
+          </a:ln>
+        </p:spPr>
+        <p:style>
+          <a:lnRef idx="1">
+            <a:schemeClr val="accent1"/>
+          </a:lnRef>
+          <a:fillRef idx="3">
+            <a:schemeClr val="accent1"/>
+          </a:fillRef>
+          <a:effectRef idx="2">
+            <a:schemeClr val="accent1"/>
+          </a:effectRef>
+          <a:fontRef idx="minor">
+            <a:schemeClr val="lt1"/>
+          </a:fontRef>
+        </p:style>
+        <p:txBody>
+          <a:bodyPr rtlCol="0" anchor="ctr"/>
+          <a:lstStyle/>
+          <a:p>
+            <a:pPr algn="ctr"/>
+          </a:p>
+        </p:txBody>
+      </p:sp>
       <p:sp>
         <p:nvSpPr>
           <p:cNvPr id="4" name="TextBox 3"/>
@@ -6251,41 +4597,8 @@
         </p:nvSpPr>
         <p:spPr>
           <a:xfrm>
-            <a:off x="457200" y="1737360"/>
-            <a:ext cx="11277295" cy="1097280"/>
-          </a:xfrm>
-          <a:prstGeom prst="rect">
-            <a:avLst/>
-          </a:prstGeom>
-          <a:noFill/>
-        </p:spPr>
-        <p:txBody>
-          <a:bodyPr wrap="square" anchor="ctr"/>
-          <a:lstStyle/>
-          <a:p>
-            <a:pPr algn="ctr"/>
-            <a:r>
-              <a:rPr sz="3400" b="1" i="0">
-                <a:solidFill>
-                  <a:srgbClr val="095292"/>
-                </a:solidFill>
-                <a:latin typeface="Calibri"/>
-              </a:rPr>
-              <a:t>Nos vemos en la sesión 10</a:t>
-            </a:r>
-          </a:p>
-        </p:txBody>
-      </p:sp>
-      <p:sp>
-        <p:nvSpPr>
-          <p:cNvPr id="5" name="TextBox 4"/>
-          <p:cNvSpPr txBox="1"/>
-          <p:nvPr/>
-        </p:nvSpPr>
-        <p:spPr>
-          <a:xfrm>
-            <a:off x="457200" y="3017520"/>
-            <a:ext cx="11277295" cy="1645920"/>
+            <a:off x="457200" y="164592"/>
+            <a:ext cx="11277295" cy="502920"/>
           </a:xfrm>
           <a:prstGeom prst="rect">
             <a:avLst/>
@@ -6298,49 +4611,28 @@
           </a:bodyPr>
           <a:lstStyle/>
           <a:p>
-            <a:pPr algn="ctr">
-              <a:spcAft>
-                <a:spcPts val="600"/>
-              </a:spcAft>
-            </a:pPr>
-            <a:r>
-              <a:rPr sz="1600" b="0" i="0">
-                <a:solidFill>
-                  <a:srgbClr val="333333"/>
-                </a:solidFill>
-                <a:latin typeface="Calibri"/>
-              </a:rPr>
-              <a:t>Estrategias de innovación en Ingeniería · Clase 9</a:t>
-            </a:r>
-          </a:p>
-          <a:p>
-            <a:pPr algn="ctr">
-              <a:spcAft>
-                <a:spcPts val="600"/>
-              </a:spcAft>
-            </a:pPr>
-            <a:r>
-              <a:rPr sz="1600" b="0" i="0">
-                <a:solidFill>
-                  <a:srgbClr val="333333"/>
-                </a:solidFill>
-                <a:latin typeface="Calibri"/>
-              </a:rPr>
-              <a:t>FI300101 · UNIAJC · Ingeniería de Sistemas</a:t>
-            </a:r>
-          </a:p>
-        </p:txBody>
-      </p:sp>
-      <p:sp>
-        <p:nvSpPr>
-          <p:cNvPr id="6" name="TextBox 5"/>
+            <a:r>
+              <a:rPr sz="2600" b="1" i="0">
+                <a:solidFill>
+                  <a:srgbClr val="FFFFFF"/>
+                </a:solidFill>
+                <a:latin typeface="Calibri"/>
+              </a:rPr>
+              <a:t>Las cuatro maneras de generar una mejora (1/2)</a:t>
+            </a:r>
+          </a:p>
+        </p:txBody>
+      </p:sp>
+      <p:sp>
+        <p:nvSpPr>
+          <p:cNvPr id="5" name="TextBox 4"/>
           <p:cNvSpPr txBox="1"/>
           <p:nvPr/>
         </p:nvSpPr>
         <p:spPr>
           <a:xfrm>
-            <a:off x="457200" y="4754880"/>
-            <a:ext cx="11277295" cy="640080"/>
+            <a:off x="457200" y="1170432"/>
+            <a:ext cx="11277295" cy="5230368"/>
           </a:xfrm>
           <a:prstGeom prst="rect">
             <a:avLst/>
@@ -6353,15 +4645,2191 @@
           </a:bodyPr>
           <a:lstStyle/>
           <a:p>
+            <a:pPr>
+              <a:spcAft>
+                <a:spcPts val="800"/>
+              </a:spcAft>
+            </a:pPr>
+            <a:r>
+              <a:rPr sz="2000" b="0" i="0">
+                <a:solidFill>
+                  <a:srgbClr val="333333"/>
+                </a:solidFill>
+                <a:latin typeface="Calibri"/>
+              </a:rPr>
+              <a:t>–   Estas cuatro operaciones son deliberadamente simples porque tienen que poder usarse en quince minutos dentro de una sala de grupo.</a:t>
+            </a:r>
+          </a:p>
+          <a:p>
+            <a:pPr>
+              <a:spcAft>
+                <a:spcPts val="800"/>
+              </a:spcAft>
+            </a:pPr>
+            <a:r>
+              <a:rPr sz="2000" b="0" i="0">
+                <a:solidFill>
+                  <a:srgbClr val="333333"/>
+                </a:solidFill>
+                <a:latin typeface="Calibri"/>
+              </a:rPr>
+              <a:t>–   Y hay una condición que hay que repetir: </a:t>
+            </a:r>
+            <a:r>
+              <a:rPr sz="2000" b="1" i="0">
+                <a:solidFill>
+                  <a:srgbClr val="333333"/>
+                </a:solidFill>
+                <a:latin typeface="Calibri"/>
+              </a:rPr>
+              <a:t>se aplican sobre un antecedente concreto, no sobre una hoja en blanco</a:t>
+            </a:r>
+            <a:r>
+              <a:rPr sz="2000" b="0" i="0">
+                <a:solidFill>
+                  <a:srgbClr val="333333"/>
+                </a:solidFill>
+                <a:latin typeface="Calibri"/>
+              </a:rPr>
+              <a:t>.</a:t>
+            </a:r>
+          </a:p>
+          <a:p>
+            <a:pPr>
+              <a:spcAft>
+                <a:spcPts val="800"/>
+              </a:spcAft>
+            </a:pPr>
+            <a:r>
+              <a:rPr sz="2000" b="0" i="0">
+                <a:solidFill>
+                  <a:srgbClr val="333333"/>
+                </a:solidFill>
+                <a:latin typeface="Calibri"/>
+              </a:rPr>
+              <a:t>–   Sin antecedente no producen nada. </a:t>
+            </a:r>
+            <a:r>
+              <a:rPr sz="2000" b="1" i="0">
+                <a:solidFill>
+                  <a:srgbClr val="333333"/>
+                </a:solidFill>
+                <a:latin typeface="Calibri"/>
+              </a:rPr>
+              <a:t>QUITAR</a:t>
+            </a:r>
+            <a:r>
+              <a:rPr sz="2000" b="0" i="0">
+                <a:solidFill>
+                  <a:srgbClr val="333333"/>
+                </a:solidFill>
+                <a:latin typeface="Calibri"/>
+              </a:rPr>
+              <a:t> es la más subestimada y casi siempre la más efectiva.</a:t>
+            </a:r>
+          </a:p>
+          <a:p>
+            <a:pPr>
+              <a:spcAft>
+                <a:spcPts val="800"/>
+              </a:spcAft>
+            </a:pPr>
+            <a:r>
+              <a:rPr sz="2000" b="0" i="0">
+                <a:solidFill>
+                  <a:srgbClr val="333333"/>
+                </a:solidFill>
+                <a:latin typeface="Calibri"/>
+              </a:rPr>
+              <a:t>–   Quitar un paso, un requisito, un dato, una pantalla.</a:t>
+            </a:r>
+          </a:p>
+          <a:p>
+            <a:pPr>
+              <a:spcAft>
+                <a:spcPts val="800"/>
+              </a:spcAft>
+            </a:pPr>
+            <a:r>
+              <a:rPr sz="2000" b="0" i="0">
+                <a:solidFill>
+                  <a:srgbClr val="333333"/>
+                </a:solidFill>
+                <a:latin typeface="Calibri"/>
+              </a:rPr>
+              <a:t>–   En el caso de la biblioteca: quitar el registro previo del usuario, quitar la contraseña, quitar la visita presencial.</a:t>
+            </a:r>
+          </a:p>
+          <a:p>
+            <a:pPr>
+              <a:spcAft>
+                <a:spcPts val="800"/>
+              </a:spcAft>
+            </a:pPr>
+            <a:r>
+              <a:rPr sz="2000" b="0" i="0">
+                <a:solidFill>
+                  <a:srgbClr val="333333"/>
+                </a:solidFill>
+                <a:latin typeface="Calibri"/>
+              </a:rPr>
+              <a:t>–   Cada cosa que se quita elimina una razón para que la solución no se use.</a:t>
+            </a:r>
+          </a:p>
+          <a:p>
+            <a:pPr>
+              <a:spcAft>
+                <a:spcPts val="800"/>
+              </a:spcAft>
+            </a:pPr>
+            <a:r>
+              <a:rPr sz="2000" b="0" i="0">
+                <a:solidFill>
+                  <a:srgbClr val="333333"/>
+                </a:solidFill>
+                <a:latin typeface="Calibri"/>
+              </a:rPr>
+              <a:t>–   Vale la pena señalar que </a:t>
+            </a:r>
+            <a:r>
+              <a:rPr sz="2000" b="1" i="0">
+                <a:solidFill>
+                  <a:srgbClr val="333333"/>
+                </a:solidFill>
+                <a:latin typeface="Calibri"/>
+              </a:rPr>
+              <a:t>quitar también reduce la huella</a:t>
+            </a:r>
+            <a:r>
+              <a:rPr sz="2000" b="0" i="0">
+                <a:solidFill>
+                  <a:srgbClr val="333333"/>
+                </a:solidFill>
+                <a:latin typeface="Calibri"/>
+              </a:rPr>
+              <a:t> —menos datos, menos consultas, menos transferencia—</a:t>
+            </a:r>
+          </a:p>
+          <a:p>
+            <a:pPr>
+              <a:spcAft>
+                <a:spcPts val="800"/>
+              </a:spcAft>
+            </a:pPr>
+            <a:r>
+              <a:rPr sz="2000" b="0" i="0">
+                <a:solidFill>
+                  <a:srgbClr val="333333"/>
+                </a:solidFill>
+                <a:latin typeface="Calibri"/>
+              </a:rPr>
+              <a:t>–   Que es el indicador de la sesión 5. </a:t>
+            </a:r>
+            <a:r>
+              <a:rPr sz="2000" b="1" i="0">
+                <a:solidFill>
+                  <a:srgbClr val="333333"/>
+                </a:solidFill>
+                <a:latin typeface="Calibri"/>
+              </a:rPr>
+              <a:t>COMBINAR</a:t>
+            </a:r>
+            <a:r>
+              <a:rPr sz="2000" b="0" i="0">
+                <a:solidFill>
+                  <a:srgbClr val="333333"/>
+                </a:solidFill>
+                <a:latin typeface="Calibri"/>
+              </a:rPr>
+              <a:t> es juntar dos cosas que ya existen y que nadie había juntado en ese contexto: una lista publicada más un mensaje automático; un formulario más un tablero.</a:t>
+            </a:r>
+          </a:p>
+        </p:txBody>
+      </p:sp>
+      <p:sp>
+        <p:nvSpPr>
+          <p:cNvPr id="6" name="TextBox 5"/>
+          <p:cNvSpPr txBox="1"/>
+          <p:nvPr/>
+        </p:nvSpPr>
+        <p:spPr>
+          <a:xfrm>
+            <a:off x="11185855" y="6473952"/>
+            <a:ext cx="640080" cy="274320"/>
+          </a:xfrm>
+          <a:prstGeom prst="rect">
+            <a:avLst/>
+          </a:prstGeom>
+          <a:noFill/>
+        </p:spPr>
+        <p:txBody>
+          <a:bodyPr wrap="square">
+            <a:spAutoFit/>
+          </a:bodyPr>
+          <a:lstStyle/>
+          <a:p>
+            <a:pPr algn="r"/>
+            <a:r>
+              <a:rPr sz="1100" b="0" i="0">
+                <a:solidFill>
+                  <a:srgbClr val="666666"/>
+                </a:solidFill>
+                <a:latin typeface="Calibri"/>
+              </a:rPr>
+              <a:t>13</a:t>
+            </a:r>
+          </a:p>
+        </p:txBody>
+      </p:sp>
+    </p:spTree>
+  </p:cSld>
+  <p:clrMapOvr>
+    <a:masterClrMapping/>
+  </p:clrMapOvr>
+</p:sld>
+</file>
+
+<file path=ppt/slides/slide14.xml><?xml version="1.0" encoding="utf-8"?>
+<p:sld xmlns:a="http://schemas.openxmlformats.org/drawingml/2006/main" xmlns:p="http://schemas.openxmlformats.org/presentationml/2006/main" xmlns:r="http://schemas.openxmlformats.org/officeDocument/2006/relationships">
+  <p:cSld>
+    <p:bg>
+      <p:bgPr>
+        <a:solidFill>
+          <a:srgbClr val="FFFFFF"/>
+        </a:solidFill>
+        <a:effectLst/>
+      </p:bgPr>
+    </p:bg>
+    <p:spTree>
+      <p:nvGrpSpPr>
+        <p:cNvPr id="1" name=""/>
+        <p:cNvGrpSpPr/>
+        <p:nvPr/>
+      </p:nvGrpSpPr>
+      <p:grpSpPr/>
+      <p:sp>
+        <p:nvSpPr>
+          <p:cNvPr id="2" name="Rectangle 1"/>
+          <p:cNvSpPr/>
+          <p:nvPr/>
+        </p:nvSpPr>
+        <p:spPr>
+          <a:xfrm>
+            <a:off x="0" y="0"/>
+            <a:ext cx="12191695" cy="960120"/>
+          </a:xfrm>
+          <a:prstGeom prst="rect">
+            <a:avLst/>
+          </a:prstGeom>
+          <a:solidFill>
+            <a:srgbClr val="095292"/>
+          </a:solidFill>
+          <a:ln>
+            <a:noFill/>
+          </a:ln>
+        </p:spPr>
+        <p:style>
+          <a:lnRef idx="1">
+            <a:schemeClr val="accent1"/>
+          </a:lnRef>
+          <a:fillRef idx="3">
+            <a:schemeClr val="accent1"/>
+          </a:fillRef>
+          <a:effectRef idx="2">
+            <a:schemeClr val="accent1"/>
+          </a:effectRef>
+          <a:fontRef idx="minor">
+            <a:schemeClr val="lt1"/>
+          </a:fontRef>
+        </p:style>
+        <p:txBody>
+          <a:bodyPr rtlCol="0" anchor="ctr"/>
+          <a:lstStyle/>
+          <a:p>
             <a:pPr algn="ctr"/>
+          </a:p>
+        </p:txBody>
+      </p:sp>
+      <p:sp>
+        <p:nvSpPr>
+          <p:cNvPr id="3" name="Rectangle 2"/>
+          <p:cNvSpPr/>
+          <p:nvPr/>
+        </p:nvSpPr>
+        <p:spPr>
+          <a:xfrm>
+            <a:off x="0" y="960120"/>
+            <a:ext cx="12191695" cy="41148"/>
+          </a:xfrm>
+          <a:prstGeom prst="rect">
+            <a:avLst/>
+          </a:prstGeom>
+          <a:solidFill>
+            <a:srgbClr val="FFD000"/>
+          </a:solidFill>
+          <a:ln>
+            <a:noFill/>
+          </a:ln>
+        </p:spPr>
+        <p:style>
+          <a:lnRef idx="1">
+            <a:schemeClr val="accent1"/>
+          </a:lnRef>
+          <a:fillRef idx="3">
+            <a:schemeClr val="accent1"/>
+          </a:fillRef>
+          <a:effectRef idx="2">
+            <a:schemeClr val="accent1"/>
+          </a:effectRef>
+          <a:fontRef idx="minor">
+            <a:schemeClr val="lt1"/>
+          </a:fontRef>
+        </p:style>
+        <p:txBody>
+          <a:bodyPr rtlCol="0" anchor="ctr"/>
+          <a:lstStyle/>
+          <a:p>
+            <a:pPr algn="ctr"/>
+          </a:p>
+        </p:txBody>
+      </p:sp>
+      <p:sp>
+        <p:nvSpPr>
+          <p:cNvPr id="4" name="TextBox 3"/>
+          <p:cNvSpPr txBox="1"/>
+          <p:nvPr/>
+        </p:nvSpPr>
+        <p:spPr>
+          <a:xfrm>
+            <a:off x="457200" y="164592"/>
+            <a:ext cx="11277295" cy="502920"/>
+          </a:xfrm>
+          <a:prstGeom prst="rect">
+            <a:avLst/>
+          </a:prstGeom>
+          <a:noFill/>
+        </p:spPr>
+        <p:txBody>
+          <a:bodyPr wrap="square">
+            <a:spAutoFit/>
+          </a:bodyPr>
+          <a:lstStyle/>
+          <a:p>
+            <a:r>
+              <a:rPr sz="2600" b="1" i="0">
+                <a:solidFill>
+                  <a:srgbClr val="FFFFFF"/>
+                </a:solidFill>
+                <a:latin typeface="Calibri"/>
+              </a:rPr>
+              <a:t>Las cuatro maneras de generar una mejora (2/2)</a:t>
+            </a:r>
+          </a:p>
+        </p:txBody>
+      </p:sp>
+      <p:sp>
+        <p:nvSpPr>
+          <p:cNvPr id="5" name="TextBox 4"/>
+          <p:cNvSpPr txBox="1"/>
+          <p:nvPr/>
+        </p:nvSpPr>
+        <p:spPr>
+          <a:xfrm>
+            <a:off x="457200" y="1170432"/>
+            <a:ext cx="11277295" cy="5230368"/>
+          </a:xfrm>
+          <a:prstGeom prst="rect">
+            <a:avLst/>
+          </a:prstGeom>
+          <a:noFill/>
+        </p:spPr>
+        <p:txBody>
+          <a:bodyPr wrap="square">
+            <a:spAutoFit/>
+          </a:bodyPr>
+          <a:lstStyle/>
+          <a:p>
+            <a:pPr>
+              <a:spcAft>
+                <a:spcPts val="800"/>
+              </a:spcAft>
+            </a:pPr>
+            <a:r>
+              <a:rPr sz="2000" b="0" i="0">
+                <a:solidFill>
+                  <a:srgbClr val="333333"/>
+                </a:solidFill>
+                <a:latin typeface="Calibri"/>
+              </a:rPr>
+              <a:t>–   Es la operación de la que sale la mayoría de las innovaciones incrementales reales. </a:t>
+            </a:r>
             <a:r>
               <a:rPr sz="2000" b="1" i="0">
                 <a:solidFill>
-                  <a:srgbClr val="269CCB"/>
-                </a:solidFill>
-                <a:latin typeface="Calibri"/>
-              </a:rPr>
-              <a:t>Nadie parte de cero: lo que se cita se puede abrir, y lo que se mejora se puede señalar</a:t>
+                  <a:srgbClr val="333333"/>
+                </a:solidFill>
+                <a:latin typeface="Calibri"/>
+              </a:rPr>
+              <a:t>INVERTIR</a:t>
+            </a:r>
+            <a:r>
+              <a:rPr sz="2000" b="0" i="0">
+                <a:solidFill>
+                  <a:srgbClr val="333333"/>
+                </a:solidFill>
+                <a:latin typeface="Calibri"/>
+              </a:rPr>
+              <a:t> es dar vuelta a quién hace el trabajo o cuándo se hace: que el usuario consulte en vez de que alguien responda —que es exactamente la decisión de la sesión 8—, que el dato se cargue al cerrar y no en el momento de atender.</a:t>
+            </a:r>
+          </a:p>
+          <a:p>
+            <a:pPr>
+              <a:spcAft>
+                <a:spcPts val="800"/>
+              </a:spcAft>
+            </a:pPr>
+            <a:r>
+              <a:rPr sz="2000" b="0" i="0">
+                <a:solidFill>
+                  <a:srgbClr val="333333"/>
+                </a:solidFill>
+                <a:latin typeface="Calibri"/>
+              </a:rPr>
+              <a:t>–   Invertir suele resolver restricciones de personal, que son las más duras y las que menos se pueden comprar. </a:t>
+            </a:r>
+            <a:r>
+              <a:rPr sz="2000" b="1" i="0">
+                <a:solidFill>
+                  <a:srgbClr val="333333"/>
+                </a:solidFill>
+                <a:latin typeface="Calibri"/>
+              </a:rPr>
+              <a:t>ADAPTAR DE OTRO DOMINIO</a:t>
+            </a:r>
+            <a:r>
+              <a:rPr sz="2000" b="0" i="0">
+                <a:solidFill>
+                  <a:srgbClr val="333333"/>
+                </a:solidFill>
+                <a:latin typeface="Calibri"/>
+              </a:rPr>
+              <a:t> es traer una solución que ya funciona en otro campo.</a:t>
+            </a:r>
+          </a:p>
+          <a:p>
+            <a:pPr>
+              <a:spcAft>
+                <a:spcPts val="800"/>
+              </a:spcAft>
+            </a:pPr>
+            <a:r>
+              <a:rPr sz="2000" b="0" i="0">
+                <a:solidFill>
+                  <a:srgbClr val="333333"/>
+                </a:solidFill>
+                <a:latin typeface="Calibri"/>
+              </a:rPr>
+              <a:t>–   El ejemplo que conviene dar porque desbloquea a todos los equipos: *la disponibilidad de un libro y la disponibilidad de una mesa en un restaurante son el mismo problema*.</a:t>
+            </a:r>
+          </a:p>
+          <a:p>
+            <a:pPr>
+              <a:spcAft>
+                <a:spcPts val="800"/>
+              </a:spcAft>
+            </a:pPr>
+            <a:r>
+              <a:rPr sz="2000" b="0" i="0">
+                <a:solidFill>
+                  <a:srgbClr val="333333"/>
+                </a:solidFill>
+                <a:latin typeface="Calibri"/>
+              </a:rPr>
+              <a:t>–   Si un equipo se queda sin ideas, la pregunta que hay que hacerle es «¿qué otro negocio tiene este mismo problema y cómo lo resolvió?».</a:t>
+            </a:r>
+          </a:p>
+        </p:txBody>
+      </p:sp>
+      <p:sp>
+        <p:nvSpPr>
+          <p:cNvPr id="6" name="TextBox 5"/>
+          <p:cNvSpPr txBox="1"/>
+          <p:nvPr/>
+        </p:nvSpPr>
+        <p:spPr>
+          <a:xfrm>
+            <a:off x="11185855" y="6473952"/>
+            <a:ext cx="640080" cy="274320"/>
+          </a:xfrm>
+          <a:prstGeom prst="rect">
+            <a:avLst/>
+          </a:prstGeom>
+          <a:noFill/>
+        </p:spPr>
+        <p:txBody>
+          <a:bodyPr wrap="square">
+            <a:spAutoFit/>
+          </a:bodyPr>
+          <a:lstStyle/>
+          <a:p>
+            <a:pPr algn="r"/>
+            <a:r>
+              <a:rPr sz="1100" b="0" i="0">
+                <a:solidFill>
+                  <a:srgbClr val="666666"/>
+                </a:solidFill>
+                <a:latin typeface="Calibri"/>
+              </a:rPr>
+              <a:t>14</a:t>
+            </a:r>
+          </a:p>
+        </p:txBody>
+      </p:sp>
+    </p:spTree>
+  </p:cSld>
+  <p:clrMapOvr>
+    <a:masterClrMapping/>
+  </p:clrMapOvr>
+</p:sld>
+</file>
+
+<file path=ppt/slides/slide15.xml><?xml version="1.0" encoding="utf-8"?>
+<p:sld xmlns:a="http://schemas.openxmlformats.org/drawingml/2006/main" xmlns:p="http://schemas.openxmlformats.org/presentationml/2006/main" xmlns:r="http://schemas.openxmlformats.org/officeDocument/2006/relationships">
+  <p:cSld>
+    <p:bg>
+      <p:bgPr>
+        <a:solidFill>
+          <a:srgbClr val="FFFFFF"/>
+        </a:solidFill>
+        <a:effectLst/>
+      </p:bgPr>
+    </p:bg>
+    <p:spTree>
+      <p:nvGrpSpPr>
+        <p:cNvPr id="1" name=""/>
+        <p:cNvGrpSpPr/>
+        <p:nvPr/>
+      </p:nvGrpSpPr>
+      <p:grpSpPr/>
+      <p:sp>
+        <p:nvSpPr>
+          <p:cNvPr id="2" name="Rectangle 1"/>
+          <p:cNvSpPr/>
+          <p:nvPr/>
+        </p:nvSpPr>
+        <p:spPr>
+          <a:xfrm>
+            <a:off x="0" y="0"/>
+            <a:ext cx="12191695" cy="960120"/>
+          </a:xfrm>
+          <a:prstGeom prst="rect">
+            <a:avLst/>
+          </a:prstGeom>
+          <a:solidFill>
+            <a:srgbClr val="095292"/>
+          </a:solidFill>
+          <a:ln>
+            <a:noFill/>
+          </a:ln>
+        </p:spPr>
+        <p:style>
+          <a:lnRef idx="1">
+            <a:schemeClr val="accent1"/>
+          </a:lnRef>
+          <a:fillRef idx="3">
+            <a:schemeClr val="accent1"/>
+          </a:fillRef>
+          <a:effectRef idx="2">
+            <a:schemeClr val="accent1"/>
+          </a:effectRef>
+          <a:fontRef idx="minor">
+            <a:schemeClr val="lt1"/>
+          </a:fontRef>
+        </p:style>
+        <p:txBody>
+          <a:bodyPr rtlCol="0" anchor="ctr"/>
+          <a:lstStyle/>
+          <a:p>
+            <a:pPr algn="ctr"/>
+          </a:p>
+        </p:txBody>
+      </p:sp>
+      <p:sp>
+        <p:nvSpPr>
+          <p:cNvPr id="3" name="Rectangle 2"/>
+          <p:cNvSpPr/>
+          <p:nvPr/>
+        </p:nvSpPr>
+        <p:spPr>
+          <a:xfrm>
+            <a:off x="0" y="960120"/>
+            <a:ext cx="12191695" cy="41148"/>
+          </a:xfrm>
+          <a:prstGeom prst="rect">
+            <a:avLst/>
+          </a:prstGeom>
+          <a:solidFill>
+            <a:srgbClr val="FFD000"/>
+          </a:solidFill>
+          <a:ln>
+            <a:noFill/>
+          </a:ln>
+        </p:spPr>
+        <p:style>
+          <a:lnRef idx="1">
+            <a:schemeClr val="accent1"/>
+          </a:lnRef>
+          <a:fillRef idx="3">
+            <a:schemeClr val="accent1"/>
+          </a:fillRef>
+          <a:effectRef idx="2">
+            <a:schemeClr val="accent1"/>
+          </a:effectRef>
+          <a:fontRef idx="minor">
+            <a:schemeClr val="lt1"/>
+          </a:fontRef>
+        </p:style>
+        <p:txBody>
+          <a:bodyPr rtlCol="0" anchor="ctr"/>
+          <a:lstStyle/>
+          <a:p>
+            <a:pPr algn="ctr"/>
+          </a:p>
+        </p:txBody>
+      </p:sp>
+      <p:sp>
+        <p:nvSpPr>
+          <p:cNvPr id="4" name="TextBox 3"/>
+          <p:cNvSpPr txBox="1"/>
+          <p:nvPr/>
+        </p:nvSpPr>
+        <p:spPr>
+          <a:xfrm>
+            <a:off x="457200" y="164592"/>
+            <a:ext cx="11277295" cy="502920"/>
+          </a:xfrm>
+          <a:prstGeom prst="rect">
+            <a:avLst/>
+          </a:prstGeom>
+          <a:noFill/>
+        </p:spPr>
+        <p:txBody>
+          <a:bodyPr wrap="square">
+            <a:spAutoFit/>
+          </a:bodyPr>
+          <a:lstStyle/>
+          <a:p>
+            <a:r>
+              <a:rPr sz="2600" b="1" i="0">
+                <a:solidFill>
+                  <a:srgbClr val="FFFFFF"/>
+                </a:solidFill>
+                <a:latin typeface="Calibri"/>
+              </a:rPr>
+              <a:t>Buscar: la pregunta de búsqueda y los cinco pasos (1/2)</a:t>
+            </a:r>
+          </a:p>
+        </p:txBody>
+      </p:sp>
+      <p:sp>
+        <p:nvSpPr>
+          <p:cNvPr id="5" name="TextBox 4"/>
+          <p:cNvSpPr txBox="1"/>
+          <p:nvPr/>
+        </p:nvSpPr>
+        <p:spPr>
+          <a:xfrm>
+            <a:off x="457200" y="1170432"/>
+            <a:ext cx="11277295" cy="5230368"/>
+          </a:xfrm>
+          <a:prstGeom prst="rect">
+            <a:avLst/>
+          </a:prstGeom>
+          <a:noFill/>
+        </p:spPr>
+        <p:txBody>
+          <a:bodyPr wrap="square">
+            <a:spAutoFit/>
+          </a:bodyPr>
+          <a:lstStyle/>
+          <a:p>
+            <a:pPr>
+              <a:spcAft>
+                <a:spcPts val="800"/>
+              </a:spcAft>
+            </a:pPr>
+            <a:r>
+              <a:rPr sz="2000" b="0" i="0">
+                <a:solidFill>
+                  <a:srgbClr val="333333"/>
+                </a:solidFill>
+                <a:latin typeface="Calibri"/>
+              </a:rPr>
+              <a:t>–   El paso que casi nadie hace es el primero, y es el que ahorra las tres horas perdidas: </a:t>
+            </a:r>
+            <a:r>
+              <a:rPr sz="2000" b="1" i="0">
+                <a:solidFill>
+                  <a:srgbClr val="333333"/>
+                </a:solidFill>
+                <a:latin typeface="Calibri"/>
+              </a:rPr>
+              <a:t>escribir la pregunta de búsqueda antes de buscar</a:t>
+            </a:r>
+            <a:r>
+              <a:rPr sz="2000" b="0" i="0">
+                <a:solidFill>
+                  <a:srgbClr val="333333"/>
+                </a:solidFill>
+                <a:latin typeface="Calibri"/>
+              </a:rPr>
+              <a:t>.</a:t>
+            </a:r>
+          </a:p>
+          <a:p>
+            <a:pPr>
+              <a:spcAft>
+                <a:spcPts val="800"/>
+              </a:spcAft>
+            </a:pPr>
+            <a:r>
+              <a:rPr sz="2000" b="0" i="0">
+                <a:solidFill>
+                  <a:srgbClr val="333333"/>
+                </a:solidFill>
+                <a:latin typeface="Calibri"/>
+              </a:rPr>
+              <a:t>–   No una palabra —«bibliotecas»— sino una pregunta: *¿cómo publican su disponibilidad las bibliotecas pequeñas que no tienen sistema?* Sin pregunta la búsqueda no tiene final</a:t>
+            </a:r>
+          </a:p>
+          <a:p>
+            <a:pPr>
+              <a:spcAft>
+                <a:spcPts val="800"/>
+              </a:spcAft>
+            </a:pPr>
+            <a:r>
+              <a:rPr sz="2000" b="0" i="0">
+                <a:solidFill>
+                  <a:srgbClr val="333333"/>
+                </a:solidFill>
+                <a:latin typeface="Calibri"/>
+              </a:rPr>
+              <a:t>–   Porque nada permite decidir si un resultado sirve o no. </a:t>
+            </a:r>
+            <a:r>
+              <a:rPr sz="2000" b="1" i="0">
+                <a:solidFill>
+                  <a:srgbClr val="333333"/>
+                </a:solidFill>
+                <a:latin typeface="Calibri"/>
+              </a:rPr>
+              <a:t>Traducir a términos de búsqueda</a:t>
+            </a:r>
+            <a:r>
+              <a:rPr sz="2000" b="0" i="0">
+                <a:solidFill>
+                  <a:srgbClr val="333333"/>
+                </a:solidFill>
+                <a:latin typeface="Calibri"/>
+              </a:rPr>
+              <a:t> es el paso técnico: dos o tres versiones del mismo concepto —el término técnico, el término común y el término en inglés—.</a:t>
+            </a:r>
+          </a:p>
+          <a:p>
+            <a:pPr>
+              <a:spcAft>
+                <a:spcPts val="800"/>
+              </a:spcAft>
+            </a:pPr>
+            <a:r>
+              <a:rPr sz="2000" b="0" i="0">
+                <a:solidFill>
+                  <a:srgbClr val="333333"/>
+                </a:solidFill>
+                <a:latin typeface="Calibri"/>
+              </a:rPr>
+              <a:t>–   El navegador traduce; la falta de resultados no. </a:t>
+            </a:r>
+            <a:r>
+              <a:rPr sz="2000" b="1" i="0">
+                <a:solidFill>
+                  <a:srgbClr val="333333"/>
+                </a:solidFill>
+                <a:latin typeface="Calibri"/>
+              </a:rPr>
+              <a:t>Buscar en más de un sitio</a:t>
+            </a:r>
+            <a:r>
+              <a:rPr sz="2000" b="0" i="0">
+                <a:solidFill>
+                  <a:srgbClr val="333333"/>
+                </a:solidFill>
+                <a:latin typeface="Calibri"/>
+              </a:rPr>
+              <a:t> es donde la mayoría falla por comodidad: un buscador general, un buscador académico, un repositorio institucional y las normas oficiales.</a:t>
+            </a:r>
+          </a:p>
+          <a:p>
+            <a:pPr>
+              <a:spcAft>
+                <a:spcPts val="800"/>
+              </a:spcAft>
+            </a:pPr>
+            <a:r>
+              <a:rPr sz="2000" b="0" i="0">
+                <a:solidFill>
+                  <a:srgbClr val="333333"/>
+                </a:solidFill>
+                <a:latin typeface="Calibri"/>
+              </a:rPr>
+              <a:t>–   Cada uno devuelve un tipo distinto de cosa y ninguno cubre a los otros. </a:t>
+            </a:r>
+            <a:r>
+              <a:rPr sz="2000" b="1" i="0">
+                <a:solidFill>
+                  <a:srgbClr val="333333"/>
+                </a:solidFill>
+                <a:latin typeface="Calibri"/>
+              </a:rPr>
+              <a:t>Filtrar por calidad y no por posición</a:t>
+            </a:r>
+            <a:r>
+              <a:rPr sz="2000" b="0" i="0">
+                <a:solidFill>
+                  <a:srgbClr val="333333"/>
+                </a:solidFill>
+                <a:latin typeface="Calibri"/>
+              </a:rPr>
+              <a:t> es el criterio que hay que dejar instalado para toda la carrera: el primer resultado es el mejor posicionado, que no es lo mismo que el mejor.</a:t>
+            </a:r>
+          </a:p>
+        </p:txBody>
+      </p:sp>
+      <p:sp>
+        <p:nvSpPr>
+          <p:cNvPr id="6" name="TextBox 5"/>
+          <p:cNvSpPr txBox="1"/>
+          <p:nvPr/>
+        </p:nvSpPr>
+        <p:spPr>
+          <a:xfrm>
+            <a:off x="11185855" y="6473952"/>
+            <a:ext cx="640080" cy="274320"/>
+          </a:xfrm>
+          <a:prstGeom prst="rect">
+            <a:avLst/>
+          </a:prstGeom>
+          <a:noFill/>
+        </p:spPr>
+        <p:txBody>
+          <a:bodyPr wrap="square">
+            <a:spAutoFit/>
+          </a:bodyPr>
+          <a:lstStyle/>
+          <a:p>
+            <a:pPr algn="r"/>
+            <a:r>
+              <a:rPr sz="1100" b="0" i="0">
+                <a:solidFill>
+                  <a:srgbClr val="666666"/>
+                </a:solidFill>
+                <a:latin typeface="Calibri"/>
+              </a:rPr>
+              <a:t>15</a:t>
+            </a:r>
+          </a:p>
+        </p:txBody>
+      </p:sp>
+    </p:spTree>
+  </p:cSld>
+  <p:clrMapOvr>
+    <a:masterClrMapping/>
+  </p:clrMapOvr>
+</p:sld>
+</file>
+
+<file path=ppt/slides/slide16.xml><?xml version="1.0" encoding="utf-8"?>
+<p:sld xmlns:a="http://schemas.openxmlformats.org/drawingml/2006/main" xmlns:p="http://schemas.openxmlformats.org/presentationml/2006/main" xmlns:r="http://schemas.openxmlformats.org/officeDocument/2006/relationships">
+  <p:cSld>
+    <p:bg>
+      <p:bgPr>
+        <a:solidFill>
+          <a:srgbClr val="FFFFFF"/>
+        </a:solidFill>
+        <a:effectLst/>
+      </p:bgPr>
+    </p:bg>
+    <p:spTree>
+      <p:nvGrpSpPr>
+        <p:cNvPr id="1" name=""/>
+        <p:cNvGrpSpPr/>
+        <p:nvPr/>
+      </p:nvGrpSpPr>
+      <p:grpSpPr/>
+      <p:sp>
+        <p:nvSpPr>
+          <p:cNvPr id="2" name="Rectangle 1"/>
+          <p:cNvSpPr/>
+          <p:nvPr/>
+        </p:nvSpPr>
+        <p:spPr>
+          <a:xfrm>
+            <a:off x="0" y="0"/>
+            <a:ext cx="12191695" cy="960120"/>
+          </a:xfrm>
+          <a:prstGeom prst="rect">
+            <a:avLst/>
+          </a:prstGeom>
+          <a:solidFill>
+            <a:srgbClr val="095292"/>
+          </a:solidFill>
+          <a:ln>
+            <a:noFill/>
+          </a:ln>
+        </p:spPr>
+        <p:style>
+          <a:lnRef idx="1">
+            <a:schemeClr val="accent1"/>
+          </a:lnRef>
+          <a:fillRef idx="3">
+            <a:schemeClr val="accent1"/>
+          </a:fillRef>
+          <a:effectRef idx="2">
+            <a:schemeClr val="accent1"/>
+          </a:effectRef>
+          <a:fontRef idx="minor">
+            <a:schemeClr val="lt1"/>
+          </a:fontRef>
+        </p:style>
+        <p:txBody>
+          <a:bodyPr rtlCol="0" anchor="ctr"/>
+          <a:lstStyle/>
+          <a:p>
+            <a:pPr algn="ctr"/>
+          </a:p>
+        </p:txBody>
+      </p:sp>
+      <p:sp>
+        <p:nvSpPr>
+          <p:cNvPr id="3" name="Rectangle 2"/>
+          <p:cNvSpPr/>
+          <p:nvPr/>
+        </p:nvSpPr>
+        <p:spPr>
+          <a:xfrm>
+            <a:off x="0" y="960120"/>
+            <a:ext cx="12191695" cy="41148"/>
+          </a:xfrm>
+          <a:prstGeom prst="rect">
+            <a:avLst/>
+          </a:prstGeom>
+          <a:solidFill>
+            <a:srgbClr val="FFD000"/>
+          </a:solidFill>
+          <a:ln>
+            <a:noFill/>
+          </a:ln>
+        </p:spPr>
+        <p:style>
+          <a:lnRef idx="1">
+            <a:schemeClr val="accent1"/>
+          </a:lnRef>
+          <a:fillRef idx="3">
+            <a:schemeClr val="accent1"/>
+          </a:fillRef>
+          <a:effectRef idx="2">
+            <a:schemeClr val="accent1"/>
+          </a:effectRef>
+          <a:fontRef idx="minor">
+            <a:schemeClr val="lt1"/>
+          </a:fontRef>
+        </p:style>
+        <p:txBody>
+          <a:bodyPr rtlCol="0" anchor="ctr"/>
+          <a:lstStyle/>
+          <a:p>
+            <a:pPr algn="ctr"/>
+          </a:p>
+        </p:txBody>
+      </p:sp>
+      <p:sp>
+        <p:nvSpPr>
+          <p:cNvPr id="4" name="TextBox 3"/>
+          <p:cNvSpPr txBox="1"/>
+          <p:nvPr/>
+        </p:nvSpPr>
+        <p:spPr>
+          <a:xfrm>
+            <a:off x="457200" y="164592"/>
+            <a:ext cx="11277295" cy="502920"/>
+          </a:xfrm>
+          <a:prstGeom prst="rect">
+            <a:avLst/>
+          </a:prstGeom>
+          <a:noFill/>
+        </p:spPr>
+        <p:txBody>
+          <a:bodyPr wrap="square">
+            <a:spAutoFit/>
+          </a:bodyPr>
+          <a:lstStyle/>
+          <a:p>
+            <a:r>
+              <a:rPr sz="2600" b="1" i="0">
+                <a:solidFill>
+                  <a:srgbClr val="FFFFFF"/>
+                </a:solidFill>
+                <a:latin typeface="Calibri"/>
+              </a:rPr>
+              <a:t>Buscar: la pregunta de búsqueda y los cinco pasos (2/2)</a:t>
+            </a:r>
+          </a:p>
+        </p:txBody>
+      </p:sp>
+      <p:sp>
+        <p:nvSpPr>
+          <p:cNvPr id="5" name="TextBox 4"/>
+          <p:cNvSpPr txBox="1"/>
+          <p:nvPr/>
+        </p:nvSpPr>
+        <p:spPr>
+          <a:xfrm>
+            <a:off x="457200" y="1170432"/>
+            <a:ext cx="11277295" cy="5230368"/>
+          </a:xfrm>
+          <a:prstGeom prst="rect">
+            <a:avLst/>
+          </a:prstGeom>
+          <a:noFill/>
+        </p:spPr>
+        <p:txBody>
+          <a:bodyPr wrap="square">
+            <a:spAutoFit/>
+          </a:bodyPr>
+          <a:lstStyle/>
+          <a:p>
+            <a:pPr>
+              <a:spcAft>
+                <a:spcPts val="800"/>
+              </a:spcAft>
+            </a:pPr>
+            <a:r>
+              <a:rPr sz="2000" b="0" i="0">
+                <a:solidFill>
+                  <a:srgbClr val="333333"/>
+                </a:solidFill>
+                <a:latin typeface="Calibri"/>
+              </a:rPr>
+              <a:t>–   Cuatro preguntas rápidas bastan: quién lo escribe —hay un autor o una institución responsable—, de qué año es, dónde se publicó, y si se puede verificar abriendo el documento. </a:t>
+            </a:r>
+            <a:r>
+              <a:rPr sz="2000" b="1" i="0">
+                <a:solidFill>
+                  <a:srgbClr val="333333"/>
+                </a:solidFill>
+                <a:latin typeface="Calibri"/>
+              </a:rPr>
+              <a:t>Fichar mientras se lee</a:t>
+            </a:r>
+            <a:r>
+              <a:rPr sz="2000" b="0" i="0">
+                <a:solidFill>
+                  <a:srgbClr val="333333"/>
+                </a:solidFill>
+                <a:latin typeface="Calibri"/>
+              </a:rPr>
+              <a:t> cierra el método.</a:t>
+            </a:r>
+          </a:p>
+          <a:p>
+            <a:pPr>
+              <a:spcAft>
+                <a:spcPts val="800"/>
+              </a:spcAft>
+            </a:pPr>
+            <a:r>
+              <a:rPr sz="2000" b="0" i="0">
+                <a:solidFill>
+                  <a:srgbClr val="333333"/>
+                </a:solidFill>
+                <a:latin typeface="Calibri"/>
+              </a:rPr>
+              <a:t>–   La ficha del curso tiene seis campos: autor o responsable, año, dónde, qué hace, </a:t>
+            </a:r>
+            <a:r>
+              <a:rPr sz="2000" b="1" i="0">
+                <a:solidFill>
+                  <a:srgbClr val="333333"/>
+                </a:solidFill>
+                <a:latin typeface="Calibri"/>
+              </a:rPr>
+              <a:t>qué le falta para nuestro caso</a:t>
+            </a:r>
+            <a:r>
+              <a:rPr sz="2000" b="0" i="0">
+                <a:solidFill>
+                  <a:srgbClr val="333333"/>
+                </a:solidFill>
+                <a:latin typeface="Calibri"/>
+              </a:rPr>
+              <a:t>, y el enlace.</a:t>
+            </a:r>
+          </a:p>
+          <a:p>
+            <a:pPr>
+              <a:spcAft>
+                <a:spcPts val="800"/>
+              </a:spcAft>
+            </a:pPr>
+            <a:r>
+              <a:rPr sz="2000" b="0" i="0">
+                <a:solidFill>
+                  <a:srgbClr val="333333"/>
+                </a:solidFill>
+                <a:latin typeface="Calibri"/>
+              </a:rPr>
+              <a:t>–   El quinto campo es el que convierte una bibliografía en un insumo de diseño: es la brecha donde va a entrar su propuesta de mejora, y es lo que se califica más alto en el taller.</a:t>
+            </a:r>
+          </a:p>
+        </p:txBody>
+      </p:sp>
+      <p:sp>
+        <p:nvSpPr>
+          <p:cNvPr id="6" name="TextBox 5"/>
+          <p:cNvSpPr txBox="1"/>
+          <p:nvPr/>
+        </p:nvSpPr>
+        <p:spPr>
+          <a:xfrm>
+            <a:off x="11185855" y="6473952"/>
+            <a:ext cx="640080" cy="274320"/>
+          </a:xfrm>
+          <a:prstGeom prst="rect">
+            <a:avLst/>
+          </a:prstGeom>
+          <a:noFill/>
+        </p:spPr>
+        <p:txBody>
+          <a:bodyPr wrap="square">
+            <a:spAutoFit/>
+          </a:bodyPr>
+          <a:lstStyle/>
+          <a:p>
+            <a:pPr algn="r"/>
+            <a:r>
+              <a:rPr sz="1100" b="0" i="0">
+                <a:solidFill>
+                  <a:srgbClr val="666666"/>
+                </a:solidFill>
+                <a:latin typeface="Calibri"/>
+              </a:rPr>
+              <a:t>16</a:t>
+            </a:r>
+          </a:p>
+        </p:txBody>
+      </p:sp>
+    </p:spTree>
+  </p:cSld>
+  <p:clrMapOvr>
+    <a:masterClrMapping/>
+  </p:clrMapOvr>
+</p:sld>
+</file>
+
+<file path=ppt/slides/slide17.xml><?xml version="1.0" encoding="utf-8"?>
+<p:sld xmlns:a="http://schemas.openxmlformats.org/drawingml/2006/main" xmlns:p="http://schemas.openxmlformats.org/presentationml/2006/main" xmlns:r="http://schemas.openxmlformats.org/officeDocument/2006/relationships">
+  <p:cSld>
+    <p:bg>
+      <p:bgPr>
+        <a:solidFill>
+          <a:srgbClr val="FFFFFF"/>
+        </a:solidFill>
+        <a:effectLst/>
+      </p:bgPr>
+    </p:bg>
+    <p:spTree>
+      <p:nvGrpSpPr>
+        <p:cNvPr id="1" name=""/>
+        <p:cNvGrpSpPr/>
+        <p:nvPr/>
+      </p:nvGrpSpPr>
+      <p:grpSpPr/>
+      <p:sp>
+        <p:nvSpPr>
+          <p:cNvPr id="2" name="Rectangle 1"/>
+          <p:cNvSpPr/>
+          <p:nvPr/>
+        </p:nvSpPr>
+        <p:spPr>
+          <a:xfrm>
+            <a:off x="0" y="0"/>
+            <a:ext cx="12191695" cy="960120"/>
+          </a:xfrm>
+          <a:prstGeom prst="rect">
+            <a:avLst/>
+          </a:prstGeom>
+          <a:solidFill>
+            <a:srgbClr val="095292"/>
+          </a:solidFill>
+          <a:ln>
+            <a:noFill/>
+          </a:ln>
+        </p:spPr>
+        <p:style>
+          <a:lnRef idx="1">
+            <a:schemeClr val="accent1"/>
+          </a:lnRef>
+          <a:fillRef idx="3">
+            <a:schemeClr val="accent1"/>
+          </a:fillRef>
+          <a:effectRef idx="2">
+            <a:schemeClr val="accent1"/>
+          </a:effectRef>
+          <a:fontRef idx="minor">
+            <a:schemeClr val="lt1"/>
+          </a:fontRef>
+        </p:style>
+        <p:txBody>
+          <a:bodyPr rtlCol="0" anchor="ctr"/>
+          <a:lstStyle/>
+          <a:p>
+            <a:pPr algn="ctr"/>
+          </a:p>
+        </p:txBody>
+      </p:sp>
+      <p:sp>
+        <p:nvSpPr>
+          <p:cNvPr id="3" name="Rectangle 2"/>
+          <p:cNvSpPr/>
+          <p:nvPr/>
+        </p:nvSpPr>
+        <p:spPr>
+          <a:xfrm>
+            <a:off x="0" y="960120"/>
+            <a:ext cx="12191695" cy="41148"/>
+          </a:xfrm>
+          <a:prstGeom prst="rect">
+            <a:avLst/>
+          </a:prstGeom>
+          <a:solidFill>
+            <a:srgbClr val="FFD000"/>
+          </a:solidFill>
+          <a:ln>
+            <a:noFill/>
+          </a:ln>
+        </p:spPr>
+        <p:style>
+          <a:lnRef idx="1">
+            <a:schemeClr val="accent1"/>
+          </a:lnRef>
+          <a:fillRef idx="3">
+            <a:schemeClr val="accent1"/>
+          </a:fillRef>
+          <a:effectRef idx="2">
+            <a:schemeClr val="accent1"/>
+          </a:effectRef>
+          <a:fontRef idx="minor">
+            <a:schemeClr val="lt1"/>
+          </a:fontRef>
+        </p:style>
+        <p:txBody>
+          <a:bodyPr rtlCol="0" anchor="ctr"/>
+          <a:lstStyle/>
+          <a:p>
+            <a:pPr algn="ctr"/>
+          </a:p>
+        </p:txBody>
+      </p:sp>
+      <p:sp>
+        <p:nvSpPr>
+          <p:cNvPr id="4" name="TextBox 3"/>
+          <p:cNvSpPr txBox="1"/>
+          <p:nvPr/>
+        </p:nvSpPr>
+        <p:spPr>
+          <a:xfrm>
+            <a:off x="457200" y="164592"/>
+            <a:ext cx="11277295" cy="502920"/>
+          </a:xfrm>
+          <a:prstGeom prst="rect">
+            <a:avLst/>
+          </a:prstGeom>
+          <a:noFill/>
+        </p:spPr>
+        <p:txBody>
+          <a:bodyPr wrap="square">
+            <a:spAutoFit/>
+          </a:bodyPr>
+          <a:lstStyle/>
+          <a:p>
+            <a:r>
+              <a:rPr sz="2600" b="1" i="0">
+                <a:solidFill>
+                  <a:srgbClr val="FFFFFF"/>
+                </a:solidFill>
+                <a:latin typeface="Calibri"/>
+              </a:rPr>
+              <a:t>Calidad de las fuentes, la IA y qué hacer cuando no se encuentra nada (1/3)</a:t>
+            </a:r>
+          </a:p>
+        </p:txBody>
+      </p:sp>
+      <p:sp>
+        <p:nvSpPr>
+          <p:cNvPr id="5" name="TextBox 4"/>
+          <p:cNvSpPr txBox="1"/>
+          <p:nvPr/>
+        </p:nvSpPr>
+        <p:spPr>
+          <a:xfrm>
+            <a:off x="457200" y="1170432"/>
+            <a:ext cx="11277295" cy="5230368"/>
+          </a:xfrm>
+          <a:prstGeom prst="rect">
+            <a:avLst/>
+          </a:prstGeom>
+          <a:noFill/>
+        </p:spPr>
+        <p:txBody>
+          <a:bodyPr wrap="square">
+            <a:spAutoFit/>
+          </a:bodyPr>
+          <a:lstStyle/>
+          <a:p>
+            <a:pPr>
+              <a:spcAft>
+                <a:spcPts val="800"/>
+              </a:spcAft>
+            </a:pPr>
+            <a:r>
+              <a:rPr sz="2000" b="0" i="0">
+                <a:solidFill>
+                  <a:srgbClr val="333333"/>
+                </a:solidFill>
+                <a:latin typeface="Calibri"/>
+              </a:rPr>
+              <a:t>–   La tabla de sitios hay que recorrerla rápido y con un consejo práctico por fila.</a:t>
+            </a:r>
+          </a:p>
+          <a:p>
+            <a:pPr>
+              <a:spcAft>
+                <a:spcPts val="800"/>
+              </a:spcAft>
+            </a:pPr>
+            <a:r>
+              <a:rPr sz="2000" b="0" i="0">
+                <a:solidFill>
+                  <a:srgbClr val="333333"/>
+                </a:solidFill>
+                <a:latin typeface="Calibri"/>
+              </a:rPr>
+              <a:t>–   El más valioso: </a:t>
+            </a:r>
+            <a:r>
+              <a:rPr sz="2000" b="1" i="0">
+                <a:solidFill>
+                  <a:srgbClr val="333333"/>
+                </a:solidFill>
+                <a:latin typeface="Calibri"/>
+              </a:rPr>
+              <a:t>cuando un artículo académico está de pago, busque el PDF en el repositorio institucional de la universidad del autor</a:t>
+            </a:r>
+            <a:r>
+              <a:rPr sz="2000" b="0" i="0">
+                <a:solidFill>
+                  <a:srgbClr val="333333"/>
+                </a:solidFill>
+                <a:latin typeface="Calibri"/>
+              </a:rPr>
+              <a:t>; una parte grande está disponible de manera libre y legal.</a:t>
+            </a:r>
+          </a:p>
+          <a:p>
+            <a:pPr>
+              <a:spcAft>
+                <a:spcPts val="800"/>
+              </a:spcAft>
+            </a:pPr>
+            <a:r>
+              <a:rPr sz="2000" b="0" i="0">
+                <a:solidFill>
+                  <a:srgbClr val="333333"/>
+                </a:solidFill>
+                <a:latin typeface="Calibri"/>
+              </a:rPr>
+              <a:t>–   Esto le resuelve a un estudiante de primer semestre el muro más desmoralizante de la búsqueda académica.</a:t>
+            </a:r>
+          </a:p>
+          <a:p>
+            <a:pPr>
+              <a:spcAft>
+                <a:spcPts val="800"/>
+              </a:spcAft>
+            </a:pPr>
+            <a:r>
+              <a:rPr sz="2000" b="0" i="0">
+                <a:solidFill>
+                  <a:srgbClr val="333333"/>
+                </a:solidFill>
+                <a:latin typeface="Calibri"/>
+              </a:rPr>
+              <a:t>–   Los </a:t>
+            </a:r>
+            <a:r>
+              <a:rPr sz="2000" b="1" i="0">
+                <a:solidFill>
+                  <a:srgbClr val="333333"/>
+                </a:solidFill>
+                <a:latin typeface="Calibri"/>
+              </a:rPr>
+              <a:t>repositorios institucionales</a:t>
+            </a:r>
+            <a:r>
+              <a:rPr sz="2000" b="0" i="0">
+                <a:solidFill>
+                  <a:srgbClr val="333333"/>
+                </a:solidFill>
+                <a:latin typeface="Calibri"/>
+              </a:rPr>
+              <a:t> merecen un énfasis especial en este curso: son la mejor fuente para problemas de contexto colombiano, porque las tesis y trabajos de grado suelen atacar exactamente el tipo de problema local que ellos eligieron.</a:t>
+            </a:r>
+          </a:p>
+          <a:p>
+            <a:pPr>
+              <a:spcAft>
+                <a:spcPts val="800"/>
+              </a:spcAft>
+            </a:pPr>
+            <a:r>
+              <a:rPr sz="2000" b="0" i="0">
+                <a:solidFill>
+                  <a:srgbClr val="333333"/>
+                </a:solidFill>
+                <a:latin typeface="Calibri"/>
+              </a:rPr>
+              <a:t>–   Y los </a:t>
+            </a:r>
+            <a:r>
+              <a:rPr sz="2000" b="1" i="0">
+                <a:solidFill>
+                  <a:srgbClr val="333333"/>
+                </a:solidFill>
+                <a:latin typeface="Calibri"/>
+              </a:rPr>
+              <a:t>sitios oficiales y las normas</a:t>
+            </a:r>
+            <a:r>
+              <a:rPr sz="2000" b="0" i="0">
+                <a:solidFill>
+                  <a:srgbClr val="333333"/>
+                </a:solidFill>
+                <a:latin typeface="Calibri"/>
+              </a:rPr>
+              <a:t> son fuente primaria: se cita el documento, no la noticia que lo comenta</a:t>
+            </a:r>
+          </a:p>
+          <a:p>
+            <a:pPr>
+              <a:spcAft>
+                <a:spcPts val="800"/>
+              </a:spcAft>
+            </a:pPr>
+            <a:r>
+              <a:rPr sz="2000" b="0" i="0">
+                <a:solidFill>
+                  <a:srgbClr val="333333"/>
+                </a:solidFill>
+                <a:latin typeface="Calibri"/>
+              </a:rPr>
+              <a:t>–   Que es la misma regla que ya practicaron en la sesión 4 con los numerales y en la sesión 5 con las cifras. </a:t>
+            </a:r>
+            <a:r>
+              <a:rPr sz="2000" b="1" i="0">
+                <a:solidFill>
+                  <a:srgbClr val="333333"/>
+                </a:solidFill>
+                <a:latin typeface="Calibri"/>
+              </a:rPr>
+              <a:t>El asistente de IA</a:t>
+            </a:r>
+            <a:r>
+              <a:rPr sz="2000" b="0" i="0">
+                <a:solidFill>
+                  <a:srgbClr val="333333"/>
+                </a:solidFill>
+                <a:latin typeface="Calibri"/>
+              </a:rPr>
+              <a:t> merece su propia fila y hay que ser preciso, porque este curso lo autoriza en dos sesiones y lo prohíbe en el resto.</a:t>
+            </a:r>
+          </a:p>
+        </p:txBody>
+      </p:sp>
+      <p:sp>
+        <p:nvSpPr>
+          <p:cNvPr id="6" name="TextBox 5"/>
+          <p:cNvSpPr txBox="1"/>
+          <p:nvPr/>
+        </p:nvSpPr>
+        <p:spPr>
+          <a:xfrm>
+            <a:off x="11185855" y="6473952"/>
+            <a:ext cx="640080" cy="274320"/>
+          </a:xfrm>
+          <a:prstGeom prst="rect">
+            <a:avLst/>
+          </a:prstGeom>
+          <a:noFill/>
+        </p:spPr>
+        <p:txBody>
+          <a:bodyPr wrap="square">
+            <a:spAutoFit/>
+          </a:bodyPr>
+          <a:lstStyle/>
+          <a:p>
+            <a:pPr algn="r"/>
+            <a:r>
+              <a:rPr sz="1100" b="0" i="0">
+                <a:solidFill>
+                  <a:srgbClr val="666666"/>
+                </a:solidFill>
+                <a:latin typeface="Calibri"/>
+              </a:rPr>
+              <a:t>17</a:t>
+            </a:r>
+          </a:p>
+        </p:txBody>
+      </p:sp>
+    </p:spTree>
+  </p:cSld>
+  <p:clrMapOvr>
+    <a:masterClrMapping/>
+  </p:clrMapOvr>
+</p:sld>
+</file>
+
+<file path=ppt/slides/slide18.xml><?xml version="1.0" encoding="utf-8"?>
+<p:sld xmlns:a="http://schemas.openxmlformats.org/drawingml/2006/main" xmlns:p="http://schemas.openxmlformats.org/presentationml/2006/main" xmlns:r="http://schemas.openxmlformats.org/officeDocument/2006/relationships">
+  <p:cSld>
+    <p:bg>
+      <p:bgPr>
+        <a:solidFill>
+          <a:srgbClr val="FFFFFF"/>
+        </a:solidFill>
+        <a:effectLst/>
+      </p:bgPr>
+    </p:bg>
+    <p:spTree>
+      <p:nvGrpSpPr>
+        <p:cNvPr id="1" name=""/>
+        <p:cNvGrpSpPr/>
+        <p:nvPr/>
+      </p:nvGrpSpPr>
+      <p:grpSpPr/>
+      <p:sp>
+        <p:nvSpPr>
+          <p:cNvPr id="2" name="Rectangle 1"/>
+          <p:cNvSpPr/>
+          <p:nvPr/>
+        </p:nvSpPr>
+        <p:spPr>
+          <a:xfrm>
+            <a:off x="0" y="0"/>
+            <a:ext cx="12191695" cy="960120"/>
+          </a:xfrm>
+          <a:prstGeom prst="rect">
+            <a:avLst/>
+          </a:prstGeom>
+          <a:solidFill>
+            <a:srgbClr val="095292"/>
+          </a:solidFill>
+          <a:ln>
+            <a:noFill/>
+          </a:ln>
+        </p:spPr>
+        <p:style>
+          <a:lnRef idx="1">
+            <a:schemeClr val="accent1"/>
+          </a:lnRef>
+          <a:fillRef idx="3">
+            <a:schemeClr val="accent1"/>
+          </a:fillRef>
+          <a:effectRef idx="2">
+            <a:schemeClr val="accent1"/>
+          </a:effectRef>
+          <a:fontRef idx="minor">
+            <a:schemeClr val="lt1"/>
+          </a:fontRef>
+        </p:style>
+        <p:txBody>
+          <a:bodyPr rtlCol="0" anchor="ctr"/>
+          <a:lstStyle/>
+          <a:p>
+            <a:pPr algn="ctr"/>
+          </a:p>
+        </p:txBody>
+      </p:sp>
+      <p:sp>
+        <p:nvSpPr>
+          <p:cNvPr id="3" name="Rectangle 2"/>
+          <p:cNvSpPr/>
+          <p:nvPr/>
+        </p:nvSpPr>
+        <p:spPr>
+          <a:xfrm>
+            <a:off x="0" y="960120"/>
+            <a:ext cx="12191695" cy="41148"/>
+          </a:xfrm>
+          <a:prstGeom prst="rect">
+            <a:avLst/>
+          </a:prstGeom>
+          <a:solidFill>
+            <a:srgbClr val="FFD000"/>
+          </a:solidFill>
+          <a:ln>
+            <a:noFill/>
+          </a:ln>
+        </p:spPr>
+        <p:style>
+          <a:lnRef idx="1">
+            <a:schemeClr val="accent1"/>
+          </a:lnRef>
+          <a:fillRef idx="3">
+            <a:schemeClr val="accent1"/>
+          </a:fillRef>
+          <a:effectRef idx="2">
+            <a:schemeClr val="accent1"/>
+          </a:effectRef>
+          <a:fontRef idx="minor">
+            <a:schemeClr val="lt1"/>
+          </a:fontRef>
+        </p:style>
+        <p:txBody>
+          <a:bodyPr rtlCol="0" anchor="ctr"/>
+          <a:lstStyle/>
+          <a:p>
+            <a:pPr algn="ctr"/>
+          </a:p>
+        </p:txBody>
+      </p:sp>
+      <p:sp>
+        <p:nvSpPr>
+          <p:cNvPr id="4" name="TextBox 3"/>
+          <p:cNvSpPr txBox="1"/>
+          <p:nvPr/>
+        </p:nvSpPr>
+        <p:spPr>
+          <a:xfrm>
+            <a:off x="457200" y="164592"/>
+            <a:ext cx="11277295" cy="502920"/>
+          </a:xfrm>
+          <a:prstGeom prst="rect">
+            <a:avLst/>
+          </a:prstGeom>
+          <a:noFill/>
+        </p:spPr>
+        <p:txBody>
+          <a:bodyPr wrap="square">
+            <a:spAutoFit/>
+          </a:bodyPr>
+          <a:lstStyle/>
+          <a:p>
+            <a:r>
+              <a:rPr sz="2600" b="1" i="0">
+                <a:solidFill>
+                  <a:srgbClr val="FFFFFF"/>
+                </a:solidFill>
+                <a:latin typeface="Calibri"/>
+              </a:rPr>
+              <a:t>Calidad de las fuentes, la IA y qué hacer cuando no se encuentra nada (2/3)</a:t>
+            </a:r>
+          </a:p>
+        </p:txBody>
+      </p:sp>
+      <p:sp>
+        <p:nvSpPr>
+          <p:cNvPr id="5" name="TextBox 4"/>
+          <p:cNvSpPr txBox="1"/>
+          <p:nvPr/>
+        </p:nvSpPr>
+        <p:spPr>
+          <a:xfrm>
+            <a:off x="457200" y="1170432"/>
+            <a:ext cx="11277295" cy="5230368"/>
+          </a:xfrm>
+          <a:prstGeom prst="rect">
+            <a:avLst/>
+          </a:prstGeom>
+          <a:noFill/>
+        </p:spPr>
+        <p:txBody>
+          <a:bodyPr wrap="square">
+            <a:spAutoFit/>
+          </a:bodyPr>
+          <a:lstStyle/>
+          <a:p>
+            <a:pPr>
+              <a:spcAft>
+                <a:spcPts val="800"/>
+              </a:spcAft>
+            </a:pPr>
+            <a:r>
+              <a:rPr sz="2000" b="0" i="0">
+                <a:solidFill>
+                  <a:srgbClr val="333333"/>
+                </a:solidFill>
+                <a:latin typeface="Calibri"/>
+              </a:rPr>
+              <a:t>–   Sirve para buscar —pistas, sinónimos, el término en inglés que uno no conoce— y </a:t>
+            </a:r>
+            <a:r>
+              <a:rPr sz="2000" b="1" i="0">
+                <a:solidFill>
+                  <a:srgbClr val="333333"/>
+                </a:solidFill>
+                <a:latin typeface="Calibri"/>
+              </a:rPr>
+              <a:t>no sirve para citar</a:t>
+            </a:r>
+            <a:r>
+              <a:rPr sz="2000" b="0" i="0">
+                <a:solidFill>
+                  <a:srgbClr val="333333"/>
+                </a:solidFill>
+                <a:latin typeface="Calibri"/>
+              </a:rPr>
+              <a:t>.</a:t>
+            </a:r>
+          </a:p>
+          <a:p>
+            <a:pPr>
+              <a:spcAft>
+                <a:spcPts val="800"/>
+              </a:spcAft>
+            </a:pPr>
+            <a:r>
+              <a:rPr sz="2000" b="0" i="0">
+                <a:solidFill>
+                  <a:srgbClr val="333333"/>
+                </a:solidFill>
+                <a:latin typeface="Calibri"/>
+              </a:rPr>
+              <a:t>–   La razón técnica hay que decirla explícitamente: un modelo de lenguaje genera texto plausible, y una referencia bibliográfica plausible tiene autor, título, revista y año con formato perfecto </a:t>
+            </a:r>
+            <a:r>
+              <a:rPr sz="2000" b="1" i="0">
+                <a:solidFill>
+                  <a:srgbClr val="333333"/>
+                </a:solidFill>
+                <a:latin typeface="Calibri"/>
+              </a:rPr>
+              <a:t>aunque no exista</a:t>
+            </a:r>
+            <a:r>
+              <a:rPr sz="2000" b="0" i="0">
+                <a:solidFill>
+                  <a:srgbClr val="333333"/>
+                </a:solidFill>
+                <a:latin typeface="Calibri"/>
+              </a:rPr>
+              <a:t>.</a:t>
+            </a:r>
+          </a:p>
+          <a:p>
+            <a:pPr>
+              <a:spcAft>
+                <a:spcPts val="800"/>
+              </a:spcAft>
+            </a:pPr>
+            <a:r>
+              <a:rPr sz="2000" b="0" i="0">
+                <a:solidFill>
+                  <a:srgbClr val="333333"/>
+                </a:solidFill>
+                <a:latin typeface="Calibri"/>
+              </a:rPr>
+              <a:t>–   Ha habido abogados sancionados por presentar ante un juez citas de jurisprudencia generadas así.</a:t>
+            </a:r>
+          </a:p>
+          <a:p>
+            <a:pPr>
+              <a:spcAft>
+                <a:spcPts val="800"/>
+              </a:spcAft>
+            </a:pPr>
+            <a:r>
+              <a:rPr sz="2000" b="0" i="0">
+                <a:solidFill>
+                  <a:srgbClr val="333333"/>
+                </a:solidFill>
+                <a:latin typeface="Calibri"/>
+              </a:rPr>
+              <a:t>–   La regla del curso es simple y verificable: **si no puede abrir el enlace y ver el documento</a:t>
+            </a:r>
+          </a:p>
+          <a:p>
+            <a:pPr>
+              <a:spcAft>
+                <a:spcPts val="800"/>
+              </a:spcAft>
+            </a:pPr>
+            <a:r>
+              <a:rPr sz="2000" b="0" i="0">
+                <a:solidFill>
+                  <a:srgbClr val="333333"/>
+                </a:solidFill>
+                <a:latin typeface="Calibri"/>
+              </a:rPr>
+              <a:t>–   No lo cite.</a:t>
+            </a:r>
+            <a:r>
+              <a:rPr sz="2000" b="1" i="0">
+                <a:solidFill>
+                  <a:srgbClr val="333333"/>
+                </a:solidFill>
+                <a:latin typeface="Calibri"/>
+              </a:rPr>
+              <a:t> Las tres reglas del cierre son las que definen la ética del trabajo académico en este curso. </a:t>
+            </a:r>
+            <a:r>
+              <a:rPr sz="2000" b="0" i="0">
+                <a:solidFill>
+                  <a:srgbClr val="333333"/>
+                </a:solidFill>
+                <a:latin typeface="Calibri"/>
+              </a:rPr>
+              <a:t>No inventar una cita ni copiar una que no se abrió** es la falta más grave</a:t>
+            </a:r>
+          </a:p>
+          <a:p>
+            <a:pPr>
+              <a:spcAft>
+                <a:spcPts val="800"/>
+              </a:spcAft>
+            </a:pPr>
+            <a:r>
+              <a:rPr sz="2000" b="0" i="0">
+                <a:solidFill>
+                  <a:srgbClr val="333333"/>
+                </a:solidFill>
+                <a:latin typeface="Calibri"/>
+              </a:rPr>
+              <a:t>–   Y hoy es más fácil cometerla sin mala intención que nunca. </a:t>
+            </a:r>
+            <a:r>
+              <a:rPr sz="2000" b="1" i="0">
+                <a:solidFill>
+                  <a:srgbClr val="333333"/>
+                </a:solidFill>
+                <a:latin typeface="Calibri"/>
+              </a:rPr>
+              <a:t>«No encontramos nada» es un resultado válido</a:t>
+            </a:r>
+            <a:r>
+              <a:rPr sz="2000" b="0" i="0">
+                <a:solidFill>
+                  <a:srgbClr val="333333"/>
+                </a:solidFill>
+                <a:latin typeface="Calibri"/>
+              </a:rPr>
+              <a:t> si se escribe con qué términos</a:t>
+            </a:r>
+          </a:p>
+        </p:txBody>
+      </p:sp>
+      <p:sp>
+        <p:nvSpPr>
+          <p:cNvPr id="6" name="TextBox 5"/>
+          <p:cNvSpPr txBox="1"/>
+          <p:nvPr/>
+        </p:nvSpPr>
+        <p:spPr>
+          <a:xfrm>
+            <a:off x="11185855" y="6473952"/>
+            <a:ext cx="640080" cy="274320"/>
+          </a:xfrm>
+          <a:prstGeom prst="rect">
+            <a:avLst/>
+          </a:prstGeom>
+          <a:noFill/>
+        </p:spPr>
+        <p:txBody>
+          <a:bodyPr wrap="square">
+            <a:spAutoFit/>
+          </a:bodyPr>
+          <a:lstStyle/>
+          <a:p>
+            <a:pPr algn="r"/>
+            <a:r>
+              <a:rPr sz="1100" b="0" i="0">
+                <a:solidFill>
+                  <a:srgbClr val="666666"/>
+                </a:solidFill>
+                <a:latin typeface="Calibri"/>
+              </a:rPr>
+              <a:t>18</a:t>
+            </a:r>
+          </a:p>
+        </p:txBody>
+      </p:sp>
+    </p:spTree>
+  </p:cSld>
+  <p:clrMapOvr>
+    <a:masterClrMapping/>
+  </p:clrMapOvr>
+</p:sld>
+</file>
+
+<file path=ppt/slides/slide19.xml><?xml version="1.0" encoding="utf-8"?>
+<p:sld xmlns:a="http://schemas.openxmlformats.org/drawingml/2006/main" xmlns:p="http://schemas.openxmlformats.org/presentationml/2006/main" xmlns:r="http://schemas.openxmlformats.org/officeDocument/2006/relationships">
+  <p:cSld>
+    <p:bg>
+      <p:bgPr>
+        <a:solidFill>
+          <a:srgbClr val="FFFFFF"/>
+        </a:solidFill>
+        <a:effectLst/>
+      </p:bgPr>
+    </p:bg>
+    <p:spTree>
+      <p:nvGrpSpPr>
+        <p:cNvPr id="1" name=""/>
+        <p:cNvGrpSpPr/>
+        <p:nvPr/>
+      </p:nvGrpSpPr>
+      <p:grpSpPr/>
+      <p:sp>
+        <p:nvSpPr>
+          <p:cNvPr id="2" name="Rectangle 1"/>
+          <p:cNvSpPr/>
+          <p:nvPr/>
+        </p:nvSpPr>
+        <p:spPr>
+          <a:xfrm>
+            <a:off x="0" y="0"/>
+            <a:ext cx="12191695" cy="960120"/>
+          </a:xfrm>
+          <a:prstGeom prst="rect">
+            <a:avLst/>
+          </a:prstGeom>
+          <a:solidFill>
+            <a:srgbClr val="095292"/>
+          </a:solidFill>
+          <a:ln>
+            <a:noFill/>
+          </a:ln>
+        </p:spPr>
+        <p:style>
+          <a:lnRef idx="1">
+            <a:schemeClr val="accent1"/>
+          </a:lnRef>
+          <a:fillRef idx="3">
+            <a:schemeClr val="accent1"/>
+          </a:fillRef>
+          <a:effectRef idx="2">
+            <a:schemeClr val="accent1"/>
+          </a:effectRef>
+          <a:fontRef idx="minor">
+            <a:schemeClr val="lt1"/>
+          </a:fontRef>
+        </p:style>
+        <p:txBody>
+          <a:bodyPr rtlCol="0" anchor="ctr"/>
+          <a:lstStyle/>
+          <a:p>
+            <a:pPr algn="ctr"/>
+          </a:p>
+        </p:txBody>
+      </p:sp>
+      <p:sp>
+        <p:nvSpPr>
+          <p:cNvPr id="3" name="Rectangle 2"/>
+          <p:cNvSpPr/>
+          <p:nvPr/>
+        </p:nvSpPr>
+        <p:spPr>
+          <a:xfrm>
+            <a:off x="0" y="960120"/>
+            <a:ext cx="12191695" cy="41148"/>
+          </a:xfrm>
+          <a:prstGeom prst="rect">
+            <a:avLst/>
+          </a:prstGeom>
+          <a:solidFill>
+            <a:srgbClr val="FFD000"/>
+          </a:solidFill>
+          <a:ln>
+            <a:noFill/>
+          </a:ln>
+        </p:spPr>
+        <p:style>
+          <a:lnRef idx="1">
+            <a:schemeClr val="accent1"/>
+          </a:lnRef>
+          <a:fillRef idx="3">
+            <a:schemeClr val="accent1"/>
+          </a:fillRef>
+          <a:effectRef idx="2">
+            <a:schemeClr val="accent1"/>
+          </a:effectRef>
+          <a:fontRef idx="minor">
+            <a:schemeClr val="lt1"/>
+          </a:fontRef>
+        </p:style>
+        <p:txBody>
+          <a:bodyPr rtlCol="0" anchor="ctr"/>
+          <a:lstStyle/>
+          <a:p>
+            <a:pPr algn="ctr"/>
+          </a:p>
+        </p:txBody>
+      </p:sp>
+      <p:sp>
+        <p:nvSpPr>
+          <p:cNvPr id="4" name="TextBox 3"/>
+          <p:cNvSpPr txBox="1"/>
+          <p:nvPr/>
+        </p:nvSpPr>
+        <p:spPr>
+          <a:xfrm>
+            <a:off x="457200" y="164592"/>
+            <a:ext cx="11277295" cy="502920"/>
+          </a:xfrm>
+          <a:prstGeom prst="rect">
+            <a:avLst/>
+          </a:prstGeom>
+          <a:noFill/>
+        </p:spPr>
+        <p:txBody>
+          <a:bodyPr wrap="square">
+            <a:spAutoFit/>
+          </a:bodyPr>
+          <a:lstStyle/>
+          <a:p>
+            <a:r>
+              <a:rPr sz="2600" b="1" i="0">
+                <a:solidFill>
+                  <a:srgbClr val="FFFFFF"/>
+                </a:solidFill>
+                <a:latin typeface="Calibri"/>
+              </a:rPr>
+              <a:t>Calidad de las fuentes, la IA y qué hacer cuando no se encuentra nada (3/3)</a:t>
+            </a:r>
+          </a:p>
+        </p:txBody>
+      </p:sp>
+      <p:sp>
+        <p:nvSpPr>
+          <p:cNvPr id="5" name="TextBox 4"/>
+          <p:cNvSpPr txBox="1"/>
+          <p:nvPr/>
+        </p:nvSpPr>
+        <p:spPr>
+          <a:xfrm>
+            <a:off x="457200" y="1170432"/>
+            <a:ext cx="11277295" cy="5230368"/>
+          </a:xfrm>
+          <a:prstGeom prst="rect">
+            <a:avLst/>
+          </a:prstGeom>
+          <a:noFill/>
+        </p:spPr>
+        <p:txBody>
+          <a:bodyPr wrap="square">
+            <a:spAutoFit/>
+          </a:bodyPr>
+          <a:lstStyle/>
+          <a:p>
+            <a:pPr>
+              <a:spcAft>
+                <a:spcPts val="800"/>
+              </a:spcAft>
+            </a:pPr>
+            <a:r>
+              <a:rPr sz="2000" b="0" i="0">
+                <a:solidFill>
+                  <a:srgbClr val="333333"/>
+                </a:solidFill>
+                <a:latin typeface="Calibri"/>
+              </a:rPr>
+              <a:t>–   En qué sitios y qué fue lo más cercano que apareció: eso es un hallazgo, se califica, y es infinitamente mejor que tres fuentes de adorno que nadie leyó.</a:t>
+            </a:r>
+          </a:p>
+          <a:p>
+            <a:pPr>
+              <a:spcAft>
+                <a:spcPts val="800"/>
+              </a:spcAft>
+            </a:pPr>
+            <a:r>
+              <a:rPr sz="2000" b="0" i="0">
+                <a:solidFill>
+                  <a:srgbClr val="333333"/>
+                </a:solidFill>
+                <a:latin typeface="Calibri"/>
+              </a:rPr>
+              <a:t>–   Y la tercera tranquiliza y hay que decirla con convicción: </a:t>
+            </a:r>
+            <a:r>
+              <a:rPr sz="2000" b="1" i="0">
+                <a:solidFill>
+                  <a:srgbClr val="333333"/>
+                </a:solidFill>
+                <a:latin typeface="Calibri"/>
+              </a:rPr>
+              <a:t>encontrar que su idea ya existe mejora el proyecto</a:t>
+            </a:r>
+          </a:p>
+          <a:p>
+            <a:pPr>
+              <a:spcAft>
+                <a:spcPts val="800"/>
+              </a:spcAft>
+            </a:pPr>
+            <a:r>
+              <a:rPr sz="2000" b="0" i="0">
+                <a:solidFill>
+                  <a:srgbClr val="333333"/>
+                </a:solidFill>
+                <a:latin typeface="Calibri"/>
+              </a:rPr>
+              <a:t>–   Porque confirma que el problema es real y da un punto de partida; la pregunta deja de ser «¿lo inventamos?» y pasa a ser «¿qué hacemos distinto y por qué eso importa en nuestro contexto?», que es una pregunta de ingeniería mucho mejor.</a:t>
+            </a:r>
+          </a:p>
+        </p:txBody>
+      </p:sp>
+      <p:sp>
+        <p:nvSpPr>
+          <p:cNvPr id="6" name="TextBox 5"/>
+          <p:cNvSpPr txBox="1"/>
+          <p:nvPr/>
+        </p:nvSpPr>
+        <p:spPr>
+          <a:xfrm>
+            <a:off x="11185855" y="6473952"/>
+            <a:ext cx="640080" cy="274320"/>
+          </a:xfrm>
+          <a:prstGeom prst="rect">
+            <a:avLst/>
+          </a:prstGeom>
+          <a:noFill/>
+        </p:spPr>
+        <p:txBody>
+          <a:bodyPr wrap="square">
+            <a:spAutoFit/>
+          </a:bodyPr>
+          <a:lstStyle/>
+          <a:p>
+            <a:pPr algn="r"/>
+            <a:r>
+              <a:rPr sz="1100" b="0" i="0">
+                <a:solidFill>
+                  <a:srgbClr val="666666"/>
+                </a:solidFill>
+                <a:latin typeface="Calibri"/>
+              </a:rPr>
+              <a:t>19</a:t>
             </a:r>
           </a:p>
         </p:txBody>
@@ -7248,6 +7716,2895 @@
                 <a:latin typeface="Calibri"/>
               </a:rPr>
               <a:t>2</a:t>
+            </a:r>
+          </a:p>
+        </p:txBody>
+      </p:sp>
+    </p:spTree>
+  </p:cSld>
+  <p:clrMapOvr>
+    <a:masterClrMapping/>
+  </p:clrMapOvr>
+</p:sld>
+</file>
+
+<file path=ppt/slides/slide20.xml><?xml version="1.0" encoding="utf-8"?>
+<p:sld xmlns:a="http://schemas.openxmlformats.org/drawingml/2006/main" xmlns:p="http://schemas.openxmlformats.org/presentationml/2006/main" xmlns:r="http://schemas.openxmlformats.org/officeDocument/2006/relationships">
+  <p:cSld>
+    <p:bg>
+      <p:bgPr>
+        <a:solidFill>
+          <a:srgbClr val="FFFFFF"/>
+        </a:solidFill>
+        <a:effectLst/>
+      </p:bgPr>
+    </p:bg>
+    <p:spTree>
+      <p:nvGrpSpPr>
+        <p:cNvPr id="1" name=""/>
+        <p:cNvGrpSpPr/>
+        <p:nvPr/>
+      </p:nvGrpSpPr>
+      <p:grpSpPr/>
+      <p:sp>
+        <p:nvSpPr>
+          <p:cNvPr id="2" name="Rectangle 1"/>
+          <p:cNvSpPr/>
+          <p:nvPr/>
+        </p:nvSpPr>
+        <p:spPr>
+          <a:xfrm>
+            <a:off x="0" y="0"/>
+            <a:ext cx="12191695" cy="1170432"/>
+          </a:xfrm>
+          <a:prstGeom prst="rect">
+            <a:avLst/>
+          </a:prstGeom>
+          <a:solidFill>
+            <a:srgbClr val="095292"/>
+          </a:solidFill>
+          <a:ln>
+            <a:noFill/>
+          </a:ln>
+        </p:spPr>
+        <p:style>
+          <a:lnRef idx="1">
+            <a:schemeClr val="accent1"/>
+          </a:lnRef>
+          <a:fillRef idx="3">
+            <a:schemeClr val="accent1"/>
+          </a:fillRef>
+          <a:effectRef idx="2">
+            <a:schemeClr val="accent1"/>
+          </a:effectRef>
+          <a:fontRef idx="minor">
+            <a:schemeClr val="lt1"/>
+          </a:fontRef>
+        </p:style>
+        <p:txBody>
+          <a:bodyPr rtlCol="0" anchor="ctr"/>
+          <a:lstStyle/>
+          <a:p>
+            <a:pPr algn="ctr"/>
+          </a:p>
+        </p:txBody>
+      </p:sp>
+      <p:sp>
+        <p:nvSpPr>
+          <p:cNvPr id="3" name="Rectangle 2"/>
+          <p:cNvSpPr/>
+          <p:nvPr/>
+        </p:nvSpPr>
+        <p:spPr>
+          <a:xfrm>
+            <a:off x="0" y="1170432"/>
+            <a:ext cx="12191695" cy="41148"/>
+          </a:xfrm>
+          <a:prstGeom prst="rect">
+            <a:avLst/>
+          </a:prstGeom>
+          <a:solidFill>
+            <a:srgbClr val="FFD000"/>
+          </a:solidFill>
+          <a:ln>
+            <a:noFill/>
+          </a:ln>
+        </p:spPr>
+        <p:style>
+          <a:lnRef idx="1">
+            <a:schemeClr val="accent1"/>
+          </a:lnRef>
+          <a:fillRef idx="3">
+            <a:schemeClr val="accent1"/>
+          </a:fillRef>
+          <a:effectRef idx="2">
+            <a:schemeClr val="accent1"/>
+          </a:effectRef>
+          <a:fontRef idx="minor">
+            <a:schemeClr val="lt1"/>
+          </a:fontRef>
+        </p:style>
+        <p:txBody>
+          <a:bodyPr rtlCol="0" anchor="ctr"/>
+          <a:lstStyle/>
+          <a:p>
+            <a:pPr algn="ctr"/>
+          </a:p>
+        </p:txBody>
+      </p:sp>
+      <p:sp>
+        <p:nvSpPr>
+          <p:cNvPr id="4" name="TextBox 3"/>
+          <p:cNvSpPr txBox="1"/>
+          <p:nvPr/>
+        </p:nvSpPr>
+        <p:spPr>
+          <a:xfrm>
+            <a:off x="457200" y="164592"/>
+            <a:ext cx="11277295" cy="384048"/>
+          </a:xfrm>
+          <a:prstGeom prst="rect">
+            <a:avLst/>
+          </a:prstGeom>
+          <a:noFill/>
+        </p:spPr>
+        <p:txBody>
+          <a:bodyPr wrap="square">
+            <a:spAutoFit/>
+          </a:bodyPr>
+          <a:lstStyle/>
+          <a:p>
+            <a:r>
+              <a:rPr sz="2600" b="1" i="0">
+                <a:solidFill>
+                  <a:srgbClr val="FFFFFF"/>
+                </a:solidFill>
+                <a:latin typeface="Calibri"/>
+              </a:rPr>
+              <a:t>Taller de hoy: Antecedentes y propuesta de mejora</a:t>
+            </a:r>
+          </a:p>
+        </p:txBody>
+      </p:sp>
+      <p:sp>
+        <p:nvSpPr>
+          <p:cNvPr id="5" name="TextBox 4"/>
+          <p:cNvSpPr txBox="1"/>
+          <p:nvPr/>
+        </p:nvSpPr>
+        <p:spPr>
+          <a:xfrm>
+            <a:off x="457200" y="566928"/>
+            <a:ext cx="11277295" cy="411480"/>
+          </a:xfrm>
+          <a:prstGeom prst="rect">
+            <a:avLst/>
+          </a:prstGeom>
+          <a:noFill/>
+        </p:spPr>
+        <p:txBody>
+          <a:bodyPr wrap="square">
+            <a:spAutoFit/>
+          </a:bodyPr>
+          <a:lstStyle/>
+          <a:p>
+            <a:r>
+              <a:rPr sz="1400" b="0" i="0">
+                <a:solidFill>
+                  <a:srgbClr val="B8D8EE"/>
+                </a:solidFill>
+                <a:latin typeface="Calibri"/>
+              </a:rPr>
+              <a:t>17 min en equipos · búsqueda repartida: 2 académico · 2 soluciones reales · 1 normas · tres fichas de antecedentes + propuesta de mejora + mapa en Excalidraw</a:t>
+            </a:r>
+          </a:p>
+        </p:txBody>
+      </p:sp>
+      <p:sp>
+        <p:nvSpPr>
+          <p:cNvPr id="6" name="Rounded Rectangle 5"/>
+          <p:cNvSpPr/>
+          <p:nvPr/>
+        </p:nvSpPr>
+        <p:spPr>
+          <a:xfrm>
+            <a:off x="457200" y="1472184"/>
+            <a:ext cx="11277295" cy="566928"/>
+          </a:xfrm>
+          <a:prstGeom prst="roundRect">
+            <a:avLst>
+              <a:gd name="adj" fmla="val 12000"/>
+            </a:avLst>
+          </a:prstGeom>
+          <a:solidFill>
+            <a:srgbClr val="F2F2F2"/>
+          </a:solidFill>
+          <a:ln>
+            <a:noFill/>
+          </a:ln>
+        </p:spPr>
+        <p:style>
+          <a:lnRef idx="1">
+            <a:schemeClr val="accent1"/>
+          </a:lnRef>
+          <a:fillRef idx="3">
+            <a:schemeClr val="accent1"/>
+          </a:fillRef>
+          <a:effectRef idx="2">
+            <a:schemeClr val="accent1"/>
+          </a:effectRef>
+          <a:fontRef idx="minor">
+            <a:schemeClr val="lt1"/>
+          </a:fontRef>
+        </p:style>
+        <p:txBody>
+          <a:bodyPr rtlCol="0" anchor="ctr"/>
+          <a:lstStyle/>
+          <a:p>
+            <a:pPr algn="ctr"/>
+          </a:p>
+        </p:txBody>
+      </p:sp>
+      <p:sp>
+        <p:nvSpPr>
+          <p:cNvPr id="7" name="Rectangle 6"/>
+          <p:cNvSpPr/>
+          <p:nvPr/>
+        </p:nvSpPr>
+        <p:spPr>
+          <a:xfrm>
+            <a:off x="640080" y="1618487"/>
+            <a:ext cx="274320" cy="274320"/>
+          </a:xfrm>
+          <a:prstGeom prst="rect">
+            <a:avLst/>
+          </a:prstGeom>
+          <a:solidFill>
+            <a:srgbClr val="FFFFFF"/>
+          </a:solidFill>
+          <a:ln>
+            <a:solidFill>
+              <a:srgbClr val="333333"/>
+            </a:solidFill>
+          </a:ln>
+        </p:spPr>
+        <p:style>
+          <a:lnRef idx="1">
+            <a:schemeClr val="accent1"/>
+          </a:lnRef>
+          <a:fillRef idx="3">
+            <a:schemeClr val="accent1"/>
+          </a:fillRef>
+          <a:effectRef idx="2">
+            <a:schemeClr val="accent1"/>
+          </a:effectRef>
+          <a:fontRef idx="minor">
+            <a:schemeClr val="lt1"/>
+          </a:fontRef>
+        </p:style>
+        <p:txBody>
+          <a:bodyPr rtlCol="0" anchor="ctr"/>
+          <a:lstStyle/>
+          <a:p>
+            <a:pPr algn="ctr"/>
+          </a:p>
+        </p:txBody>
+      </p:sp>
+      <p:sp>
+        <p:nvSpPr>
+          <p:cNvPr id="8" name="Rectangle 7"/>
+          <p:cNvSpPr/>
+          <p:nvPr/>
+        </p:nvSpPr>
+        <p:spPr>
+          <a:xfrm>
+            <a:off x="640080" y="1618487"/>
+            <a:ext cx="73152" cy="274320"/>
+          </a:xfrm>
+          <a:prstGeom prst="rect">
+            <a:avLst/>
+          </a:prstGeom>
+          <a:solidFill>
+            <a:srgbClr val="269CCB"/>
+          </a:solidFill>
+          <a:ln>
+            <a:noFill/>
+          </a:ln>
+        </p:spPr>
+        <p:style>
+          <a:lnRef idx="1">
+            <a:schemeClr val="accent1"/>
+          </a:lnRef>
+          <a:fillRef idx="3">
+            <a:schemeClr val="accent1"/>
+          </a:fillRef>
+          <a:effectRef idx="2">
+            <a:schemeClr val="accent1"/>
+          </a:effectRef>
+          <a:fontRef idx="minor">
+            <a:schemeClr val="lt1"/>
+          </a:fontRef>
+        </p:style>
+        <p:txBody>
+          <a:bodyPr rtlCol="0" anchor="ctr"/>
+          <a:lstStyle/>
+          <a:p>
+            <a:pPr algn="ctr"/>
+          </a:p>
+        </p:txBody>
+      </p:sp>
+      <p:sp>
+        <p:nvSpPr>
+          <p:cNvPr id="9" name="TextBox 8"/>
+          <p:cNvSpPr txBox="1"/>
+          <p:nvPr/>
+        </p:nvSpPr>
+        <p:spPr>
+          <a:xfrm>
+            <a:off x="1097280" y="1563624"/>
+            <a:ext cx="10362895" cy="402336"/>
+          </a:xfrm>
+          <a:prstGeom prst="rect">
+            <a:avLst/>
+          </a:prstGeom>
+          <a:noFill/>
+        </p:spPr>
+        <p:txBody>
+          <a:bodyPr wrap="square" anchor="ctr"/>
+          <a:lstStyle/>
+          <a:p>
+            <a:r>
+              <a:rPr sz="1500" b="1" i="0">
+                <a:solidFill>
+                  <a:srgbClr val="333333"/>
+                </a:solidFill>
+                <a:latin typeface="Calibri"/>
+              </a:rPr>
+              <a:t>LA PREGUNTA DE BÚSQUEDA</a:t>
+            </a:r>
+            <a:r>
+              <a:rPr sz="1500" b="0" i="0">
+                <a:solidFill>
+                  <a:srgbClr val="333333"/>
+                </a:solidFill>
+                <a:latin typeface="Calibri"/>
+              </a:rPr>
+              <a:t> — Una </a:t>
+            </a:r>
+            <a:r>
+              <a:rPr sz="1500" b="1" i="0">
+                <a:solidFill>
+                  <a:srgbClr val="333333"/>
+                </a:solidFill>
+                <a:latin typeface="Calibri"/>
+              </a:rPr>
+              <a:t>pregunta</a:t>
+            </a:r>
+            <a:r>
+              <a:rPr sz="1500" b="0" i="0">
+                <a:solidFill>
+                  <a:srgbClr val="333333"/>
+                </a:solidFill>
+                <a:latin typeface="Calibri"/>
+              </a:rPr>
+              <a:t>, no una palabra, y sus términos de búsqueda en dos o tres versiones — incluida una en inglés.</a:t>
+            </a:r>
+          </a:p>
+        </p:txBody>
+      </p:sp>
+      <p:sp>
+        <p:nvSpPr>
+          <p:cNvPr id="10" name="Rounded Rectangle 9"/>
+          <p:cNvSpPr/>
+          <p:nvPr/>
+        </p:nvSpPr>
+        <p:spPr>
+          <a:xfrm>
+            <a:off x="457200" y="2148839"/>
+            <a:ext cx="11277295" cy="566928"/>
+          </a:xfrm>
+          <a:prstGeom prst="roundRect">
+            <a:avLst>
+              <a:gd name="adj" fmla="val 12000"/>
+            </a:avLst>
+          </a:prstGeom>
+          <a:solidFill>
+            <a:srgbClr val="F2F2F2"/>
+          </a:solidFill>
+          <a:ln>
+            <a:noFill/>
+          </a:ln>
+        </p:spPr>
+        <p:style>
+          <a:lnRef idx="1">
+            <a:schemeClr val="accent1"/>
+          </a:lnRef>
+          <a:fillRef idx="3">
+            <a:schemeClr val="accent1"/>
+          </a:fillRef>
+          <a:effectRef idx="2">
+            <a:schemeClr val="accent1"/>
+          </a:effectRef>
+          <a:fontRef idx="minor">
+            <a:schemeClr val="lt1"/>
+          </a:fontRef>
+        </p:style>
+        <p:txBody>
+          <a:bodyPr rtlCol="0" anchor="ctr"/>
+          <a:lstStyle/>
+          <a:p>
+            <a:pPr algn="ctr"/>
+          </a:p>
+        </p:txBody>
+      </p:sp>
+      <p:sp>
+        <p:nvSpPr>
+          <p:cNvPr id="11" name="Rectangle 10"/>
+          <p:cNvSpPr/>
+          <p:nvPr/>
+        </p:nvSpPr>
+        <p:spPr>
+          <a:xfrm>
+            <a:off x="640080" y="2295144"/>
+            <a:ext cx="274320" cy="274320"/>
+          </a:xfrm>
+          <a:prstGeom prst="rect">
+            <a:avLst/>
+          </a:prstGeom>
+          <a:solidFill>
+            <a:srgbClr val="FFFFFF"/>
+          </a:solidFill>
+          <a:ln>
+            <a:solidFill>
+              <a:srgbClr val="333333"/>
+            </a:solidFill>
+          </a:ln>
+        </p:spPr>
+        <p:style>
+          <a:lnRef idx="1">
+            <a:schemeClr val="accent1"/>
+          </a:lnRef>
+          <a:fillRef idx="3">
+            <a:schemeClr val="accent1"/>
+          </a:fillRef>
+          <a:effectRef idx="2">
+            <a:schemeClr val="accent1"/>
+          </a:effectRef>
+          <a:fontRef idx="minor">
+            <a:schemeClr val="lt1"/>
+          </a:fontRef>
+        </p:style>
+        <p:txBody>
+          <a:bodyPr rtlCol="0" anchor="ctr"/>
+          <a:lstStyle/>
+          <a:p>
+            <a:pPr algn="ctr"/>
+          </a:p>
+        </p:txBody>
+      </p:sp>
+      <p:sp>
+        <p:nvSpPr>
+          <p:cNvPr id="12" name="Rectangle 11"/>
+          <p:cNvSpPr/>
+          <p:nvPr/>
+        </p:nvSpPr>
+        <p:spPr>
+          <a:xfrm>
+            <a:off x="640080" y="2295144"/>
+            <a:ext cx="73152" cy="274320"/>
+          </a:xfrm>
+          <a:prstGeom prst="rect">
+            <a:avLst/>
+          </a:prstGeom>
+          <a:solidFill>
+            <a:srgbClr val="269CCB"/>
+          </a:solidFill>
+          <a:ln>
+            <a:noFill/>
+          </a:ln>
+        </p:spPr>
+        <p:style>
+          <a:lnRef idx="1">
+            <a:schemeClr val="accent1"/>
+          </a:lnRef>
+          <a:fillRef idx="3">
+            <a:schemeClr val="accent1"/>
+          </a:fillRef>
+          <a:effectRef idx="2">
+            <a:schemeClr val="accent1"/>
+          </a:effectRef>
+          <a:fontRef idx="minor">
+            <a:schemeClr val="lt1"/>
+          </a:fontRef>
+        </p:style>
+        <p:txBody>
+          <a:bodyPr rtlCol="0" anchor="ctr"/>
+          <a:lstStyle/>
+          <a:p>
+            <a:pPr algn="ctr"/>
+          </a:p>
+        </p:txBody>
+      </p:sp>
+      <p:sp>
+        <p:nvSpPr>
+          <p:cNvPr id="13" name="TextBox 12"/>
+          <p:cNvSpPr txBox="1"/>
+          <p:nvPr/>
+        </p:nvSpPr>
+        <p:spPr>
+          <a:xfrm>
+            <a:off x="1097280" y="2240279"/>
+            <a:ext cx="10362895" cy="402336"/>
+          </a:xfrm>
+          <a:prstGeom prst="rect">
+            <a:avLst/>
+          </a:prstGeom>
+          <a:noFill/>
+        </p:spPr>
+        <p:txBody>
+          <a:bodyPr wrap="square" anchor="ctr"/>
+          <a:lstStyle/>
+          <a:p>
+            <a:r>
+              <a:rPr sz="1500" b="1" i="0">
+                <a:solidFill>
+                  <a:srgbClr val="333333"/>
+                </a:solidFill>
+                <a:latin typeface="Calibri"/>
+              </a:rPr>
+              <a:t>TRES ANTECEDENTES FICHADOS</a:t>
+            </a:r>
+            <a:r>
+              <a:rPr sz="1500" b="0" i="0">
+                <a:solidFill>
+                  <a:srgbClr val="333333"/>
+                </a:solidFill>
+                <a:latin typeface="Calibri"/>
+              </a:rPr>
+              <a:t> — Tres fichas con los seis campos: </a:t>
+            </a:r>
+            <a:r>
+              <a:rPr sz="1500" b="1" i="0">
+                <a:solidFill>
+                  <a:srgbClr val="333333"/>
+                </a:solidFill>
+                <a:latin typeface="Calibri"/>
+              </a:rPr>
+              <a:t>autor o responsable · año · dónde · qué hace · qué le falta para nuestro caso · enlace</a:t>
+            </a:r>
+            <a:r>
+              <a:rPr sz="1500" b="0" i="0">
+                <a:solidFill>
+                  <a:srgbClr val="333333"/>
+                </a:solidFill>
+                <a:latin typeface="Calibri"/>
+              </a:rPr>
+              <a:t>. Al menos una fuente académica o normativa.</a:t>
+            </a:r>
+          </a:p>
+        </p:txBody>
+      </p:sp>
+      <p:sp>
+        <p:nvSpPr>
+          <p:cNvPr id="14" name="Rounded Rectangle 13"/>
+          <p:cNvSpPr/>
+          <p:nvPr/>
+        </p:nvSpPr>
+        <p:spPr>
+          <a:xfrm>
+            <a:off x="457200" y="2825496"/>
+            <a:ext cx="11277295" cy="566928"/>
+          </a:xfrm>
+          <a:prstGeom prst="roundRect">
+            <a:avLst>
+              <a:gd name="adj" fmla="val 12000"/>
+            </a:avLst>
+          </a:prstGeom>
+          <a:solidFill>
+            <a:srgbClr val="F2F2F2"/>
+          </a:solidFill>
+          <a:ln>
+            <a:noFill/>
+          </a:ln>
+        </p:spPr>
+        <p:style>
+          <a:lnRef idx="1">
+            <a:schemeClr val="accent1"/>
+          </a:lnRef>
+          <a:fillRef idx="3">
+            <a:schemeClr val="accent1"/>
+          </a:fillRef>
+          <a:effectRef idx="2">
+            <a:schemeClr val="accent1"/>
+          </a:effectRef>
+          <a:fontRef idx="minor">
+            <a:schemeClr val="lt1"/>
+          </a:fontRef>
+        </p:style>
+        <p:txBody>
+          <a:bodyPr rtlCol="0" anchor="ctr"/>
+          <a:lstStyle/>
+          <a:p>
+            <a:pPr algn="ctr"/>
+          </a:p>
+        </p:txBody>
+      </p:sp>
+      <p:sp>
+        <p:nvSpPr>
+          <p:cNvPr id="15" name="Rectangle 14"/>
+          <p:cNvSpPr/>
+          <p:nvPr/>
+        </p:nvSpPr>
+        <p:spPr>
+          <a:xfrm>
+            <a:off x="640080" y="2971800"/>
+            <a:ext cx="274320" cy="274320"/>
+          </a:xfrm>
+          <a:prstGeom prst="rect">
+            <a:avLst/>
+          </a:prstGeom>
+          <a:solidFill>
+            <a:srgbClr val="FFFFFF"/>
+          </a:solidFill>
+          <a:ln>
+            <a:solidFill>
+              <a:srgbClr val="333333"/>
+            </a:solidFill>
+          </a:ln>
+        </p:spPr>
+        <p:style>
+          <a:lnRef idx="1">
+            <a:schemeClr val="accent1"/>
+          </a:lnRef>
+          <a:fillRef idx="3">
+            <a:schemeClr val="accent1"/>
+          </a:fillRef>
+          <a:effectRef idx="2">
+            <a:schemeClr val="accent1"/>
+          </a:effectRef>
+          <a:fontRef idx="minor">
+            <a:schemeClr val="lt1"/>
+          </a:fontRef>
+        </p:style>
+        <p:txBody>
+          <a:bodyPr rtlCol="0" anchor="ctr"/>
+          <a:lstStyle/>
+          <a:p>
+            <a:pPr algn="ctr"/>
+          </a:p>
+        </p:txBody>
+      </p:sp>
+      <p:sp>
+        <p:nvSpPr>
+          <p:cNvPr id="16" name="Rectangle 15"/>
+          <p:cNvSpPr/>
+          <p:nvPr/>
+        </p:nvSpPr>
+        <p:spPr>
+          <a:xfrm>
+            <a:off x="640080" y="2971800"/>
+            <a:ext cx="73152" cy="274320"/>
+          </a:xfrm>
+          <a:prstGeom prst="rect">
+            <a:avLst/>
+          </a:prstGeom>
+          <a:solidFill>
+            <a:srgbClr val="269CCB"/>
+          </a:solidFill>
+          <a:ln>
+            <a:noFill/>
+          </a:ln>
+        </p:spPr>
+        <p:style>
+          <a:lnRef idx="1">
+            <a:schemeClr val="accent1"/>
+          </a:lnRef>
+          <a:fillRef idx="3">
+            <a:schemeClr val="accent1"/>
+          </a:fillRef>
+          <a:effectRef idx="2">
+            <a:schemeClr val="accent1"/>
+          </a:effectRef>
+          <a:fontRef idx="minor">
+            <a:schemeClr val="lt1"/>
+          </a:fontRef>
+        </p:style>
+        <p:txBody>
+          <a:bodyPr rtlCol="0" anchor="ctr"/>
+          <a:lstStyle/>
+          <a:p>
+            <a:pPr algn="ctr"/>
+          </a:p>
+        </p:txBody>
+      </p:sp>
+      <p:sp>
+        <p:nvSpPr>
+          <p:cNvPr id="17" name="TextBox 16"/>
+          <p:cNvSpPr txBox="1"/>
+          <p:nvPr/>
+        </p:nvSpPr>
+        <p:spPr>
+          <a:xfrm>
+            <a:off x="1097280" y="2916936"/>
+            <a:ext cx="10362895" cy="402336"/>
+          </a:xfrm>
+          <a:prstGeom prst="rect">
+            <a:avLst/>
+          </a:prstGeom>
+          <a:noFill/>
+        </p:spPr>
+        <p:txBody>
+          <a:bodyPr wrap="square" anchor="ctr"/>
+          <a:lstStyle/>
+          <a:p>
+            <a:r>
+              <a:rPr sz="1500" b="1" i="0">
+                <a:solidFill>
+                  <a:srgbClr val="333333"/>
+                </a:solidFill>
+                <a:latin typeface="Calibri"/>
+              </a:rPr>
+              <a:t>QUÉ BUSCAMOS Y NO ENCONTRAMOS</a:t>
+            </a:r>
+            <a:r>
+              <a:rPr sz="1500" b="0" i="0">
+                <a:solidFill>
+                  <a:srgbClr val="333333"/>
+                </a:solidFill>
+                <a:latin typeface="Calibri"/>
+              </a:rPr>
+              <a:t> — Qué buscaron, con qué términos, en qué sitios, y </a:t>
+            </a:r>
+            <a:r>
+              <a:rPr sz="1500" b="1" i="0">
+                <a:solidFill>
+                  <a:srgbClr val="333333"/>
+                </a:solidFill>
+                <a:latin typeface="Calibri"/>
+              </a:rPr>
+              <a:t>qué fue lo más cercano</a:t>
+            </a:r>
+            <a:r>
+              <a:rPr sz="1500" b="0" i="0">
+                <a:solidFill>
+                  <a:srgbClr val="333333"/>
+                </a:solidFill>
+                <a:latin typeface="Calibri"/>
+              </a:rPr>
+              <a:t> que apareció. «No encontramos nada» bien escrito es un hallazgo.</a:t>
+            </a:r>
+          </a:p>
+        </p:txBody>
+      </p:sp>
+      <p:sp>
+        <p:nvSpPr>
+          <p:cNvPr id="18" name="Rounded Rectangle 17"/>
+          <p:cNvSpPr/>
+          <p:nvPr/>
+        </p:nvSpPr>
+        <p:spPr>
+          <a:xfrm>
+            <a:off x="457200" y="3502152"/>
+            <a:ext cx="11277295" cy="566928"/>
+          </a:xfrm>
+          <a:prstGeom prst="roundRect">
+            <a:avLst>
+              <a:gd name="adj" fmla="val 12000"/>
+            </a:avLst>
+          </a:prstGeom>
+          <a:solidFill>
+            <a:srgbClr val="F2F2F2"/>
+          </a:solidFill>
+          <a:ln>
+            <a:noFill/>
+          </a:ln>
+        </p:spPr>
+        <p:style>
+          <a:lnRef idx="1">
+            <a:schemeClr val="accent1"/>
+          </a:lnRef>
+          <a:fillRef idx="3">
+            <a:schemeClr val="accent1"/>
+          </a:fillRef>
+          <a:effectRef idx="2">
+            <a:schemeClr val="accent1"/>
+          </a:effectRef>
+          <a:fontRef idx="minor">
+            <a:schemeClr val="lt1"/>
+          </a:fontRef>
+        </p:style>
+        <p:txBody>
+          <a:bodyPr rtlCol="0" anchor="ctr"/>
+          <a:lstStyle/>
+          <a:p>
+            <a:pPr algn="ctr"/>
+          </a:p>
+        </p:txBody>
+      </p:sp>
+      <p:sp>
+        <p:nvSpPr>
+          <p:cNvPr id="19" name="Rectangle 18"/>
+          <p:cNvSpPr/>
+          <p:nvPr/>
+        </p:nvSpPr>
+        <p:spPr>
+          <a:xfrm>
+            <a:off x="640080" y="3648456"/>
+            <a:ext cx="274320" cy="274320"/>
+          </a:xfrm>
+          <a:prstGeom prst="rect">
+            <a:avLst/>
+          </a:prstGeom>
+          <a:solidFill>
+            <a:srgbClr val="FFFFFF"/>
+          </a:solidFill>
+          <a:ln>
+            <a:solidFill>
+              <a:srgbClr val="333333"/>
+            </a:solidFill>
+          </a:ln>
+        </p:spPr>
+        <p:style>
+          <a:lnRef idx="1">
+            <a:schemeClr val="accent1"/>
+          </a:lnRef>
+          <a:fillRef idx="3">
+            <a:schemeClr val="accent1"/>
+          </a:fillRef>
+          <a:effectRef idx="2">
+            <a:schemeClr val="accent1"/>
+          </a:effectRef>
+          <a:fontRef idx="minor">
+            <a:schemeClr val="lt1"/>
+          </a:fontRef>
+        </p:style>
+        <p:txBody>
+          <a:bodyPr rtlCol="0" anchor="ctr"/>
+          <a:lstStyle/>
+          <a:p>
+            <a:pPr algn="ctr"/>
+          </a:p>
+        </p:txBody>
+      </p:sp>
+      <p:sp>
+        <p:nvSpPr>
+          <p:cNvPr id="20" name="Rectangle 19"/>
+          <p:cNvSpPr/>
+          <p:nvPr/>
+        </p:nvSpPr>
+        <p:spPr>
+          <a:xfrm>
+            <a:off x="640080" y="3648456"/>
+            <a:ext cx="73152" cy="274320"/>
+          </a:xfrm>
+          <a:prstGeom prst="rect">
+            <a:avLst/>
+          </a:prstGeom>
+          <a:solidFill>
+            <a:srgbClr val="269CCB"/>
+          </a:solidFill>
+          <a:ln>
+            <a:noFill/>
+          </a:ln>
+        </p:spPr>
+        <p:style>
+          <a:lnRef idx="1">
+            <a:schemeClr val="accent1"/>
+          </a:lnRef>
+          <a:fillRef idx="3">
+            <a:schemeClr val="accent1"/>
+          </a:fillRef>
+          <a:effectRef idx="2">
+            <a:schemeClr val="accent1"/>
+          </a:effectRef>
+          <a:fontRef idx="minor">
+            <a:schemeClr val="lt1"/>
+          </a:fontRef>
+        </p:style>
+        <p:txBody>
+          <a:bodyPr rtlCol="0" anchor="ctr"/>
+          <a:lstStyle/>
+          <a:p>
+            <a:pPr algn="ctr"/>
+          </a:p>
+        </p:txBody>
+      </p:sp>
+      <p:sp>
+        <p:nvSpPr>
+          <p:cNvPr id="21" name="TextBox 20"/>
+          <p:cNvSpPr txBox="1"/>
+          <p:nvPr/>
+        </p:nvSpPr>
+        <p:spPr>
+          <a:xfrm>
+            <a:off x="1097280" y="3593592"/>
+            <a:ext cx="10362895" cy="402336"/>
+          </a:xfrm>
+          <a:prstGeom prst="rect">
+            <a:avLst/>
+          </a:prstGeom>
+          <a:noFill/>
+        </p:spPr>
+        <p:txBody>
+          <a:bodyPr wrap="square" anchor="ctr"/>
+          <a:lstStyle/>
+          <a:p>
+            <a:r>
+              <a:rPr sz="1500" b="1" i="0">
+                <a:solidFill>
+                  <a:srgbClr val="333333"/>
+                </a:solidFill>
+                <a:latin typeface="Calibri"/>
+              </a:rPr>
+              <a:t>LA PROPUESTA DE MEJORA</a:t>
+            </a:r>
+            <a:r>
+              <a:rPr sz="1500" b="0" i="0">
+                <a:solidFill>
+                  <a:srgbClr val="333333"/>
+                </a:solidFill>
+                <a:latin typeface="Calibri"/>
+              </a:rPr>
+              <a:t> — Qué van a hacer distinto respecto a lo fichado, </a:t>
+            </a:r>
+            <a:r>
+              <a:rPr sz="1500" b="1" i="0">
+                <a:solidFill>
+                  <a:srgbClr val="333333"/>
+                </a:solidFill>
+                <a:latin typeface="Calibri"/>
+              </a:rPr>
+              <a:t>con cuál de las cuatro operaciones</a:t>
+            </a:r>
+            <a:r>
+              <a:rPr sz="1500" b="0" i="0">
+                <a:solidFill>
+                  <a:srgbClr val="333333"/>
+                </a:solidFill>
+                <a:latin typeface="Calibri"/>
+              </a:rPr>
+              <a:t> (quitar, combinar, invertir, adaptar), y por qué eso importa en su contexto.</a:t>
+            </a:r>
+          </a:p>
+        </p:txBody>
+      </p:sp>
+      <p:sp>
+        <p:nvSpPr>
+          <p:cNvPr id="22" name="Rounded Rectangle 21"/>
+          <p:cNvSpPr/>
+          <p:nvPr/>
+        </p:nvSpPr>
+        <p:spPr>
+          <a:xfrm>
+            <a:off x="457200" y="4178808"/>
+            <a:ext cx="11277295" cy="566928"/>
+          </a:xfrm>
+          <a:prstGeom prst="roundRect">
+            <a:avLst>
+              <a:gd name="adj" fmla="val 12000"/>
+            </a:avLst>
+          </a:prstGeom>
+          <a:solidFill>
+            <a:srgbClr val="F2F2F2"/>
+          </a:solidFill>
+          <a:ln>
+            <a:noFill/>
+          </a:ln>
+        </p:spPr>
+        <p:style>
+          <a:lnRef idx="1">
+            <a:schemeClr val="accent1"/>
+          </a:lnRef>
+          <a:fillRef idx="3">
+            <a:schemeClr val="accent1"/>
+          </a:fillRef>
+          <a:effectRef idx="2">
+            <a:schemeClr val="accent1"/>
+          </a:effectRef>
+          <a:fontRef idx="minor">
+            <a:schemeClr val="lt1"/>
+          </a:fontRef>
+        </p:style>
+        <p:txBody>
+          <a:bodyPr rtlCol="0" anchor="ctr"/>
+          <a:lstStyle/>
+          <a:p>
+            <a:pPr algn="ctr"/>
+          </a:p>
+        </p:txBody>
+      </p:sp>
+      <p:sp>
+        <p:nvSpPr>
+          <p:cNvPr id="23" name="Rectangle 22"/>
+          <p:cNvSpPr/>
+          <p:nvPr/>
+        </p:nvSpPr>
+        <p:spPr>
+          <a:xfrm>
+            <a:off x="640080" y="4325112"/>
+            <a:ext cx="274320" cy="274320"/>
+          </a:xfrm>
+          <a:prstGeom prst="rect">
+            <a:avLst/>
+          </a:prstGeom>
+          <a:solidFill>
+            <a:srgbClr val="FFFFFF"/>
+          </a:solidFill>
+          <a:ln>
+            <a:solidFill>
+              <a:srgbClr val="333333"/>
+            </a:solidFill>
+          </a:ln>
+        </p:spPr>
+        <p:style>
+          <a:lnRef idx="1">
+            <a:schemeClr val="accent1"/>
+          </a:lnRef>
+          <a:fillRef idx="3">
+            <a:schemeClr val="accent1"/>
+          </a:fillRef>
+          <a:effectRef idx="2">
+            <a:schemeClr val="accent1"/>
+          </a:effectRef>
+          <a:fontRef idx="minor">
+            <a:schemeClr val="lt1"/>
+          </a:fontRef>
+        </p:style>
+        <p:txBody>
+          <a:bodyPr rtlCol="0" anchor="ctr"/>
+          <a:lstStyle/>
+          <a:p>
+            <a:pPr algn="ctr"/>
+          </a:p>
+        </p:txBody>
+      </p:sp>
+      <p:sp>
+        <p:nvSpPr>
+          <p:cNvPr id="24" name="Rectangle 23"/>
+          <p:cNvSpPr/>
+          <p:nvPr/>
+        </p:nvSpPr>
+        <p:spPr>
+          <a:xfrm>
+            <a:off x="640080" y="4325112"/>
+            <a:ext cx="73152" cy="274320"/>
+          </a:xfrm>
+          <a:prstGeom prst="rect">
+            <a:avLst/>
+          </a:prstGeom>
+          <a:solidFill>
+            <a:srgbClr val="269CCB"/>
+          </a:solidFill>
+          <a:ln>
+            <a:noFill/>
+          </a:ln>
+        </p:spPr>
+        <p:style>
+          <a:lnRef idx="1">
+            <a:schemeClr val="accent1"/>
+          </a:lnRef>
+          <a:fillRef idx="3">
+            <a:schemeClr val="accent1"/>
+          </a:fillRef>
+          <a:effectRef idx="2">
+            <a:schemeClr val="accent1"/>
+          </a:effectRef>
+          <a:fontRef idx="minor">
+            <a:schemeClr val="lt1"/>
+          </a:fontRef>
+        </p:style>
+        <p:txBody>
+          <a:bodyPr rtlCol="0" anchor="ctr"/>
+          <a:lstStyle/>
+          <a:p>
+            <a:pPr algn="ctr"/>
+          </a:p>
+        </p:txBody>
+      </p:sp>
+      <p:sp>
+        <p:nvSpPr>
+          <p:cNvPr id="25" name="TextBox 24"/>
+          <p:cNvSpPr txBox="1"/>
+          <p:nvPr/>
+        </p:nvSpPr>
+        <p:spPr>
+          <a:xfrm>
+            <a:off x="1097280" y="4270248"/>
+            <a:ext cx="10362895" cy="402336"/>
+          </a:xfrm>
+          <a:prstGeom prst="rect">
+            <a:avLst/>
+          </a:prstGeom>
+          <a:noFill/>
+        </p:spPr>
+        <p:txBody>
+          <a:bodyPr wrap="square" anchor="ctr"/>
+          <a:lstStyle/>
+          <a:p>
+            <a:r>
+              <a:rPr sz="1500" b="1" i="0">
+                <a:solidFill>
+                  <a:srgbClr val="333333"/>
+                </a:solidFill>
+                <a:latin typeface="Calibri"/>
+              </a:rPr>
+              <a:t>LO QUE VAMOS A REUSAR</a:t>
+            </a:r>
+            <a:r>
+              <a:rPr sz="1500" b="0" i="0">
+                <a:solidFill>
+                  <a:srgbClr val="333333"/>
+                </a:solidFill>
+                <a:latin typeface="Calibri"/>
+              </a:rPr>
+              <a:t> — Qué de lo que ya existe piensan aprovechar: una idea de diseño, una forma de organizar los datos, una herramienta, una lista de errores conocidos.</a:t>
+            </a:r>
+          </a:p>
+        </p:txBody>
+      </p:sp>
+      <p:sp>
+        <p:nvSpPr>
+          <p:cNvPr id="26" name="TextBox 25"/>
+          <p:cNvSpPr txBox="1"/>
+          <p:nvPr/>
+        </p:nvSpPr>
+        <p:spPr>
+          <a:xfrm>
+            <a:off x="11185855" y="6473952"/>
+            <a:ext cx="640080" cy="274320"/>
+          </a:xfrm>
+          <a:prstGeom prst="rect">
+            <a:avLst/>
+          </a:prstGeom>
+          <a:noFill/>
+        </p:spPr>
+        <p:txBody>
+          <a:bodyPr wrap="square">
+            <a:spAutoFit/>
+          </a:bodyPr>
+          <a:lstStyle/>
+          <a:p>
+            <a:pPr algn="r"/>
+            <a:r>
+              <a:rPr sz="1100" b="0" i="0">
+                <a:solidFill>
+                  <a:srgbClr val="666666"/>
+                </a:solidFill>
+                <a:latin typeface="Calibri"/>
+              </a:rPr>
+              <a:t>20</a:t>
+            </a:r>
+          </a:p>
+        </p:txBody>
+      </p:sp>
+    </p:spTree>
+  </p:cSld>
+  <p:clrMapOvr>
+    <a:masterClrMapping/>
+  </p:clrMapOvr>
+</p:sld>
+</file>
+
+<file path=ppt/slides/slide21.xml><?xml version="1.0" encoding="utf-8"?>
+<p:sld xmlns:a="http://schemas.openxmlformats.org/drawingml/2006/main" xmlns:p="http://schemas.openxmlformats.org/presentationml/2006/main" xmlns:r="http://schemas.openxmlformats.org/officeDocument/2006/relationships">
+  <p:cSld>
+    <p:bg>
+      <p:bgPr>
+        <a:solidFill>
+          <a:srgbClr val="FFFFFF"/>
+        </a:solidFill>
+        <a:effectLst/>
+      </p:bgPr>
+    </p:bg>
+    <p:spTree>
+      <p:nvGrpSpPr>
+        <p:cNvPr id="1" name=""/>
+        <p:cNvGrpSpPr/>
+        <p:nvPr/>
+      </p:nvGrpSpPr>
+      <p:grpSpPr/>
+      <p:sp>
+        <p:nvSpPr>
+          <p:cNvPr id="2" name="Rectangle 1"/>
+          <p:cNvSpPr/>
+          <p:nvPr/>
+        </p:nvSpPr>
+        <p:spPr>
+          <a:xfrm>
+            <a:off x="0" y="0"/>
+            <a:ext cx="12191695" cy="1170432"/>
+          </a:xfrm>
+          <a:prstGeom prst="rect">
+            <a:avLst/>
+          </a:prstGeom>
+          <a:solidFill>
+            <a:srgbClr val="095292"/>
+          </a:solidFill>
+          <a:ln>
+            <a:noFill/>
+          </a:ln>
+        </p:spPr>
+        <p:style>
+          <a:lnRef idx="1">
+            <a:schemeClr val="accent1"/>
+          </a:lnRef>
+          <a:fillRef idx="3">
+            <a:schemeClr val="accent1"/>
+          </a:fillRef>
+          <a:effectRef idx="2">
+            <a:schemeClr val="accent1"/>
+          </a:effectRef>
+          <a:fontRef idx="minor">
+            <a:schemeClr val="lt1"/>
+          </a:fontRef>
+        </p:style>
+        <p:txBody>
+          <a:bodyPr rtlCol="0" anchor="ctr"/>
+          <a:lstStyle/>
+          <a:p>
+            <a:pPr algn="ctr"/>
+          </a:p>
+        </p:txBody>
+      </p:sp>
+      <p:sp>
+        <p:nvSpPr>
+          <p:cNvPr id="3" name="Rectangle 2"/>
+          <p:cNvSpPr/>
+          <p:nvPr/>
+        </p:nvSpPr>
+        <p:spPr>
+          <a:xfrm>
+            <a:off x="0" y="1170432"/>
+            <a:ext cx="12191695" cy="41148"/>
+          </a:xfrm>
+          <a:prstGeom prst="rect">
+            <a:avLst/>
+          </a:prstGeom>
+          <a:solidFill>
+            <a:srgbClr val="FFD000"/>
+          </a:solidFill>
+          <a:ln>
+            <a:noFill/>
+          </a:ln>
+        </p:spPr>
+        <p:style>
+          <a:lnRef idx="1">
+            <a:schemeClr val="accent1"/>
+          </a:lnRef>
+          <a:fillRef idx="3">
+            <a:schemeClr val="accent1"/>
+          </a:fillRef>
+          <a:effectRef idx="2">
+            <a:schemeClr val="accent1"/>
+          </a:effectRef>
+          <a:fontRef idx="minor">
+            <a:schemeClr val="lt1"/>
+          </a:fontRef>
+        </p:style>
+        <p:txBody>
+          <a:bodyPr rtlCol="0" anchor="ctr"/>
+          <a:lstStyle/>
+          <a:p>
+            <a:pPr algn="ctr"/>
+          </a:p>
+        </p:txBody>
+      </p:sp>
+      <p:sp>
+        <p:nvSpPr>
+          <p:cNvPr id="4" name="TextBox 3"/>
+          <p:cNvSpPr txBox="1"/>
+          <p:nvPr/>
+        </p:nvSpPr>
+        <p:spPr>
+          <a:xfrm>
+            <a:off x="457200" y="164592"/>
+            <a:ext cx="11277295" cy="384048"/>
+          </a:xfrm>
+          <a:prstGeom prst="rect">
+            <a:avLst/>
+          </a:prstGeom>
+          <a:noFill/>
+        </p:spPr>
+        <p:txBody>
+          <a:bodyPr wrap="square">
+            <a:spAutoFit/>
+          </a:bodyPr>
+          <a:lstStyle/>
+          <a:p>
+            <a:r>
+              <a:rPr sz="2600" b="1" i="0">
+                <a:solidFill>
+                  <a:srgbClr val="FFFFFF"/>
+                </a:solidFill>
+                <a:latin typeface="Calibri"/>
+              </a:rPr>
+              <a:t>Cómo se expone en 3 minutos</a:t>
+            </a:r>
+          </a:p>
+        </p:txBody>
+      </p:sp>
+      <p:sp>
+        <p:nvSpPr>
+          <p:cNvPr id="5" name="TextBox 4"/>
+          <p:cNvSpPr txBox="1"/>
+          <p:nvPr/>
+        </p:nvSpPr>
+        <p:spPr>
+          <a:xfrm>
+            <a:off x="457200" y="566928"/>
+            <a:ext cx="11277295" cy="411480"/>
+          </a:xfrm>
+          <a:prstGeom prst="rect">
+            <a:avLst/>
+          </a:prstGeom>
+          <a:noFill/>
+        </p:spPr>
+        <p:txBody>
+          <a:bodyPr wrap="square">
+            <a:spAutoFit/>
+          </a:bodyPr>
+          <a:lstStyle/>
+          <a:p>
+            <a:r>
+              <a:rPr sz="1400" b="0" i="0">
+                <a:solidFill>
+                  <a:srgbClr val="B8D8EE"/>
+                </a:solidFill>
+                <a:latin typeface="Calibri"/>
+              </a:rPr>
+              <a:t>Habla el vocero con la pantalla ya compartida · cronómetro en pantalla · se corta al llegar a cero</a:t>
+            </a:r>
+          </a:p>
+        </p:txBody>
+      </p:sp>
+      <p:sp>
+        <p:nvSpPr>
+          <p:cNvPr id="6" name="Rounded Rectangle 5"/>
+          <p:cNvSpPr/>
+          <p:nvPr/>
+        </p:nvSpPr>
+        <p:spPr>
+          <a:xfrm>
+            <a:off x="457200" y="1444752"/>
+            <a:ext cx="11277295" cy="908913"/>
+          </a:xfrm>
+          <a:prstGeom prst="roundRect">
+            <a:avLst>
+              <a:gd name="adj" fmla="val 12000"/>
+            </a:avLst>
+          </a:prstGeom>
+          <a:solidFill>
+            <a:srgbClr val="F2F2F2"/>
+          </a:solidFill>
+          <a:ln>
+            <a:noFill/>
+          </a:ln>
+        </p:spPr>
+        <p:style>
+          <a:lnRef idx="1">
+            <a:schemeClr val="accent1"/>
+          </a:lnRef>
+          <a:fillRef idx="3">
+            <a:schemeClr val="accent1"/>
+          </a:fillRef>
+          <a:effectRef idx="2">
+            <a:schemeClr val="accent1"/>
+          </a:effectRef>
+          <a:fontRef idx="minor">
+            <a:schemeClr val="lt1"/>
+          </a:fontRef>
+        </p:style>
+        <p:txBody>
+          <a:bodyPr rtlCol="0" anchor="ctr"/>
+          <a:lstStyle/>
+          <a:p>
+            <a:pPr algn="ctr"/>
+          </a:p>
+        </p:txBody>
+      </p:sp>
+      <p:sp>
+        <p:nvSpPr>
+          <p:cNvPr id="7" name="Rounded Rectangle 6"/>
+          <p:cNvSpPr/>
+          <p:nvPr/>
+        </p:nvSpPr>
+        <p:spPr>
+          <a:xfrm>
+            <a:off x="594360" y="1679752"/>
+            <a:ext cx="438912" cy="438912"/>
+          </a:xfrm>
+          <a:prstGeom prst="roundRect">
+            <a:avLst>
+              <a:gd name="adj" fmla="val 12000"/>
+            </a:avLst>
+          </a:prstGeom>
+          <a:solidFill>
+            <a:srgbClr val="095292"/>
+          </a:solidFill>
+          <a:ln>
+            <a:noFill/>
+          </a:ln>
+        </p:spPr>
+        <p:style>
+          <a:lnRef idx="1">
+            <a:schemeClr val="accent1"/>
+          </a:lnRef>
+          <a:fillRef idx="3">
+            <a:schemeClr val="accent1"/>
+          </a:fillRef>
+          <a:effectRef idx="2">
+            <a:schemeClr val="accent1"/>
+          </a:effectRef>
+          <a:fontRef idx="minor">
+            <a:schemeClr val="lt1"/>
+          </a:fontRef>
+        </p:style>
+        <p:txBody>
+          <a:bodyPr rtlCol="0" anchor="ctr"/>
+          <a:lstStyle/>
+          <a:p>
+            <a:pPr algn="ctr"/>
+          </a:p>
+        </p:txBody>
+      </p:sp>
+      <p:sp>
+        <p:nvSpPr>
+          <p:cNvPr id="8" name="TextBox 7"/>
+          <p:cNvSpPr txBox="1"/>
+          <p:nvPr/>
+        </p:nvSpPr>
+        <p:spPr>
+          <a:xfrm>
+            <a:off x="594360" y="1679752"/>
+            <a:ext cx="438912" cy="438912"/>
+          </a:xfrm>
+          <a:prstGeom prst="rect">
+            <a:avLst/>
+          </a:prstGeom>
+          <a:noFill/>
+        </p:spPr>
+        <p:txBody>
+          <a:bodyPr wrap="square" anchor="ctr"/>
+          <a:lstStyle/>
+          <a:p>
+            <a:pPr algn="ctr"/>
+            <a:r>
+              <a:rPr sz="1600" b="1" i="0">
+                <a:solidFill>
+                  <a:srgbClr val="FFFFFF"/>
+                </a:solidFill>
+                <a:latin typeface="Calibri"/>
+              </a:rPr>
+              <a:t>1</a:t>
+            </a:r>
+          </a:p>
+        </p:txBody>
+      </p:sp>
+      <p:sp>
+        <p:nvSpPr>
+          <p:cNvPr id="9" name="TextBox 8"/>
+          <p:cNvSpPr txBox="1"/>
+          <p:nvPr/>
+        </p:nvSpPr>
+        <p:spPr>
+          <a:xfrm>
+            <a:off x="1188720" y="1536192"/>
+            <a:ext cx="10271455" cy="744321"/>
+          </a:xfrm>
+          <a:prstGeom prst="rect">
+            <a:avLst/>
+          </a:prstGeom>
+          <a:noFill/>
+        </p:spPr>
+        <p:txBody>
+          <a:bodyPr wrap="square" anchor="ctr"/>
+          <a:lstStyle/>
+          <a:p>
+            <a:r>
+              <a:rPr sz="1500" b="1" i="0">
+                <a:solidFill>
+                  <a:srgbClr val="095292"/>
+                </a:solidFill>
+                <a:latin typeface="Calibri"/>
+              </a:rPr>
+              <a:t>25 s · La pregunta de búsqueda</a:t>
+            </a:r>
+          </a:p>
+          <a:p>
+            <a:pPr>
+              <a:spcBef>
+                <a:spcPts val="200"/>
+              </a:spcBef>
+            </a:pPr>
+            <a:r>
+              <a:rPr sz="1300" b="0" i="0">
+                <a:solidFill>
+                  <a:srgbClr val="333333"/>
+                </a:solidFill>
+                <a:latin typeface="Calibri"/>
+              </a:rPr>
+              <a:t>Leída tal cual, con un término en inglés.</a:t>
+            </a:r>
+          </a:p>
+        </p:txBody>
+      </p:sp>
+      <p:sp>
+        <p:nvSpPr>
+          <p:cNvPr id="10" name="Rounded Rectangle 9"/>
+          <p:cNvSpPr/>
+          <p:nvPr/>
+        </p:nvSpPr>
+        <p:spPr>
+          <a:xfrm>
+            <a:off x="457200" y="2445105"/>
+            <a:ext cx="11277295" cy="908913"/>
+          </a:xfrm>
+          <a:prstGeom prst="roundRect">
+            <a:avLst>
+              <a:gd name="adj" fmla="val 12000"/>
+            </a:avLst>
+          </a:prstGeom>
+          <a:solidFill>
+            <a:srgbClr val="E8F4FA"/>
+          </a:solidFill>
+          <a:ln>
+            <a:noFill/>
+          </a:ln>
+        </p:spPr>
+        <p:style>
+          <a:lnRef idx="1">
+            <a:schemeClr val="accent1"/>
+          </a:lnRef>
+          <a:fillRef idx="3">
+            <a:schemeClr val="accent1"/>
+          </a:fillRef>
+          <a:effectRef idx="2">
+            <a:schemeClr val="accent1"/>
+          </a:effectRef>
+          <a:fontRef idx="minor">
+            <a:schemeClr val="lt1"/>
+          </a:fontRef>
+        </p:style>
+        <p:txBody>
+          <a:bodyPr rtlCol="0" anchor="ctr"/>
+          <a:lstStyle/>
+          <a:p>
+            <a:pPr algn="ctr"/>
+          </a:p>
+        </p:txBody>
+      </p:sp>
+      <p:sp>
+        <p:nvSpPr>
+          <p:cNvPr id="11" name="Rounded Rectangle 10"/>
+          <p:cNvSpPr/>
+          <p:nvPr/>
+        </p:nvSpPr>
+        <p:spPr>
+          <a:xfrm>
+            <a:off x="594360" y="2680106"/>
+            <a:ext cx="438912" cy="438912"/>
+          </a:xfrm>
+          <a:prstGeom prst="roundRect">
+            <a:avLst>
+              <a:gd name="adj" fmla="val 12000"/>
+            </a:avLst>
+          </a:prstGeom>
+          <a:solidFill>
+            <a:srgbClr val="095292"/>
+          </a:solidFill>
+          <a:ln>
+            <a:noFill/>
+          </a:ln>
+        </p:spPr>
+        <p:style>
+          <a:lnRef idx="1">
+            <a:schemeClr val="accent1"/>
+          </a:lnRef>
+          <a:fillRef idx="3">
+            <a:schemeClr val="accent1"/>
+          </a:fillRef>
+          <a:effectRef idx="2">
+            <a:schemeClr val="accent1"/>
+          </a:effectRef>
+          <a:fontRef idx="minor">
+            <a:schemeClr val="lt1"/>
+          </a:fontRef>
+        </p:style>
+        <p:txBody>
+          <a:bodyPr rtlCol="0" anchor="ctr"/>
+          <a:lstStyle/>
+          <a:p>
+            <a:pPr algn="ctr"/>
+          </a:p>
+        </p:txBody>
+      </p:sp>
+      <p:sp>
+        <p:nvSpPr>
+          <p:cNvPr id="12" name="TextBox 11"/>
+          <p:cNvSpPr txBox="1"/>
+          <p:nvPr/>
+        </p:nvSpPr>
+        <p:spPr>
+          <a:xfrm>
+            <a:off x="594360" y="2680106"/>
+            <a:ext cx="438912" cy="438912"/>
+          </a:xfrm>
+          <a:prstGeom prst="rect">
+            <a:avLst/>
+          </a:prstGeom>
+          <a:noFill/>
+        </p:spPr>
+        <p:txBody>
+          <a:bodyPr wrap="square" anchor="ctr"/>
+          <a:lstStyle/>
+          <a:p>
+            <a:pPr algn="ctr"/>
+            <a:r>
+              <a:rPr sz="1600" b="1" i="0">
+                <a:solidFill>
+                  <a:srgbClr val="FFFFFF"/>
+                </a:solidFill>
+                <a:latin typeface="Calibri"/>
+              </a:rPr>
+              <a:t>2</a:t>
+            </a:r>
+          </a:p>
+        </p:txBody>
+      </p:sp>
+      <p:sp>
+        <p:nvSpPr>
+          <p:cNvPr id="13" name="TextBox 12"/>
+          <p:cNvSpPr txBox="1"/>
+          <p:nvPr/>
+        </p:nvSpPr>
+        <p:spPr>
+          <a:xfrm>
+            <a:off x="1188720" y="2536545"/>
+            <a:ext cx="10271455" cy="744321"/>
+          </a:xfrm>
+          <a:prstGeom prst="rect">
+            <a:avLst/>
+          </a:prstGeom>
+          <a:noFill/>
+        </p:spPr>
+        <p:txBody>
+          <a:bodyPr wrap="square" anchor="ctr"/>
+          <a:lstStyle/>
+          <a:p>
+            <a:r>
+              <a:rPr sz="1500" b="1" i="0">
+                <a:solidFill>
+                  <a:srgbClr val="095292"/>
+                </a:solidFill>
+                <a:latin typeface="Calibri"/>
+              </a:rPr>
+              <a:t>50 s · El antecedente más útil</a:t>
+            </a:r>
+          </a:p>
+          <a:p>
+            <a:pPr>
+              <a:spcBef>
+                <a:spcPts val="200"/>
+              </a:spcBef>
+            </a:pPr>
+            <a:r>
+              <a:rPr sz="1300" b="0" i="0">
+                <a:solidFill>
+                  <a:srgbClr val="333333"/>
+                </a:solidFill>
+                <a:latin typeface="Calibri"/>
+              </a:rPr>
+              <a:t>Cuál es, de qué año, y </a:t>
+            </a:r>
+            <a:r>
+              <a:rPr sz="1300" b="1" i="0">
+                <a:solidFill>
+                  <a:srgbClr val="333333"/>
+                </a:solidFill>
+                <a:latin typeface="Calibri"/>
+              </a:rPr>
+              <a:t>muéstrenlo en pantalla</a:t>
+            </a:r>
+            <a:r>
+              <a:rPr sz="1300" b="0" i="0">
+                <a:solidFill>
+                  <a:srgbClr val="333333"/>
+                </a:solidFill>
+                <a:latin typeface="Calibri"/>
+              </a:rPr>
+              <a:t>.</a:t>
+            </a:r>
+          </a:p>
+        </p:txBody>
+      </p:sp>
+      <p:sp>
+        <p:nvSpPr>
+          <p:cNvPr id="14" name="Rounded Rectangle 13"/>
+          <p:cNvSpPr/>
+          <p:nvPr/>
+        </p:nvSpPr>
+        <p:spPr>
+          <a:xfrm>
+            <a:off x="457200" y="3445459"/>
+            <a:ext cx="11277295" cy="908913"/>
+          </a:xfrm>
+          <a:prstGeom prst="roundRect">
+            <a:avLst>
+              <a:gd name="adj" fmla="val 12000"/>
+            </a:avLst>
+          </a:prstGeom>
+          <a:solidFill>
+            <a:srgbClr val="F2F2F2"/>
+          </a:solidFill>
+          <a:ln>
+            <a:noFill/>
+          </a:ln>
+        </p:spPr>
+        <p:style>
+          <a:lnRef idx="1">
+            <a:schemeClr val="accent1"/>
+          </a:lnRef>
+          <a:fillRef idx="3">
+            <a:schemeClr val="accent1"/>
+          </a:fillRef>
+          <a:effectRef idx="2">
+            <a:schemeClr val="accent1"/>
+          </a:effectRef>
+          <a:fontRef idx="minor">
+            <a:schemeClr val="lt1"/>
+          </a:fontRef>
+        </p:style>
+        <p:txBody>
+          <a:bodyPr rtlCol="0" anchor="ctr"/>
+          <a:lstStyle/>
+          <a:p>
+            <a:pPr algn="ctr"/>
+          </a:p>
+        </p:txBody>
+      </p:sp>
+      <p:sp>
+        <p:nvSpPr>
+          <p:cNvPr id="15" name="Rounded Rectangle 14"/>
+          <p:cNvSpPr/>
+          <p:nvPr/>
+        </p:nvSpPr>
+        <p:spPr>
+          <a:xfrm>
+            <a:off x="594360" y="3680460"/>
+            <a:ext cx="438912" cy="438912"/>
+          </a:xfrm>
+          <a:prstGeom prst="roundRect">
+            <a:avLst>
+              <a:gd name="adj" fmla="val 12000"/>
+            </a:avLst>
+          </a:prstGeom>
+          <a:solidFill>
+            <a:srgbClr val="095292"/>
+          </a:solidFill>
+          <a:ln>
+            <a:noFill/>
+          </a:ln>
+        </p:spPr>
+        <p:style>
+          <a:lnRef idx="1">
+            <a:schemeClr val="accent1"/>
+          </a:lnRef>
+          <a:fillRef idx="3">
+            <a:schemeClr val="accent1"/>
+          </a:fillRef>
+          <a:effectRef idx="2">
+            <a:schemeClr val="accent1"/>
+          </a:effectRef>
+          <a:fontRef idx="minor">
+            <a:schemeClr val="lt1"/>
+          </a:fontRef>
+        </p:style>
+        <p:txBody>
+          <a:bodyPr rtlCol="0" anchor="ctr"/>
+          <a:lstStyle/>
+          <a:p>
+            <a:pPr algn="ctr"/>
+          </a:p>
+        </p:txBody>
+      </p:sp>
+      <p:sp>
+        <p:nvSpPr>
+          <p:cNvPr id="16" name="TextBox 15"/>
+          <p:cNvSpPr txBox="1"/>
+          <p:nvPr/>
+        </p:nvSpPr>
+        <p:spPr>
+          <a:xfrm>
+            <a:off x="594360" y="3680460"/>
+            <a:ext cx="438912" cy="438912"/>
+          </a:xfrm>
+          <a:prstGeom prst="rect">
+            <a:avLst/>
+          </a:prstGeom>
+          <a:noFill/>
+        </p:spPr>
+        <p:txBody>
+          <a:bodyPr wrap="square" anchor="ctr"/>
+          <a:lstStyle/>
+          <a:p>
+            <a:pPr algn="ctr"/>
+            <a:r>
+              <a:rPr sz="1600" b="1" i="0">
+                <a:solidFill>
+                  <a:srgbClr val="FFFFFF"/>
+                </a:solidFill>
+                <a:latin typeface="Calibri"/>
+              </a:rPr>
+              <a:t>3</a:t>
+            </a:r>
+          </a:p>
+        </p:txBody>
+      </p:sp>
+      <p:sp>
+        <p:nvSpPr>
+          <p:cNvPr id="17" name="TextBox 16"/>
+          <p:cNvSpPr txBox="1"/>
+          <p:nvPr/>
+        </p:nvSpPr>
+        <p:spPr>
+          <a:xfrm>
+            <a:off x="1188720" y="3536899"/>
+            <a:ext cx="10271455" cy="744321"/>
+          </a:xfrm>
+          <a:prstGeom prst="rect">
+            <a:avLst/>
+          </a:prstGeom>
+          <a:noFill/>
+        </p:spPr>
+        <p:txBody>
+          <a:bodyPr wrap="square" anchor="ctr"/>
+          <a:lstStyle/>
+          <a:p>
+            <a:r>
+              <a:rPr sz="1500" b="1" i="0">
+                <a:solidFill>
+                  <a:srgbClr val="095292"/>
+                </a:solidFill>
+                <a:latin typeface="Calibri"/>
+              </a:rPr>
+              <a:t>50 s · Qué le falta</a:t>
+            </a:r>
+          </a:p>
+          <a:p>
+            <a:pPr>
+              <a:spcBef>
+                <a:spcPts val="200"/>
+              </a:spcBef>
+            </a:pPr>
+            <a:r>
+              <a:rPr sz="1300" b="0" i="0">
+                <a:solidFill>
+                  <a:srgbClr val="333333"/>
+                </a:solidFill>
+                <a:latin typeface="Calibri"/>
+              </a:rPr>
+              <a:t>La brecha respecto a su caso. Es el minuto obligatorio.</a:t>
+            </a:r>
+          </a:p>
+        </p:txBody>
+      </p:sp>
+      <p:sp>
+        <p:nvSpPr>
+          <p:cNvPr id="18" name="Rounded Rectangle 17"/>
+          <p:cNvSpPr/>
+          <p:nvPr/>
+        </p:nvSpPr>
+        <p:spPr>
+          <a:xfrm>
+            <a:off x="457200" y="4445812"/>
+            <a:ext cx="11277295" cy="908913"/>
+          </a:xfrm>
+          <a:prstGeom prst="roundRect">
+            <a:avLst>
+              <a:gd name="adj" fmla="val 12000"/>
+            </a:avLst>
+          </a:prstGeom>
+          <a:solidFill>
+            <a:srgbClr val="E8F4FA"/>
+          </a:solidFill>
+          <a:ln>
+            <a:noFill/>
+          </a:ln>
+        </p:spPr>
+        <p:style>
+          <a:lnRef idx="1">
+            <a:schemeClr val="accent1"/>
+          </a:lnRef>
+          <a:fillRef idx="3">
+            <a:schemeClr val="accent1"/>
+          </a:fillRef>
+          <a:effectRef idx="2">
+            <a:schemeClr val="accent1"/>
+          </a:effectRef>
+          <a:fontRef idx="minor">
+            <a:schemeClr val="lt1"/>
+          </a:fontRef>
+        </p:style>
+        <p:txBody>
+          <a:bodyPr rtlCol="0" anchor="ctr"/>
+          <a:lstStyle/>
+          <a:p>
+            <a:pPr algn="ctr"/>
+          </a:p>
+        </p:txBody>
+      </p:sp>
+      <p:sp>
+        <p:nvSpPr>
+          <p:cNvPr id="19" name="Rounded Rectangle 18"/>
+          <p:cNvSpPr/>
+          <p:nvPr/>
+        </p:nvSpPr>
+        <p:spPr>
+          <a:xfrm>
+            <a:off x="594360" y="4680813"/>
+            <a:ext cx="438912" cy="438912"/>
+          </a:xfrm>
+          <a:prstGeom prst="roundRect">
+            <a:avLst>
+              <a:gd name="adj" fmla="val 12000"/>
+            </a:avLst>
+          </a:prstGeom>
+          <a:solidFill>
+            <a:srgbClr val="095292"/>
+          </a:solidFill>
+          <a:ln>
+            <a:noFill/>
+          </a:ln>
+        </p:spPr>
+        <p:style>
+          <a:lnRef idx="1">
+            <a:schemeClr val="accent1"/>
+          </a:lnRef>
+          <a:fillRef idx="3">
+            <a:schemeClr val="accent1"/>
+          </a:fillRef>
+          <a:effectRef idx="2">
+            <a:schemeClr val="accent1"/>
+          </a:effectRef>
+          <a:fontRef idx="minor">
+            <a:schemeClr val="lt1"/>
+          </a:fontRef>
+        </p:style>
+        <p:txBody>
+          <a:bodyPr rtlCol="0" anchor="ctr"/>
+          <a:lstStyle/>
+          <a:p>
+            <a:pPr algn="ctr"/>
+          </a:p>
+        </p:txBody>
+      </p:sp>
+      <p:sp>
+        <p:nvSpPr>
+          <p:cNvPr id="20" name="TextBox 19"/>
+          <p:cNvSpPr txBox="1"/>
+          <p:nvPr/>
+        </p:nvSpPr>
+        <p:spPr>
+          <a:xfrm>
+            <a:off x="594360" y="4680813"/>
+            <a:ext cx="438912" cy="438912"/>
+          </a:xfrm>
+          <a:prstGeom prst="rect">
+            <a:avLst/>
+          </a:prstGeom>
+          <a:noFill/>
+        </p:spPr>
+        <p:txBody>
+          <a:bodyPr wrap="square" anchor="ctr"/>
+          <a:lstStyle/>
+          <a:p>
+            <a:pPr algn="ctr"/>
+            <a:r>
+              <a:rPr sz="1600" b="1" i="0">
+                <a:solidFill>
+                  <a:srgbClr val="FFFFFF"/>
+                </a:solidFill>
+                <a:latin typeface="Calibri"/>
+              </a:rPr>
+              <a:t>4</a:t>
+            </a:r>
+          </a:p>
+        </p:txBody>
+      </p:sp>
+      <p:sp>
+        <p:nvSpPr>
+          <p:cNvPr id="21" name="TextBox 20"/>
+          <p:cNvSpPr txBox="1"/>
+          <p:nvPr/>
+        </p:nvSpPr>
+        <p:spPr>
+          <a:xfrm>
+            <a:off x="1188720" y="4537252"/>
+            <a:ext cx="10271455" cy="744321"/>
+          </a:xfrm>
+          <a:prstGeom prst="rect">
+            <a:avLst/>
+          </a:prstGeom>
+          <a:noFill/>
+        </p:spPr>
+        <p:txBody>
+          <a:bodyPr wrap="square" anchor="ctr"/>
+          <a:lstStyle/>
+          <a:p>
+            <a:r>
+              <a:rPr sz="1500" b="1" i="0">
+                <a:solidFill>
+                  <a:srgbClr val="095292"/>
+                </a:solidFill>
+                <a:latin typeface="Calibri"/>
+              </a:rPr>
+              <a:t>40 s · La propuesta de mejora</a:t>
+            </a:r>
+          </a:p>
+          <a:p>
+            <a:pPr>
+              <a:spcBef>
+                <a:spcPts val="200"/>
+              </a:spcBef>
+            </a:pPr>
+            <a:r>
+              <a:rPr sz="1300" b="0" i="0">
+                <a:solidFill>
+                  <a:srgbClr val="333333"/>
+                </a:solidFill>
+                <a:latin typeface="Calibri"/>
+              </a:rPr>
+              <a:t>Qué hacen distinto y con cuál de las cuatro operaciones.</a:t>
+            </a:r>
+          </a:p>
+        </p:txBody>
+      </p:sp>
+      <p:sp>
+        <p:nvSpPr>
+          <p:cNvPr id="22" name="Rounded Rectangle 21"/>
+          <p:cNvSpPr/>
+          <p:nvPr/>
+        </p:nvSpPr>
+        <p:spPr>
+          <a:xfrm>
+            <a:off x="457200" y="5446166"/>
+            <a:ext cx="11277295" cy="908913"/>
+          </a:xfrm>
+          <a:prstGeom prst="roundRect">
+            <a:avLst>
+              <a:gd name="adj" fmla="val 12000"/>
+            </a:avLst>
+          </a:prstGeom>
+          <a:solidFill>
+            <a:srgbClr val="F2F2F2"/>
+          </a:solidFill>
+          <a:ln>
+            <a:noFill/>
+          </a:ln>
+        </p:spPr>
+        <p:style>
+          <a:lnRef idx="1">
+            <a:schemeClr val="accent1"/>
+          </a:lnRef>
+          <a:fillRef idx="3">
+            <a:schemeClr val="accent1"/>
+          </a:fillRef>
+          <a:effectRef idx="2">
+            <a:schemeClr val="accent1"/>
+          </a:effectRef>
+          <a:fontRef idx="minor">
+            <a:schemeClr val="lt1"/>
+          </a:fontRef>
+        </p:style>
+        <p:txBody>
+          <a:bodyPr rtlCol="0" anchor="ctr"/>
+          <a:lstStyle/>
+          <a:p>
+            <a:pPr algn="ctr"/>
+          </a:p>
+        </p:txBody>
+      </p:sp>
+      <p:sp>
+        <p:nvSpPr>
+          <p:cNvPr id="23" name="Rounded Rectangle 22"/>
+          <p:cNvSpPr/>
+          <p:nvPr/>
+        </p:nvSpPr>
+        <p:spPr>
+          <a:xfrm>
+            <a:off x="594360" y="5681167"/>
+            <a:ext cx="438912" cy="438912"/>
+          </a:xfrm>
+          <a:prstGeom prst="roundRect">
+            <a:avLst>
+              <a:gd name="adj" fmla="val 12000"/>
+            </a:avLst>
+          </a:prstGeom>
+          <a:solidFill>
+            <a:srgbClr val="095292"/>
+          </a:solidFill>
+          <a:ln>
+            <a:noFill/>
+          </a:ln>
+        </p:spPr>
+        <p:style>
+          <a:lnRef idx="1">
+            <a:schemeClr val="accent1"/>
+          </a:lnRef>
+          <a:fillRef idx="3">
+            <a:schemeClr val="accent1"/>
+          </a:fillRef>
+          <a:effectRef idx="2">
+            <a:schemeClr val="accent1"/>
+          </a:effectRef>
+          <a:fontRef idx="minor">
+            <a:schemeClr val="lt1"/>
+          </a:fontRef>
+        </p:style>
+        <p:txBody>
+          <a:bodyPr rtlCol="0" anchor="ctr"/>
+          <a:lstStyle/>
+          <a:p>
+            <a:pPr algn="ctr"/>
+          </a:p>
+        </p:txBody>
+      </p:sp>
+      <p:sp>
+        <p:nvSpPr>
+          <p:cNvPr id="24" name="TextBox 23"/>
+          <p:cNvSpPr txBox="1"/>
+          <p:nvPr/>
+        </p:nvSpPr>
+        <p:spPr>
+          <a:xfrm>
+            <a:off x="594360" y="5681167"/>
+            <a:ext cx="438912" cy="438912"/>
+          </a:xfrm>
+          <a:prstGeom prst="rect">
+            <a:avLst/>
+          </a:prstGeom>
+          <a:noFill/>
+        </p:spPr>
+        <p:txBody>
+          <a:bodyPr wrap="square" anchor="ctr"/>
+          <a:lstStyle/>
+          <a:p>
+            <a:pPr algn="ctr"/>
+            <a:r>
+              <a:rPr sz="1600" b="1" i="0">
+                <a:solidFill>
+                  <a:srgbClr val="FFFFFF"/>
+                </a:solidFill>
+                <a:latin typeface="Calibri"/>
+              </a:rPr>
+              <a:t>5</a:t>
+            </a:r>
+          </a:p>
+        </p:txBody>
+      </p:sp>
+      <p:sp>
+        <p:nvSpPr>
+          <p:cNvPr id="25" name="TextBox 24"/>
+          <p:cNvSpPr txBox="1"/>
+          <p:nvPr/>
+        </p:nvSpPr>
+        <p:spPr>
+          <a:xfrm>
+            <a:off x="1188720" y="5537606"/>
+            <a:ext cx="10271455" cy="744321"/>
+          </a:xfrm>
+          <a:prstGeom prst="rect">
+            <a:avLst/>
+          </a:prstGeom>
+          <a:noFill/>
+        </p:spPr>
+        <p:txBody>
+          <a:bodyPr wrap="square" anchor="ctr"/>
+          <a:lstStyle/>
+          <a:p>
+            <a:r>
+              <a:rPr sz="1500" b="1" i="0">
+                <a:solidFill>
+                  <a:srgbClr val="095292"/>
+                </a:solidFill>
+                <a:latin typeface="Calibri"/>
+              </a:rPr>
+              <a:t>15 s · Qué reusan</a:t>
+            </a:r>
+          </a:p>
+          <a:p>
+            <a:pPr>
+              <a:spcBef>
+                <a:spcPts val="200"/>
+              </a:spcBef>
+            </a:pPr>
+            <a:r>
+              <a:rPr sz="1300" b="0" i="0">
+                <a:solidFill>
+                  <a:srgbClr val="333333"/>
+                </a:solidFill>
+                <a:latin typeface="Calibri"/>
+              </a:rPr>
+              <a:t>Una cosa concreta que aprovechan de lo que ya existe.</a:t>
+            </a:r>
+          </a:p>
+        </p:txBody>
+      </p:sp>
+      <p:sp>
+        <p:nvSpPr>
+          <p:cNvPr id="26" name="TextBox 25"/>
+          <p:cNvSpPr txBox="1"/>
+          <p:nvPr/>
+        </p:nvSpPr>
+        <p:spPr>
+          <a:xfrm>
+            <a:off x="11185855" y="6473952"/>
+            <a:ext cx="640080" cy="274320"/>
+          </a:xfrm>
+          <a:prstGeom prst="rect">
+            <a:avLst/>
+          </a:prstGeom>
+          <a:noFill/>
+        </p:spPr>
+        <p:txBody>
+          <a:bodyPr wrap="square">
+            <a:spAutoFit/>
+          </a:bodyPr>
+          <a:lstStyle/>
+          <a:p>
+            <a:pPr algn="r"/>
+            <a:r>
+              <a:rPr sz="1100" b="0" i="0">
+                <a:solidFill>
+                  <a:srgbClr val="666666"/>
+                </a:solidFill>
+                <a:latin typeface="Calibri"/>
+              </a:rPr>
+              <a:t>21</a:t>
+            </a:r>
+          </a:p>
+        </p:txBody>
+      </p:sp>
+    </p:spTree>
+  </p:cSld>
+  <p:clrMapOvr>
+    <a:masterClrMapping/>
+  </p:clrMapOvr>
+</p:sld>
+</file>
+
+<file path=ppt/slides/slide22.xml><?xml version="1.0" encoding="utf-8"?>
+<p:sld xmlns:a="http://schemas.openxmlformats.org/drawingml/2006/main" xmlns:p="http://schemas.openxmlformats.org/presentationml/2006/main" xmlns:r="http://schemas.openxmlformats.org/officeDocument/2006/relationships">
+  <p:cSld>
+    <p:bg>
+      <p:bgPr>
+        <a:solidFill>
+          <a:srgbClr val="FFFFFF"/>
+        </a:solidFill>
+        <a:effectLst/>
+      </p:bgPr>
+    </p:bg>
+    <p:spTree>
+      <p:nvGrpSpPr>
+        <p:cNvPr id="1" name=""/>
+        <p:cNvGrpSpPr/>
+        <p:nvPr/>
+      </p:nvGrpSpPr>
+      <p:grpSpPr/>
+      <p:sp>
+        <p:nvSpPr>
+          <p:cNvPr id="2" name="Rectangle 1"/>
+          <p:cNvSpPr/>
+          <p:nvPr/>
+        </p:nvSpPr>
+        <p:spPr>
+          <a:xfrm>
+            <a:off x="0" y="0"/>
+            <a:ext cx="12191695" cy="960120"/>
+          </a:xfrm>
+          <a:prstGeom prst="rect">
+            <a:avLst/>
+          </a:prstGeom>
+          <a:solidFill>
+            <a:srgbClr val="095292"/>
+          </a:solidFill>
+          <a:ln>
+            <a:noFill/>
+          </a:ln>
+        </p:spPr>
+        <p:style>
+          <a:lnRef idx="1">
+            <a:schemeClr val="accent1"/>
+          </a:lnRef>
+          <a:fillRef idx="3">
+            <a:schemeClr val="accent1"/>
+          </a:fillRef>
+          <a:effectRef idx="2">
+            <a:schemeClr val="accent1"/>
+          </a:effectRef>
+          <a:fontRef idx="minor">
+            <a:schemeClr val="lt1"/>
+          </a:fontRef>
+        </p:style>
+        <p:txBody>
+          <a:bodyPr rtlCol="0" anchor="ctr"/>
+          <a:lstStyle/>
+          <a:p>
+            <a:pPr algn="ctr"/>
+          </a:p>
+        </p:txBody>
+      </p:sp>
+      <p:sp>
+        <p:nvSpPr>
+          <p:cNvPr id="3" name="Rectangle 2"/>
+          <p:cNvSpPr/>
+          <p:nvPr/>
+        </p:nvSpPr>
+        <p:spPr>
+          <a:xfrm>
+            <a:off x="0" y="960120"/>
+            <a:ext cx="12191695" cy="41148"/>
+          </a:xfrm>
+          <a:prstGeom prst="rect">
+            <a:avLst/>
+          </a:prstGeom>
+          <a:solidFill>
+            <a:srgbClr val="FFD000"/>
+          </a:solidFill>
+          <a:ln>
+            <a:noFill/>
+          </a:ln>
+        </p:spPr>
+        <p:style>
+          <a:lnRef idx="1">
+            <a:schemeClr val="accent1"/>
+          </a:lnRef>
+          <a:fillRef idx="3">
+            <a:schemeClr val="accent1"/>
+          </a:fillRef>
+          <a:effectRef idx="2">
+            <a:schemeClr val="accent1"/>
+          </a:effectRef>
+          <a:fontRef idx="minor">
+            <a:schemeClr val="lt1"/>
+          </a:fontRef>
+        </p:style>
+        <p:txBody>
+          <a:bodyPr rtlCol="0" anchor="ctr"/>
+          <a:lstStyle/>
+          <a:p>
+            <a:pPr algn="ctr"/>
+          </a:p>
+        </p:txBody>
+      </p:sp>
+      <p:sp>
+        <p:nvSpPr>
+          <p:cNvPr id="4" name="TextBox 3"/>
+          <p:cNvSpPr txBox="1"/>
+          <p:nvPr/>
+        </p:nvSpPr>
+        <p:spPr>
+          <a:xfrm>
+            <a:off x="457200" y="164592"/>
+            <a:ext cx="11277295" cy="502920"/>
+          </a:xfrm>
+          <a:prstGeom prst="rect">
+            <a:avLst/>
+          </a:prstGeom>
+          <a:noFill/>
+        </p:spPr>
+        <p:txBody>
+          <a:bodyPr wrap="square">
+            <a:spAutoFit/>
+          </a:bodyPr>
+          <a:lstStyle/>
+          <a:p>
+            <a:r>
+              <a:rPr sz="2600" b="1" i="0">
+                <a:solidFill>
+                  <a:srgbClr val="FFFFFF"/>
+                </a:solidFill>
+                <a:latin typeface="Calibri"/>
+              </a:rPr>
+              <a:t>Para la Clase 10</a:t>
+            </a:r>
+          </a:p>
+        </p:txBody>
+      </p:sp>
+      <p:sp>
+        <p:nvSpPr>
+          <p:cNvPr id="5" name="TextBox 4"/>
+          <p:cNvSpPr txBox="1"/>
+          <p:nvPr/>
+        </p:nvSpPr>
+        <p:spPr>
+          <a:xfrm>
+            <a:off x="457200" y="1170432"/>
+            <a:ext cx="11277295" cy="5230368"/>
+          </a:xfrm>
+          <a:prstGeom prst="rect">
+            <a:avLst/>
+          </a:prstGeom>
+          <a:noFill/>
+        </p:spPr>
+        <p:txBody>
+          <a:bodyPr wrap="square">
+            <a:spAutoFit/>
+          </a:bodyPr>
+          <a:lstStyle/>
+          <a:p>
+            <a:pPr>
+              <a:spcAft>
+                <a:spcPts val="800"/>
+              </a:spcAft>
+            </a:pPr>
+            <a:r>
+              <a:rPr sz="2000" b="0" i="0">
+                <a:solidFill>
+                  <a:srgbClr val="333333"/>
+                </a:solidFill>
+                <a:latin typeface="Calibri"/>
+              </a:rPr>
+              <a:t>–   </a:t>
+            </a:r>
+            <a:r>
+              <a:rPr sz="2000" b="1" i="0">
+                <a:solidFill>
+                  <a:srgbClr val="333333"/>
+                </a:solidFill>
+                <a:latin typeface="Calibri"/>
+              </a:rPr>
+              <a:t>Trabajo dirigido:</a:t>
+            </a:r>
+            <a:r>
+              <a:rPr sz="2000" b="0" i="0">
+                <a:solidFill>
+                  <a:srgbClr val="333333"/>
+                </a:solidFill>
+                <a:latin typeface="Calibri"/>
+              </a:rPr>
+              <a:t> Revisión bibliográfica — completar las tres fichas con los seis campos y </a:t>
+            </a:r>
+            <a:r>
+              <a:rPr sz="2000" b="1" i="0">
+                <a:solidFill>
+                  <a:srgbClr val="333333"/>
+                </a:solidFill>
+                <a:latin typeface="Calibri"/>
+              </a:rPr>
+              <a:t>abrir cada enlace</a:t>
+            </a:r>
+            <a:r>
+              <a:rPr sz="2000" b="0" i="0">
+                <a:solidFill>
+                  <a:srgbClr val="333333"/>
+                </a:solidFill>
+                <a:latin typeface="Calibri"/>
+              </a:rPr>
+              <a:t> para confirmar que sirve, anotando la fecha de consulta.</a:t>
+            </a:r>
+          </a:p>
+          <a:p>
+            <a:pPr>
+              <a:spcAft>
+                <a:spcPts val="800"/>
+              </a:spcAft>
+            </a:pPr>
+            <a:r>
+              <a:rPr sz="2000" b="0" i="0">
+                <a:solidFill>
+                  <a:srgbClr val="333333"/>
+                </a:solidFill>
+                <a:latin typeface="Calibri"/>
+              </a:rPr>
+              <a:t>–   </a:t>
+            </a:r>
+            <a:r>
+              <a:rPr sz="2000" b="1" i="0">
+                <a:solidFill>
+                  <a:srgbClr val="333333"/>
+                </a:solidFill>
+                <a:latin typeface="Calibri"/>
+              </a:rPr>
+              <a:t>Trabajo independiente:</a:t>
+            </a:r>
+            <a:r>
+              <a:rPr sz="2000" b="0" i="0">
+                <a:solidFill>
+                  <a:srgbClr val="333333"/>
+                </a:solidFill>
+                <a:latin typeface="Calibri"/>
+              </a:rPr>
+              <a:t> Propuesta de mejora escrita en el documento del equipo: la brecha, la operación usada y por qué importa en su contexto. Máximo una página.</a:t>
+            </a:r>
+          </a:p>
+          <a:p>
+            <a:pPr>
+              <a:spcAft>
+                <a:spcPts val="800"/>
+              </a:spcAft>
+            </a:pPr>
+            <a:r>
+              <a:rPr sz="2000" b="0" i="0">
+                <a:solidFill>
+                  <a:srgbClr val="333333"/>
+                </a:solidFill>
+                <a:latin typeface="Calibri"/>
+              </a:rPr>
+              <a:t>–   </a:t>
+            </a:r>
+            <a:r>
+              <a:rPr sz="2000" b="1" i="0">
+                <a:solidFill>
+                  <a:srgbClr val="333333"/>
+                </a:solidFill>
+                <a:latin typeface="Calibri"/>
+              </a:rPr>
+              <a:t>Clase 10 · Herramientas digitales aplicadas a la Ingeniería</a:t>
+            </a:r>
+            <a:r>
+              <a:rPr sz="2000" b="0" i="0">
+                <a:solidFill>
+                  <a:srgbClr val="333333"/>
+                </a:solidFill>
+                <a:latin typeface="Calibri"/>
+              </a:rPr>
+              <a:t> — </a:t>
+            </a:r>
+            <a:r>
+              <a:rPr sz="2000" b="1" i="0">
+                <a:solidFill>
+                  <a:srgbClr val="333333"/>
+                </a:solidFill>
+                <a:latin typeface="Calibri"/>
+              </a:rPr>
+              <a:t>prototipado</a:t>
+            </a:r>
+            <a:r>
+              <a:rPr sz="2000" b="0" i="0">
+                <a:solidFill>
+                  <a:srgbClr val="333333"/>
+                </a:solidFill>
+                <a:latin typeface="Calibri"/>
+              </a:rPr>
+              <a:t>: qué es un prototipo y qué no, los niveles de fidelidad, y por qué el dibujo a mano da mejor retroalimentación que la pantalla terminada.</a:t>
+            </a:r>
+          </a:p>
+          <a:p>
+            <a:pPr>
+              <a:spcAft>
+                <a:spcPts val="800"/>
+              </a:spcAft>
+            </a:pPr>
+            <a:r>
+              <a:rPr sz="2000" b="0" i="0">
+                <a:solidFill>
+                  <a:srgbClr val="333333"/>
+                </a:solidFill>
+                <a:latin typeface="Calibri"/>
+              </a:rPr>
+              <a:t>–   </a:t>
+            </a:r>
+            <a:r>
+              <a:rPr sz="2000" b="1" i="0">
+                <a:solidFill>
+                  <a:srgbClr val="333333"/>
+                </a:solidFill>
+                <a:latin typeface="Calibri"/>
+              </a:rPr>
+              <a:t>Aviso:</a:t>
+            </a:r>
+            <a:r>
+              <a:rPr sz="2000" b="0" i="0">
+                <a:solidFill>
+                  <a:srgbClr val="333333"/>
+                </a:solidFill>
+                <a:latin typeface="Calibri"/>
+              </a:rPr>
+              <a:t> Para la sesión 10 traigan la propuesta de mejora escrita y el </a:t>
+            </a:r>
+            <a:r>
+              <a:rPr sz="2000" b="1" i="0">
+                <a:solidFill>
+                  <a:srgbClr val="333333"/>
+                </a:solidFill>
+                <a:latin typeface="Calibri"/>
+              </a:rPr>
+              <a:t>alcance mínimo de la sesión 8</a:t>
+            </a:r>
+            <a:r>
+              <a:rPr sz="2000" b="0" i="0">
+                <a:solidFill>
+                  <a:srgbClr val="333333"/>
+                </a:solidFill>
+                <a:latin typeface="Calibri"/>
+              </a:rPr>
+              <a:t> a la vista. Se van a dibujar las tres pantallas o pasos del flujo principal, y de las fichas de hoy sale el diseño.</a:t>
+            </a:r>
+          </a:p>
+          <a:p>
+            <a:pPr>
+              <a:spcAft>
+                <a:spcPts val="800"/>
+              </a:spcAft>
+            </a:pPr>
+            <a:r>
+              <a:rPr sz="2000" b="0" i="0">
+                <a:solidFill>
+                  <a:srgbClr val="333333"/>
+                </a:solidFill>
+                <a:latin typeface="Calibri"/>
+              </a:rPr>
+              <a:t>–   </a:t>
+            </a:r>
+            <a:r>
+              <a:rPr sz="2000" b="1" i="0">
+                <a:solidFill>
+                  <a:srgbClr val="333333"/>
+                </a:solidFill>
+                <a:latin typeface="Calibri"/>
+              </a:rPr>
+              <a:t>Antes de salir:</a:t>
+            </a:r>
+            <a:r>
+              <a:rPr sz="2000" b="0" i="0">
+                <a:solidFill>
+                  <a:srgbClr val="333333"/>
+                </a:solidFill>
+                <a:latin typeface="Calibri"/>
+              </a:rPr>
+              <a:t> el enlace del documento del equipo en el chat, con permiso de lectura para el docente, y el nombre del vocero de hoy.</a:t>
+            </a:r>
+          </a:p>
+        </p:txBody>
+      </p:sp>
+      <p:sp>
+        <p:nvSpPr>
+          <p:cNvPr id="6" name="TextBox 5"/>
+          <p:cNvSpPr txBox="1"/>
+          <p:nvPr/>
+        </p:nvSpPr>
+        <p:spPr>
+          <a:xfrm>
+            <a:off x="11185855" y="6473952"/>
+            <a:ext cx="640080" cy="274320"/>
+          </a:xfrm>
+          <a:prstGeom prst="rect">
+            <a:avLst/>
+          </a:prstGeom>
+          <a:noFill/>
+        </p:spPr>
+        <p:txBody>
+          <a:bodyPr wrap="square">
+            <a:spAutoFit/>
+          </a:bodyPr>
+          <a:lstStyle/>
+          <a:p>
+            <a:pPr algn="r"/>
+            <a:r>
+              <a:rPr sz="1100" b="0" i="0">
+                <a:solidFill>
+                  <a:srgbClr val="666666"/>
+                </a:solidFill>
+                <a:latin typeface="Calibri"/>
+              </a:rPr>
+              <a:t>22</a:t>
+            </a:r>
+          </a:p>
+        </p:txBody>
+      </p:sp>
+    </p:spTree>
+  </p:cSld>
+  <p:clrMapOvr>
+    <a:masterClrMapping/>
+  </p:clrMapOvr>
+</p:sld>
+</file>
+
+<file path=ppt/slides/slide23.xml><?xml version="1.0" encoding="utf-8"?>
+<p:sld xmlns:a="http://schemas.openxmlformats.org/drawingml/2006/main" xmlns:p="http://schemas.openxmlformats.org/presentationml/2006/main" xmlns:r="http://schemas.openxmlformats.org/officeDocument/2006/relationships">
+  <p:cSld>
+    <p:bg>
+      <p:bgPr>
+        <a:solidFill>
+          <a:srgbClr val="FFFFFF"/>
+        </a:solidFill>
+        <a:effectLst/>
+      </p:bgPr>
+    </p:bg>
+    <p:spTree>
+      <p:nvGrpSpPr>
+        <p:cNvPr id="1" name=""/>
+        <p:cNvGrpSpPr/>
+        <p:nvPr/>
+      </p:nvGrpSpPr>
+      <p:grpSpPr/>
+      <p:sp>
+        <p:nvSpPr>
+          <p:cNvPr id="2" name="Rectangle 1"/>
+          <p:cNvSpPr/>
+          <p:nvPr/>
+        </p:nvSpPr>
+        <p:spPr>
+          <a:xfrm>
+            <a:off x="0" y="0"/>
+            <a:ext cx="12191695" cy="164592"/>
+          </a:xfrm>
+          <a:prstGeom prst="rect">
+            <a:avLst/>
+          </a:prstGeom>
+          <a:solidFill>
+            <a:srgbClr val="269CCB"/>
+          </a:solidFill>
+          <a:ln>
+            <a:noFill/>
+          </a:ln>
+        </p:spPr>
+        <p:style>
+          <a:lnRef idx="1">
+            <a:schemeClr val="accent1"/>
+          </a:lnRef>
+          <a:fillRef idx="3">
+            <a:schemeClr val="accent1"/>
+          </a:fillRef>
+          <a:effectRef idx="2">
+            <a:schemeClr val="accent1"/>
+          </a:effectRef>
+          <a:fontRef idx="minor">
+            <a:schemeClr val="lt1"/>
+          </a:fontRef>
+        </p:style>
+        <p:txBody>
+          <a:bodyPr rtlCol="0" anchor="ctr"/>
+          <a:lstStyle/>
+          <a:p>
+            <a:pPr algn="ctr"/>
+          </a:p>
+        </p:txBody>
+      </p:sp>
+      <p:pic>
+        <p:nvPicPr>
+          <p:cNvPr id="3" name="Picture 2" descr="logo_uniajc_color.png"/>
+          <p:cNvPicPr>
+            <a:picLocks noChangeAspect="1"/>
+          </p:cNvPicPr>
+          <p:nvPr/>
+        </p:nvPicPr>
+        <p:blipFill>
+          <a:blip r:embed="rId2"/>
+          <a:stretch>
+            <a:fillRect/>
+          </a:stretch>
+        </p:blipFill>
+        <p:spPr>
+          <a:xfrm>
+            <a:off x="10271455" y="5998464"/>
+            <a:ext cx="1463040" cy="643233"/>
+          </a:xfrm>
+          <a:prstGeom prst="rect">
+            <a:avLst/>
+          </a:prstGeom>
+        </p:spPr>
+      </p:pic>
+      <p:sp>
+        <p:nvSpPr>
+          <p:cNvPr id="4" name="TextBox 3"/>
+          <p:cNvSpPr txBox="1"/>
+          <p:nvPr/>
+        </p:nvSpPr>
+        <p:spPr>
+          <a:xfrm>
+            <a:off x="457200" y="1737360"/>
+            <a:ext cx="11277295" cy="1097280"/>
+          </a:xfrm>
+          <a:prstGeom prst="rect">
+            <a:avLst/>
+          </a:prstGeom>
+          <a:noFill/>
+        </p:spPr>
+        <p:txBody>
+          <a:bodyPr wrap="square" anchor="ctr"/>
+          <a:lstStyle/>
+          <a:p>
+            <a:pPr algn="ctr"/>
+            <a:r>
+              <a:rPr sz="3400" b="1" i="0">
+                <a:solidFill>
+                  <a:srgbClr val="095292"/>
+                </a:solidFill>
+                <a:latin typeface="Calibri"/>
+              </a:rPr>
+              <a:t>Nos vemos en la sesión 10</a:t>
+            </a:r>
+          </a:p>
+        </p:txBody>
+      </p:sp>
+      <p:sp>
+        <p:nvSpPr>
+          <p:cNvPr id="5" name="TextBox 4"/>
+          <p:cNvSpPr txBox="1"/>
+          <p:nvPr/>
+        </p:nvSpPr>
+        <p:spPr>
+          <a:xfrm>
+            <a:off x="457200" y="3017520"/>
+            <a:ext cx="11277295" cy="1645920"/>
+          </a:xfrm>
+          <a:prstGeom prst="rect">
+            <a:avLst/>
+          </a:prstGeom>
+          <a:noFill/>
+        </p:spPr>
+        <p:txBody>
+          <a:bodyPr wrap="square">
+            <a:spAutoFit/>
+          </a:bodyPr>
+          <a:lstStyle/>
+          <a:p>
+            <a:pPr algn="ctr">
+              <a:spcAft>
+                <a:spcPts val="600"/>
+              </a:spcAft>
+            </a:pPr>
+            <a:r>
+              <a:rPr sz="1600" b="0" i="0">
+                <a:solidFill>
+                  <a:srgbClr val="333333"/>
+                </a:solidFill>
+                <a:latin typeface="Calibri"/>
+              </a:rPr>
+              <a:t>Estrategias de innovación en Ingeniería · Clase 9</a:t>
+            </a:r>
+          </a:p>
+          <a:p>
+            <a:pPr algn="ctr">
+              <a:spcAft>
+                <a:spcPts val="600"/>
+              </a:spcAft>
+            </a:pPr>
+            <a:r>
+              <a:rPr sz="1600" b="0" i="0">
+                <a:solidFill>
+                  <a:srgbClr val="333333"/>
+                </a:solidFill>
+                <a:latin typeface="Calibri"/>
+              </a:rPr>
+              <a:t>FI300101 · UNIAJC · Ingeniería de Sistemas</a:t>
+            </a:r>
+          </a:p>
+        </p:txBody>
+      </p:sp>
+      <p:sp>
+        <p:nvSpPr>
+          <p:cNvPr id="6" name="TextBox 5"/>
+          <p:cNvSpPr txBox="1"/>
+          <p:nvPr/>
+        </p:nvSpPr>
+        <p:spPr>
+          <a:xfrm>
+            <a:off x="457200" y="4754880"/>
+            <a:ext cx="11277295" cy="640080"/>
+          </a:xfrm>
+          <a:prstGeom prst="rect">
+            <a:avLst/>
+          </a:prstGeom>
+          <a:noFill/>
+        </p:spPr>
+        <p:txBody>
+          <a:bodyPr wrap="square">
+            <a:spAutoFit/>
+          </a:bodyPr>
+          <a:lstStyle/>
+          <a:p>
+            <a:pPr algn="ctr"/>
+            <a:r>
+              <a:rPr sz="2000" b="1" i="0">
+                <a:solidFill>
+                  <a:srgbClr val="269CCB"/>
+                </a:solidFill>
+                <a:latin typeface="Calibri"/>
+              </a:rPr>
+              <a:t>Nadie parte de cero: lo que se cita se puede abrir, y lo que se mejora se puede señalar</a:t>
             </a:r>
           </a:p>
         </p:txBody>

--- a/Introduccion a la Ingenieria/Clases/Clase 9 - Estrategias de innovacion en Ingenieria/Presentacion.pptx
+++ b/Introduccion a la Ingenieria/Clases/Clase 9 - Estrategias de innovacion en Ingenieria/Presentacion.pptx
@@ -3661,7 +3661,7 @@
               </a:spcAft>
             </a:pPr>
             <a:r>
-              <a:rPr sz="1900" b="0" i="0">
+              <a:rPr sz="2000" b="0" i="0">
                 <a:solidFill>
                   <a:srgbClr val="333333"/>
                 </a:solidFill>
@@ -3677,13 +3677,31 @@
               </a:spcAft>
             </a:pPr>
             <a:r>
-              <a:rPr sz="1900" b="0" i="0">
-                <a:solidFill>
-                  <a:srgbClr val="333333"/>
-                </a:solidFill>
-                <a:latin typeface="Calibri"/>
-              </a:rPr>
-              <a:t>–   La respuesta estadística es dura: en un mundo con millones de ingenieros y cincuenta años de software publicado, la probabilidad de que un problema común —disponibilidad, inventario, turnos, avisos— no tenga antecedentes es prácticamente cero.</a:t>
+              <a:rPr sz="2000" b="0" i="0">
+                <a:solidFill>
+                  <a:srgbClr val="333333"/>
+                </a:solidFill>
+                <a:latin typeface="Calibri"/>
+              </a:rPr>
+              <a:t>–   El encuadre que funciona: </a:t>
+            </a:r>
+            <a:r>
+              <a:rPr sz="2000" b="1" i="0">
+                <a:solidFill>
+                  <a:srgbClr val="333333"/>
+                </a:solidFill>
+                <a:latin typeface="Calibri"/>
+              </a:rPr>
+              <a:t>buscar antecedentes no le quita mérito al proyecto, le da argumento</a:t>
+            </a:r>
+            <a:r>
+              <a:rPr sz="2000" b="0" i="0">
+                <a:solidFill>
+                  <a:srgbClr val="333333"/>
+                </a:solidFill>
+                <a:latin typeface="Calibri"/>
+              </a:rPr>
+              <a:t>.</a:t>
             </a:r>
           </a:p>
           <a:p>
@@ -3693,13 +3711,13 @@
               </a:spcAft>
             </a:pPr>
             <a:r>
-              <a:rPr sz="1900" b="0" i="0">
-                <a:solidFill>
-                  <a:srgbClr val="333333"/>
-                </a:solidFill>
-                <a:latin typeface="Calibri"/>
-              </a:rPr>
-              <a:t>–   Lo que hay que evitar es que el grupo lo lea como un desaire.</a:t>
+              <a:rPr sz="2000" b="0" i="0">
+                <a:solidFill>
+                  <a:srgbClr val="333333"/>
+                </a:solidFill>
+                <a:latin typeface="Calibri"/>
+              </a:rPr>
+              <a:t>–   Aproveche el muro para recoger las respuestas y luego voltee la pregunta: *¿qué sería peor, descubrir hoy que ya existe</a:t>
             </a:r>
           </a:p>
           <a:p>
@@ -3709,89 +3727,7 @@
               </a:spcAft>
             </a:pPr>
             <a:r>
-              <a:rPr sz="1900" b="0" i="0">
-                <a:solidFill>
-                  <a:srgbClr val="333333"/>
-                </a:solidFill>
-                <a:latin typeface="Calibri"/>
-              </a:rPr>
-              <a:t>–   El encuadre que funciona: </a:t>
-            </a:r>
-            <a:r>
-              <a:rPr sz="1900" b="1" i="0">
-                <a:solidFill>
-                  <a:srgbClr val="333333"/>
-                </a:solidFill>
-                <a:latin typeface="Calibri"/>
-              </a:rPr>
-              <a:t>buscar antecedentes no le quita mérito al proyecto, le da argumento</a:t>
-            </a:r>
-            <a:r>
-              <a:rPr sz="1900" b="0" i="0">
-                <a:solidFill>
-                  <a:srgbClr val="333333"/>
-                </a:solidFill>
-                <a:latin typeface="Calibri"/>
-              </a:rPr>
-              <a:t>.</a:t>
-            </a:r>
-          </a:p>
-          <a:p>
-            <a:pPr>
-              <a:spcAft>
-                <a:spcPts val="800"/>
-              </a:spcAft>
-            </a:pPr>
-            <a:r>
-              <a:rPr sz="1900" b="0" i="0">
-                <a:solidFill>
-                  <a:srgbClr val="333333"/>
-                </a:solidFill>
-                <a:latin typeface="Calibri"/>
-              </a:rPr>
-              <a:t>–   Un equipo que dice «esto no existe» está apostando; un equipo que dice «existen estas tres soluciones, ninguna funciona sin computador en el mostrador, y nosotros resolvemos justamente eso» tiene una posición defendible ante cualquiera.</a:t>
-            </a:r>
-          </a:p>
-          <a:p>
-            <a:pPr>
-              <a:spcAft>
-                <a:spcPts val="800"/>
-              </a:spcAft>
-            </a:pPr>
-            <a:r>
-              <a:rPr sz="1900" b="0" i="0">
-                <a:solidFill>
-                  <a:srgbClr val="333333"/>
-                </a:solidFill>
-                <a:latin typeface="Calibri"/>
-              </a:rPr>
-              <a:t>–   La segunda frase es la que se califica en la Clase 15.</a:t>
-            </a:r>
-          </a:p>
-          <a:p>
-            <a:pPr>
-              <a:spcAft>
-                <a:spcPts val="800"/>
-              </a:spcAft>
-            </a:pPr>
-            <a:r>
-              <a:rPr sz="1900" b="0" i="0">
-                <a:solidFill>
-                  <a:srgbClr val="333333"/>
-                </a:solidFill>
-                <a:latin typeface="Calibri"/>
-              </a:rPr>
-              <a:t>–   Aproveche el muro para recoger las respuestas y luego voltee la pregunta: *¿qué sería peor, descubrir hoy que ya existe</a:t>
-            </a:r>
-          </a:p>
-          <a:p>
-            <a:pPr>
-              <a:spcAft>
-                <a:spcPts val="800"/>
-              </a:spcAft>
-            </a:pPr>
-            <a:r>
-              <a:rPr sz="1900" b="0" i="0">
+              <a:rPr sz="2000" b="0" i="0">
                 <a:solidFill>
                   <a:srgbClr val="333333"/>
                 </a:solidFill>
@@ -4117,22 +4053,6 @@
                 </a:solidFill>
                 <a:latin typeface="Calibri"/>
               </a:rPr>
-              <a:t>–   Si nadie la usa, fue un experimento — respetable, pero no innovación.</a:t>
-            </a:r>
-          </a:p>
-          <a:p>
-            <a:pPr>
-              <a:spcAft>
-                <a:spcPts val="800"/>
-              </a:spcAft>
-            </a:pPr>
-            <a:r>
-              <a:rPr sz="2000" b="0" i="0">
-                <a:solidFill>
-                  <a:srgbClr val="333333"/>
-                </a:solidFill>
-                <a:latin typeface="Calibri"/>
-              </a:rPr>
               <a:t>–   Esto tiene una consecuencia directa sobre sus proyectos y conviene decirla: la biblioteca que empieza a usar una lista publicada es más innovadora que la aplicación perfecta que quedó en el computador del equipo. </a:t>
             </a:r>
             <a:r>
@@ -4408,38 +4328,6 @@
               <a:t> de cosas que ya existían, traídas a un contexto donde no estaban.</a:t>
             </a:r>
           </a:p>
-          <a:p>
-            <a:pPr>
-              <a:spcAft>
-                <a:spcPts val="800"/>
-              </a:spcAft>
-            </a:pPr>
-            <a:r>
-              <a:rPr sz="2000" b="0" i="0">
-                <a:solidFill>
-                  <a:srgbClr val="333333"/>
-                </a:solidFill>
-                <a:latin typeface="Calibri"/>
-              </a:rPr>
-              <a:t>–   Eso convierte la búsqueda de antecedentes en la materia prima del proyecto, y no en un requisito académico.</a:t>
-            </a:r>
-          </a:p>
-          <a:p>
-            <a:pPr>
-              <a:spcAft>
-                <a:spcPts val="800"/>
-              </a:spcAft>
-            </a:pPr>
-            <a:r>
-              <a:rPr sz="2000" b="0" i="0">
-                <a:solidFill>
-                  <a:srgbClr val="333333"/>
-                </a:solidFill>
-                <a:latin typeface="Calibri"/>
-              </a:rPr>
-              <a:t>–   Sin antecedentes no hay con qué recombinar.</a:t>
-            </a:r>
-          </a:p>
         </p:txBody>
       </p:sp>
       <p:sp>
@@ -4741,7 +4629,7 @@
                 </a:solidFill>
                 <a:latin typeface="Calibri"/>
               </a:rPr>
-              <a:t>–   Quitar un paso, un requisito, un dato, una pantalla.</a:t>
+              <a:t>–   En el caso de la biblioteca: quitar el registro previo del usuario, quitar la contraseña, quitar la visita presencial.</a:t>
             </a:r>
           </a:p>
           <a:p>
@@ -4757,7 +4645,7 @@
                 </a:solidFill>
                 <a:latin typeface="Calibri"/>
               </a:rPr>
-              <a:t>–   En el caso de la biblioteca: quitar el registro previo del usuario, quitar la contraseña, quitar la visita presencial.</a:t>
+              <a:t>–   Cada cosa que se quita elimina una razón para que la solución no se use.</a:t>
             </a:r>
           </a:p>
           <a:p>
@@ -4773,15 +4661,17 @@
                 </a:solidFill>
                 <a:latin typeface="Calibri"/>
               </a:rPr>
-              <a:t>–   Cada cosa que se quita elimina una razón para que la solución no se use.</a:t>
-            </a:r>
-          </a:p>
-          <a:p>
-            <a:pPr>
-              <a:spcAft>
-                <a:spcPts val="800"/>
-              </a:spcAft>
-            </a:pPr>
+              <a:t>–   Es la operación de la que sale la mayoría de las innovaciones incrementales reales. </a:t>
+            </a:r>
+            <a:r>
+              <a:rPr sz="2000" b="1" i="0">
+                <a:solidFill>
+                  <a:srgbClr val="333333"/>
+                </a:solidFill>
+                <a:latin typeface="Calibri"/>
+              </a:rPr>
+              <a:t>INVERTIR</a:t>
+            </a:r>
             <a:r>
               <a:rPr sz="2000" b="0" i="0">
                 <a:solidFill>
@@ -4789,59 +4679,7 @@
                 </a:solidFill>
                 <a:latin typeface="Calibri"/>
               </a:rPr>
-              <a:t>–   Vale la pena señalar que </a:t>
-            </a:r>
-            <a:r>
-              <a:rPr sz="2000" b="1" i="0">
-                <a:solidFill>
-                  <a:srgbClr val="333333"/>
-                </a:solidFill>
-                <a:latin typeface="Calibri"/>
-              </a:rPr>
-              <a:t>quitar también reduce la huella</a:t>
-            </a:r>
-            <a:r>
-              <a:rPr sz="2000" b="0" i="0">
-                <a:solidFill>
-                  <a:srgbClr val="333333"/>
-                </a:solidFill>
-                <a:latin typeface="Calibri"/>
-              </a:rPr>
-              <a:t> —menos datos, menos consultas, menos transferencia—</a:t>
-            </a:r>
-          </a:p>
-          <a:p>
-            <a:pPr>
-              <a:spcAft>
-                <a:spcPts val="800"/>
-              </a:spcAft>
-            </a:pPr>
-            <a:r>
-              <a:rPr sz="2000" b="0" i="0">
-                <a:solidFill>
-                  <a:srgbClr val="333333"/>
-                </a:solidFill>
-                <a:latin typeface="Calibri"/>
-              </a:rPr>
-              <a:t>–   Que es el indicador de la sesión 5. </a:t>
-            </a:r>
-            <a:r>
-              <a:rPr sz="2000" b="1" i="0">
-                <a:solidFill>
-                  <a:srgbClr val="333333"/>
-                </a:solidFill>
-                <a:latin typeface="Calibri"/>
-              </a:rPr>
-              <a:t>COMBINAR</a:t>
-            </a:r>
-            <a:r>
-              <a:rPr sz="2000" b="0" i="0">
-                <a:solidFill>
-                  <a:srgbClr val="333333"/>
-                </a:solidFill>
-                <a:latin typeface="Calibri"/>
-              </a:rPr>
-              <a:t> es juntar dos cosas que ya existen y que nadie había juntado en ese contexto: una lista publicada más un mensaje automático; un formulario más un tablero.</a:t>
+              <a:t> es dar vuelta a quién hace el trabajo o cuándo se hace: que el usuario consulte en vez de que alguien responda —que es exactamente la decisión de la sesión 8—, que el dato se cargue al cerrar y no en el momento de atender.</a:t>
             </a:r>
           </a:p>
         </p:txBody>
@@ -5061,40 +4899,6 @@
                 </a:solidFill>
                 <a:latin typeface="Calibri"/>
               </a:rPr>
-              <a:t>–   Es la operación de la que sale la mayoría de las innovaciones incrementales reales. </a:t>
-            </a:r>
-            <a:r>
-              <a:rPr sz="2000" b="1" i="0">
-                <a:solidFill>
-                  <a:srgbClr val="333333"/>
-                </a:solidFill>
-                <a:latin typeface="Calibri"/>
-              </a:rPr>
-              <a:t>INVERTIR</a:t>
-            </a:r>
-            <a:r>
-              <a:rPr sz="2000" b="0" i="0">
-                <a:solidFill>
-                  <a:srgbClr val="333333"/>
-                </a:solidFill>
-                <a:latin typeface="Calibri"/>
-              </a:rPr>
-              <a:t> es dar vuelta a quién hace el trabajo o cuándo se hace: que el usuario consulte en vez de que alguien responda —que es exactamente la decisión de la sesión 8—, que el dato se cargue al cerrar y no en el momento de atender.</a:t>
-            </a:r>
-          </a:p>
-          <a:p>
-            <a:pPr>
-              <a:spcAft>
-                <a:spcPts val="800"/>
-              </a:spcAft>
-            </a:pPr>
-            <a:r>
-              <a:rPr sz="2000" b="0" i="0">
-                <a:solidFill>
-                  <a:srgbClr val="333333"/>
-                </a:solidFill>
-                <a:latin typeface="Calibri"/>
-              </a:rPr>
               <a:t>–   Invertir suele resolver restricciones de personal, que son las más duras y las que menos se pueden comprar. </a:t>
             </a:r>
             <a:r>
@@ -6059,22 +5863,6 @@
                 </a:solidFill>
                 <a:latin typeface="Calibri"/>
               </a:rPr>
-              <a:t>–   Esto le resuelve a un estudiante de primer semestre el muro más desmoralizante de la búsqueda académica.</a:t>
-            </a:r>
-          </a:p>
-          <a:p>
-            <a:pPr>
-              <a:spcAft>
-                <a:spcPts val="800"/>
-              </a:spcAft>
-            </a:pPr>
-            <a:r>
-              <a:rPr sz="2000" b="0" i="0">
-                <a:solidFill>
-                  <a:srgbClr val="333333"/>
-                </a:solidFill>
-                <a:latin typeface="Calibri"/>
-              </a:rPr>
               <a:t>–   Los </a:t>
             </a:r>
             <a:r>
@@ -6434,22 +6222,6 @@
                 <a:latin typeface="Calibri"/>
               </a:rPr>
               <a:t>.</a:t>
-            </a:r>
-          </a:p>
-          <a:p>
-            <a:pPr>
-              <a:spcAft>
-                <a:spcPts val="800"/>
-              </a:spcAft>
-            </a:pPr>
-            <a:r>
-              <a:rPr sz="2000" b="0" i="0">
-                <a:solidFill>
-                  <a:srgbClr val="333333"/>
-                </a:solidFill>
-                <a:latin typeface="Calibri"/>
-              </a:rPr>
-              <a:t>–   Ha habido abogados sancionados por presentar ante un juez citas de jurisprudencia generadas así.</a:t>
             </a:r>
           </a:p>
           <a:p>

--- a/Introduccion a la Ingenieria/Clases/Clase 9 - Estrategias de innovacion en Ingenieria/Presentacion.pptx
+++ b/Introduccion a la Ingenieria/Clases/Clase 9 - Estrategias de innovacion en Ingenieria/Presentacion.pptx
@@ -28,6 +28,8 @@
     <p:sldId id="276" r:id="rId27"/>
     <p:sldId id="277" r:id="rId28"/>
     <p:sldId id="278" r:id="rId29"/>
+    <p:sldId id="279" r:id="rId30"/>
+    <p:sldId id="280" r:id="rId31"/>
   </p:sldIdLst>
   <p:sldSz cx="12191695" cy="6858000" type="screen4x3"/>
   <p:notesSz cx="6858000" cy="9144000"/>
@@ -7527,7 +7529,7 @@
         <p:spPr>
           <a:xfrm>
             <a:off x="0" y="0"/>
-            <a:ext cx="12191695" cy="1170432"/>
+            <a:ext cx="12191695" cy="960120"/>
           </a:xfrm>
           <a:prstGeom prst="rect">
             <a:avLst/>
@@ -7569,7 +7571,7 @@
         </p:nvSpPr>
         <p:spPr>
           <a:xfrm>
-            <a:off x="0" y="1170432"/>
+            <a:off x="0" y="960120"/>
             <a:ext cx="12191695" cy="41148"/>
           </a:xfrm>
           <a:prstGeom prst="rect">
@@ -7613,7 +7615,7 @@
         <p:spPr>
           <a:xfrm>
             <a:off x="457200" y="164592"/>
-            <a:ext cx="11277295" cy="384048"/>
+            <a:ext cx="11277295" cy="502920"/>
           </a:xfrm>
           <a:prstGeom prst="rect">
             <a:avLst/>
@@ -7633,55 +7635,21 @@
                 </a:solidFill>
                 <a:latin typeface="Calibri"/>
               </a:rPr>
-              <a:t>Taller de hoy: Antecedentes y propuesta de mejora</a:t>
-            </a:r>
-          </a:p>
-        </p:txBody>
-      </p:sp>
-      <p:sp>
-        <p:nvSpPr>
-          <p:cNvPr id="5" name="TextBox 4"/>
-          <p:cNvSpPr txBox="1"/>
-          <p:nvPr/>
-        </p:nvSpPr>
-        <p:spPr>
-          <a:xfrm>
-            <a:off x="457200" y="566928"/>
-            <a:ext cx="11277295" cy="411480"/>
-          </a:xfrm>
-          <a:prstGeom prst="rect">
-            <a:avLst/>
-          </a:prstGeom>
-          <a:noFill/>
-        </p:spPr>
-        <p:txBody>
-          <a:bodyPr wrap="square">
-            <a:spAutoFit/>
-          </a:bodyPr>
-          <a:lstStyle/>
-          <a:p>
-            <a:r>
-              <a:rPr sz="1400" b="0" i="0">
-                <a:solidFill>
-                  <a:srgbClr val="B8D8EE"/>
-                </a:solidFill>
-                <a:latin typeface="Calibri"/>
-              </a:rPr>
-              <a:t>17 min en equipos · búsqueda repartida: 2 académico · 2 soluciones reales · 1 normas · tres fichas de antecedentes + propuesta de mejora + mapa en Excalidraw</a:t>
-            </a:r>
-          </a:p>
-        </p:txBody>
-      </p:sp>
-      <p:sp>
-        <p:nvSpPr>
-          <p:cNvPr id="6" name="Rounded Rectangle 5"/>
+              <a:t>Plantilla del entregable: los 5 bloques</a:t>
+            </a:r>
+          </a:p>
+        </p:txBody>
+      </p:sp>
+      <p:sp>
+        <p:nvSpPr>
+          <p:cNvPr id="5" name="Rounded Rectangle 4"/>
           <p:cNvSpPr/>
           <p:nvPr/>
         </p:nvSpPr>
         <p:spPr>
           <a:xfrm>
-            <a:off x="457200" y="1472184"/>
-            <a:ext cx="11277295" cy="566928"/>
+            <a:off x="457200" y="1261872"/>
+            <a:ext cx="11277295" cy="5093208"/>
           </a:xfrm>
           <a:prstGeom prst="roundRect">
             <a:avLst>
@@ -7689,7 +7657,7 @@
             </a:avLst>
           </a:prstGeom>
           <a:solidFill>
-            <a:srgbClr val="F2F2F2"/>
+            <a:srgbClr val="1E2A38"/>
           </a:solidFill>
           <a:ln>
             <a:noFill/>
@@ -7719,25 +7687,23 @@
       </p:sp>
       <p:sp>
         <p:nvSpPr>
-          <p:cNvPr id="7" name="Rectangle 6"/>
+          <p:cNvPr id="6" name="Rectangle 5"/>
           <p:cNvSpPr/>
           <p:nvPr/>
         </p:nvSpPr>
         <p:spPr>
           <a:xfrm>
-            <a:off x="640080" y="1618487"/>
-            <a:ext cx="274320" cy="274320"/>
+            <a:off x="457200" y="1261872"/>
+            <a:ext cx="11277295" cy="320040"/>
           </a:xfrm>
           <a:prstGeom prst="rect">
             <a:avLst/>
           </a:prstGeom>
           <a:solidFill>
-            <a:srgbClr val="FFFFFF"/>
+            <a:srgbClr val="095292"/>
           </a:solidFill>
           <a:ln>
-            <a:solidFill>
-              <a:srgbClr val="333333"/>
-            </a:solidFill>
+            <a:noFill/>
           </a:ln>
         </p:spPr>
         <p:style>
@@ -7764,859 +7730,222 @@
       </p:sp>
       <p:sp>
         <p:nvSpPr>
-          <p:cNvPr id="8" name="Rectangle 7"/>
-          <p:cNvSpPr/>
-          <p:nvPr/>
-        </p:nvSpPr>
-        <p:spPr>
-          <a:xfrm>
-            <a:off x="640080" y="1618487"/>
-            <a:ext cx="73152" cy="274320"/>
-          </a:xfrm>
-          <a:prstGeom prst="rect">
-            <a:avLst/>
-          </a:prstGeom>
-          <a:solidFill>
-            <a:srgbClr val="269CCB"/>
-          </a:solidFill>
-          <a:ln>
-            <a:noFill/>
-          </a:ln>
-        </p:spPr>
-        <p:style>
-          <a:lnRef idx="1">
-            <a:schemeClr val="accent1"/>
-          </a:lnRef>
-          <a:fillRef idx="3">
-            <a:schemeClr val="accent1"/>
-          </a:fillRef>
-          <a:effectRef idx="2">
-            <a:schemeClr val="accent1"/>
-          </a:effectRef>
-          <a:fontRef idx="minor">
-            <a:schemeClr val="lt1"/>
-          </a:fontRef>
-        </p:style>
-        <p:txBody>
-          <a:bodyPr rtlCol="0" anchor="ctr"/>
-          <a:lstStyle/>
-          <a:p>
-            <a:pPr algn="ctr"/>
+          <p:cNvPr id="7" name="TextBox 6"/>
+          <p:cNvSpPr txBox="1"/>
+          <p:nvPr/>
+        </p:nvSpPr>
+        <p:spPr>
+          <a:xfrm>
+            <a:off x="685800" y="1307592"/>
+            <a:ext cx="10820095" cy="256032"/>
+          </a:xfrm>
+          <a:prstGeom prst="rect">
+            <a:avLst/>
+          </a:prstGeom>
+          <a:noFill/>
+        </p:spPr>
+        <p:txBody>
+          <a:bodyPr wrap="square" anchor="ctr"/>
+          <a:lstStyle/>
+          <a:p>
+            <a:r>
+              <a:rPr sz="1000" b="1" i="0">
+                <a:solidFill>
+                  <a:srgbClr val="269CCB"/>
+                </a:solidFill>
+                <a:latin typeface="Calibri"/>
+              </a:rPr>
+              <a:t>● ● ●</a:t>
+            </a:r>
+          </a:p>
+        </p:txBody>
+      </p:sp>
+      <p:sp>
+        <p:nvSpPr>
+          <p:cNvPr id="8" name="TextBox 7"/>
+          <p:cNvSpPr txBox="1"/>
+          <p:nvPr/>
+        </p:nvSpPr>
+        <p:spPr>
+          <a:xfrm>
+            <a:off x="777240" y="1719072"/>
+            <a:ext cx="10637215" cy="4453128"/>
+          </a:xfrm>
+          <a:prstGeom prst="rect">
+            <a:avLst/>
+          </a:prstGeom>
+          <a:noFill/>
+        </p:spPr>
+        <p:txBody>
+          <a:bodyPr wrap="square">
+            <a:spAutoFit/>
+          </a:bodyPr>
+          <a:lstStyle/>
+          <a:p>
+            <a:pPr>
+              <a:spcAft>
+                <a:spcPts val="400"/>
+              </a:spcAft>
+            </a:pPr>
+            <a:r>
+              <a:rPr sz="1400" b="0" i="0">
+                <a:solidFill>
+                  <a:srgbClr val="FFFFFF"/>
+                </a:solidFill>
+                <a:latin typeface="Calibri"/>
+              </a:rPr>
+              <a:t># Antecedentes y propuesta de mejora</a:t>
+            </a:r>
+          </a:p>
+          <a:p>
+            <a:pPr>
+              <a:spcAft>
+                <a:spcPts val="400"/>
+              </a:spcAft>
+            </a:pPr>
+            <a:r>
+              <a:rPr sz="1400" b="0" i="0">
+                <a:solidFill>
+                  <a:srgbClr val="FFFFFF"/>
+                </a:solidFill>
+                <a:latin typeface="Calibri"/>
+              </a:rPr>
+              <a:t># Documento del equipo · un bloque por titulo, sin cambiar los nombres</a:t>
+            </a:r>
+          </a:p>
+          <a:p>
+            <a:pPr>
+              <a:spcAft>
+                <a:spcPts val="400"/>
+              </a:spcAft>
+            </a:pPr>
+            <a:r>
+              <a:rPr sz="1400" b="0" i="0">
+                <a:solidFill>
+                  <a:srgbClr val="FFFFFF"/>
+                </a:solidFill>
+                <a:latin typeface="Calibri"/>
+              </a:rPr>
+              <a:t/>
+            </a:r>
+          </a:p>
+          <a:p>
+            <a:pPr>
+              <a:spcAft>
+                <a:spcPts val="400"/>
+              </a:spcAft>
+            </a:pPr>
+            <a:r>
+              <a:rPr sz="1400" b="0" i="0">
+                <a:solidFill>
+                  <a:srgbClr val="FFFFFF"/>
+                </a:solidFill>
+                <a:latin typeface="Calibri"/>
+              </a:rPr>
+              <a:t>## 1. LA PREGUNTA DE BÚSQUEDA</a:t>
+            </a:r>
+          </a:p>
+          <a:p>
+            <a:pPr>
+              <a:spcAft>
+                <a:spcPts val="400"/>
+              </a:spcAft>
+            </a:pPr>
+            <a:r>
+              <a:rPr sz="1400" b="0" i="0">
+                <a:solidFill>
+                  <a:srgbClr val="FFFFFF"/>
+                </a:solidFill>
+                <a:latin typeface="Calibri"/>
+              </a:rPr>
+              <a:t>## 2. TRES ANTECEDENTES FICHADOS</a:t>
+            </a:r>
+          </a:p>
+          <a:p>
+            <a:pPr>
+              <a:spcAft>
+                <a:spcPts val="400"/>
+              </a:spcAft>
+            </a:pPr>
+            <a:r>
+              <a:rPr sz="1400" b="0" i="0">
+                <a:solidFill>
+                  <a:srgbClr val="FFFFFF"/>
+                </a:solidFill>
+                <a:latin typeface="Calibri"/>
+              </a:rPr>
+              <a:t>## 3. QUÉ BUSCAMOS Y NO ENCONTRAMOS</a:t>
+            </a:r>
+          </a:p>
+          <a:p>
+            <a:pPr>
+              <a:spcAft>
+                <a:spcPts val="400"/>
+              </a:spcAft>
+            </a:pPr>
+            <a:r>
+              <a:rPr sz="1400" b="0" i="0">
+                <a:solidFill>
+                  <a:srgbClr val="FFFFFF"/>
+                </a:solidFill>
+                <a:latin typeface="Calibri"/>
+              </a:rPr>
+              <a:t>## 4. LA PROPUESTA DE MEJORA</a:t>
+            </a:r>
+          </a:p>
+          <a:p>
+            <a:pPr>
+              <a:spcAft>
+                <a:spcPts val="400"/>
+              </a:spcAft>
+            </a:pPr>
+            <a:r>
+              <a:rPr sz="1400" b="0" i="0">
+                <a:solidFill>
+                  <a:srgbClr val="FFFFFF"/>
+                </a:solidFill>
+                <a:latin typeface="Calibri"/>
+              </a:rPr>
+              <a:t>## 5. LO QUE VAMOS A REUSAR</a:t>
+            </a:r>
+          </a:p>
+          <a:p>
+            <a:pPr>
+              <a:spcAft>
+                <a:spcPts val="400"/>
+              </a:spcAft>
+            </a:pPr>
+            <a:r>
+              <a:rPr sz="1400" b="0" i="0">
+                <a:solidFill>
+                  <a:srgbClr val="FFFFFF"/>
+                </a:solidFill>
+                <a:latin typeface="Calibri"/>
+              </a:rPr>
+              <a:t/>
+            </a:r>
+          </a:p>
+          <a:p>
+            <a:pPr>
+              <a:spcAft>
+                <a:spcPts val="400"/>
+              </a:spcAft>
+            </a:pPr>
+            <a:r>
+              <a:rPr sz="1400" b="0" i="0">
+                <a:solidFill>
+                  <a:srgbClr val="FFFFFF"/>
+                </a:solidFill>
+                <a:latin typeface="Calibri"/>
+              </a:rPr>
+              <a:t># Los titulos van TAL CUAL: son con los que se califica.</a:t>
+            </a:r>
           </a:p>
         </p:txBody>
       </p:sp>
       <p:sp>
         <p:nvSpPr>
           <p:cNvPr id="9" name="TextBox 8"/>
-          <p:cNvSpPr txBox="1"/>
-          <p:nvPr/>
-        </p:nvSpPr>
-        <p:spPr>
-          <a:xfrm>
-            <a:off x="1097280" y="1563624"/>
-            <a:ext cx="10362895" cy="402336"/>
-          </a:xfrm>
-          <a:prstGeom prst="rect">
-            <a:avLst/>
-          </a:prstGeom>
-          <a:noFill/>
-        </p:spPr>
-        <p:txBody>
-          <a:bodyPr wrap="square" anchor="ctr"/>
-          <a:lstStyle/>
-          <a:p>
-            <a:r>
-              <a:rPr sz="1500" b="1" i="0">
-                <a:solidFill>
-                  <a:srgbClr val="333333"/>
-                </a:solidFill>
-                <a:latin typeface="Calibri"/>
-              </a:rPr>
-              <a:t>LA PREGUNTA DE BÚSQUEDA</a:t>
-            </a:r>
-            <a:r>
-              <a:rPr sz="1500" b="0" i="0">
-                <a:solidFill>
-                  <a:srgbClr val="333333"/>
-                </a:solidFill>
-                <a:latin typeface="Calibri"/>
-              </a:rPr>
-              <a:t> — Una </a:t>
-            </a:r>
-            <a:r>
-              <a:rPr sz="1500" b="1" i="0">
-                <a:solidFill>
-                  <a:srgbClr val="333333"/>
-                </a:solidFill>
-                <a:latin typeface="Calibri"/>
-              </a:rPr>
-              <a:t>pregunta</a:t>
-            </a:r>
-            <a:r>
-              <a:rPr sz="1500" b="0" i="0">
-                <a:solidFill>
-                  <a:srgbClr val="333333"/>
-                </a:solidFill>
-                <a:latin typeface="Calibri"/>
-              </a:rPr>
-              <a:t>, no una palabra, y sus términos de búsqueda en dos o tres versiones — incluida una en inglés.</a:t>
-            </a:r>
-          </a:p>
-        </p:txBody>
-      </p:sp>
-      <p:sp>
-        <p:nvSpPr>
-          <p:cNvPr id="10" name="Rounded Rectangle 9"/>
-          <p:cNvSpPr/>
-          <p:nvPr/>
-        </p:nvSpPr>
-        <p:spPr>
-          <a:xfrm>
-            <a:off x="457200" y="2148839"/>
-            <a:ext cx="11277295" cy="566928"/>
-          </a:xfrm>
-          <a:prstGeom prst="roundRect">
-            <a:avLst>
-              <a:gd name="adj" fmla="val 12000"/>
-            </a:avLst>
-          </a:prstGeom>
-          <a:solidFill>
-            <a:srgbClr val="F2F2F2"/>
-          </a:solidFill>
-          <a:ln>
-            <a:noFill/>
-          </a:ln>
-        </p:spPr>
-        <p:style>
-          <a:lnRef idx="1">
-            <a:schemeClr val="accent1"/>
-          </a:lnRef>
-          <a:fillRef idx="3">
-            <a:schemeClr val="accent1"/>
-          </a:fillRef>
-          <a:effectRef idx="2">
-            <a:schemeClr val="accent1"/>
-          </a:effectRef>
-          <a:fontRef idx="minor">
-            <a:schemeClr val="lt1"/>
-          </a:fontRef>
-        </p:style>
-        <p:txBody>
-          <a:bodyPr rtlCol="0" anchor="ctr"/>
-          <a:lstStyle/>
-          <a:p>
-            <a:pPr algn="ctr"/>
-          </a:p>
-        </p:txBody>
-      </p:sp>
-      <p:sp>
-        <p:nvSpPr>
-          <p:cNvPr id="11" name="Rectangle 10"/>
-          <p:cNvSpPr/>
-          <p:nvPr/>
-        </p:nvSpPr>
-        <p:spPr>
-          <a:xfrm>
-            <a:off x="640080" y="2295144"/>
-            <a:ext cx="274320" cy="274320"/>
-          </a:xfrm>
-          <a:prstGeom prst="rect">
-            <a:avLst/>
-          </a:prstGeom>
-          <a:solidFill>
-            <a:srgbClr val="FFFFFF"/>
-          </a:solidFill>
-          <a:ln>
-            <a:solidFill>
-              <a:srgbClr val="333333"/>
-            </a:solidFill>
-          </a:ln>
-        </p:spPr>
-        <p:style>
-          <a:lnRef idx="1">
-            <a:schemeClr val="accent1"/>
-          </a:lnRef>
-          <a:fillRef idx="3">
-            <a:schemeClr val="accent1"/>
-          </a:fillRef>
-          <a:effectRef idx="2">
-            <a:schemeClr val="accent1"/>
-          </a:effectRef>
-          <a:fontRef idx="minor">
-            <a:schemeClr val="lt1"/>
-          </a:fontRef>
-        </p:style>
-        <p:txBody>
-          <a:bodyPr rtlCol="0" anchor="ctr"/>
-          <a:lstStyle/>
-          <a:p>
-            <a:pPr algn="ctr"/>
-          </a:p>
-        </p:txBody>
-      </p:sp>
-      <p:sp>
-        <p:nvSpPr>
-          <p:cNvPr id="12" name="Rectangle 11"/>
-          <p:cNvSpPr/>
-          <p:nvPr/>
-        </p:nvSpPr>
-        <p:spPr>
-          <a:xfrm>
-            <a:off x="640080" y="2295144"/>
-            <a:ext cx="73152" cy="274320"/>
-          </a:xfrm>
-          <a:prstGeom prst="rect">
-            <a:avLst/>
-          </a:prstGeom>
-          <a:solidFill>
-            <a:srgbClr val="269CCB"/>
-          </a:solidFill>
-          <a:ln>
-            <a:noFill/>
-          </a:ln>
-        </p:spPr>
-        <p:style>
-          <a:lnRef idx="1">
-            <a:schemeClr val="accent1"/>
-          </a:lnRef>
-          <a:fillRef idx="3">
-            <a:schemeClr val="accent1"/>
-          </a:fillRef>
-          <a:effectRef idx="2">
-            <a:schemeClr val="accent1"/>
-          </a:effectRef>
-          <a:fontRef idx="minor">
-            <a:schemeClr val="lt1"/>
-          </a:fontRef>
-        </p:style>
-        <p:txBody>
-          <a:bodyPr rtlCol="0" anchor="ctr"/>
-          <a:lstStyle/>
-          <a:p>
-            <a:pPr algn="ctr"/>
-          </a:p>
-        </p:txBody>
-      </p:sp>
-      <p:sp>
-        <p:nvSpPr>
-          <p:cNvPr id="13" name="TextBox 12"/>
-          <p:cNvSpPr txBox="1"/>
-          <p:nvPr/>
-        </p:nvSpPr>
-        <p:spPr>
-          <a:xfrm>
-            <a:off x="1097280" y="2240279"/>
-            <a:ext cx="10362895" cy="402336"/>
-          </a:xfrm>
-          <a:prstGeom prst="rect">
-            <a:avLst/>
-          </a:prstGeom>
-          <a:noFill/>
-        </p:spPr>
-        <p:txBody>
-          <a:bodyPr wrap="square" anchor="ctr"/>
-          <a:lstStyle/>
-          <a:p>
-            <a:r>
-              <a:rPr sz="1500" b="1" i="0">
-                <a:solidFill>
-                  <a:srgbClr val="333333"/>
-                </a:solidFill>
-                <a:latin typeface="Calibri"/>
-              </a:rPr>
-              <a:t>TRES ANTECEDENTES FICHADOS</a:t>
-            </a:r>
-            <a:r>
-              <a:rPr sz="1500" b="0" i="0">
-                <a:solidFill>
-                  <a:srgbClr val="333333"/>
-                </a:solidFill>
-                <a:latin typeface="Calibri"/>
-              </a:rPr>
-              <a:t> — Tres fichas con los seis campos: </a:t>
-            </a:r>
-            <a:r>
-              <a:rPr sz="1500" b="1" i="0">
-                <a:solidFill>
-                  <a:srgbClr val="333333"/>
-                </a:solidFill>
-                <a:latin typeface="Calibri"/>
-              </a:rPr>
-              <a:t>autor o responsable · año · dónde · qué hace · qué le falta para nuestro caso · enlace</a:t>
-            </a:r>
-            <a:r>
-              <a:rPr sz="1500" b="0" i="0">
-                <a:solidFill>
-                  <a:srgbClr val="333333"/>
-                </a:solidFill>
-                <a:latin typeface="Calibri"/>
-              </a:rPr>
-              <a:t>. Al menos una fuente académica o normativa.</a:t>
-            </a:r>
-          </a:p>
-        </p:txBody>
-      </p:sp>
-      <p:sp>
-        <p:nvSpPr>
-          <p:cNvPr id="14" name="Rounded Rectangle 13"/>
-          <p:cNvSpPr/>
-          <p:nvPr/>
-        </p:nvSpPr>
-        <p:spPr>
-          <a:xfrm>
-            <a:off x="457200" y="2825496"/>
-            <a:ext cx="11277295" cy="566928"/>
-          </a:xfrm>
-          <a:prstGeom prst="roundRect">
-            <a:avLst>
-              <a:gd name="adj" fmla="val 12000"/>
-            </a:avLst>
-          </a:prstGeom>
-          <a:solidFill>
-            <a:srgbClr val="F2F2F2"/>
-          </a:solidFill>
-          <a:ln>
-            <a:noFill/>
-          </a:ln>
-        </p:spPr>
-        <p:style>
-          <a:lnRef idx="1">
-            <a:schemeClr val="accent1"/>
-          </a:lnRef>
-          <a:fillRef idx="3">
-            <a:schemeClr val="accent1"/>
-          </a:fillRef>
-          <a:effectRef idx="2">
-            <a:schemeClr val="accent1"/>
-          </a:effectRef>
-          <a:fontRef idx="minor">
-            <a:schemeClr val="lt1"/>
-          </a:fontRef>
-        </p:style>
-        <p:txBody>
-          <a:bodyPr rtlCol="0" anchor="ctr"/>
-          <a:lstStyle/>
-          <a:p>
-            <a:pPr algn="ctr"/>
-          </a:p>
-        </p:txBody>
-      </p:sp>
-      <p:sp>
-        <p:nvSpPr>
-          <p:cNvPr id="15" name="Rectangle 14"/>
-          <p:cNvSpPr/>
-          <p:nvPr/>
-        </p:nvSpPr>
-        <p:spPr>
-          <a:xfrm>
-            <a:off x="640080" y="2971800"/>
-            <a:ext cx="274320" cy="274320"/>
-          </a:xfrm>
-          <a:prstGeom prst="rect">
-            <a:avLst/>
-          </a:prstGeom>
-          <a:solidFill>
-            <a:srgbClr val="FFFFFF"/>
-          </a:solidFill>
-          <a:ln>
-            <a:solidFill>
-              <a:srgbClr val="333333"/>
-            </a:solidFill>
-          </a:ln>
-        </p:spPr>
-        <p:style>
-          <a:lnRef idx="1">
-            <a:schemeClr val="accent1"/>
-          </a:lnRef>
-          <a:fillRef idx="3">
-            <a:schemeClr val="accent1"/>
-          </a:fillRef>
-          <a:effectRef idx="2">
-            <a:schemeClr val="accent1"/>
-          </a:effectRef>
-          <a:fontRef idx="minor">
-            <a:schemeClr val="lt1"/>
-          </a:fontRef>
-        </p:style>
-        <p:txBody>
-          <a:bodyPr rtlCol="0" anchor="ctr"/>
-          <a:lstStyle/>
-          <a:p>
-            <a:pPr algn="ctr"/>
-          </a:p>
-        </p:txBody>
-      </p:sp>
-      <p:sp>
-        <p:nvSpPr>
-          <p:cNvPr id="16" name="Rectangle 15"/>
-          <p:cNvSpPr/>
-          <p:nvPr/>
-        </p:nvSpPr>
-        <p:spPr>
-          <a:xfrm>
-            <a:off x="640080" y="2971800"/>
-            <a:ext cx="73152" cy="274320"/>
-          </a:xfrm>
-          <a:prstGeom prst="rect">
-            <a:avLst/>
-          </a:prstGeom>
-          <a:solidFill>
-            <a:srgbClr val="269CCB"/>
-          </a:solidFill>
-          <a:ln>
-            <a:noFill/>
-          </a:ln>
-        </p:spPr>
-        <p:style>
-          <a:lnRef idx="1">
-            <a:schemeClr val="accent1"/>
-          </a:lnRef>
-          <a:fillRef idx="3">
-            <a:schemeClr val="accent1"/>
-          </a:fillRef>
-          <a:effectRef idx="2">
-            <a:schemeClr val="accent1"/>
-          </a:effectRef>
-          <a:fontRef idx="minor">
-            <a:schemeClr val="lt1"/>
-          </a:fontRef>
-        </p:style>
-        <p:txBody>
-          <a:bodyPr rtlCol="0" anchor="ctr"/>
-          <a:lstStyle/>
-          <a:p>
-            <a:pPr algn="ctr"/>
-          </a:p>
-        </p:txBody>
-      </p:sp>
-      <p:sp>
-        <p:nvSpPr>
-          <p:cNvPr id="17" name="TextBox 16"/>
-          <p:cNvSpPr txBox="1"/>
-          <p:nvPr/>
-        </p:nvSpPr>
-        <p:spPr>
-          <a:xfrm>
-            <a:off x="1097280" y="2916936"/>
-            <a:ext cx="10362895" cy="402336"/>
-          </a:xfrm>
-          <a:prstGeom prst="rect">
-            <a:avLst/>
-          </a:prstGeom>
-          <a:noFill/>
-        </p:spPr>
-        <p:txBody>
-          <a:bodyPr wrap="square" anchor="ctr"/>
-          <a:lstStyle/>
-          <a:p>
-            <a:r>
-              <a:rPr sz="1500" b="1" i="0">
-                <a:solidFill>
-                  <a:srgbClr val="333333"/>
-                </a:solidFill>
-                <a:latin typeface="Calibri"/>
-              </a:rPr>
-              <a:t>QUÉ BUSCAMOS Y NO ENCONTRAMOS</a:t>
-            </a:r>
-            <a:r>
-              <a:rPr sz="1500" b="0" i="0">
-                <a:solidFill>
-                  <a:srgbClr val="333333"/>
-                </a:solidFill>
-                <a:latin typeface="Calibri"/>
-              </a:rPr>
-              <a:t> — Qué buscaron, con qué términos, en qué sitios, y </a:t>
-            </a:r>
-            <a:r>
-              <a:rPr sz="1500" b="1" i="0">
-                <a:solidFill>
-                  <a:srgbClr val="333333"/>
-                </a:solidFill>
-                <a:latin typeface="Calibri"/>
-              </a:rPr>
-              <a:t>qué fue lo más cercano</a:t>
-            </a:r>
-            <a:r>
-              <a:rPr sz="1500" b="0" i="0">
-                <a:solidFill>
-                  <a:srgbClr val="333333"/>
-                </a:solidFill>
-                <a:latin typeface="Calibri"/>
-              </a:rPr>
-              <a:t> que apareció. «No encontramos nada» bien escrito es un hallazgo.</a:t>
-            </a:r>
-          </a:p>
-        </p:txBody>
-      </p:sp>
-      <p:sp>
-        <p:nvSpPr>
-          <p:cNvPr id="18" name="Rounded Rectangle 17"/>
-          <p:cNvSpPr/>
-          <p:nvPr/>
-        </p:nvSpPr>
-        <p:spPr>
-          <a:xfrm>
-            <a:off x="457200" y="3502152"/>
-            <a:ext cx="11277295" cy="566928"/>
-          </a:xfrm>
-          <a:prstGeom prst="roundRect">
-            <a:avLst>
-              <a:gd name="adj" fmla="val 12000"/>
-            </a:avLst>
-          </a:prstGeom>
-          <a:solidFill>
-            <a:srgbClr val="F2F2F2"/>
-          </a:solidFill>
-          <a:ln>
-            <a:noFill/>
-          </a:ln>
-        </p:spPr>
-        <p:style>
-          <a:lnRef idx="1">
-            <a:schemeClr val="accent1"/>
-          </a:lnRef>
-          <a:fillRef idx="3">
-            <a:schemeClr val="accent1"/>
-          </a:fillRef>
-          <a:effectRef idx="2">
-            <a:schemeClr val="accent1"/>
-          </a:effectRef>
-          <a:fontRef idx="minor">
-            <a:schemeClr val="lt1"/>
-          </a:fontRef>
-        </p:style>
-        <p:txBody>
-          <a:bodyPr rtlCol="0" anchor="ctr"/>
-          <a:lstStyle/>
-          <a:p>
-            <a:pPr algn="ctr"/>
-          </a:p>
-        </p:txBody>
-      </p:sp>
-      <p:sp>
-        <p:nvSpPr>
-          <p:cNvPr id="19" name="Rectangle 18"/>
-          <p:cNvSpPr/>
-          <p:nvPr/>
-        </p:nvSpPr>
-        <p:spPr>
-          <a:xfrm>
-            <a:off x="640080" y="3648456"/>
-            <a:ext cx="274320" cy="274320"/>
-          </a:xfrm>
-          <a:prstGeom prst="rect">
-            <a:avLst/>
-          </a:prstGeom>
-          <a:solidFill>
-            <a:srgbClr val="FFFFFF"/>
-          </a:solidFill>
-          <a:ln>
-            <a:solidFill>
-              <a:srgbClr val="333333"/>
-            </a:solidFill>
-          </a:ln>
-        </p:spPr>
-        <p:style>
-          <a:lnRef idx="1">
-            <a:schemeClr val="accent1"/>
-          </a:lnRef>
-          <a:fillRef idx="3">
-            <a:schemeClr val="accent1"/>
-          </a:fillRef>
-          <a:effectRef idx="2">
-            <a:schemeClr val="accent1"/>
-          </a:effectRef>
-          <a:fontRef idx="minor">
-            <a:schemeClr val="lt1"/>
-          </a:fontRef>
-        </p:style>
-        <p:txBody>
-          <a:bodyPr rtlCol="0" anchor="ctr"/>
-          <a:lstStyle/>
-          <a:p>
-            <a:pPr algn="ctr"/>
-          </a:p>
-        </p:txBody>
-      </p:sp>
-      <p:sp>
-        <p:nvSpPr>
-          <p:cNvPr id="20" name="Rectangle 19"/>
-          <p:cNvSpPr/>
-          <p:nvPr/>
-        </p:nvSpPr>
-        <p:spPr>
-          <a:xfrm>
-            <a:off x="640080" y="3648456"/>
-            <a:ext cx="73152" cy="274320"/>
-          </a:xfrm>
-          <a:prstGeom prst="rect">
-            <a:avLst/>
-          </a:prstGeom>
-          <a:solidFill>
-            <a:srgbClr val="269CCB"/>
-          </a:solidFill>
-          <a:ln>
-            <a:noFill/>
-          </a:ln>
-        </p:spPr>
-        <p:style>
-          <a:lnRef idx="1">
-            <a:schemeClr val="accent1"/>
-          </a:lnRef>
-          <a:fillRef idx="3">
-            <a:schemeClr val="accent1"/>
-          </a:fillRef>
-          <a:effectRef idx="2">
-            <a:schemeClr val="accent1"/>
-          </a:effectRef>
-          <a:fontRef idx="minor">
-            <a:schemeClr val="lt1"/>
-          </a:fontRef>
-        </p:style>
-        <p:txBody>
-          <a:bodyPr rtlCol="0" anchor="ctr"/>
-          <a:lstStyle/>
-          <a:p>
-            <a:pPr algn="ctr"/>
-          </a:p>
-        </p:txBody>
-      </p:sp>
-      <p:sp>
-        <p:nvSpPr>
-          <p:cNvPr id="21" name="TextBox 20"/>
-          <p:cNvSpPr txBox="1"/>
-          <p:nvPr/>
-        </p:nvSpPr>
-        <p:spPr>
-          <a:xfrm>
-            <a:off x="1097280" y="3593592"/>
-            <a:ext cx="10362895" cy="402336"/>
-          </a:xfrm>
-          <a:prstGeom prst="rect">
-            <a:avLst/>
-          </a:prstGeom>
-          <a:noFill/>
-        </p:spPr>
-        <p:txBody>
-          <a:bodyPr wrap="square" anchor="ctr"/>
-          <a:lstStyle/>
-          <a:p>
-            <a:r>
-              <a:rPr sz="1500" b="1" i="0">
-                <a:solidFill>
-                  <a:srgbClr val="333333"/>
-                </a:solidFill>
-                <a:latin typeface="Calibri"/>
-              </a:rPr>
-              <a:t>LA PROPUESTA DE MEJORA</a:t>
-            </a:r>
-            <a:r>
-              <a:rPr sz="1500" b="0" i="0">
-                <a:solidFill>
-                  <a:srgbClr val="333333"/>
-                </a:solidFill>
-                <a:latin typeface="Calibri"/>
-              </a:rPr>
-              <a:t> — Qué van a hacer distinto respecto a lo fichado, </a:t>
-            </a:r>
-            <a:r>
-              <a:rPr sz="1500" b="1" i="0">
-                <a:solidFill>
-                  <a:srgbClr val="333333"/>
-                </a:solidFill>
-                <a:latin typeface="Calibri"/>
-              </a:rPr>
-              <a:t>con cuál de las cuatro operaciones</a:t>
-            </a:r>
-            <a:r>
-              <a:rPr sz="1500" b="0" i="0">
-                <a:solidFill>
-                  <a:srgbClr val="333333"/>
-                </a:solidFill>
-                <a:latin typeface="Calibri"/>
-              </a:rPr>
-              <a:t> (quitar, combinar, invertir, adaptar), y por qué eso importa en su contexto.</a:t>
-            </a:r>
-          </a:p>
-        </p:txBody>
-      </p:sp>
-      <p:sp>
-        <p:nvSpPr>
-          <p:cNvPr id="22" name="Rounded Rectangle 21"/>
-          <p:cNvSpPr/>
-          <p:nvPr/>
-        </p:nvSpPr>
-        <p:spPr>
-          <a:xfrm>
-            <a:off x="457200" y="4178808"/>
-            <a:ext cx="11277295" cy="566928"/>
-          </a:xfrm>
-          <a:prstGeom prst="roundRect">
-            <a:avLst>
-              <a:gd name="adj" fmla="val 12000"/>
-            </a:avLst>
-          </a:prstGeom>
-          <a:solidFill>
-            <a:srgbClr val="F2F2F2"/>
-          </a:solidFill>
-          <a:ln>
-            <a:noFill/>
-          </a:ln>
-        </p:spPr>
-        <p:style>
-          <a:lnRef idx="1">
-            <a:schemeClr val="accent1"/>
-          </a:lnRef>
-          <a:fillRef idx="3">
-            <a:schemeClr val="accent1"/>
-          </a:fillRef>
-          <a:effectRef idx="2">
-            <a:schemeClr val="accent1"/>
-          </a:effectRef>
-          <a:fontRef idx="minor">
-            <a:schemeClr val="lt1"/>
-          </a:fontRef>
-        </p:style>
-        <p:txBody>
-          <a:bodyPr rtlCol="0" anchor="ctr"/>
-          <a:lstStyle/>
-          <a:p>
-            <a:pPr algn="ctr"/>
-          </a:p>
-        </p:txBody>
-      </p:sp>
-      <p:sp>
-        <p:nvSpPr>
-          <p:cNvPr id="23" name="Rectangle 22"/>
-          <p:cNvSpPr/>
-          <p:nvPr/>
-        </p:nvSpPr>
-        <p:spPr>
-          <a:xfrm>
-            <a:off x="640080" y="4325112"/>
-            <a:ext cx="274320" cy="274320"/>
-          </a:xfrm>
-          <a:prstGeom prst="rect">
-            <a:avLst/>
-          </a:prstGeom>
-          <a:solidFill>
-            <a:srgbClr val="FFFFFF"/>
-          </a:solidFill>
-          <a:ln>
-            <a:solidFill>
-              <a:srgbClr val="333333"/>
-            </a:solidFill>
-          </a:ln>
-        </p:spPr>
-        <p:style>
-          <a:lnRef idx="1">
-            <a:schemeClr val="accent1"/>
-          </a:lnRef>
-          <a:fillRef idx="3">
-            <a:schemeClr val="accent1"/>
-          </a:fillRef>
-          <a:effectRef idx="2">
-            <a:schemeClr val="accent1"/>
-          </a:effectRef>
-          <a:fontRef idx="minor">
-            <a:schemeClr val="lt1"/>
-          </a:fontRef>
-        </p:style>
-        <p:txBody>
-          <a:bodyPr rtlCol="0" anchor="ctr"/>
-          <a:lstStyle/>
-          <a:p>
-            <a:pPr algn="ctr"/>
-          </a:p>
-        </p:txBody>
-      </p:sp>
-      <p:sp>
-        <p:nvSpPr>
-          <p:cNvPr id="24" name="Rectangle 23"/>
-          <p:cNvSpPr/>
-          <p:nvPr/>
-        </p:nvSpPr>
-        <p:spPr>
-          <a:xfrm>
-            <a:off x="640080" y="4325112"/>
-            <a:ext cx="73152" cy="274320"/>
-          </a:xfrm>
-          <a:prstGeom prst="rect">
-            <a:avLst/>
-          </a:prstGeom>
-          <a:solidFill>
-            <a:srgbClr val="269CCB"/>
-          </a:solidFill>
-          <a:ln>
-            <a:noFill/>
-          </a:ln>
-        </p:spPr>
-        <p:style>
-          <a:lnRef idx="1">
-            <a:schemeClr val="accent1"/>
-          </a:lnRef>
-          <a:fillRef idx="3">
-            <a:schemeClr val="accent1"/>
-          </a:fillRef>
-          <a:effectRef idx="2">
-            <a:schemeClr val="accent1"/>
-          </a:effectRef>
-          <a:fontRef idx="minor">
-            <a:schemeClr val="lt1"/>
-          </a:fontRef>
-        </p:style>
-        <p:txBody>
-          <a:bodyPr rtlCol="0" anchor="ctr"/>
-          <a:lstStyle/>
-          <a:p>
-            <a:pPr algn="ctr"/>
-          </a:p>
-        </p:txBody>
-      </p:sp>
-      <p:sp>
-        <p:nvSpPr>
-          <p:cNvPr id="25" name="TextBox 24"/>
-          <p:cNvSpPr txBox="1"/>
-          <p:nvPr/>
-        </p:nvSpPr>
-        <p:spPr>
-          <a:xfrm>
-            <a:off x="1097280" y="4270248"/>
-            <a:ext cx="10362895" cy="402336"/>
-          </a:xfrm>
-          <a:prstGeom prst="rect">
-            <a:avLst/>
-          </a:prstGeom>
-          <a:noFill/>
-        </p:spPr>
-        <p:txBody>
-          <a:bodyPr wrap="square" anchor="ctr"/>
-          <a:lstStyle/>
-          <a:p>
-            <a:r>
-              <a:rPr sz="1500" b="1" i="0">
-                <a:solidFill>
-                  <a:srgbClr val="333333"/>
-                </a:solidFill>
-                <a:latin typeface="Calibri"/>
-              </a:rPr>
-              <a:t>LO QUE VAMOS A REUSAR</a:t>
-            </a:r>
-            <a:r>
-              <a:rPr sz="1500" b="0" i="0">
-                <a:solidFill>
-                  <a:srgbClr val="333333"/>
-                </a:solidFill>
-                <a:latin typeface="Calibri"/>
-              </a:rPr>
-              <a:t> — Qué de lo que ya existe piensan aprovechar: una idea de diseño, una forma de organizar los datos, una herramienta, una lista de errores conocidos.</a:t>
-            </a:r>
-          </a:p>
-        </p:txBody>
-      </p:sp>
-      <p:sp>
-        <p:nvSpPr>
-          <p:cNvPr id="26" name="TextBox 25"/>
           <p:cNvSpPr txBox="1"/>
           <p:nvPr/>
         </p:nvSpPr>
@@ -8684,7 +8013,7 @@
         <p:spPr>
           <a:xfrm>
             <a:off x="0" y="0"/>
-            <a:ext cx="12191695" cy="1170432"/>
+            <a:ext cx="12191695" cy="960120"/>
           </a:xfrm>
           <a:prstGeom prst="rect">
             <a:avLst/>
@@ -8726,7 +8055,7 @@
         </p:nvSpPr>
         <p:spPr>
           <a:xfrm>
-            <a:off x="0" y="1170432"/>
+            <a:off x="0" y="960120"/>
             <a:ext cx="12191695" cy="41148"/>
           </a:xfrm>
           <a:prstGeom prst="rect">
@@ -8770,7 +8099,7 @@
         <p:spPr>
           <a:xfrm>
             <a:off x="457200" y="164592"/>
-            <a:ext cx="11277295" cy="384048"/>
+            <a:ext cx="11277295" cy="502920"/>
           </a:xfrm>
           <a:prstGeom prst="rect">
             <a:avLst/>
@@ -8790,55 +8119,21 @@
                 </a:solidFill>
                 <a:latin typeface="Calibri"/>
               </a:rPr>
-              <a:t>Cómo se expone en 3 minutos</a:t>
-            </a:r>
-          </a:p>
-        </p:txBody>
-      </p:sp>
-      <p:sp>
-        <p:nvSpPr>
-          <p:cNvPr id="5" name="TextBox 4"/>
-          <p:cNvSpPr txBox="1"/>
-          <p:nvPr/>
-        </p:nvSpPr>
-        <p:spPr>
-          <a:xfrm>
-            <a:off x="457200" y="566928"/>
-            <a:ext cx="11277295" cy="411480"/>
-          </a:xfrm>
-          <a:prstGeom prst="rect">
-            <a:avLst/>
-          </a:prstGeom>
-          <a:noFill/>
-        </p:spPr>
-        <p:txBody>
-          <a:bodyPr wrap="square">
-            <a:spAutoFit/>
-          </a:bodyPr>
-          <a:lstStyle/>
-          <a:p>
-            <a:r>
-              <a:rPr sz="1400" b="0" i="0">
-                <a:solidFill>
-                  <a:srgbClr val="B8D8EE"/>
-                </a:solidFill>
-                <a:latin typeface="Calibri"/>
-              </a:rPr>
-              <a:t>Habla el vocero con la pantalla ya compartida · cronómetro en pantalla · se corta al llegar a cero</a:t>
-            </a:r>
-          </a:p>
-        </p:txBody>
-      </p:sp>
-      <p:sp>
-        <p:nvSpPr>
-          <p:cNvPr id="6" name="Rounded Rectangle 5"/>
+              <a:t>Guion de la exposicion, con tiempos</a:t>
+            </a:r>
+          </a:p>
+        </p:txBody>
+      </p:sp>
+      <p:sp>
+        <p:nvSpPr>
+          <p:cNvPr id="5" name="Rounded Rectangle 4"/>
           <p:cNvSpPr/>
           <p:nvPr/>
         </p:nvSpPr>
         <p:spPr>
           <a:xfrm>
-            <a:off x="457200" y="1444752"/>
-            <a:ext cx="11277295" cy="908913"/>
+            <a:off x="457200" y="1261872"/>
+            <a:ext cx="11277295" cy="5093208"/>
           </a:xfrm>
           <a:prstGeom prst="roundRect">
             <a:avLst>
@@ -8846,7 +8141,7 @@
             </a:avLst>
           </a:prstGeom>
           <a:solidFill>
-            <a:srgbClr val="F2F2F2"/>
+            <a:srgbClr val="1E2A38"/>
           </a:solidFill>
           <a:ln>
             <a:noFill/>
@@ -8876,19 +8171,17 @@
       </p:sp>
       <p:sp>
         <p:nvSpPr>
-          <p:cNvPr id="7" name="Rounded Rectangle 6"/>
+          <p:cNvPr id="6" name="Rectangle 5"/>
           <p:cNvSpPr/>
           <p:nvPr/>
         </p:nvSpPr>
         <p:spPr>
           <a:xfrm>
-            <a:off x="594360" y="1679752"/>
-            <a:ext cx="438912" cy="438912"/>
-          </a:xfrm>
-          <a:prstGeom prst="roundRect">
-            <a:avLst>
-              <a:gd name="adj" fmla="val 12000"/>
-            </a:avLst>
+            <a:off x="457200" y="1261872"/>
+            <a:ext cx="11277295" cy="320040"/>
+          </a:xfrm>
+          <a:prstGeom prst="rect">
+            <a:avLst/>
           </a:prstGeom>
           <a:solidFill>
             <a:srgbClr val="095292"/>
@@ -8921,14 +8214,46 @@
       </p:sp>
       <p:sp>
         <p:nvSpPr>
+          <p:cNvPr id="7" name="TextBox 6"/>
+          <p:cNvSpPr txBox="1"/>
+          <p:nvPr/>
+        </p:nvSpPr>
+        <p:spPr>
+          <a:xfrm>
+            <a:off x="685800" y="1307592"/>
+            <a:ext cx="10820095" cy="256032"/>
+          </a:xfrm>
+          <a:prstGeom prst="rect">
+            <a:avLst/>
+          </a:prstGeom>
+          <a:noFill/>
+        </p:spPr>
+        <p:txBody>
+          <a:bodyPr wrap="square" anchor="ctr"/>
+          <a:lstStyle/>
+          <a:p>
+            <a:r>
+              <a:rPr sz="1000" b="1" i="0">
+                <a:solidFill>
+                  <a:srgbClr val="269CCB"/>
+                </a:solidFill>
+                <a:latin typeface="Calibri"/>
+              </a:rPr>
+              <a:t>● ● ●</a:t>
+            </a:r>
+          </a:p>
+        </p:txBody>
+      </p:sp>
+      <p:sp>
+        <p:nvSpPr>
           <p:cNvPr id="8" name="TextBox 7"/>
           <p:cNvSpPr txBox="1"/>
           <p:nvPr/>
         </p:nvSpPr>
         <p:spPr>
           <a:xfrm>
-            <a:off x="594360" y="1679752"/>
-            <a:ext cx="438912" cy="438912"/>
+            <a:off x="777240" y="1719072"/>
+            <a:ext cx="10637215" cy="4453128"/>
           </a:xfrm>
           <a:prstGeom prst="rect">
             <a:avLst/>
@@ -8936,18 +8261,168 @@
           <a:noFill/>
         </p:spPr>
         <p:txBody>
-          <a:bodyPr wrap="square" anchor="ctr"/>
-          <a:lstStyle/>
-          <a:p>
-            <a:pPr algn="ctr"/>
-            <a:r>
-              <a:rPr sz="1600" b="1" i="0">
+          <a:bodyPr wrap="square">
+            <a:spAutoFit/>
+          </a:bodyPr>
+          <a:lstStyle/>
+          <a:p>
+            <a:pPr>
+              <a:spcAft>
+                <a:spcPts val="400"/>
+              </a:spcAft>
+            </a:pPr>
+            <a:r>
+              <a:rPr sz="1400" b="0" i="0">
                 <a:solidFill>
                   <a:srgbClr val="FFFFFF"/>
                 </a:solidFill>
                 <a:latin typeface="Calibri"/>
               </a:rPr>
-              <a:t>1</a:t>
+              <a:t># Exposicion de hoy · lo que se califica es el reparto, no el total</a:t>
+            </a:r>
+          </a:p>
+          <a:p>
+            <a:pPr>
+              <a:spcAft>
+                <a:spcPts val="400"/>
+              </a:spcAft>
+            </a:pPr>
+            <a:r>
+              <a:rPr sz="1400" b="0" i="0">
+                <a:solidFill>
+                  <a:srgbClr val="FFFFFF"/>
+                </a:solidFill>
+                <a:latin typeface="Calibri"/>
+              </a:rPr>
+              <a:t/>
+            </a:r>
+          </a:p>
+          <a:p>
+            <a:pPr>
+              <a:spcAft>
+                <a:spcPts val="400"/>
+              </a:spcAft>
+            </a:pPr>
+            <a:r>
+              <a:rPr sz="1400" b="0" i="0">
+                <a:solidFill>
+                  <a:srgbClr val="FFFFFF"/>
+                </a:solidFill>
+                <a:latin typeface="Calibri"/>
+              </a:rPr>
+              <a:t>25 s · La pregunta de búsqueda     Leída tal cual, con un término en inglés.</a:t>
+            </a:r>
+          </a:p>
+          <a:p>
+            <a:pPr>
+              <a:spcAft>
+                <a:spcPts val="400"/>
+              </a:spcAft>
+            </a:pPr>
+            <a:r>
+              <a:rPr sz="1400" b="0" i="0">
+                <a:solidFill>
+                  <a:srgbClr val="FFFFFF"/>
+                </a:solidFill>
+                <a:latin typeface="Calibri"/>
+              </a:rPr>
+              <a:t>50 s · El antecedente más útil     Cuál es, de qué año, y **muéstrenlo en panta</a:t>
+            </a:r>
+          </a:p>
+          <a:p>
+            <a:pPr>
+              <a:spcAft>
+                <a:spcPts val="400"/>
+              </a:spcAft>
+            </a:pPr>
+            <a:r>
+              <a:rPr sz="1400" b="0" i="0">
+                <a:solidFill>
+                  <a:srgbClr val="FFFFFF"/>
+                </a:solidFill>
+                <a:latin typeface="Calibri"/>
+              </a:rPr>
+              <a:t>50 s · Qué le falta                La brecha respecto a su caso. Es el minuto o</a:t>
+            </a:r>
+          </a:p>
+          <a:p>
+            <a:pPr>
+              <a:spcAft>
+                <a:spcPts val="400"/>
+              </a:spcAft>
+            </a:pPr>
+            <a:r>
+              <a:rPr sz="1400" b="0" i="0">
+                <a:solidFill>
+                  <a:srgbClr val="FFFFFF"/>
+                </a:solidFill>
+                <a:latin typeface="Calibri"/>
+              </a:rPr>
+              <a:t>40 s · La propuesta de mejora      Qué hacen distinto y con cuál de las cuatro </a:t>
+            </a:r>
+          </a:p>
+          <a:p>
+            <a:pPr>
+              <a:spcAft>
+                <a:spcPts val="400"/>
+              </a:spcAft>
+            </a:pPr>
+            <a:r>
+              <a:rPr sz="1400" b="0" i="0">
+                <a:solidFill>
+                  <a:srgbClr val="FFFFFF"/>
+                </a:solidFill>
+                <a:latin typeface="Calibri"/>
+              </a:rPr>
+              <a:t>15 s · Qué reusan                  Una cosa concreta que aprovechan de lo que y</a:t>
+            </a:r>
+          </a:p>
+          <a:p>
+            <a:pPr>
+              <a:spcAft>
+                <a:spcPts val="400"/>
+              </a:spcAft>
+            </a:pPr>
+            <a:r>
+              <a:rPr sz="1400" b="0" i="0">
+                <a:solidFill>
+                  <a:srgbClr val="FFFFFF"/>
+                </a:solidFill>
+                <a:latin typeface="Calibri"/>
+              </a:rPr>
+              <a:t/>
+            </a:r>
+          </a:p>
+          <a:p>
+            <a:pPr>
+              <a:spcAft>
+                <a:spcPts val="400"/>
+              </a:spcAft>
+            </a:pPr>
+            <a:r>
+              <a:rPr sz="1400" b="0" i="0">
+                <a:solidFill>
+                  <a:srgbClr val="FFFFFF"/>
+                </a:solidFill>
+                <a:latin typeface="Calibri"/>
+              </a:rPr>
+              <a:t># El tramo marcado como obligatorio es el que el jurado califica:</a:t>
+            </a:r>
+          </a:p>
+          <a:p>
+            <a:pPr>
+              <a:spcAft>
+                <a:spcPts val="400"/>
+              </a:spcAft>
+            </a:pPr>
+            <a:r>
+              <a:rPr sz="1400" b="0" i="0">
+                <a:solidFill>
+                  <a:srgbClr val="FFFFFF"/>
+                </a:solidFill>
+                <a:latin typeface="Calibri"/>
+              </a:rPr>
+              <a:t># si el guion no esta cronometrado, es el que se queda sin tiempo.</a:t>
             </a:r>
           </a:p>
         </p:txBody>
@@ -8955,756 +8430,6 @@
       <p:sp>
         <p:nvSpPr>
           <p:cNvPr id="9" name="TextBox 8"/>
-          <p:cNvSpPr txBox="1"/>
-          <p:nvPr/>
-        </p:nvSpPr>
-        <p:spPr>
-          <a:xfrm>
-            <a:off x="1188720" y="1536192"/>
-            <a:ext cx="10271455" cy="744321"/>
-          </a:xfrm>
-          <a:prstGeom prst="rect">
-            <a:avLst/>
-          </a:prstGeom>
-          <a:noFill/>
-        </p:spPr>
-        <p:txBody>
-          <a:bodyPr wrap="square" anchor="ctr"/>
-          <a:lstStyle/>
-          <a:p>
-            <a:r>
-              <a:rPr sz="1500" b="1" i="0">
-                <a:solidFill>
-                  <a:srgbClr val="095292"/>
-                </a:solidFill>
-                <a:latin typeface="Calibri"/>
-              </a:rPr>
-              <a:t>25 s · La pregunta de búsqueda</a:t>
-            </a:r>
-          </a:p>
-          <a:p>
-            <a:pPr>
-              <a:spcBef>
-                <a:spcPts val="200"/>
-              </a:spcBef>
-            </a:pPr>
-            <a:r>
-              <a:rPr sz="1300" b="0" i="0">
-                <a:solidFill>
-                  <a:srgbClr val="333333"/>
-                </a:solidFill>
-                <a:latin typeface="Calibri"/>
-              </a:rPr>
-              <a:t>Leída tal cual, con un término en inglés.</a:t>
-            </a:r>
-          </a:p>
-        </p:txBody>
-      </p:sp>
-      <p:sp>
-        <p:nvSpPr>
-          <p:cNvPr id="10" name="Rounded Rectangle 9"/>
-          <p:cNvSpPr/>
-          <p:nvPr/>
-        </p:nvSpPr>
-        <p:spPr>
-          <a:xfrm>
-            <a:off x="457200" y="2445105"/>
-            <a:ext cx="11277295" cy="908913"/>
-          </a:xfrm>
-          <a:prstGeom prst="roundRect">
-            <a:avLst>
-              <a:gd name="adj" fmla="val 12000"/>
-            </a:avLst>
-          </a:prstGeom>
-          <a:solidFill>
-            <a:srgbClr val="E8F4FA"/>
-          </a:solidFill>
-          <a:ln>
-            <a:noFill/>
-          </a:ln>
-        </p:spPr>
-        <p:style>
-          <a:lnRef idx="1">
-            <a:schemeClr val="accent1"/>
-          </a:lnRef>
-          <a:fillRef idx="3">
-            <a:schemeClr val="accent1"/>
-          </a:fillRef>
-          <a:effectRef idx="2">
-            <a:schemeClr val="accent1"/>
-          </a:effectRef>
-          <a:fontRef idx="minor">
-            <a:schemeClr val="lt1"/>
-          </a:fontRef>
-        </p:style>
-        <p:txBody>
-          <a:bodyPr rtlCol="0" anchor="ctr"/>
-          <a:lstStyle/>
-          <a:p>
-            <a:pPr algn="ctr"/>
-          </a:p>
-        </p:txBody>
-      </p:sp>
-      <p:sp>
-        <p:nvSpPr>
-          <p:cNvPr id="11" name="Rounded Rectangle 10"/>
-          <p:cNvSpPr/>
-          <p:nvPr/>
-        </p:nvSpPr>
-        <p:spPr>
-          <a:xfrm>
-            <a:off x="594360" y="2680106"/>
-            <a:ext cx="438912" cy="438912"/>
-          </a:xfrm>
-          <a:prstGeom prst="roundRect">
-            <a:avLst>
-              <a:gd name="adj" fmla="val 12000"/>
-            </a:avLst>
-          </a:prstGeom>
-          <a:solidFill>
-            <a:srgbClr val="095292"/>
-          </a:solidFill>
-          <a:ln>
-            <a:noFill/>
-          </a:ln>
-        </p:spPr>
-        <p:style>
-          <a:lnRef idx="1">
-            <a:schemeClr val="accent1"/>
-          </a:lnRef>
-          <a:fillRef idx="3">
-            <a:schemeClr val="accent1"/>
-          </a:fillRef>
-          <a:effectRef idx="2">
-            <a:schemeClr val="accent1"/>
-          </a:effectRef>
-          <a:fontRef idx="minor">
-            <a:schemeClr val="lt1"/>
-          </a:fontRef>
-        </p:style>
-        <p:txBody>
-          <a:bodyPr rtlCol="0" anchor="ctr"/>
-          <a:lstStyle/>
-          <a:p>
-            <a:pPr algn="ctr"/>
-          </a:p>
-        </p:txBody>
-      </p:sp>
-      <p:sp>
-        <p:nvSpPr>
-          <p:cNvPr id="12" name="TextBox 11"/>
-          <p:cNvSpPr txBox="1"/>
-          <p:nvPr/>
-        </p:nvSpPr>
-        <p:spPr>
-          <a:xfrm>
-            <a:off x="594360" y="2680106"/>
-            <a:ext cx="438912" cy="438912"/>
-          </a:xfrm>
-          <a:prstGeom prst="rect">
-            <a:avLst/>
-          </a:prstGeom>
-          <a:noFill/>
-        </p:spPr>
-        <p:txBody>
-          <a:bodyPr wrap="square" anchor="ctr"/>
-          <a:lstStyle/>
-          <a:p>
-            <a:pPr algn="ctr"/>
-            <a:r>
-              <a:rPr sz="1600" b="1" i="0">
-                <a:solidFill>
-                  <a:srgbClr val="FFFFFF"/>
-                </a:solidFill>
-                <a:latin typeface="Calibri"/>
-              </a:rPr>
-              <a:t>2</a:t>
-            </a:r>
-          </a:p>
-        </p:txBody>
-      </p:sp>
-      <p:sp>
-        <p:nvSpPr>
-          <p:cNvPr id="13" name="TextBox 12"/>
-          <p:cNvSpPr txBox="1"/>
-          <p:nvPr/>
-        </p:nvSpPr>
-        <p:spPr>
-          <a:xfrm>
-            <a:off x="1188720" y="2536545"/>
-            <a:ext cx="10271455" cy="744321"/>
-          </a:xfrm>
-          <a:prstGeom prst="rect">
-            <a:avLst/>
-          </a:prstGeom>
-          <a:noFill/>
-        </p:spPr>
-        <p:txBody>
-          <a:bodyPr wrap="square" anchor="ctr"/>
-          <a:lstStyle/>
-          <a:p>
-            <a:r>
-              <a:rPr sz="1500" b="1" i="0">
-                <a:solidFill>
-                  <a:srgbClr val="095292"/>
-                </a:solidFill>
-                <a:latin typeface="Calibri"/>
-              </a:rPr>
-              <a:t>50 s · El antecedente más útil</a:t>
-            </a:r>
-          </a:p>
-          <a:p>
-            <a:pPr>
-              <a:spcBef>
-                <a:spcPts val="200"/>
-              </a:spcBef>
-            </a:pPr>
-            <a:r>
-              <a:rPr sz="1300" b="0" i="0">
-                <a:solidFill>
-                  <a:srgbClr val="333333"/>
-                </a:solidFill>
-                <a:latin typeface="Calibri"/>
-              </a:rPr>
-              <a:t>Cuál es, de qué año, y </a:t>
-            </a:r>
-            <a:r>
-              <a:rPr sz="1300" b="1" i="0">
-                <a:solidFill>
-                  <a:srgbClr val="333333"/>
-                </a:solidFill>
-                <a:latin typeface="Calibri"/>
-              </a:rPr>
-              <a:t>muéstrenlo en pantalla</a:t>
-            </a:r>
-            <a:r>
-              <a:rPr sz="1300" b="0" i="0">
-                <a:solidFill>
-                  <a:srgbClr val="333333"/>
-                </a:solidFill>
-                <a:latin typeface="Calibri"/>
-              </a:rPr>
-              <a:t>.</a:t>
-            </a:r>
-          </a:p>
-        </p:txBody>
-      </p:sp>
-      <p:sp>
-        <p:nvSpPr>
-          <p:cNvPr id="14" name="Rounded Rectangle 13"/>
-          <p:cNvSpPr/>
-          <p:nvPr/>
-        </p:nvSpPr>
-        <p:spPr>
-          <a:xfrm>
-            <a:off x="457200" y="3445459"/>
-            <a:ext cx="11277295" cy="908913"/>
-          </a:xfrm>
-          <a:prstGeom prst="roundRect">
-            <a:avLst>
-              <a:gd name="adj" fmla="val 12000"/>
-            </a:avLst>
-          </a:prstGeom>
-          <a:solidFill>
-            <a:srgbClr val="F2F2F2"/>
-          </a:solidFill>
-          <a:ln>
-            <a:noFill/>
-          </a:ln>
-        </p:spPr>
-        <p:style>
-          <a:lnRef idx="1">
-            <a:schemeClr val="accent1"/>
-          </a:lnRef>
-          <a:fillRef idx="3">
-            <a:schemeClr val="accent1"/>
-          </a:fillRef>
-          <a:effectRef idx="2">
-            <a:schemeClr val="accent1"/>
-          </a:effectRef>
-          <a:fontRef idx="minor">
-            <a:schemeClr val="lt1"/>
-          </a:fontRef>
-        </p:style>
-        <p:txBody>
-          <a:bodyPr rtlCol="0" anchor="ctr"/>
-          <a:lstStyle/>
-          <a:p>
-            <a:pPr algn="ctr"/>
-          </a:p>
-        </p:txBody>
-      </p:sp>
-      <p:sp>
-        <p:nvSpPr>
-          <p:cNvPr id="15" name="Rounded Rectangle 14"/>
-          <p:cNvSpPr/>
-          <p:nvPr/>
-        </p:nvSpPr>
-        <p:spPr>
-          <a:xfrm>
-            <a:off x="594360" y="3680460"/>
-            <a:ext cx="438912" cy="438912"/>
-          </a:xfrm>
-          <a:prstGeom prst="roundRect">
-            <a:avLst>
-              <a:gd name="adj" fmla="val 12000"/>
-            </a:avLst>
-          </a:prstGeom>
-          <a:solidFill>
-            <a:srgbClr val="095292"/>
-          </a:solidFill>
-          <a:ln>
-            <a:noFill/>
-          </a:ln>
-        </p:spPr>
-        <p:style>
-          <a:lnRef idx="1">
-            <a:schemeClr val="accent1"/>
-          </a:lnRef>
-          <a:fillRef idx="3">
-            <a:schemeClr val="accent1"/>
-          </a:fillRef>
-          <a:effectRef idx="2">
-            <a:schemeClr val="accent1"/>
-          </a:effectRef>
-          <a:fontRef idx="minor">
-            <a:schemeClr val="lt1"/>
-          </a:fontRef>
-        </p:style>
-        <p:txBody>
-          <a:bodyPr rtlCol="0" anchor="ctr"/>
-          <a:lstStyle/>
-          <a:p>
-            <a:pPr algn="ctr"/>
-          </a:p>
-        </p:txBody>
-      </p:sp>
-      <p:sp>
-        <p:nvSpPr>
-          <p:cNvPr id="16" name="TextBox 15"/>
-          <p:cNvSpPr txBox="1"/>
-          <p:nvPr/>
-        </p:nvSpPr>
-        <p:spPr>
-          <a:xfrm>
-            <a:off x="594360" y="3680460"/>
-            <a:ext cx="438912" cy="438912"/>
-          </a:xfrm>
-          <a:prstGeom prst="rect">
-            <a:avLst/>
-          </a:prstGeom>
-          <a:noFill/>
-        </p:spPr>
-        <p:txBody>
-          <a:bodyPr wrap="square" anchor="ctr"/>
-          <a:lstStyle/>
-          <a:p>
-            <a:pPr algn="ctr"/>
-            <a:r>
-              <a:rPr sz="1600" b="1" i="0">
-                <a:solidFill>
-                  <a:srgbClr val="FFFFFF"/>
-                </a:solidFill>
-                <a:latin typeface="Calibri"/>
-              </a:rPr>
-              <a:t>3</a:t>
-            </a:r>
-          </a:p>
-        </p:txBody>
-      </p:sp>
-      <p:sp>
-        <p:nvSpPr>
-          <p:cNvPr id="17" name="TextBox 16"/>
-          <p:cNvSpPr txBox="1"/>
-          <p:nvPr/>
-        </p:nvSpPr>
-        <p:spPr>
-          <a:xfrm>
-            <a:off x="1188720" y="3536899"/>
-            <a:ext cx="10271455" cy="744321"/>
-          </a:xfrm>
-          <a:prstGeom prst="rect">
-            <a:avLst/>
-          </a:prstGeom>
-          <a:noFill/>
-        </p:spPr>
-        <p:txBody>
-          <a:bodyPr wrap="square" anchor="ctr"/>
-          <a:lstStyle/>
-          <a:p>
-            <a:r>
-              <a:rPr sz="1500" b="1" i="0">
-                <a:solidFill>
-                  <a:srgbClr val="095292"/>
-                </a:solidFill>
-                <a:latin typeface="Calibri"/>
-              </a:rPr>
-              <a:t>50 s · Qué le falta</a:t>
-            </a:r>
-          </a:p>
-          <a:p>
-            <a:pPr>
-              <a:spcBef>
-                <a:spcPts val="200"/>
-              </a:spcBef>
-            </a:pPr>
-            <a:r>
-              <a:rPr sz="1300" b="0" i="0">
-                <a:solidFill>
-                  <a:srgbClr val="333333"/>
-                </a:solidFill>
-                <a:latin typeface="Calibri"/>
-              </a:rPr>
-              <a:t>La brecha respecto a su caso. Es el minuto obligatorio.</a:t>
-            </a:r>
-          </a:p>
-        </p:txBody>
-      </p:sp>
-      <p:sp>
-        <p:nvSpPr>
-          <p:cNvPr id="18" name="Rounded Rectangle 17"/>
-          <p:cNvSpPr/>
-          <p:nvPr/>
-        </p:nvSpPr>
-        <p:spPr>
-          <a:xfrm>
-            <a:off x="457200" y="4445812"/>
-            <a:ext cx="11277295" cy="908913"/>
-          </a:xfrm>
-          <a:prstGeom prst="roundRect">
-            <a:avLst>
-              <a:gd name="adj" fmla="val 12000"/>
-            </a:avLst>
-          </a:prstGeom>
-          <a:solidFill>
-            <a:srgbClr val="E8F4FA"/>
-          </a:solidFill>
-          <a:ln>
-            <a:noFill/>
-          </a:ln>
-        </p:spPr>
-        <p:style>
-          <a:lnRef idx="1">
-            <a:schemeClr val="accent1"/>
-          </a:lnRef>
-          <a:fillRef idx="3">
-            <a:schemeClr val="accent1"/>
-          </a:fillRef>
-          <a:effectRef idx="2">
-            <a:schemeClr val="accent1"/>
-          </a:effectRef>
-          <a:fontRef idx="minor">
-            <a:schemeClr val="lt1"/>
-          </a:fontRef>
-        </p:style>
-        <p:txBody>
-          <a:bodyPr rtlCol="0" anchor="ctr"/>
-          <a:lstStyle/>
-          <a:p>
-            <a:pPr algn="ctr"/>
-          </a:p>
-        </p:txBody>
-      </p:sp>
-      <p:sp>
-        <p:nvSpPr>
-          <p:cNvPr id="19" name="Rounded Rectangle 18"/>
-          <p:cNvSpPr/>
-          <p:nvPr/>
-        </p:nvSpPr>
-        <p:spPr>
-          <a:xfrm>
-            <a:off x="594360" y="4680813"/>
-            <a:ext cx="438912" cy="438912"/>
-          </a:xfrm>
-          <a:prstGeom prst="roundRect">
-            <a:avLst>
-              <a:gd name="adj" fmla="val 12000"/>
-            </a:avLst>
-          </a:prstGeom>
-          <a:solidFill>
-            <a:srgbClr val="095292"/>
-          </a:solidFill>
-          <a:ln>
-            <a:noFill/>
-          </a:ln>
-        </p:spPr>
-        <p:style>
-          <a:lnRef idx="1">
-            <a:schemeClr val="accent1"/>
-          </a:lnRef>
-          <a:fillRef idx="3">
-            <a:schemeClr val="accent1"/>
-          </a:fillRef>
-          <a:effectRef idx="2">
-            <a:schemeClr val="accent1"/>
-          </a:effectRef>
-          <a:fontRef idx="minor">
-            <a:schemeClr val="lt1"/>
-          </a:fontRef>
-        </p:style>
-        <p:txBody>
-          <a:bodyPr rtlCol="0" anchor="ctr"/>
-          <a:lstStyle/>
-          <a:p>
-            <a:pPr algn="ctr"/>
-          </a:p>
-        </p:txBody>
-      </p:sp>
-      <p:sp>
-        <p:nvSpPr>
-          <p:cNvPr id="20" name="TextBox 19"/>
-          <p:cNvSpPr txBox="1"/>
-          <p:nvPr/>
-        </p:nvSpPr>
-        <p:spPr>
-          <a:xfrm>
-            <a:off x="594360" y="4680813"/>
-            <a:ext cx="438912" cy="438912"/>
-          </a:xfrm>
-          <a:prstGeom prst="rect">
-            <a:avLst/>
-          </a:prstGeom>
-          <a:noFill/>
-        </p:spPr>
-        <p:txBody>
-          <a:bodyPr wrap="square" anchor="ctr"/>
-          <a:lstStyle/>
-          <a:p>
-            <a:pPr algn="ctr"/>
-            <a:r>
-              <a:rPr sz="1600" b="1" i="0">
-                <a:solidFill>
-                  <a:srgbClr val="FFFFFF"/>
-                </a:solidFill>
-                <a:latin typeface="Calibri"/>
-              </a:rPr>
-              <a:t>4</a:t>
-            </a:r>
-          </a:p>
-        </p:txBody>
-      </p:sp>
-      <p:sp>
-        <p:nvSpPr>
-          <p:cNvPr id="21" name="TextBox 20"/>
-          <p:cNvSpPr txBox="1"/>
-          <p:nvPr/>
-        </p:nvSpPr>
-        <p:spPr>
-          <a:xfrm>
-            <a:off x="1188720" y="4537252"/>
-            <a:ext cx="10271455" cy="744321"/>
-          </a:xfrm>
-          <a:prstGeom prst="rect">
-            <a:avLst/>
-          </a:prstGeom>
-          <a:noFill/>
-        </p:spPr>
-        <p:txBody>
-          <a:bodyPr wrap="square" anchor="ctr"/>
-          <a:lstStyle/>
-          <a:p>
-            <a:r>
-              <a:rPr sz="1500" b="1" i="0">
-                <a:solidFill>
-                  <a:srgbClr val="095292"/>
-                </a:solidFill>
-                <a:latin typeface="Calibri"/>
-              </a:rPr>
-              <a:t>40 s · La propuesta de mejora</a:t>
-            </a:r>
-          </a:p>
-          <a:p>
-            <a:pPr>
-              <a:spcBef>
-                <a:spcPts val="200"/>
-              </a:spcBef>
-            </a:pPr>
-            <a:r>
-              <a:rPr sz="1300" b="0" i="0">
-                <a:solidFill>
-                  <a:srgbClr val="333333"/>
-                </a:solidFill>
-                <a:latin typeface="Calibri"/>
-              </a:rPr>
-              <a:t>Qué hacen distinto y con cuál de las cuatro operaciones.</a:t>
-            </a:r>
-          </a:p>
-        </p:txBody>
-      </p:sp>
-      <p:sp>
-        <p:nvSpPr>
-          <p:cNvPr id="22" name="Rounded Rectangle 21"/>
-          <p:cNvSpPr/>
-          <p:nvPr/>
-        </p:nvSpPr>
-        <p:spPr>
-          <a:xfrm>
-            <a:off x="457200" y="5446166"/>
-            <a:ext cx="11277295" cy="908913"/>
-          </a:xfrm>
-          <a:prstGeom prst="roundRect">
-            <a:avLst>
-              <a:gd name="adj" fmla="val 12000"/>
-            </a:avLst>
-          </a:prstGeom>
-          <a:solidFill>
-            <a:srgbClr val="F2F2F2"/>
-          </a:solidFill>
-          <a:ln>
-            <a:noFill/>
-          </a:ln>
-        </p:spPr>
-        <p:style>
-          <a:lnRef idx="1">
-            <a:schemeClr val="accent1"/>
-          </a:lnRef>
-          <a:fillRef idx="3">
-            <a:schemeClr val="accent1"/>
-          </a:fillRef>
-          <a:effectRef idx="2">
-            <a:schemeClr val="accent1"/>
-          </a:effectRef>
-          <a:fontRef idx="minor">
-            <a:schemeClr val="lt1"/>
-          </a:fontRef>
-        </p:style>
-        <p:txBody>
-          <a:bodyPr rtlCol="0" anchor="ctr"/>
-          <a:lstStyle/>
-          <a:p>
-            <a:pPr algn="ctr"/>
-          </a:p>
-        </p:txBody>
-      </p:sp>
-      <p:sp>
-        <p:nvSpPr>
-          <p:cNvPr id="23" name="Rounded Rectangle 22"/>
-          <p:cNvSpPr/>
-          <p:nvPr/>
-        </p:nvSpPr>
-        <p:spPr>
-          <a:xfrm>
-            <a:off x="594360" y="5681167"/>
-            <a:ext cx="438912" cy="438912"/>
-          </a:xfrm>
-          <a:prstGeom prst="roundRect">
-            <a:avLst>
-              <a:gd name="adj" fmla="val 12000"/>
-            </a:avLst>
-          </a:prstGeom>
-          <a:solidFill>
-            <a:srgbClr val="095292"/>
-          </a:solidFill>
-          <a:ln>
-            <a:noFill/>
-          </a:ln>
-        </p:spPr>
-        <p:style>
-          <a:lnRef idx="1">
-            <a:schemeClr val="accent1"/>
-          </a:lnRef>
-          <a:fillRef idx="3">
-            <a:schemeClr val="accent1"/>
-          </a:fillRef>
-          <a:effectRef idx="2">
-            <a:schemeClr val="accent1"/>
-          </a:effectRef>
-          <a:fontRef idx="minor">
-            <a:schemeClr val="lt1"/>
-          </a:fontRef>
-        </p:style>
-        <p:txBody>
-          <a:bodyPr rtlCol="0" anchor="ctr"/>
-          <a:lstStyle/>
-          <a:p>
-            <a:pPr algn="ctr"/>
-          </a:p>
-        </p:txBody>
-      </p:sp>
-      <p:sp>
-        <p:nvSpPr>
-          <p:cNvPr id="24" name="TextBox 23"/>
-          <p:cNvSpPr txBox="1"/>
-          <p:nvPr/>
-        </p:nvSpPr>
-        <p:spPr>
-          <a:xfrm>
-            <a:off x="594360" y="5681167"/>
-            <a:ext cx="438912" cy="438912"/>
-          </a:xfrm>
-          <a:prstGeom prst="rect">
-            <a:avLst/>
-          </a:prstGeom>
-          <a:noFill/>
-        </p:spPr>
-        <p:txBody>
-          <a:bodyPr wrap="square" anchor="ctr"/>
-          <a:lstStyle/>
-          <a:p>
-            <a:pPr algn="ctr"/>
-            <a:r>
-              <a:rPr sz="1600" b="1" i="0">
-                <a:solidFill>
-                  <a:srgbClr val="FFFFFF"/>
-                </a:solidFill>
-                <a:latin typeface="Calibri"/>
-              </a:rPr>
-              <a:t>5</a:t>
-            </a:r>
-          </a:p>
-        </p:txBody>
-      </p:sp>
-      <p:sp>
-        <p:nvSpPr>
-          <p:cNvPr id="25" name="TextBox 24"/>
-          <p:cNvSpPr txBox="1"/>
-          <p:nvPr/>
-        </p:nvSpPr>
-        <p:spPr>
-          <a:xfrm>
-            <a:off x="1188720" y="5537606"/>
-            <a:ext cx="10271455" cy="744321"/>
-          </a:xfrm>
-          <a:prstGeom prst="rect">
-            <a:avLst/>
-          </a:prstGeom>
-          <a:noFill/>
-        </p:spPr>
-        <p:txBody>
-          <a:bodyPr wrap="square" anchor="ctr"/>
-          <a:lstStyle/>
-          <a:p>
-            <a:r>
-              <a:rPr sz="1500" b="1" i="0">
-                <a:solidFill>
-                  <a:srgbClr val="095292"/>
-                </a:solidFill>
-                <a:latin typeface="Calibri"/>
-              </a:rPr>
-              <a:t>15 s · Qué reusan</a:t>
-            </a:r>
-          </a:p>
-          <a:p>
-            <a:pPr>
-              <a:spcBef>
-                <a:spcPts val="200"/>
-              </a:spcBef>
-            </a:pPr>
-            <a:r>
-              <a:rPr sz="1300" b="0" i="0">
-                <a:solidFill>
-                  <a:srgbClr val="333333"/>
-                </a:solidFill>
-                <a:latin typeface="Calibri"/>
-              </a:rPr>
-              <a:t>Una cosa concreta que aprovechan de lo que ya existe.</a:t>
-            </a:r>
-          </a:p>
-        </p:txBody>
-      </p:sp>
-      <p:sp>
-        <p:nvSpPr>
-          <p:cNvPr id="26" name="TextBox 25"/>
           <p:cNvSpPr txBox="1"/>
           <p:nvPr/>
         </p:nvSpPr>
@@ -9772,7 +8497,7 @@
         <p:spPr>
           <a:xfrm>
             <a:off x="0" y="0"/>
-            <a:ext cx="12191695" cy="960120"/>
+            <a:ext cx="12191695" cy="1170432"/>
           </a:xfrm>
           <a:prstGeom prst="rect">
             <a:avLst/>
@@ -9814,7 +8539,7 @@
         </p:nvSpPr>
         <p:spPr>
           <a:xfrm>
-            <a:off x="0" y="960120"/>
+            <a:off x="0" y="1170432"/>
             <a:ext cx="12191695" cy="41148"/>
           </a:xfrm>
           <a:prstGeom prst="rect">
@@ -9858,7 +8583,7 @@
         <p:spPr>
           <a:xfrm>
             <a:off x="457200" y="164592"/>
-            <a:ext cx="11277295" cy="502920"/>
+            <a:ext cx="11277295" cy="384048"/>
           </a:xfrm>
           <a:prstGeom prst="rect">
             <a:avLst/>
@@ -9878,7 +8603,7 @@
                 </a:solidFill>
                 <a:latin typeface="Calibri"/>
               </a:rPr>
-              <a:t>Para la Clase 10</a:t>
+              <a:t>Taller de hoy: Antecedentes y propuesta de mejora</a:t>
             </a:r>
           </a:p>
         </p:txBody>
@@ -9891,8 +8616,8 @@
         </p:nvSpPr>
         <p:spPr>
           <a:xfrm>
-            <a:off x="457200" y="1170432"/>
-            <a:ext cx="11277295" cy="5230368"/>
+            <a:off x="457200" y="566928"/>
+            <a:ext cx="11277295" cy="411480"/>
           </a:xfrm>
           <a:prstGeom prst="rect">
             <a:avLst/>
@@ -9905,234 +8630,963 @@
           </a:bodyPr>
           <a:lstStyle/>
           <a:p>
-            <a:pPr>
-              <a:spcAft>
-                <a:spcPts val="800"/>
-              </a:spcAft>
-            </a:pPr>
-            <a:r>
-              <a:rPr sz="2000" b="0" i="0">
-                <a:solidFill>
-                  <a:srgbClr val="333333"/>
-                </a:solidFill>
-                <a:latin typeface="Calibri"/>
-              </a:rPr>
-              <a:t>–   </a:t>
-            </a:r>
-            <a:r>
-              <a:rPr sz="2000" b="1" i="0">
-                <a:solidFill>
-                  <a:srgbClr val="333333"/>
-                </a:solidFill>
-                <a:latin typeface="Calibri"/>
-              </a:rPr>
-              <a:t>Trabajo dirigido:</a:t>
-            </a:r>
-            <a:r>
-              <a:rPr sz="2000" b="0" i="0">
-                <a:solidFill>
-                  <a:srgbClr val="333333"/>
-                </a:solidFill>
-                <a:latin typeface="Calibri"/>
-              </a:rPr>
-              <a:t> Revisión bibliográfica — completar las tres fichas con los seis campos y </a:t>
-            </a:r>
-            <a:r>
-              <a:rPr sz="2000" b="1" i="0">
-                <a:solidFill>
-                  <a:srgbClr val="333333"/>
-                </a:solidFill>
-                <a:latin typeface="Calibri"/>
-              </a:rPr>
-              <a:t>abrir cada enlace</a:t>
-            </a:r>
-            <a:r>
-              <a:rPr sz="2000" b="0" i="0">
-                <a:solidFill>
-                  <a:srgbClr val="333333"/>
-                </a:solidFill>
-                <a:latin typeface="Calibri"/>
-              </a:rPr>
-              <a:t> para confirmar que sirve, anotando la fecha de consulta.</a:t>
-            </a:r>
-          </a:p>
-          <a:p>
-            <a:pPr>
-              <a:spcAft>
-                <a:spcPts val="800"/>
-              </a:spcAft>
-            </a:pPr>
-            <a:r>
-              <a:rPr sz="2000" b="0" i="0">
-                <a:solidFill>
-                  <a:srgbClr val="333333"/>
-                </a:solidFill>
-                <a:latin typeface="Calibri"/>
-              </a:rPr>
-              <a:t>–   </a:t>
-            </a:r>
-            <a:r>
-              <a:rPr sz="2000" b="1" i="0">
-                <a:solidFill>
-                  <a:srgbClr val="333333"/>
-                </a:solidFill>
-                <a:latin typeface="Calibri"/>
-              </a:rPr>
-              <a:t>Trabajo independiente:</a:t>
-            </a:r>
-            <a:r>
-              <a:rPr sz="2000" b="0" i="0">
-                <a:solidFill>
-                  <a:srgbClr val="333333"/>
-                </a:solidFill>
-                <a:latin typeface="Calibri"/>
-              </a:rPr>
-              <a:t> Propuesta de mejora escrita en el documento del equipo: la brecha, la operación usada y por qué importa en su contexto. Máximo una página.</a:t>
-            </a:r>
-          </a:p>
-          <a:p>
-            <a:pPr>
-              <a:spcAft>
-                <a:spcPts val="800"/>
-              </a:spcAft>
-            </a:pPr>
-            <a:r>
-              <a:rPr sz="2000" b="0" i="0">
-                <a:solidFill>
-                  <a:srgbClr val="333333"/>
-                </a:solidFill>
-                <a:latin typeface="Calibri"/>
-              </a:rPr>
-              <a:t>–   </a:t>
-            </a:r>
-            <a:r>
-              <a:rPr sz="2000" b="1" i="0">
-                <a:solidFill>
-                  <a:srgbClr val="333333"/>
-                </a:solidFill>
-                <a:latin typeface="Calibri"/>
-              </a:rPr>
-              <a:t>Clase 10 · Herramientas digitales aplicadas a la Ingeniería</a:t>
-            </a:r>
-            <a:r>
-              <a:rPr sz="2000" b="0" i="0">
-                <a:solidFill>
-                  <a:srgbClr val="333333"/>
-                </a:solidFill>
-                <a:latin typeface="Calibri"/>
-              </a:rPr>
-              <a:t> — </a:t>
-            </a:r>
-            <a:r>
-              <a:rPr sz="2000" b="1" i="0">
-                <a:solidFill>
-                  <a:srgbClr val="333333"/>
-                </a:solidFill>
-                <a:latin typeface="Calibri"/>
-              </a:rPr>
-              <a:t>prototipado</a:t>
-            </a:r>
-            <a:r>
-              <a:rPr sz="2000" b="0" i="0">
-                <a:solidFill>
-                  <a:srgbClr val="333333"/>
-                </a:solidFill>
-                <a:latin typeface="Calibri"/>
-              </a:rPr>
-              <a:t>: qué es un prototipo y qué no, los niveles de fidelidad, y por qué el dibujo a mano da mejor retroalimentación que la pantalla terminada.</a:t>
-            </a:r>
-          </a:p>
-          <a:p>
-            <a:pPr>
-              <a:spcAft>
-                <a:spcPts val="800"/>
-              </a:spcAft>
-            </a:pPr>
-            <a:r>
-              <a:rPr sz="2000" b="0" i="0">
-                <a:solidFill>
-                  <a:srgbClr val="333333"/>
-                </a:solidFill>
-                <a:latin typeface="Calibri"/>
-              </a:rPr>
-              <a:t>–   </a:t>
-            </a:r>
-            <a:r>
-              <a:rPr sz="2000" b="1" i="0">
-                <a:solidFill>
-                  <a:srgbClr val="333333"/>
-                </a:solidFill>
-                <a:latin typeface="Calibri"/>
-              </a:rPr>
-              <a:t>Aviso:</a:t>
-            </a:r>
-            <a:r>
-              <a:rPr sz="2000" b="0" i="0">
-                <a:solidFill>
-                  <a:srgbClr val="333333"/>
-                </a:solidFill>
-                <a:latin typeface="Calibri"/>
-              </a:rPr>
-              <a:t> Para la sesión 10 traigan la propuesta de mejora escrita y el </a:t>
-            </a:r>
-            <a:r>
-              <a:rPr sz="2000" b="1" i="0">
-                <a:solidFill>
-                  <a:srgbClr val="333333"/>
-                </a:solidFill>
-                <a:latin typeface="Calibri"/>
-              </a:rPr>
-              <a:t>alcance mínimo de la sesión 8</a:t>
-            </a:r>
-            <a:r>
-              <a:rPr sz="2000" b="0" i="0">
-                <a:solidFill>
-                  <a:srgbClr val="333333"/>
-                </a:solidFill>
-                <a:latin typeface="Calibri"/>
-              </a:rPr>
-              <a:t> a la vista. Se van a dibujar las tres pantallas o pasos del flujo principal, y de las fichas de hoy sale el diseño.</a:t>
-            </a:r>
-          </a:p>
-          <a:p>
-            <a:pPr>
-              <a:spcAft>
-                <a:spcPts val="800"/>
-              </a:spcAft>
-            </a:pPr>
-            <a:r>
-              <a:rPr sz="2000" b="0" i="0">
-                <a:solidFill>
-                  <a:srgbClr val="333333"/>
-                </a:solidFill>
-                <a:latin typeface="Calibri"/>
-              </a:rPr>
-              <a:t>–   </a:t>
-            </a:r>
-            <a:r>
-              <a:rPr sz="2000" b="1" i="0">
-                <a:solidFill>
-                  <a:srgbClr val="333333"/>
-                </a:solidFill>
-                <a:latin typeface="Calibri"/>
-              </a:rPr>
-              <a:t>Antes de salir:</a:t>
-            </a:r>
-            <a:r>
-              <a:rPr sz="2000" b="0" i="0">
-                <a:solidFill>
-                  <a:srgbClr val="333333"/>
-                </a:solidFill>
-                <a:latin typeface="Calibri"/>
-              </a:rPr>
-              <a:t> el enlace del documento del equipo en el chat, con permiso de lectura para el docente, y el nombre del vocero de hoy.</a:t>
-            </a:r>
-          </a:p>
-        </p:txBody>
-      </p:sp>
-      <p:sp>
-        <p:nvSpPr>
-          <p:cNvPr id="6" name="TextBox 5"/>
+            <a:r>
+              <a:rPr sz="1400" b="0" i="0">
+                <a:solidFill>
+                  <a:srgbClr val="B8D8EE"/>
+                </a:solidFill>
+                <a:latin typeface="Calibri"/>
+              </a:rPr>
+              <a:t>17 min en equipos · búsqueda repartida: 2 académico · 2 soluciones reales · 1 normas · tres fichas de antecedentes + propuesta de mejora + mapa en Excalidraw</a:t>
+            </a:r>
+          </a:p>
+        </p:txBody>
+      </p:sp>
+      <p:sp>
+        <p:nvSpPr>
+          <p:cNvPr id="6" name="Rounded Rectangle 5"/>
+          <p:cNvSpPr/>
+          <p:nvPr/>
+        </p:nvSpPr>
+        <p:spPr>
+          <a:xfrm>
+            <a:off x="457200" y="1472184"/>
+            <a:ext cx="11277295" cy="566928"/>
+          </a:xfrm>
+          <a:prstGeom prst="roundRect">
+            <a:avLst>
+              <a:gd name="adj" fmla="val 12000"/>
+            </a:avLst>
+          </a:prstGeom>
+          <a:solidFill>
+            <a:srgbClr val="F2F2F2"/>
+          </a:solidFill>
+          <a:ln>
+            <a:noFill/>
+          </a:ln>
+        </p:spPr>
+        <p:style>
+          <a:lnRef idx="1">
+            <a:schemeClr val="accent1"/>
+          </a:lnRef>
+          <a:fillRef idx="3">
+            <a:schemeClr val="accent1"/>
+          </a:fillRef>
+          <a:effectRef idx="2">
+            <a:schemeClr val="accent1"/>
+          </a:effectRef>
+          <a:fontRef idx="minor">
+            <a:schemeClr val="lt1"/>
+          </a:fontRef>
+        </p:style>
+        <p:txBody>
+          <a:bodyPr rtlCol="0" anchor="ctr"/>
+          <a:lstStyle/>
+          <a:p>
+            <a:pPr algn="ctr"/>
+          </a:p>
+        </p:txBody>
+      </p:sp>
+      <p:sp>
+        <p:nvSpPr>
+          <p:cNvPr id="7" name="Rectangle 6"/>
+          <p:cNvSpPr/>
+          <p:nvPr/>
+        </p:nvSpPr>
+        <p:spPr>
+          <a:xfrm>
+            <a:off x="640080" y="1618487"/>
+            <a:ext cx="274320" cy="274320"/>
+          </a:xfrm>
+          <a:prstGeom prst="rect">
+            <a:avLst/>
+          </a:prstGeom>
+          <a:solidFill>
+            <a:srgbClr val="FFFFFF"/>
+          </a:solidFill>
+          <a:ln>
+            <a:solidFill>
+              <a:srgbClr val="333333"/>
+            </a:solidFill>
+          </a:ln>
+        </p:spPr>
+        <p:style>
+          <a:lnRef idx="1">
+            <a:schemeClr val="accent1"/>
+          </a:lnRef>
+          <a:fillRef idx="3">
+            <a:schemeClr val="accent1"/>
+          </a:fillRef>
+          <a:effectRef idx="2">
+            <a:schemeClr val="accent1"/>
+          </a:effectRef>
+          <a:fontRef idx="minor">
+            <a:schemeClr val="lt1"/>
+          </a:fontRef>
+        </p:style>
+        <p:txBody>
+          <a:bodyPr rtlCol="0" anchor="ctr"/>
+          <a:lstStyle/>
+          <a:p>
+            <a:pPr algn="ctr"/>
+          </a:p>
+        </p:txBody>
+      </p:sp>
+      <p:sp>
+        <p:nvSpPr>
+          <p:cNvPr id="8" name="Rectangle 7"/>
+          <p:cNvSpPr/>
+          <p:nvPr/>
+        </p:nvSpPr>
+        <p:spPr>
+          <a:xfrm>
+            <a:off x="640080" y="1618487"/>
+            <a:ext cx="73152" cy="274320"/>
+          </a:xfrm>
+          <a:prstGeom prst="rect">
+            <a:avLst/>
+          </a:prstGeom>
+          <a:solidFill>
+            <a:srgbClr val="269CCB"/>
+          </a:solidFill>
+          <a:ln>
+            <a:noFill/>
+          </a:ln>
+        </p:spPr>
+        <p:style>
+          <a:lnRef idx="1">
+            <a:schemeClr val="accent1"/>
+          </a:lnRef>
+          <a:fillRef idx="3">
+            <a:schemeClr val="accent1"/>
+          </a:fillRef>
+          <a:effectRef idx="2">
+            <a:schemeClr val="accent1"/>
+          </a:effectRef>
+          <a:fontRef idx="minor">
+            <a:schemeClr val="lt1"/>
+          </a:fontRef>
+        </p:style>
+        <p:txBody>
+          <a:bodyPr rtlCol="0" anchor="ctr"/>
+          <a:lstStyle/>
+          <a:p>
+            <a:pPr algn="ctr"/>
+          </a:p>
+        </p:txBody>
+      </p:sp>
+      <p:sp>
+        <p:nvSpPr>
+          <p:cNvPr id="9" name="TextBox 8"/>
+          <p:cNvSpPr txBox="1"/>
+          <p:nvPr/>
+        </p:nvSpPr>
+        <p:spPr>
+          <a:xfrm>
+            <a:off x="1097280" y="1563624"/>
+            <a:ext cx="10362895" cy="402336"/>
+          </a:xfrm>
+          <a:prstGeom prst="rect">
+            <a:avLst/>
+          </a:prstGeom>
+          <a:noFill/>
+        </p:spPr>
+        <p:txBody>
+          <a:bodyPr wrap="square" anchor="ctr"/>
+          <a:lstStyle/>
+          <a:p>
+            <a:r>
+              <a:rPr sz="1500" b="1" i="0">
+                <a:solidFill>
+                  <a:srgbClr val="333333"/>
+                </a:solidFill>
+                <a:latin typeface="Calibri"/>
+              </a:rPr>
+              <a:t>LA PREGUNTA DE BÚSQUEDA</a:t>
+            </a:r>
+            <a:r>
+              <a:rPr sz="1500" b="0" i="0">
+                <a:solidFill>
+                  <a:srgbClr val="333333"/>
+                </a:solidFill>
+                <a:latin typeface="Calibri"/>
+              </a:rPr>
+              <a:t> — Una </a:t>
+            </a:r>
+            <a:r>
+              <a:rPr sz="1500" b="1" i="0">
+                <a:solidFill>
+                  <a:srgbClr val="333333"/>
+                </a:solidFill>
+                <a:latin typeface="Calibri"/>
+              </a:rPr>
+              <a:t>pregunta</a:t>
+            </a:r>
+            <a:r>
+              <a:rPr sz="1500" b="0" i="0">
+                <a:solidFill>
+                  <a:srgbClr val="333333"/>
+                </a:solidFill>
+                <a:latin typeface="Calibri"/>
+              </a:rPr>
+              <a:t>, no una palabra, y sus términos de búsqueda en dos o tres versiones — incluida una en inglés.</a:t>
+            </a:r>
+          </a:p>
+        </p:txBody>
+      </p:sp>
+      <p:sp>
+        <p:nvSpPr>
+          <p:cNvPr id="10" name="Rounded Rectangle 9"/>
+          <p:cNvSpPr/>
+          <p:nvPr/>
+        </p:nvSpPr>
+        <p:spPr>
+          <a:xfrm>
+            <a:off x="457200" y="2148839"/>
+            <a:ext cx="11277295" cy="566928"/>
+          </a:xfrm>
+          <a:prstGeom prst="roundRect">
+            <a:avLst>
+              <a:gd name="adj" fmla="val 12000"/>
+            </a:avLst>
+          </a:prstGeom>
+          <a:solidFill>
+            <a:srgbClr val="F2F2F2"/>
+          </a:solidFill>
+          <a:ln>
+            <a:noFill/>
+          </a:ln>
+        </p:spPr>
+        <p:style>
+          <a:lnRef idx="1">
+            <a:schemeClr val="accent1"/>
+          </a:lnRef>
+          <a:fillRef idx="3">
+            <a:schemeClr val="accent1"/>
+          </a:fillRef>
+          <a:effectRef idx="2">
+            <a:schemeClr val="accent1"/>
+          </a:effectRef>
+          <a:fontRef idx="minor">
+            <a:schemeClr val="lt1"/>
+          </a:fontRef>
+        </p:style>
+        <p:txBody>
+          <a:bodyPr rtlCol="0" anchor="ctr"/>
+          <a:lstStyle/>
+          <a:p>
+            <a:pPr algn="ctr"/>
+          </a:p>
+        </p:txBody>
+      </p:sp>
+      <p:sp>
+        <p:nvSpPr>
+          <p:cNvPr id="11" name="Rectangle 10"/>
+          <p:cNvSpPr/>
+          <p:nvPr/>
+        </p:nvSpPr>
+        <p:spPr>
+          <a:xfrm>
+            <a:off x="640080" y="2295144"/>
+            <a:ext cx="274320" cy="274320"/>
+          </a:xfrm>
+          <a:prstGeom prst="rect">
+            <a:avLst/>
+          </a:prstGeom>
+          <a:solidFill>
+            <a:srgbClr val="FFFFFF"/>
+          </a:solidFill>
+          <a:ln>
+            <a:solidFill>
+              <a:srgbClr val="333333"/>
+            </a:solidFill>
+          </a:ln>
+        </p:spPr>
+        <p:style>
+          <a:lnRef idx="1">
+            <a:schemeClr val="accent1"/>
+          </a:lnRef>
+          <a:fillRef idx="3">
+            <a:schemeClr val="accent1"/>
+          </a:fillRef>
+          <a:effectRef idx="2">
+            <a:schemeClr val="accent1"/>
+          </a:effectRef>
+          <a:fontRef idx="minor">
+            <a:schemeClr val="lt1"/>
+          </a:fontRef>
+        </p:style>
+        <p:txBody>
+          <a:bodyPr rtlCol="0" anchor="ctr"/>
+          <a:lstStyle/>
+          <a:p>
+            <a:pPr algn="ctr"/>
+          </a:p>
+        </p:txBody>
+      </p:sp>
+      <p:sp>
+        <p:nvSpPr>
+          <p:cNvPr id="12" name="Rectangle 11"/>
+          <p:cNvSpPr/>
+          <p:nvPr/>
+        </p:nvSpPr>
+        <p:spPr>
+          <a:xfrm>
+            <a:off x="640080" y="2295144"/>
+            <a:ext cx="73152" cy="274320"/>
+          </a:xfrm>
+          <a:prstGeom prst="rect">
+            <a:avLst/>
+          </a:prstGeom>
+          <a:solidFill>
+            <a:srgbClr val="269CCB"/>
+          </a:solidFill>
+          <a:ln>
+            <a:noFill/>
+          </a:ln>
+        </p:spPr>
+        <p:style>
+          <a:lnRef idx="1">
+            <a:schemeClr val="accent1"/>
+          </a:lnRef>
+          <a:fillRef idx="3">
+            <a:schemeClr val="accent1"/>
+          </a:fillRef>
+          <a:effectRef idx="2">
+            <a:schemeClr val="accent1"/>
+          </a:effectRef>
+          <a:fontRef idx="minor">
+            <a:schemeClr val="lt1"/>
+          </a:fontRef>
+        </p:style>
+        <p:txBody>
+          <a:bodyPr rtlCol="0" anchor="ctr"/>
+          <a:lstStyle/>
+          <a:p>
+            <a:pPr algn="ctr"/>
+          </a:p>
+        </p:txBody>
+      </p:sp>
+      <p:sp>
+        <p:nvSpPr>
+          <p:cNvPr id="13" name="TextBox 12"/>
+          <p:cNvSpPr txBox="1"/>
+          <p:nvPr/>
+        </p:nvSpPr>
+        <p:spPr>
+          <a:xfrm>
+            <a:off x="1097280" y="2240279"/>
+            <a:ext cx="10362895" cy="402336"/>
+          </a:xfrm>
+          <a:prstGeom prst="rect">
+            <a:avLst/>
+          </a:prstGeom>
+          <a:noFill/>
+        </p:spPr>
+        <p:txBody>
+          <a:bodyPr wrap="square" anchor="ctr"/>
+          <a:lstStyle/>
+          <a:p>
+            <a:r>
+              <a:rPr sz="1500" b="1" i="0">
+                <a:solidFill>
+                  <a:srgbClr val="333333"/>
+                </a:solidFill>
+                <a:latin typeface="Calibri"/>
+              </a:rPr>
+              <a:t>TRES ANTECEDENTES FICHADOS</a:t>
+            </a:r>
+            <a:r>
+              <a:rPr sz="1500" b="0" i="0">
+                <a:solidFill>
+                  <a:srgbClr val="333333"/>
+                </a:solidFill>
+                <a:latin typeface="Calibri"/>
+              </a:rPr>
+              <a:t> — Tres fichas con los seis campos: </a:t>
+            </a:r>
+            <a:r>
+              <a:rPr sz="1500" b="1" i="0">
+                <a:solidFill>
+                  <a:srgbClr val="333333"/>
+                </a:solidFill>
+                <a:latin typeface="Calibri"/>
+              </a:rPr>
+              <a:t>autor o responsable · año · dónde · qué hace · qué le falta para nuestro caso · enlace</a:t>
+            </a:r>
+            <a:r>
+              <a:rPr sz="1500" b="0" i="0">
+                <a:solidFill>
+                  <a:srgbClr val="333333"/>
+                </a:solidFill>
+                <a:latin typeface="Calibri"/>
+              </a:rPr>
+              <a:t>. Al menos una fuente académica o normativa.</a:t>
+            </a:r>
+          </a:p>
+        </p:txBody>
+      </p:sp>
+      <p:sp>
+        <p:nvSpPr>
+          <p:cNvPr id="14" name="Rounded Rectangle 13"/>
+          <p:cNvSpPr/>
+          <p:nvPr/>
+        </p:nvSpPr>
+        <p:spPr>
+          <a:xfrm>
+            <a:off x="457200" y="2825496"/>
+            <a:ext cx="11277295" cy="566928"/>
+          </a:xfrm>
+          <a:prstGeom prst="roundRect">
+            <a:avLst>
+              <a:gd name="adj" fmla="val 12000"/>
+            </a:avLst>
+          </a:prstGeom>
+          <a:solidFill>
+            <a:srgbClr val="F2F2F2"/>
+          </a:solidFill>
+          <a:ln>
+            <a:noFill/>
+          </a:ln>
+        </p:spPr>
+        <p:style>
+          <a:lnRef idx="1">
+            <a:schemeClr val="accent1"/>
+          </a:lnRef>
+          <a:fillRef idx="3">
+            <a:schemeClr val="accent1"/>
+          </a:fillRef>
+          <a:effectRef idx="2">
+            <a:schemeClr val="accent1"/>
+          </a:effectRef>
+          <a:fontRef idx="minor">
+            <a:schemeClr val="lt1"/>
+          </a:fontRef>
+        </p:style>
+        <p:txBody>
+          <a:bodyPr rtlCol="0" anchor="ctr"/>
+          <a:lstStyle/>
+          <a:p>
+            <a:pPr algn="ctr"/>
+          </a:p>
+        </p:txBody>
+      </p:sp>
+      <p:sp>
+        <p:nvSpPr>
+          <p:cNvPr id="15" name="Rectangle 14"/>
+          <p:cNvSpPr/>
+          <p:nvPr/>
+        </p:nvSpPr>
+        <p:spPr>
+          <a:xfrm>
+            <a:off x="640080" y="2971800"/>
+            <a:ext cx="274320" cy="274320"/>
+          </a:xfrm>
+          <a:prstGeom prst="rect">
+            <a:avLst/>
+          </a:prstGeom>
+          <a:solidFill>
+            <a:srgbClr val="FFFFFF"/>
+          </a:solidFill>
+          <a:ln>
+            <a:solidFill>
+              <a:srgbClr val="333333"/>
+            </a:solidFill>
+          </a:ln>
+        </p:spPr>
+        <p:style>
+          <a:lnRef idx="1">
+            <a:schemeClr val="accent1"/>
+          </a:lnRef>
+          <a:fillRef idx="3">
+            <a:schemeClr val="accent1"/>
+          </a:fillRef>
+          <a:effectRef idx="2">
+            <a:schemeClr val="accent1"/>
+          </a:effectRef>
+          <a:fontRef idx="minor">
+            <a:schemeClr val="lt1"/>
+          </a:fontRef>
+        </p:style>
+        <p:txBody>
+          <a:bodyPr rtlCol="0" anchor="ctr"/>
+          <a:lstStyle/>
+          <a:p>
+            <a:pPr algn="ctr"/>
+          </a:p>
+        </p:txBody>
+      </p:sp>
+      <p:sp>
+        <p:nvSpPr>
+          <p:cNvPr id="16" name="Rectangle 15"/>
+          <p:cNvSpPr/>
+          <p:nvPr/>
+        </p:nvSpPr>
+        <p:spPr>
+          <a:xfrm>
+            <a:off x="640080" y="2971800"/>
+            <a:ext cx="73152" cy="274320"/>
+          </a:xfrm>
+          <a:prstGeom prst="rect">
+            <a:avLst/>
+          </a:prstGeom>
+          <a:solidFill>
+            <a:srgbClr val="269CCB"/>
+          </a:solidFill>
+          <a:ln>
+            <a:noFill/>
+          </a:ln>
+        </p:spPr>
+        <p:style>
+          <a:lnRef idx="1">
+            <a:schemeClr val="accent1"/>
+          </a:lnRef>
+          <a:fillRef idx="3">
+            <a:schemeClr val="accent1"/>
+          </a:fillRef>
+          <a:effectRef idx="2">
+            <a:schemeClr val="accent1"/>
+          </a:effectRef>
+          <a:fontRef idx="minor">
+            <a:schemeClr val="lt1"/>
+          </a:fontRef>
+        </p:style>
+        <p:txBody>
+          <a:bodyPr rtlCol="0" anchor="ctr"/>
+          <a:lstStyle/>
+          <a:p>
+            <a:pPr algn="ctr"/>
+          </a:p>
+        </p:txBody>
+      </p:sp>
+      <p:sp>
+        <p:nvSpPr>
+          <p:cNvPr id="17" name="TextBox 16"/>
+          <p:cNvSpPr txBox="1"/>
+          <p:nvPr/>
+        </p:nvSpPr>
+        <p:spPr>
+          <a:xfrm>
+            <a:off x="1097280" y="2916936"/>
+            <a:ext cx="10362895" cy="402336"/>
+          </a:xfrm>
+          <a:prstGeom prst="rect">
+            <a:avLst/>
+          </a:prstGeom>
+          <a:noFill/>
+        </p:spPr>
+        <p:txBody>
+          <a:bodyPr wrap="square" anchor="ctr"/>
+          <a:lstStyle/>
+          <a:p>
+            <a:r>
+              <a:rPr sz="1500" b="1" i="0">
+                <a:solidFill>
+                  <a:srgbClr val="333333"/>
+                </a:solidFill>
+                <a:latin typeface="Calibri"/>
+              </a:rPr>
+              <a:t>QUÉ BUSCAMOS Y NO ENCONTRAMOS</a:t>
+            </a:r>
+            <a:r>
+              <a:rPr sz="1500" b="0" i="0">
+                <a:solidFill>
+                  <a:srgbClr val="333333"/>
+                </a:solidFill>
+                <a:latin typeface="Calibri"/>
+              </a:rPr>
+              <a:t> — Qué buscaron, con qué términos, en qué sitios, y </a:t>
+            </a:r>
+            <a:r>
+              <a:rPr sz="1500" b="1" i="0">
+                <a:solidFill>
+                  <a:srgbClr val="333333"/>
+                </a:solidFill>
+                <a:latin typeface="Calibri"/>
+              </a:rPr>
+              <a:t>qué fue lo más cercano</a:t>
+            </a:r>
+            <a:r>
+              <a:rPr sz="1500" b="0" i="0">
+                <a:solidFill>
+                  <a:srgbClr val="333333"/>
+                </a:solidFill>
+                <a:latin typeface="Calibri"/>
+              </a:rPr>
+              <a:t> que apareció. «No encontramos nada» bien escrito es un hallazgo.</a:t>
+            </a:r>
+          </a:p>
+        </p:txBody>
+      </p:sp>
+      <p:sp>
+        <p:nvSpPr>
+          <p:cNvPr id="18" name="Rounded Rectangle 17"/>
+          <p:cNvSpPr/>
+          <p:nvPr/>
+        </p:nvSpPr>
+        <p:spPr>
+          <a:xfrm>
+            <a:off x="457200" y="3502152"/>
+            <a:ext cx="11277295" cy="566928"/>
+          </a:xfrm>
+          <a:prstGeom prst="roundRect">
+            <a:avLst>
+              <a:gd name="adj" fmla="val 12000"/>
+            </a:avLst>
+          </a:prstGeom>
+          <a:solidFill>
+            <a:srgbClr val="F2F2F2"/>
+          </a:solidFill>
+          <a:ln>
+            <a:noFill/>
+          </a:ln>
+        </p:spPr>
+        <p:style>
+          <a:lnRef idx="1">
+            <a:schemeClr val="accent1"/>
+          </a:lnRef>
+          <a:fillRef idx="3">
+            <a:schemeClr val="accent1"/>
+          </a:fillRef>
+          <a:effectRef idx="2">
+            <a:schemeClr val="accent1"/>
+          </a:effectRef>
+          <a:fontRef idx="minor">
+            <a:schemeClr val="lt1"/>
+          </a:fontRef>
+        </p:style>
+        <p:txBody>
+          <a:bodyPr rtlCol="0" anchor="ctr"/>
+          <a:lstStyle/>
+          <a:p>
+            <a:pPr algn="ctr"/>
+          </a:p>
+        </p:txBody>
+      </p:sp>
+      <p:sp>
+        <p:nvSpPr>
+          <p:cNvPr id="19" name="Rectangle 18"/>
+          <p:cNvSpPr/>
+          <p:nvPr/>
+        </p:nvSpPr>
+        <p:spPr>
+          <a:xfrm>
+            <a:off x="640080" y="3648456"/>
+            <a:ext cx="274320" cy="274320"/>
+          </a:xfrm>
+          <a:prstGeom prst="rect">
+            <a:avLst/>
+          </a:prstGeom>
+          <a:solidFill>
+            <a:srgbClr val="FFFFFF"/>
+          </a:solidFill>
+          <a:ln>
+            <a:solidFill>
+              <a:srgbClr val="333333"/>
+            </a:solidFill>
+          </a:ln>
+        </p:spPr>
+        <p:style>
+          <a:lnRef idx="1">
+            <a:schemeClr val="accent1"/>
+          </a:lnRef>
+          <a:fillRef idx="3">
+            <a:schemeClr val="accent1"/>
+          </a:fillRef>
+          <a:effectRef idx="2">
+            <a:schemeClr val="accent1"/>
+          </a:effectRef>
+          <a:fontRef idx="minor">
+            <a:schemeClr val="lt1"/>
+          </a:fontRef>
+        </p:style>
+        <p:txBody>
+          <a:bodyPr rtlCol="0" anchor="ctr"/>
+          <a:lstStyle/>
+          <a:p>
+            <a:pPr algn="ctr"/>
+          </a:p>
+        </p:txBody>
+      </p:sp>
+      <p:sp>
+        <p:nvSpPr>
+          <p:cNvPr id="20" name="Rectangle 19"/>
+          <p:cNvSpPr/>
+          <p:nvPr/>
+        </p:nvSpPr>
+        <p:spPr>
+          <a:xfrm>
+            <a:off x="640080" y="3648456"/>
+            <a:ext cx="73152" cy="274320"/>
+          </a:xfrm>
+          <a:prstGeom prst="rect">
+            <a:avLst/>
+          </a:prstGeom>
+          <a:solidFill>
+            <a:srgbClr val="269CCB"/>
+          </a:solidFill>
+          <a:ln>
+            <a:noFill/>
+          </a:ln>
+        </p:spPr>
+        <p:style>
+          <a:lnRef idx="1">
+            <a:schemeClr val="accent1"/>
+          </a:lnRef>
+          <a:fillRef idx="3">
+            <a:schemeClr val="accent1"/>
+          </a:fillRef>
+          <a:effectRef idx="2">
+            <a:schemeClr val="accent1"/>
+          </a:effectRef>
+          <a:fontRef idx="minor">
+            <a:schemeClr val="lt1"/>
+          </a:fontRef>
+        </p:style>
+        <p:txBody>
+          <a:bodyPr rtlCol="0" anchor="ctr"/>
+          <a:lstStyle/>
+          <a:p>
+            <a:pPr algn="ctr"/>
+          </a:p>
+        </p:txBody>
+      </p:sp>
+      <p:sp>
+        <p:nvSpPr>
+          <p:cNvPr id="21" name="TextBox 20"/>
+          <p:cNvSpPr txBox="1"/>
+          <p:nvPr/>
+        </p:nvSpPr>
+        <p:spPr>
+          <a:xfrm>
+            <a:off x="1097280" y="3593592"/>
+            <a:ext cx="10362895" cy="402336"/>
+          </a:xfrm>
+          <a:prstGeom prst="rect">
+            <a:avLst/>
+          </a:prstGeom>
+          <a:noFill/>
+        </p:spPr>
+        <p:txBody>
+          <a:bodyPr wrap="square" anchor="ctr"/>
+          <a:lstStyle/>
+          <a:p>
+            <a:r>
+              <a:rPr sz="1500" b="1" i="0">
+                <a:solidFill>
+                  <a:srgbClr val="333333"/>
+                </a:solidFill>
+                <a:latin typeface="Calibri"/>
+              </a:rPr>
+              <a:t>LA PROPUESTA DE MEJORA</a:t>
+            </a:r>
+            <a:r>
+              <a:rPr sz="1500" b="0" i="0">
+                <a:solidFill>
+                  <a:srgbClr val="333333"/>
+                </a:solidFill>
+                <a:latin typeface="Calibri"/>
+              </a:rPr>
+              <a:t> — Qué van a hacer distinto respecto a lo fichado, </a:t>
+            </a:r>
+            <a:r>
+              <a:rPr sz="1500" b="1" i="0">
+                <a:solidFill>
+                  <a:srgbClr val="333333"/>
+                </a:solidFill>
+                <a:latin typeface="Calibri"/>
+              </a:rPr>
+              <a:t>con cuál de las cuatro operaciones</a:t>
+            </a:r>
+            <a:r>
+              <a:rPr sz="1500" b="0" i="0">
+                <a:solidFill>
+                  <a:srgbClr val="333333"/>
+                </a:solidFill>
+                <a:latin typeface="Calibri"/>
+              </a:rPr>
+              <a:t> (quitar, combinar, invertir, adaptar), y por qué eso importa en su contexto.</a:t>
+            </a:r>
+          </a:p>
+        </p:txBody>
+      </p:sp>
+      <p:sp>
+        <p:nvSpPr>
+          <p:cNvPr id="22" name="Rounded Rectangle 21"/>
+          <p:cNvSpPr/>
+          <p:nvPr/>
+        </p:nvSpPr>
+        <p:spPr>
+          <a:xfrm>
+            <a:off x="457200" y="4178808"/>
+            <a:ext cx="11277295" cy="566928"/>
+          </a:xfrm>
+          <a:prstGeom prst="roundRect">
+            <a:avLst>
+              <a:gd name="adj" fmla="val 12000"/>
+            </a:avLst>
+          </a:prstGeom>
+          <a:solidFill>
+            <a:srgbClr val="F2F2F2"/>
+          </a:solidFill>
+          <a:ln>
+            <a:noFill/>
+          </a:ln>
+        </p:spPr>
+        <p:style>
+          <a:lnRef idx="1">
+            <a:schemeClr val="accent1"/>
+          </a:lnRef>
+          <a:fillRef idx="3">
+            <a:schemeClr val="accent1"/>
+          </a:fillRef>
+          <a:effectRef idx="2">
+            <a:schemeClr val="accent1"/>
+          </a:effectRef>
+          <a:fontRef idx="minor">
+            <a:schemeClr val="lt1"/>
+          </a:fontRef>
+        </p:style>
+        <p:txBody>
+          <a:bodyPr rtlCol="0" anchor="ctr"/>
+          <a:lstStyle/>
+          <a:p>
+            <a:pPr algn="ctr"/>
+          </a:p>
+        </p:txBody>
+      </p:sp>
+      <p:sp>
+        <p:nvSpPr>
+          <p:cNvPr id="23" name="Rectangle 22"/>
+          <p:cNvSpPr/>
+          <p:nvPr/>
+        </p:nvSpPr>
+        <p:spPr>
+          <a:xfrm>
+            <a:off x="640080" y="4325112"/>
+            <a:ext cx="274320" cy="274320"/>
+          </a:xfrm>
+          <a:prstGeom prst="rect">
+            <a:avLst/>
+          </a:prstGeom>
+          <a:solidFill>
+            <a:srgbClr val="FFFFFF"/>
+          </a:solidFill>
+          <a:ln>
+            <a:solidFill>
+              <a:srgbClr val="333333"/>
+            </a:solidFill>
+          </a:ln>
+        </p:spPr>
+        <p:style>
+          <a:lnRef idx="1">
+            <a:schemeClr val="accent1"/>
+          </a:lnRef>
+          <a:fillRef idx="3">
+            <a:schemeClr val="accent1"/>
+          </a:fillRef>
+          <a:effectRef idx="2">
+            <a:schemeClr val="accent1"/>
+          </a:effectRef>
+          <a:fontRef idx="minor">
+            <a:schemeClr val="lt1"/>
+          </a:fontRef>
+        </p:style>
+        <p:txBody>
+          <a:bodyPr rtlCol="0" anchor="ctr"/>
+          <a:lstStyle/>
+          <a:p>
+            <a:pPr algn="ctr"/>
+          </a:p>
+        </p:txBody>
+      </p:sp>
+      <p:sp>
+        <p:nvSpPr>
+          <p:cNvPr id="24" name="Rectangle 23"/>
+          <p:cNvSpPr/>
+          <p:nvPr/>
+        </p:nvSpPr>
+        <p:spPr>
+          <a:xfrm>
+            <a:off x="640080" y="4325112"/>
+            <a:ext cx="73152" cy="274320"/>
+          </a:xfrm>
+          <a:prstGeom prst="rect">
+            <a:avLst/>
+          </a:prstGeom>
+          <a:solidFill>
+            <a:srgbClr val="269CCB"/>
+          </a:solidFill>
+          <a:ln>
+            <a:noFill/>
+          </a:ln>
+        </p:spPr>
+        <p:style>
+          <a:lnRef idx="1">
+            <a:schemeClr val="accent1"/>
+          </a:lnRef>
+          <a:fillRef idx="3">
+            <a:schemeClr val="accent1"/>
+          </a:fillRef>
+          <a:effectRef idx="2">
+            <a:schemeClr val="accent1"/>
+          </a:effectRef>
+          <a:fontRef idx="minor">
+            <a:schemeClr val="lt1"/>
+          </a:fontRef>
+        </p:style>
+        <p:txBody>
+          <a:bodyPr rtlCol="0" anchor="ctr"/>
+          <a:lstStyle/>
+          <a:p>
+            <a:pPr algn="ctr"/>
+          </a:p>
+        </p:txBody>
+      </p:sp>
+      <p:sp>
+        <p:nvSpPr>
+          <p:cNvPr id="25" name="TextBox 24"/>
+          <p:cNvSpPr txBox="1"/>
+          <p:nvPr/>
+        </p:nvSpPr>
+        <p:spPr>
+          <a:xfrm>
+            <a:off x="1097280" y="4270248"/>
+            <a:ext cx="10362895" cy="402336"/>
+          </a:xfrm>
+          <a:prstGeom prst="rect">
+            <a:avLst/>
+          </a:prstGeom>
+          <a:noFill/>
+        </p:spPr>
+        <p:txBody>
+          <a:bodyPr wrap="square" anchor="ctr"/>
+          <a:lstStyle/>
+          <a:p>
+            <a:r>
+              <a:rPr sz="1500" b="1" i="0">
+                <a:solidFill>
+                  <a:srgbClr val="333333"/>
+                </a:solidFill>
+                <a:latin typeface="Calibri"/>
+              </a:rPr>
+              <a:t>LO QUE VAMOS A REUSAR</a:t>
+            </a:r>
+            <a:r>
+              <a:rPr sz="1500" b="0" i="0">
+                <a:solidFill>
+                  <a:srgbClr val="333333"/>
+                </a:solidFill>
+                <a:latin typeface="Calibri"/>
+              </a:rPr>
+              <a:t> — Qué de lo que ya existe piensan aprovechar: una idea de diseño, una forma de organizar los datos, una herramienta, una lista de errores conocidos.</a:t>
+            </a:r>
+          </a:p>
+        </p:txBody>
+      </p:sp>
+      <p:sp>
+        <p:nvSpPr>
+          <p:cNvPr id="26" name="TextBox 25"/>
           <p:cNvSpPr txBox="1"/>
           <p:nvPr/>
         </p:nvSpPr>
@@ -10174,6 +9628,1522 @@
 </file>
 
 <file path=ppt/slides/slide23.xml><?xml version="1.0" encoding="utf-8"?>
+<p:sld xmlns:a="http://schemas.openxmlformats.org/drawingml/2006/main" xmlns:p="http://schemas.openxmlformats.org/presentationml/2006/main" xmlns:r="http://schemas.openxmlformats.org/officeDocument/2006/relationships">
+  <p:cSld>
+    <p:bg>
+      <p:bgPr>
+        <a:solidFill>
+          <a:srgbClr val="FFFFFF"/>
+        </a:solidFill>
+        <a:effectLst/>
+      </p:bgPr>
+    </p:bg>
+    <p:spTree>
+      <p:nvGrpSpPr>
+        <p:cNvPr id="1" name=""/>
+        <p:cNvGrpSpPr/>
+        <p:nvPr/>
+      </p:nvGrpSpPr>
+      <p:grpSpPr/>
+      <p:sp>
+        <p:nvSpPr>
+          <p:cNvPr id="2" name="Rectangle 1"/>
+          <p:cNvSpPr/>
+          <p:nvPr/>
+        </p:nvSpPr>
+        <p:spPr>
+          <a:xfrm>
+            <a:off x="0" y="0"/>
+            <a:ext cx="12191695" cy="1170432"/>
+          </a:xfrm>
+          <a:prstGeom prst="rect">
+            <a:avLst/>
+          </a:prstGeom>
+          <a:solidFill>
+            <a:srgbClr val="095292"/>
+          </a:solidFill>
+          <a:ln>
+            <a:noFill/>
+          </a:ln>
+        </p:spPr>
+        <p:style>
+          <a:lnRef idx="1">
+            <a:schemeClr val="accent1"/>
+          </a:lnRef>
+          <a:fillRef idx="3">
+            <a:schemeClr val="accent1"/>
+          </a:fillRef>
+          <a:effectRef idx="2">
+            <a:schemeClr val="accent1"/>
+          </a:effectRef>
+          <a:fontRef idx="minor">
+            <a:schemeClr val="lt1"/>
+          </a:fontRef>
+        </p:style>
+        <p:txBody>
+          <a:bodyPr rtlCol="0" anchor="ctr"/>
+          <a:lstStyle/>
+          <a:p>
+            <a:pPr algn="ctr"/>
+          </a:p>
+        </p:txBody>
+      </p:sp>
+      <p:sp>
+        <p:nvSpPr>
+          <p:cNvPr id="3" name="Rectangle 2"/>
+          <p:cNvSpPr/>
+          <p:nvPr/>
+        </p:nvSpPr>
+        <p:spPr>
+          <a:xfrm>
+            <a:off x="0" y="1170432"/>
+            <a:ext cx="12191695" cy="41148"/>
+          </a:xfrm>
+          <a:prstGeom prst="rect">
+            <a:avLst/>
+          </a:prstGeom>
+          <a:solidFill>
+            <a:srgbClr val="FFD000"/>
+          </a:solidFill>
+          <a:ln>
+            <a:noFill/>
+          </a:ln>
+        </p:spPr>
+        <p:style>
+          <a:lnRef idx="1">
+            <a:schemeClr val="accent1"/>
+          </a:lnRef>
+          <a:fillRef idx="3">
+            <a:schemeClr val="accent1"/>
+          </a:fillRef>
+          <a:effectRef idx="2">
+            <a:schemeClr val="accent1"/>
+          </a:effectRef>
+          <a:fontRef idx="minor">
+            <a:schemeClr val="lt1"/>
+          </a:fontRef>
+        </p:style>
+        <p:txBody>
+          <a:bodyPr rtlCol="0" anchor="ctr"/>
+          <a:lstStyle/>
+          <a:p>
+            <a:pPr algn="ctr"/>
+          </a:p>
+        </p:txBody>
+      </p:sp>
+      <p:sp>
+        <p:nvSpPr>
+          <p:cNvPr id="4" name="TextBox 3"/>
+          <p:cNvSpPr txBox="1"/>
+          <p:nvPr/>
+        </p:nvSpPr>
+        <p:spPr>
+          <a:xfrm>
+            <a:off x="457200" y="164592"/>
+            <a:ext cx="11277295" cy="384048"/>
+          </a:xfrm>
+          <a:prstGeom prst="rect">
+            <a:avLst/>
+          </a:prstGeom>
+          <a:noFill/>
+        </p:spPr>
+        <p:txBody>
+          <a:bodyPr wrap="square">
+            <a:spAutoFit/>
+          </a:bodyPr>
+          <a:lstStyle/>
+          <a:p>
+            <a:r>
+              <a:rPr sz="2600" b="1" i="0">
+                <a:solidFill>
+                  <a:srgbClr val="FFFFFF"/>
+                </a:solidFill>
+                <a:latin typeface="Calibri"/>
+              </a:rPr>
+              <a:t>Cómo se expone en 3 minutos</a:t>
+            </a:r>
+          </a:p>
+        </p:txBody>
+      </p:sp>
+      <p:sp>
+        <p:nvSpPr>
+          <p:cNvPr id="5" name="TextBox 4"/>
+          <p:cNvSpPr txBox="1"/>
+          <p:nvPr/>
+        </p:nvSpPr>
+        <p:spPr>
+          <a:xfrm>
+            <a:off x="457200" y="566928"/>
+            <a:ext cx="11277295" cy="411480"/>
+          </a:xfrm>
+          <a:prstGeom prst="rect">
+            <a:avLst/>
+          </a:prstGeom>
+          <a:noFill/>
+        </p:spPr>
+        <p:txBody>
+          <a:bodyPr wrap="square">
+            <a:spAutoFit/>
+          </a:bodyPr>
+          <a:lstStyle/>
+          <a:p>
+            <a:r>
+              <a:rPr sz="1400" b="0" i="0">
+                <a:solidFill>
+                  <a:srgbClr val="B8D8EE"/>
+                </a:solidFill>
+                <a:latin typeface="Calibri"/>
+              </a:rPr>
+              <a:t>Habla el vocero con la pantalla ya compartida · cronómetro en pantalla · se corta al llegar a cero</a:t>
+            </a:r>
+          </a:p>
+        </p:txBody>
+      </p:sp>
+      <p:sp>
+        <p:nvSpPr>
+          <p:cNvPr id="6" name="Rounded Rectangle 5"/>
+          <p:cNvSpPr/>
+          <p:nvPr/>
+        </p:nvSpPr>
+        <p:spPr>
+          <a:xfrm>
+            <a:off x="457200" y="1444752"/>
+            <a:ext cx="11277295" cy="908913"/>
+          </a:xfrm>
+          <a:prstGeom prst="roundRect">
+            <a:avLst>
+              <a:gd name="adj" fmla="val 12000"/>
+            </a:avLst>
+          </a:prstGeom>
+          <a:solidFill>
+            <a:srgbClr val="F2F2F2"/>
+          </a:solidFill>
+          <a:ln>
+            <a:noFill/>
+          </a:ln>
+        </p:spPr>
+        <p:style>
+          <a:lnRef idx="1">
+            <a:schemeClr val="accent1"/>
+          </a:lnRef>
+          <a:fillRef idx="3">
+            <a:schemeClr val="accent1"/>
+          </a:fillRef>
+          <a:effectRef idx="2">
+            <a:schemeClr val="accent1"/>
+          </a:effectRef>
+          <a:fontRef idx="minor">
+            <a:schemeClr val="lt1"/>
+          </a:fontRef>
+        </p:style>
+        <p:txBody>
+          <a:bodyPr rtlCol="0" anchor="ctr"/>
+          <a:lstStyle/>
+          <a:p>
+            <a:pPr algn="ctr"/>
+          </a:p>
+        </p:txBody>
+      </p:sp>
+      <p:sp>
+        <p:nvSpPr>
+          <p:cNvPr id="7" name="Rounded Rectangle 6"/>
+          <p:cNvSpPr/>
+          <p:nvPr/>
+        </p:nvSpPr>
+        <p:spPr>
+          <a:xfrm>
+            <a:off x="594360" y="1679752"/>
+            <a:ext cx="438912" cy="438912"/>
+          </a:xfrm>
+          <a:prstGeom prst="roundRect">
+            <a:avLst>
+              <a:gd name="adj" fmla="val 12000"/>
+            </a:avLst>
+          </a:prstGeom>
+          <a:solidFill>
+            <a:srgbClr val="095292"/>
+          </a:solidFill>
+          <a:ln>
+            <a:noFill/>
+          </a:ln>
+        </p:spPr>
+        <p:style>
+          <a:lnRef idx="1">
+            <a:schemeClr val="accent1"/>
+          </a:lnRef>
+          <a:fillRef idx="3">
+            <a:schemeClr val="accent1"/>
+          </a:fillRef>
+          <a:effectRef idx="2">
+            <a:schemeClr val="accent1"/>
+          </a:effectRef>
+          <a:fontRef idx="minor">
+            <a:schemeClr val="lt1"/>
+          </a:fontRef>
+        </p:style>
+        <p:txBody>
+          <a:bodyPr rtlCol="0" anchor="ctr"/>
+          <a:lstStyle/>
+          <a:p>
+            <a:pPr algn="ctr"/>
+          </a:p>
+        </p:txBody>
+      </p:sp>
+      <p:sp>
+        <p:nvSpPr>
+          <p:cNvPr id="8" name="TextBox 7"/>
+          <p:cNvSpPr txBox="1"/>
+          <p:nvPr/>
+        </p:nvSpPr>
+        <p:spPr>
+          <a:xfrm>
+            <a:off x="594360" y="1679752"/>
+            <a:ext cx="438912" cy="438912"/>
+          </a:xfrm>
+          <a:prstGeom prst="rect">
+            <a:avLst/>
+          </a:prstGeom>
+          <a:noFill/>
+        </p:spPr>
+        <p:txBody>
+          <a:bodyPr wrap="square" anchor="ctr"/>
+          <a:lstStyle/>
+          <a:p>
+            <a:pPr algn="ctr"/>
+            <a:r>
+              <a:rPr sz="1600" b="1" i="0">
+                <a:solidFill>
+                  <a:srgbClr val="FFFFFF"/>
+                </a:solidFill>
+                <a:latin typeface="Calibri"/>
+              </a:rPr>
+              <a:t>1</a:t>
+            </a:r>
+          </a:p>
+        </p:txBody>
+      </p:sp>
+      <p:sp>
+        <p:nvSpPr>
+          <p:cNvPr id="9" name="TextBox 8"/>
+          <p:cNvSpPr txBox="1"/>
+          <p:nvPr/>
+        </p:nvSpPr>
+        <p:spPr>
+          <a:xfrm>
+            <a:off x="1188720" y="1536192"/>
+            <a:ext cx="10271455" cy="744321"/>
+          </a:xfrm>
+          <a:prstGeom prst="rect">
+            <a:avLst/>
+          </a:prstGeom>
+          <a:noFill/>
+        </p:spPr>
+        <p:txBody>
+          <a:bodyPr wrap="square" anchor="ctr"/>
+          <a:lstStyle/>
+          <a:p>
+            <a:r>
+              <a:rPr sz="1500" b="1" i="0">
+                <a:solidFill>
+                  <a:srgbClr val="095292"/>
+                </a:solidFill>
+                <a:latin typeface="Calibri"/>
+              </a:rPr>
+              <a:t>25 s · La pregunta de búsqueda</a:t>
+            </a:r>
+          </a:p>
+          <a:p>
+            <a:pPr>
+              <a:spcBef>
+                <a:spcPts val="200"/>
+              </a:spcBef>
+            </a:pPr>
+            <a:r>
+              <a:rPr sz="1300" b="0" i="0">
+                <a:solidFill>
+                  <a:srgbClr val="333333"/>
+                </a:solidFill>
+                <a:latin typeface="Calibri"/>
+              </a:rPr>
+              <a:t>Leída tal cual, con un término en inglés.</a:t>
+            </a:r>
+          </a:p>
+        </p:txBody>
+      </p:sp>
+      <p:sp>
+        <p:nvSpPr>
+          <p:cNvPr id="10" name="Rounded Rectangle 9"/>
+          <p:cNvSpPr/>
+          <p:nvPr/>
+        </p:nvSpPr>
+        <p:spPr>
+          <a:xfrm>
+            <a:off x="457200" y="2445105"/>
+            <a:ext cx="11277295" cy="908913"/>
+          </a:xfrm>
+          <a:prstGeom prst="roundRect">
+            <a:avLst>
+              <a:gd name="adj" fmla="val 12000"/>
+            </a:avLst>
+          </a:prstGeom>
+          <a:solidFill>
+            <a:srgbClr val="E8F4FA"/>
+          </a:solidFill>
+          <a:ln>
+            <a:noFill/>
+          </a:ln>
+        </p:spPr>
+        <p:style>
+          <a:lnRef idx="1">
+            <a:schemeClr val="accent1"/>
+          </a:lnRef>
+          <a:fillRef idx="3">
+            <a:schemeClr val="accent1"/>
+          </a:fillRef>
+          <a:effectRef idx="2">
+            <a:schemeClr val="accent1"/>
+          </a:effectRef>
+          <a:fontRef idx="minor">
+            <a:schemeClr val="lt1"/>
+          </a:fontRef>
+        </p:style>
+        <p:txBody>
+          <a:bodyPr rtlCol="0" anchor="ctr"/>
+          <a:lstStyle/>
+          <a:p>
+            <a:pPr algn="ctr"/>
+          </a:p>
+        </p:txBody>
+      </p:sp>
+      <p:sp>
+        <p:nvSpPr>
+          <p:cNvPr id="11" name="Rounded Rectangle 10"/>
+          <p:cNvSpPr/>
+          <p:nvPr/>
+        </p:nvSpPr>
+        <p:spPr>
+          <a:xfrm>
+            <a:off x="594360" y="2680106"/>
+            <a:ext cx="438912" cy="438912"/>
+          </a:xfrm>
+          <a:prstGeom prst="roundRect">
+            <a:avLst>
+              <a:gd name="adj" fmla="val 12000"/>
+            </a:avLst>
+          </a:prstGeom>
+          <a:solidFill>
+            <a:srgbClr val="095292"/>
+          </a:solidFill>
+          <a:ln>
+            <a:noFill/>
+          </a:ln>
+        </p:spPr>
+        <p:style>
+          <a:lnRef idx="1">
+            <a:schemeClr val="accent1"/>
+          </a:lnRef>
+          <a:fillRef idx="3">
+            <a:schemeClr val="accent1"/>
+          </a:fillRef>
+          <a:effectRef idx="2">
+            <a:schemeClr val="accent1"/>
+          </a:effectRef>
+          <a:fontRef idx="minor">
+            <a:schemeClr val="lt1"/>
+          </a:fontRef>
+        </p:style>
+        <p:txBody>
+          <a:bodyPr rtlCol="0" anchor="ctr"/>
+          <a:lstStyle/>
+          <a:p>
+            <a:pPr algn="ctr"/>
+          </a:p>
+        </p:txBody>
+      </p:sp>
+      <p:sp>
+        <p:nvSpPr>
+          <p:cNvPr id="12" name="TextBox 11"/>
+          <p:cNvSpPr txBox="1"/>
+          <p:nvPr/>
+        </p:nvSpPr>
+        <p:spPr>
+          <a:xfrm>
+            <a:off x="594360" y="2680106"/>
+            <a:ext cx="438912" cy="438912"/>
+          </a:xfrm>
+          <a:prstGeom prst="rect">
+            <a:avLst/>
+          </a:prstGeom>
+          <a:noFill/>
+        </p:spPr>
+        <p:txBody>
+          <a:bodyPr wrap="square" anchor="ctr"/>
+          <a:lstStyle/>
+          <a:p>
+            <a:pPr algn="ctr"/>
+            <a:r>
+              <a:rPr sz="1600" b="1" i="0">
+                <a:solidFill>
+                  <a:srgbClr val="FFFFFF"/>
+                </a:solidFill>
+                <a:latin typeface="Calibri"/>
+              </a:rPr>
+              <a:t>2</a:t>
+            </a:r>
+          </a:p>
+        </p:txBody>
+      </p:sp>
+      <p:sp>
+        <p:nvSpPr>
+          <p:cNvPr id="13" name="TextBox 12"/>
+          <p:cNvSpPr txBox="1"/>
+          <p:nvPr/>
+        </p:nvSpPr>
+        <p:spPr>
+          <a:xfrm>
+            <a:off x="1188720" y="2536545"/>
+            <a:ext cx="10271455" cy="744321"/>
+          </a:xfrm>
+          <a:prstGeom prst="rect">
+            <a:avLst/>
+          </a:prstGeom>
+          <a:noFill/>
+        </p:spPr>
+        <p:txBody>
+          <a:bodyPr wrap="square" anchor="ctr"/>
+          <a:lstStyle/>
+          <a:p>
+            <a:r>
+              <a:rPr sz="1500" b="1" i="0">
+                <a:solidFill>
+                  <a:srgbClr val="095292"/>
+                </a:solidFill>
+                <a:latin typeface="Calibri"/>
+              </a:rPr>
+              <a:t>50 s · El antecedente más útil</a:t>
+            </a:r>
+          </a:p>
+          <a:p>
+            <a:pPr>
+              <a:spcBef>
+                <a:spcPts val="200"/>
+              </a:spcBef>
+            </a:pPr>
+            <a:r>
+              <a:rPr sz="1300" b="0" i="0">
+                <a:solidFill>
+                  <a:srgbClr val="333333"/>
+                </a:solidFill>
+                <a:latin typeface="Calibri"/>
+              </a:rPr>
+              <a:t>Cuál es, de qué año, y </a:t>
+            </a:r>
+            <a:r>
+              <a:rPr sz="1300" b="1" i="0">
+                <a:solidFill>
+                  <a:srgbClr val="333333"/>
+                </a:solidFill>
+                <a:latin typeface="Calibri"/>
+              </a:rPr>
+              <a:t>muéstrenlo en pantalla</a:t>
+            </a:r>
+            <a:r>
+              <a:rPr sz="1300" b="0" i="0">
+                <a:solidFill>
+                  <a:srgbClr val="333333"/>
+                </a:solidFill>
+                <a:latin typeface="Calibri"/>
+              </a:rPr>
+              <a:t>.</a:t>
+            </a:r>
+          </a:p>
+        </p:txBody>
+      </p:sp>
+      <p:sp>
+        <p:nvSpPr>
+          <p:cNvPr id="14" name="Rounded Rectangle 13"/>
+          <p:cNvSpPr/>
+          <p:nvPr/>
+        </p:nvSpPr>
+        <p:spPr>
+          <a:xfrm>
+            <a:off x="457200" y="3445459"/>
+            <a:ext cx="11277295" cy="908913"/>
+          </a:xfrm>
+          <a:prstGeom prst="roundRect">
+            <a:avLst>
+              <a:gd name="adj" fmla="val 12000"/>
+            </a:avLst>
+          </a:prstGeom>
+          <a:solidFill>
+            <a:srgbClr val="F2F2F2"/>
+          </a:solidFill>
+          <a:ln>
+            <a:noFill/>
+          </a:ln>
+        </p:spPr>
+        <p:style>
+          <a:lnRef idx="1">
+            <a:schemeClr val="accent1"/>
+          </a:lnRef>
+          <a:fillRef idx="3">
+            <a:schemeClr val="accent1"/>
+          </a:fillRef>
+          <a:effectRef idx="2">
+            <a:schemeClr val="accent1"/>
+          </a:effectRef>
+          <a:fontRef idx="minor">
+            <a:schemeClr val="lt1"/>
+          </a:fontRef>
+        </p:style>
+        <p:txBody>
+          <a:bodyPr rtlCol="0" anchor="ctr"/>
+          <a:lstStyle/>
+          <a:p>
+            <a:pPr algn="ctr"/>
+          </a:p>
+        </p:txBody>
+      </p:sp>
+      <p:sp>
+        <p:nvSpPr>
+          <p:cNvPr id="15" name="Rounded Rectangle 14"/>
+          <p:cNvSpPr/>
+          <p:nvPr/>
+        </p:nvSpPr>
+        <p:spPr>
+          <a:xfrm>
+            <a:off x="594360" y="3680460"/>
+            <a:ext cx="438912" cy="438912"/>
+          </a:xfrm>
+          <a:prstGeom prst="roundRect">
+            <a:avLst>
+              <a:gd name="adj" fmla="val 12000"/>
+            </a:avLst>
+          </a:prstGeom>
+          <a:solidFill>
+            <a:srgbClr val="095292"/>
+          </a:solidFill>
+          <a:ln>
+            <a:noFill/>
+          </a:ln>
+        </p:spPr>
+        <p:style>
+          <a:lnRef idx="1">
+            <a:schemeClr val="accent1"/>
+          </a:lnRef>
+          <a:fillRef idx="3">
+            <a:schemeClr val="accent1"/>
+          </a:fillRef>
+          <a:effectRef idx="2">
+            <a:schemeClr val="accent1"/>
+          </a:effectRef>
+          <a:fontRef idx="minor">
+            <a:schemeClr val="lt1"/>
+          </a:fontRef>
+        </p:style>
+        <p:txBody>
+          <a:bodyPr rtlCol="0" anchor="ctr"/>
+          <a:lstStyle/>
+          <a:p>
+            <a:pPr algn="ctr"/>
+          </a:p>
+        </p:txBody>
+      </p:sp>
+      <p:sp>
+        <p:nvSpPr>
+          <p:cNvPr id="16" name="TextBox 15"/>
+          <p:cNvSpPr txBox="1"/>
+          <p:nvPr/>
+        </p:nvSpPr>
+        <p:spPr>
+          <a:xfrm>
+            <a:off x="594360" y="3680460"/>
+            <a:ext cx="438912" cy="438912"/>
+          </a:xfrm>
+          <a:prstGeom prst="rect">
+            <a:avLst/>
+          </a:prstGeom>
+          <a:noFill/>
+        </p:spPr>
+        <p:txBody>
+          <a:bodyPr wrap="square" anchor="ctr"/>
+          <a:lstStyle/>
+          <a:p>
+            <a:pPr algn="ctr"/>
+            <a:r>
+              <a:rPr sz="1600" b="1" i="0">
+                <a:solidFill>
+                  <a:srgbClr val="FFFFFF"/>
+                </a:solidFill>
+                <a:latin typeface="Calibri"/>
+              </a:rPr>
+              <a:t>3</a:t>
+            </a:r>
+          </a:p>
+        </p:txBody>
+      </p:sp>
+      <p:sp>
+        <p:nvSpPr>
+          <p:cNvPr id="17" name="TextBox 16"/>
+          <p:cNvSpPr txBox="1"/>
+          <p:nvPr/>
+        </p:nvSpPr>
+        <p:spPr>
+          <a:xfrm>
+            <a:off x="1188720" y="3536899"/>
+            <a:ext cx="10271455" cy="744321"/>
+          </a:xfrm>
+          <a:prstGeom prst="rect">
+            <a:avLst/>
+          </a:prstGeom>
+          <a:noFill/>
+        </p:spPr>
+        <p:txBody>
+          <a:bodyPr wrap="square" anchor="ctr"/>
+          <a:lstStyle/>
+          <a:p>
+            <a:r>
+              <a:rPr sz="1500" b="1" i="0">
+                <a:solidFill>
+                  <a:srgbClr val="095292"/>
+                </a:solidFill>
+                <a:latin typeface="Calibri"/>
+              </a:rPr>
+              <a:t>50 s · Qué le falta</a:t>
+            </a:r>
+          </a:p>
+          <a:p>
+            <a:pPr>
+              <a:spcBef>
+                <a:spcPts val="200"/>
+              </a:spcBef>
+            </a:pPr>
+            <a:r>
+              <a:rPr sz="1300" b="0" i="0">
+                <a:solidFill>
+                  <a:srgbClr val="333333"/>
+                </a:solidFill>
+                <a:latin typeface="Calibri"/>
+              </a:rPr>
+              <a:t>La brecha respecto a su caso. Es el minuto obligatorio.</a:t>
+            </a:r>
+          </a:p>
+        </p:txBody>
+      </p:sp>
+      <p:sp>
+        <p:nvSpPr>
+          <p:cNvPr id="18" name="Rounded Rectangle 17"/>
+          <p:cNvSpPr/>
+          <p:nvPr/>
+        </p:nvSpPr>
+        <p:spPr>
+          <a:xfrm>
+            <a:off x="457200" y="4445812"/>
+            <a:ext cx="11277295" cy="908913"/>
+          </a:xfrm>
+          <a:prstGeom prst="roundRect">
+            <a:avLst>
+              <a:gd name="adj" fmla="val 12000"/>
+            </a:avLst>
+          </a:prstGeom>
+          <a:solidFill>
+            <a:srgbClr val="E8F4FA"/>
+          </a:solidFill>
+          <a:ln>
+            <a:noFill/>
+          </a:ln>
+        </p:spPr>
+        <p:style>
+          <a:lnRef idx="1">
+            <a:schemeClr val="accent1"/>
+          </a:lnRef>
+          <a:fillRef idx="3">
+            <a:schemeClr val="accent1"/>
+          </a:fillRef>
+          <a:effectRef idx="2">
+            <a:schemeClr val="accent1"/>
+          </a:effectRef>
+          <a:fontRef idx="minor">
+            <a:schemeClr val="lt1"/>
+          </a:fontRef>
+        </p:style>
+        <p:txBody>
+          <a:bodyPr rtlCol="0" anchor="ctr"/>
+          <a:lstStyle/>
+          <a:p>
+            <a:pPr algn="ctr"/>
+          </a:p>
+        </p:txBody>
+      </p:sp>
+      <p:sp>
+        <p:nvSpPr>
+          <p:cNvPr id="19" name="Rounded Rectangle 18"/>
+          <p:cNvSpPr/>
+          <p:nvPr/>
+        </p:nvSpPr>
+        <p:spPr>
+          <a:xfrm>
+            <a:off x="594360" y="4680813"/>
+            <a:ext cx="438912" cy="438912"/>
+          </a:xfrm>
+          <a:prstGeom prst="roundRect">
+            <a:avLst>
+              <a:gd name="adj" fmla="val 12000"/>
+            </a:avLst>
+          </a:prstGeom>
+          <a:solidFill>
+            <a:srgbClr val="095292"/>
+          </a:solidFill>
+          <a:ln>
+            <a:noFill/>
+          </a:ln>
+        </p:spPr>
+        <p:style>
+          <a:lnRef idx="1">
+            <a:schemeClr val="accent1"/>
+          </a:lnRef>
+          <a:fillRef idx="3">
+            <a:schemeClr val="accent1"/>
+          </a:fillRef>
+          <a:effectRef idx="2">
+            <a:schemeClr val="accent1"/>
+          </a:effectRef>
+          <a:fontRef idx="minor">
+            <a:schemeClr val="lt1"/>
+          </a:fontRef>
+        </p:style>
+        <p:txBody>
+          <a:bodyPr rtlCol="0" anchor="ctr"/>
+          <a:lstStyle/>
+          <a:p>
+            <a:pPr algn="ctr"/>
+          </a:p>
+        </p:txBody>
+      </p:sp>
+      <p:sp>
+        <p:nvSpPr>
+          <p:cNvPr id="20" name="TextBox 19"/>
+          <p:cNvSpPr txBox="1"/>
+          <p:nvPr/>
+        </p:nvSpPr>
+        <p:spPr>
+          <a:xfrm>
+            <a:off x="594360" y="4680813"/>
+            <a:ext cx="438912" cy="438912"/>
+          </a:xfrm>
+          <a:prstGeom prst="rect">
+            <a:avLst/>
+          </a:prstGeom>
+          <a:noFill/>
+        </p:spPr>
+        <p:txBody>
+          <a:bodyPr wrap="square" anchor="ctr"/>
+          <a:lstStyle/>
+          <a:p>
+            <a:pPr algn="ctr"/>
+            <a:r>
+              <a:rPr sz="1600" b="1" i="0">
+                <a:solidFill>
+                  <a:srgbClr val="FFFFFF"/>
+                </a:solidFill>
+                <a:latin typeface="Calibri"/>
+              </a:rPr>
+              <a:t>4</a:t>
+            </a:r>
+          </a:p>
+        </p:txBody>
+      </p:sp>
+      <p:sp>
+        <p:nvSpPr>
+          <p:cNvPr id="21" name="TextBox 20"/>
+          <p:cNvSpPr txBox="1"/>
+          <p:nvPr/>
+        </p:nvSpPr>
+        <p:spPr>
+          <a:xfrm>
+            <a:off x="1188720" y="4537252"/>
+            <a:ext cx="10271455" cy="744321"/>
+          </a:xfrm>
+          <a:prstGeom prst="rect">
+            <a:avLst/>
+          </a:prstGeom>
+          <a:noFill/>
+        </p:spPr>
+        <p:txBody>
+          <a:bodyPr wrap="square" anchor="ctr"/>
+          <a:lstStyle/>
+          <a:p>
+            <a:r>
+              <a:rPr sz="1500" b="1" i="0">
+                <a:solidFill>
+                  <a:srgbClr val="095292"/>
+                </a:solidFill>
+                <a:latin typeface="Calibri"/>
+              </a:rPr>
+              <a:t>40 s · La propuesta de mejora</a:t>
+            </a:r>
+          </a:p>
+          <a:p>
+            <a:pPr>
+              <a:spcBef>
+                <a:spcPts val="200"/>
+              </a:spcBef>
+            </a:pPr>
+            <a:r>
+              <a:rPr sz="1300" b="0" i="0">
+                <a:solidFill>
+                  <a:srgbClr val="333333"/>
+                </a:solidFill>
+                <a:latin typeface="Calibri"/>
+              </a:rPr>
+              <a:t>Qué hacen distinto y con cuál de las cuatro operaciones.</a:t>
+            </a:r>
+          </a:p>
+        </p:txBody>
+      </p:sp>
+      <p:sp>
+        <p:nvSpPr>
+          <p:cNvPr id="22" name="Rounded Rectangle 21"/>
+          <p:cNvSpPr/>
+          <p:nvPr/>
+        </p:nvSpPr>
+        <p:spPr>
+          <a:xfrm>
+            <a:off x="457200" y="5446166"/>
+            <a:ext cx="11277295" cy="908913"/>
+          </a:xfrm>
+          <a:prstGeom prst="roundRect">
+            <a:avLst>
+              <a:gd name="adj" fmla="val 12000"/>
+            </a:avLst>
+          </a:prstGeom>
+          <a:solidFill>
+            <a:srgbClr val="F2F2F2"/>
+          </a:solidFill>
+          <a:ln>
+            <a:noFill/>
+          </a:ln>
+        </p:spPr>
+        <p:style>
+          <a:lnRef idx="1">
+            <a:schemeClr val="accent1"/>
+          </a:lnRef>
+          <a:fillRef idx="3">
+            <a:schemeClr val="accent1"/>
+          </a:fillRef>
+          <a:effectRef idx="2">
+            <a:schemeClr val="accent1"/>
+          </a:effectRef>
+          <a:fontRef idx="minor">
+            <a:schemeClr val="lt1"/>
+          </a:fontRef>
+        </p:style>
+        <p:txBody>
+          <a:bodyPr rtlCol="0" anchor="ctr"/>
+          <a:lstStyle/>
+          <a:p>
+            <a:pPr algn="ctr"/>
+          </a:p>
+        </p:txBody>
+      </p:sp>
+      <p:sp>
+        <p:nvSpPr>
+          <p:cNvPr id="23" name="Rounded Rectangle 22"/>
+          <p:cNvSpPr/>
+          <p:nvPr/>
+        </p:nvSpPr>
+        <p:spPr>
+          <a:xfrm>
+            <a:off x="594360" y="5681167"/>
+            <a:ext cx="438912" cy="438912"/>
+          </a:xfrm>
+          <a:prstGeom prst="roundRect">
+            <a:avLst>
+              <a:gd name="adj" fmla="val 12000"/>
+            </a:avLst>
+          </a:prstGeom>
+          <a:solidFill>
+            <a:srgbClr val="095292"/>
+          </a:solidFill>
+          <a:ln>
+            <a:noFill/>
+          </a:ln>
+        </p:spPr>
+        <p:style>
+          <a:lnRef idx="1">
+            <a:schemeClr val="accent1"/>
+          </a:lnRef>
+          <a:fillRef idx="3">
+            <a:schemeClr val="accent1"/>
+          </a:fillRef>
+          <a:effectRef idx="2">
+            <a:schemeClr val="accent1"/>
+          </a:effectRef>
+          <a:fontRef idx="minor">
+            <a:schemeClr val="lt1"/>
+          </a:fontRef>
+        </p:style>
+        <p:txBody>
+          <a:bodyPr rtlCol="0" anchor="ctr"/>
+          <a:lstStyle/>
+          <a:p>
+            <a:pPr algn="ctr"/>
+          </a:p>
+        </p:txBody>
+      </p:sp>
+      <p:sp>
+        <p:nvSpPr>
+          <p:cNvPr id="24" name="TextBox 23"/>
+          <p:cNvSpPr txBox="1"/>
+          <p:nvPr/>
+        </p:nvSpPr>
+        <p:spPr>
+          <a:xfrm>
+            <a:off x="594360" y="5681167"/>
+            <a:ext cx="438912" cy="438912"/>
+          </a:xfrm>
+          <a:prstGeom prst="rect">
+            <a:avLst/>
+          </a:prstGeom>
+          <a:noFill/>
+        </p:spPr>
+        <p:txBody>
+          <a:bodyPr wrap="square" anchor="ctr"/>
+          <a:lstStyle/>
+          <a:p>
+            <a:pPr algn="ctr"/>
+            <a:r>
+              <a:rPr sz="1600" b="1" i="0">
+                <a:solidFill>
+                  <a:srgbClr val="FFFFFF"/>
+                </a:solidFill>
+                <a:latin typeface="Calibri"/>
+              </a:rPr>
+              <a:t>5</a:t>
+            </a:r>
+          </a:p>
+        </p:txBody>
+      </p:sp>
+      <p:sp>
+        <p:nvSpPr>
+          <p:cNvPr id="25" name="TextBox 24"/>
+          <p:cNvSpPr txBox="1"/>
+          <p:nvPr/>
+        </p:nvSpPr>
+        <p:spPr>
+          <a:xfrm>
+            <a:off x="1188720" y="5537606"/>
+            <a:ext cx="10271455" cy="744321"/>
+          </a:xfrm>
+          <a:prstGeom prst="rect">
+            <a:avLst/>
+          </a:prstGeom>
+          <a:noFill/>
+        </p:spPr>
+        <p:txBody>
+          <a:bodyPr wrap="square" anchor="ctr"/>
+          <a:lstStyle/>
+          <a:p>
+            <a:r>
+              <a:rPr sz="1500" b="1" i="0">
+                <a:solidFill>
+                  <a:srgbClr val="095292"/>
+                </a:solidFill>
+                <a:latin typeface="Calibri"/>
+              </a:rPr>
+              <a:t>15 s · Qué reusan</a:t>
+            </a:r>
+          </a:p>
+          <a:p>
+            <a:pPr>
+              <a:spcBef>
+                <a:spcPts val="200"/>
+              </a:spcBef>
+            </a:pPr>
+            <a:r>
+              <a:rPr sz="1300" b="0" i="0">
+                <a:solidFill>
+                  <a:srgbClr val="333333"/>
+                </a:solidFill>
+                <a:latin typeface="Calibri"/>
+              </a:rPr>
+              <a:t>Una cosa concreta que aprovechan de lo que ya existe.</a:t>
+            </a:r>
+          </a:p>
+        </p:txBody>
+      </p:sp>
+      <p:sp>
+        <p:nvSpPr>
+          <p:cNvPr id="26" name="TextBox 25"/>
+          <p:cNvSpPr txBox="1"/>
+          <p:nvPr/>
+        </p:nvSpPr>
+        <p:spPr>
+          <a:xfrm>
+            <a:off x="11185855" y="6473952"/>
+            <a:ext cx="640080" cy="274320"/>
+          </a:xfrm>
+          <a:prstGeom prst="rect">
+            <a:avLst/>
+          </a:prstGeom>
+          <a:noFill/>
+        </p:spPr>
+        <p:txBody>
+          <a:bodyPr wrap="square">
+            <a:spAutoFit/>
+          </a:bodyPr>
+          <a:lstStyle/>
+          <a:p>
+            <a:pPr algn="r"/>
+            <a:r>
+              <a:rPr sz="1100" b="0" i="0">
+                <a:solidFill>
+                  <a:srgbClr val="666666"/>
+                </a:solidFill>
+                <a:latin typeface="Calibri"/>
+              </a:rPr>
+              <a:t>23</a:t>
+            </a:r>
+          </a:p>
+        </p:txBody>
+      </p:sp>
+    </p:spTree>
+  </p:cSld>
+  <p:clrMapOvr>
+    <a:masterClrMapping/>
+  </p:clrMapOvr>
+</p:sld>
+</file>
+
+<file path=ppt/slides/slide24.xml><?xml version="1.0" encoding="utf-8"?>
+<p:sld xmlns:a="http://schemas.openxmlformats.org/drawingml/2006/main" xmlns:p="http://schemas.openxmlformats.org/presentationml/2006/main" xmlns:r="http://schemas.openxmlformats.org/officeDocument/2006/relationships">
+  <p:cSld>
+    <p:bg>
+      <p:bgPr>
+        <a:solidFill>
+          <a:srgbClr val="FFFFFF"/>
+        </a:solidFill>
+        <a:effectLst/>
+      </p:bgPr>
+    </p:bg>
+    <p:spTree>
+      <p:nvGrpSpPr>
+        <p:cNvPr id="1" name=""/>
+        <p:cNvGrpSpPr/>
+        <p:nvPr/>
+      </p:nvGrpSpPr>
+      <p:grpSpPr/>
+      <p:sp>
+        <p:nvSpPr>
+          <p:cNvPr id="2" name="Rectangle 1"/>
+          <p:cNvSpPr/>
+          <p:nvPr/>
+        </p:nvSpPr>
+        <p:spPr>
+          <a:xfrm>
+            <a:off x="0" y="0"/>
+            <a:ext cx="12191695" cy="960120"/>
+          </a:xfrm>
+          <a:prstGeom prst="rect">
+            <a:avLst/>
+          </a:prstGeom>
+          <a:solidFill>
+            <a:srgbClr val="095292"/>
+          </a:solidFill>
+          <a:ln>
+            <a:noFill/>
+          </a:ln>
+        </p:spPr>
+        <p:style>
+          <a:lnRef idx="1">
+            <a:schemeClr val="accent1"/>
+          </a:lnRef>
+          <a:fillRef idx="3">
+            <a:schemeClr val="accent1"/>
+          </a:fillRef>
+          <a:effectRef idx="2">
+            <a:schemeClr val="accent1"/>
+          </a:effectRef>
+          <a:fontRef idx="minor">
+            <a:schemeClr val="lt1"/>
+          </a:fontRef>
+        </p:style>
+        <p:txBody>
+          <a:bodyPr rtlCol="0" anchor="ctr"/>
+          <a:lstStyle/>
+          <a:p>
+            <a:pPr algn="ctr"/>
+          </a:p>
+        </p:txBody>
+      </p:sp>
+      <p:sp>
+        <p:nvSpPr>
+          <p:cNvPr id="3" name="Rectangle 2"/>
+          <p:cNvSpPr/>
+          <p:nvPr/>
+        </p:nvSpPr>
+        <p:spPr>
+          <a:xfrm>
+            <a:off x="0" y="960120"/>
+            <a:ext cx="12191695" cy="41148"/>
+          </a:xfrm>
+          <a:prstGeom prst="rect">
+            <a:avLst/>
+          </a:prstGeom>
+          <a:solidFill>
+            <a:srgbClr val="FFD000"/>
+          </a:solidFill>
+          <a:ln>
+            <a:noFill/>
+          </a:ln>
+        </p:spPr>
+        <p:style>
+          <a:lnRef idx="1">
+            <a:schemeClr val="accent1"/>
+          </a:lnRef>
+          <a:fillRef idx="3">
+            <a:schemeClr val="accent1"/>
+          </a:fillRef>
+          <a:effectRef idx="2">
+            <a:schemeClr val="accent1"/>
+          </a:effectRef>
+          <a:fontRef idx="minor">
+            <a:schemeClr val="lt1"/>
+          </a:fontRef>
+        </p:style>
+        <p:txBody>
+          <a:bodyPr rtlCol="0" anchor="ctr"/>
+          <a:lstStyle/>
+          <a:p>
+            <a:pPr algn="ctr"/>
+          </a:p>
+        </p:txBody>
+      </p:sp>
+      <p:sp>
+        <p:nvSpPr>
+          <p:cNvPr id="4" name="TextBox 3"/>
+          <p:cNvSpPr txBox="1"/>
+          <p:nvPr/>
+        </p:nvSpPr>
+        <p:spPr>
+          <a:xfrm>
+            <a:off x="457200" y="164592"/>
+            <a:ext cx="11277295" cy="502920"/>
+          </a:xfrm>
+          <a:prstGeom prst="rect">
+            <a:avLst/>
+          </a:prstGeom>
+          <a:noFill/>
+        </p:spPr>
+        <p:txBody>
+          <a:bodyPr wrap="square">
+            <a:spAutoFit/>
+          </a:bodyPr>
+          <a:lstStyle/>
+          <a:p>
+            <a:r>
+              <a:rPr sz="2600" b="1" i="0">
+                <a:solidFill>
+                  <a:srgbClr val="FFFFFF"/>
+                </a:solidFill>
+                <a:latin typeface="Calibri"/>
+              </a:rPr>
+              <a:t>Para la Clase 10</a:t>
+            </a:r>
+          </a:p>
+        </p:txBody>
+      </p:sp>
+      <p:sp>
+        <p:nvSpPr>
+          <p:cNvPr id="5" name="TextBox 4"/>
+          <p:cNvSpPr txBox="1"/>
+          <p:nvPr/>
+        </p:nvSpPr>
+        <p:spPr>
+          <a:xfrm>
+            <a:off x="457200" y="1170432"/>
+            <a:ext cx="11277295" cy="5230368"/>
+          </a:xfrm>
+          <a:prstGeom prst="rect">
+            <a:avLst/>
+          </a:prstGeom>
+          <a:noFill/>
+        </p:spPr>
+        <p:txBody>
+          <a:bodyPr wrap="square">
+            <a:spAutoFit/>
+          </a:bodyPr>
+          <a:lstStyle/>
+          <a:p>
+            <a:pPr>
+              <a:spcAft>
+                <a:spcPts val="800"/>
+              </a:spcAft>
+            </a:pPr>
+            <a:r>
+              <a:rPr sz="2000" b="0" i="0">
+                <a:solidFill>
+                  <a:srgbClr val="333333"/>
+                </a:solidFill>
+                <a:latin typeface="Calibri"/>
+              </a:rPr>
+              <a:t>–   </a:t>
+            </a:r>
+            <a:r>
+              <a:rPr sz="2000" b="1" i="0">
+                <a:solidFill>
+                  <a:srgbClr val="333333"/>
+                </a:solidFill>
+                <a:latin typeface="Calibri"/>
+              </a:rPr>
+              <a:t>Trabajo dirigido:</a:t>
+            </a:r>
+            <a:r>
+              <a:rPr sz="2000" b="0" i="0">
+                <a:solidFill>
+                  <a:srgbClr val="333333"/>
+                </a:solidFill>
+                <a:latin typeface="Calibri"/>
+              </a:rPr>
+              <a:t> Revisión bibliográfica — completar las tres fichas con los seis campos y </a:t>
+            </a:r>
+            <a:r>
+              <a:rPr sz="2000" b="1" i="0">
+                <a:solidFill>
+                  <a:srgbClr val="333333"/>
+                </a:solidFill>
+                <a:latin typeface="Calibri"/>
+              </a:rPr>
+              <a:t>abrir cada enlace</a:t>
+            </a:r>
+            <a:r>
+              <a:rPr sz="2000" b="0" i="0">
+                <a:solidFill>
+                  <a:srgbClr val="333333"/>
+                </a:solidFill>
+                <a:latin typeface="Calibri"/>
+              </a:rPr>
+              <a:t> para confirmar que sirve, anotando la fecha de consulta.</a:t>
+            </a:r>
+          </a:p>
+          <a:p>
+            <a:pPr>
+              <a:spcAft>
+                <a:spcPts val="800"/>
+              </a:spcAft>
+            </a:pPr>
+            <a:r>
+              <a:rPr sz="2000" b="0" i="0">
+                <a:solidFill>
+                  <a:srgbClr val="333333"/>
+                </a:solidFill>
+                <a:latin typeface="Calibri"/>
+              </a:rPr>
+              <a:t>–   </a:t>
+            </a:r>
+            <a:r>
+              <a:rPr sz="2000" b="1" i="0">
+                <a:solidFill>
+                  <a:srgbClr val="333333"/>
+                </a:solidFill>
+                <a:latin typeface="Calibri"/>
+              </a:rPr>
+              <a:t>Trabajo independiente:</a:t>
+            </a:r>
+            <a:r>
+              <a:rPr sz="2000" b="0" i="0">
+                <a:solidFill>
+                  <a:srgbClr val="333333"/>
+                </a:solidFill>
+                <a:latin typeface="Calibri"/>
+              </a:rPr>
+              <a:t> Propuesta de mejora escrita en el documento del equipo: la brecha, la operación usada y por qué importa en su contexto. Máximo una página.</a:t>
+            </a:r>
+          </a:p>
+          <a:p>
+            <a:pPr>
+              <a:spcAft>
+                <a:spcPts val="800"/>
+              </a:spcAft>
+            </a:pPr>
+            <a:r>
+              <a:rPr sz="2000" b="0" i="0">
+                <a:solidFill>
+                  <a:srgbClr val="333333"/>
+                </a:solidFill>
+                <a:latin typeface="Calibri"/>
+              </a:rPr>
+              <a:t>–   </a:t>
+            </a:r>
+            <a:r>
+              <a:rPr sz="2000" b="1" i="0">
+                <a:solidFill>
+                  <a:srgbClr val="333333"/>
+                </a:solidFill>
+                <a:latin typeface="Calibri"/>
+              </a:rPr>
+              <a:t>Clase 10 · Herramientas digitales aplicadas a la Ingeniería</a:t>
+            </a:r>
+            <a:r>
+              <a:rPr sz="2000" b="0" i="0">
+                <a:solidFill>
+                  <a:srgbClr val="333333"/>
+                </a:solidFill>
+                <a:latin typeface="Calibri"/>
+              </a:rPr>
+              <a:t> — </a:t>
+            </a:r>
+            <a:r>
+              <a:rPr sz="2000" b="1" i="0">
+                <a:solidFill>
+                  <a:srgbClr val="333333"/>
+                </a:solidFill>
+                <a:latin typeface="Calibri"/>
+              </a:rPr>
+              <a:t>prototipado</a:t>
+            </a:r>
+            <a:r>
+              <a:rPr sz="2000" b="0" i="0">
+                <a:solidFill>
+                  <a:srgbClr val="333333"/>
+                </a:solidFill>
+                <a:latin typeface="Calibri"/>
+              </a:rPr>
+              <a:t>: qué es un prototipo y qué no, los niveles de fidelidad, y por qué el dibujo a mano da mejor retroalimentación que la pantalla terminada.</a:t>
+            </a:r>
+          </a:p>
+          <a:p>
+            <a:pPr>
+              <a:spcAft>
+                <a:spcPts val="800"/>
+              </a:spcAft>
+            </a:pPr>
+            <a:r>
+              <a:rPr sz="2000" b="0" i="0">
+                <a:solidFill>
+                  <a:srgbClr val="333333"/>
+                </a:solidFill>
+                <a:latin typeface="Calibri"/>
+              </a:rPr>
+              <a:t>–   </a:t>
+            </a:r>
+            <a:r>
+              <a:rPr sz="2000" b="1" i="0">
+                <a:solidFill>
+                  <a:srgbClr val="333333"/>
+                </a:solidFill>
+                <a:latin typeface="Calibri"/>
+              </a:rPr>
+              <a:t>Aviso:</a:t>
+            </a:r>
+            <a:r>
+              <a:rPr sz="2000" b="0" i="0">
+                <a:solidFill>
+                  <a:srgbClr val="333333"/>
+                </a:solidFill>
+                <a:latin typeface="Calibri"/>
+              </a:rPr>
+              <a:t> Para la sesión 10 traigan la propuesta de mejora escrita y el </a:t>
+            </a:r>
+            <a:r>
+              <a:rPr sz="2000" b="1" i="0">
+                <a:solidFill>
+                  <a:srgbClr val="333333"/>
+                </a:solidFill>
+                <a:latin typeface="Calibri"/>
+              </a:rPr>
+              <a:t>alcance mínimo de la sesión 8</a:t>
+            </a:r>
+            <a:r>
+              <a:rPr sz="2000" b="0" i="0">
+                <a:solidFill>
+                  <a:srgbClr val="333333"/>
+                </a:solidFill>
+                <a:latin typeface="Calibri"/>
+              </a:rPr>
+              <a:t> a la vista. Se van a dibujar las tres pantallas o pasos del flujo principal, y de las fichas de hoy sale el diseño.</a:t>
+            </a:r>
+          </a:p>
+          <a:p>
+            <a:pPr>
+              <a:spcAft>
+                <a:spcPts val="800"/>
+              </a:spcAft>
+            </a:pPr>
+            <a:r>
+              <a:rPr sz="2000" b="0" i="0">
+                <a:solidFill>
+                  <a:srgbClr val="333333"/>
+                </a:solidFill>
+                <a:latin typeface="Calibri"/>
+              </a:rPr>
+              <a:t>–   </a:t>
+            </a:r>
+            <a:r>
+              <a:rPr sz="2000" b="1" i="0">
+                <a:solidFill>
+                  <a:srgbClr val="333333"/>
+                </a:solidFill>
+                <a:latin typeface="Calibri"/>
+              </a:rPr>
+              <a:t>Antes de salir:</a:t>
+            </a:r>
+            <a:r>
+              <a:rPr sz="2000" b="0" i="0">
+                <a:solidFill>
+                  <a:srgbClr val="333333"/>
+                </a:solidFill>
+                <a:latin typeface="Calibri"/>
+              </a:rPr>
+              <a:t> el enlace del documento del equipo en el chat, con permiso de lectura para el docente, y el nombre del vocero de hoy.</a:t>
+            </a:r>
+          </a:p>
+        </p:txBody>
+      </p:sp>
+      <p:sp>
+        <p:nvSpPr>
+          <p:cNvPr id="6" name="TextBox 5"/>
+          <p:cNvSpPr txBox="1"/>
+          <p:nvPr/>
+        </p:nvSpPr>
+        <p:spPr>
+          <a:xfrm>
+            <a:off x="11185855" y="6473952"/>
+            <a:ext cx="640080" cy="274320"/>
+          </a:xfrm>
+          <a:prstGeom prst="rect">
+            <a:avLst/>
+          </a:prstGeom>
+          <a:noFill/>
+        </p:spPr>
+        <p:txBody>
+          <a:bodyPr wrap="square">
+            <a:spAutoFit/>
+          </a:bodyPr>
+          <a:lstStyle/>
+          <a:p>
+            <a:pPr algn="r"/>
+            <a:r>
+              <a:rPr sz="1100" b="0" i="0">
+                <a:solidFill>
+                  <a:srgbClr val="666666"/>
+                </a:solidFill>
+                <a:latin typeface="Calibri"/>
+              </a:rPr>
+              <a:t>24</a:t>
+            </a:r>
+          </a:p>
+        </p:txBody>
+      </p:sp>
+    </p:spTree>
+  </p:cSld>
+  <p:clrMapOvr>
+    <a:masterClrMapping/>
+  </p:clrMapOvr>
+</p:sld>
+</file>
+
+<file path=ppt/slides/slide25.xml><?xml version="1.0" encoding="utf-8"?>
 <p:sld xmlns:a="http://schemas.openxmlformats.org/drawingml/2006/main" xmlns:p="http://schemas.openxmlformats.org/presentationml/2006/main" xmlns:r="http://schemas.openxmlformats.org/officeDocument/2006/relationships">
   <p:cSld>
     <p:bg>

--- a/Introduccion a la Ingenieria/Clases/Clase 9 - Estrategias de innovacion en Ingenieria/Presentacion.pptx
+++ b/Introduccion a la Ingenieria/Clases/Clase 9 - Estrategias de innovacion en Ingenieria/Presentacion.pptx
@@ -18,9 +18,6 @@
     <p:sldId id="266" r:id="rId18"/>
     <p:sldId id="267" r:id="rId19"/>
     <p:sldId id="268" r:id="rId20"/>
-    <p:sldId id="269" r:id="rId21"/>
-    <p:sldId id="270" r:id="rId22"/>
-    <p:sldId id="271" r:id="rId23"/>
   </p:sldIdLst>
   <p:sldSz cx="12191695" cy="6858000" type="screen4x3"/>
   <p:notesSz cx="6858000" cy="9144000"/>
@@ -7130,2679 +7127,6 @@
         <p:spPr>
           <a:xfrm>
             <a:off x="0" y="0"/>
-            <a:ext cx="12191695" cy="1170432"/>
-          </a:xfrm>
-          <a:prstGeom prst="rect">
-            <a:avLst/>
-          </a:prstGeom>
-          <a:solidFill>
-            <a:srgbClr val="095292"/>
-          </a:solidFill>
-          <a:ln>
-            <a:noFill/>
-          </a:ln>
-        </p:spPr>
-        <p:style>
-          <a:lnRef idx="1">
-            <a:schemeClr val="accent1"/>
-          </a:lnRef>
-          <a:fillRef idx="3">
-            <a:schemeClr val="accent1"/>
-          </a:fillRef>
-          <a:effectRef idx="2">
-            <a:schemeClr val="accent1"/>
-          </a:effectRef>
-          <a:fontRef idx="minor">
-            <a:schemeClr val="lt1"/>
-          </a:fontRef>
-        </p:style>
-        <p:txBody>
-          <a:bodyPr rtlCol="0" anchor="ctr"/>
-          <a:lstStyle/>
-          <a:p>
-            <a:pPr algn="ctr"/>
-          </a:p>
-        </p:txBody>
-      </p:sp>
-      <p:sp>
-        <p:nvSpPr>
-          <p:cNvPr id="3" name="Rectangle 2"/>
-          <p:cNvSpPr/>
-          <p:nvPr/>
-        </p:nvSpPr>
-        <p:spPr>
-          <a:xfrm>
-            <a:off x="0" y="1170432"/>
-            <a:ext cx="12191695" cy="41148"/>
-          </a:xfrm>
-          <a:prstGeom prst="rect">
-            <a:avLst/>
-          </a:prstGeom>
-          <a:solidFill>
-            <a:srgbClr val="FFD000"/>
-          </a:solidFill>
-          <a:ln>
-            <a:noFill/>
-          </a:ln>
-        </p:spPr>
-        <p:style>
-          <a:lnRef idx="1">
-            <a:schemeClr val="accent1"/>
-          </a:lnRef>
-          <a:fillRef idx="3">
-            <a:schemeClr val="accent1"/>
-          </a:fillRef>
-          <a:effectRef idx="2">
-            <a:schemeClr val="accent1"/>
-          </a:effectRef>
-          <a:fontRef idx="minor">
-            <a:schemeClr val="lt1"/>
-          </a:fontRef>
-        </p:style>
-        <p:txBody>
-          <a:bodyPr rtlCol="0" anchor="ctr"/>
-          <a:lstStyle/>
-          <a:p>
-            <a:pPr algn="ctr"/>
-          </a:p>
-        </p:txBody>
-      </p:sp>
-      <p:sp>
-        <p:nvSpPr>
-          <p:cNvPr id="4" name="TextBox 3"/>
-          <p:cNvSpPr txBox="1"/>
-          <p:nvPr/>
-        </p:nvSpPr>
-        <p:spPr>
-          <a:xfrm>
-            <a:off x="457200" y="164592"/>
-            <a:ext cx="11277295" cy="384048"/>
-          </a:xfrm>
-          <a:prstGeom prst="rect">
-            <a:avLst/>
-          </a:prstGeom>
-          <a:noFill/>
-        </p:spPr>
-        <p:txBody>
-          <a:bodyPr wrap="square">
-            <a:spAutoFit/>
-          </a:bodyPr>
-          <a:lstStyle/>
-          <a:p>
-            <a:r>
-              <a:rPr sz="2600" b="1" i="0">
-                <a:solidFill>
-                  <a:srgbClr val="FFFFFF"/>
-                </a:solidFill>
-                <a:latin typeface="Calibri"/>
-              </a:rPr>
-              <a:t>Taller de hoy: Antecedentes y propuesta de mejora</a:t>
-            </a:r>
-          </a:p>
-        </p:txBody>
-      </p:sp>
-      <p:sp>
-        <p:nvSpPr>
-          <p:cNvPr id="5" name="TextBox 4"/>
-          <p:cNvSpPr txBox="1"/>
-          <p:nvPr/>
-        </p:nvSpPr>
-        <p:spPr>
-          <a:xfrm>
-            <a:off x="457200" y="566928"/>
-            <a:ext cx="11277295" cy="411480"/>
-          </a:xfrm>
-          <a:prstGeom prst="rect">
-            <a:avLst/>
-          </a:prstGeom>
-          <a:noFill/>
-        </p:spPr>
-        <p:txBody>
-          <a:bodyPr wrap="square">
-            <a:spAutoFit/>
-          </a:bodyPr>
-          <a:lstStyle/>
-          <a:p>
-            <a:r>
-              <a:rPr sz="1400" b="0" i="0">
-                <a:solidFill>
-                  <a:srgbClr val="B8D8EE"/>
-                </a:solidFill>
-                <a:latin typeface="Calibri"/>
-              </a:rPr>
-              <a:t>17 min en equipos · búsqueda repartida: 2 académico · 2 soluciones reales · 1 normas · tres fichas de antecedentes + propuesta de mejora + mapa en Excalidraw</a:t>
-            </a:r>
-          </a:p>
-        </p:txBody>
-      </p:sp>
-      <p:sp>
-        <p:nvSpPr>
-          <p:cNvPr id="6" name="Rounded Rectangle 5"/>
-          <p:cNvSpPr/>
-          <p:nvPr/>
-        </p:nvSpPr>
-        <p:spPr>
-          <a:xfrm>
-            <a:off x="457200" y="1472184"/>
-            <a:ext cx="11277295" cy="566928"/>
-          </a:xfrm>
-          <a:prstGeom prst="roundRect">
-            <a:avLst>
-              <a:gd name="adj" fmla="val 12000"/>
-            </a:avLst>
-          </a:prstGeom>
-          <a:solidFill>
-            <a:srgbClr val="F2F2F2"/>
-          </a:solidFill>
-          <a:ln>
-            <a:noFill/>
-          </a:ln>
-        </p:spPr>
-        <p:style>
-          <a:lnRef idx="1">
-            <a:schemeClr val="accent1"/>
-          </a:lnRef>
-          <a:fillRef idx="3">
-            <a:schemeClr val="accent1"/>
-          </a:fillRef>
-          <a:effectRef idx="2">
-            <a:schemeClr val="accent1"/>
-          </a:effectRef>
-          <a:fontRef idx="minor">
-            <a:schemeClr val="lt1"/>
-          </a:fontRef>
-        </p:style>
-        <p:txBody>
-          <a:bodyPr rtlCol="0" anchor="ctr"/>
-          <a:lstStyle/>
-          <a:p>
-            <a:pPr algn="ctr"/>
-          </a:p>
-        </p:txBody>
-      </p:sp>
-      <p:sp>
-        <p:nvSpPr>
-          <p:cNvPr id="7" name="Rectangle 6"/>
-          <p:cNvSpPr/>
-          <p:nvPr/>
-        </p:nvSpPr>
-        <p:spPr>
-          <a:xfrm>
-            <a:off x="640080" y="1618487"/>
-            <a:ext cx="274320" cy="274320"/>
-          </a:xfrm>
-          <a:prstGeom prst="rect">
-            <a:avLst/>
-          </a:prstGeom>
-          <a:solidFill>
-            <a:srgbClr val="FFFFFF"/>
-          </a:solidFill>
-          <a:ln>
-            <a:solidFill>
-              <a:srgbClr val="333333"/>
-            </a:solidFill>
-          </a:ln>
-        </p:spPr>
-        <p:style>
-          <a:lnRef idx="1">
-            <a:schemeClr val="accent1"/>
-          </a:lnRef>
-          <a:fillRef idx="3">
-            <a:schemeClr val="accent1"/>
-          </a:fillRef>
-          <a:effectRef idx="2">
-            <a:schemeClr val="accent1"/>
-          </a:effectRef>
-          <a:fontRef idx="minor">
-            <a:schemeClr val="lt1"/>
-          </a:fontRef>
-        </p:style>
-        <p:txBody>
-          <a:bodyPr rtlCol="0" anchor="ctr"/>
-          <a:lstStyle/>
-          <a:p>
-            <a:pPr algn="ctr"/>
-          </a:p>
-        </p:txBody>
-      </p:sp>
-      <p:sp>
-        <p:nvSpPr>
-          <p:cNvPr id="8" name="Rectangle 7"/>
-          <p:cNvSpPr/>
-          <p:nvPr/>
-        </p:nvSpPr>
-        <p:spPr>
-          <a:xfrm>
-            <a:off x="640080" y="1618487"/>
-            <a:ext cx="73152" cy="274320"/>
-          </a:xfrm>
-          <a:prstGeom prst="rect">
-            <a:avLst/>
-          </a:prstGeom>
-          <a:solidFill>
-            <a:srgbClr val="269CCB"/>
-          </a:solidFill>
-          <a:ln>
-            <a:noFill/>
-          </a:ln>
-        </p:spPr>
-        <p:style>
-          <a:lnRef idx="1">
-            <a:schemeClr val="accent1"/>
-          </a:lnRef>
-          <a:fillRef idx="3">
-            <a:schemeClr val="accent1"/>
-          </a:fillRef>
-          <a:effectRef idx="2">
-            <a:schemeClr val="accent1"/>
-          </a:effectRef>
-          <a:fontRef idx="minor">
-            <a:schemeClr val="lt1"/>
-          </a:fontRef>
-        </p:style>
-        <p:txBody>
-          <a:bodyPr rtlCol="0" anchor="ctr"/>
-          <a:lstStyle/>
-          <a:p>
-            <a:pPr algn="ctr"/>
-          </a:p>
-        </p:txBody>
-      </p:sp>
-      <p:sp>
-        <p:nvSpPr>
-          <p:cNvPr id="9" name="TextBox 8"/>
-          <p:cNvSpPr txBox="1"/>
-          <p:nvPr/>
-        </p:nvSpPr>
-        <p:spPr>
-          <a:xfrm>
-            <a:off x="1097280" y="1563624"/>
-            <a:ext cx="10362895" cy="402336"/>
-          </a:xfrm>
-          <a:prstGeom prst="rect">
-            <a:avLst/>
-          </a:prstGeom>
-          <a:noFill/>
-        </p:spPr>
-        <p:txBody>
-          <a:bodyPr wrap="square" anchor="ctr"/>
-          <a:lstStyle/>
-          <a:p>
-            <a:r>
-              <a:rPr sz="1500" b="1" i="0">
-                <a:solidFill>
-                  <a:srgbClr val="333333"/>
-                </a:solidFill>
-                <a:latin typeface="Calibri"/>
-              </a:rPr>
-              <a:t>LA PREGUNTA DE BÚSQUEDA</a:t>
-            </a:r>
-            <a:r>
-              <a:rPr sz="1500" b="0" i="0">
-                <a:solidFill>
-                  <a:srgbClr val="333333"/>
-                </a:solidFill>
-                <a:latin typeface="Calibri"/>
-              </a:rPr>
-              <a:t> — Una </a:t>
-            </a:r>
-            <a:r>
-              <a:rPr sz="1500" b="1" i="0">
-                <a:solidFill>
-                  <a:srgbClr val="333333"/>
-                </a:solidFill>
-                <a:latin typeface="Calibri"/>
-              </a:rPr>
-              <a:t>pregunta</a:t>
-            </a:r>
-            <a:r>
-              <a:rPr sz="1500" b="0" i="0">
-                <a:solidFill>
-                  <a:srgbClr val="333333"/>
-                </a:solidFill>
-                <a:latin typeface="Calibri"/>
-              </a:rPr>
-              <a:t>, no una palabra, y sus términos de búsqueda en dos o tres versiones — incluida una en inglés.</a:t>
-            </a:r>
-          </a:p>
-        </p:txBody>
-      </p:sp>
-      <p:sp>
-        <p:nvSpPr>
-          <p:cNvPr id="10" name="Rounded Rectangle 9"/>
-          <p:cNvSpPr/>
-          <p:nvPr/>
-        </p:nvSpPr>
-        <p:spPr>
-          <a:xfrm>
-            <a:off x="457200" y="2148839"/>
-            <a:ext cx="11277295" cy="566928"/>
-          </a:xfrm>
-          <a:prstGeom prst="roundRect">
-            <a:avLst>
-              <a:gd name="adj" fmla="val 12000"/>
-            </a:avLst>
-          </a:prstGeom>
-          <a:solidFill>
-            <a:srgbClr val="F2F2F2"/>
-          </a:solidFill>
-          <a:ln>
-            <a:noFill/>
-          </a:ln>
-        </p:spPr>
-        <p:style>
-          <a:lnRef idx="1">
-            <a:schemeClr val="accent1"/>
-          </a:lnRef>
-          <a:fillRef idx="3">
-            <a:schemeClr val="accent1"/>
-          </a:fillRef>
-          <a:effectRef idx="2">
-            <a:schemeClr val="accent1"/>
-          </a:effectRef>
-          <a:fontRef idx="minor">
-            <a:schemeClr val="lt1"/>
-          </a:fontRef>
-        </p:style>
-        <p:txBody>
-          <a:bodyPr rtlCol="0" anchor="ctr"/>
-          <a:lstStyle/>
-          <a:p>
-            <a:pPr algn="ctr"/>
-          </a:p>
-        </p:txBody>
-      </p:sp>
-      <p:sp>
-        <p:nvSpPr>
-          <p:cNvPr id="11" name="Rectangle 10"/>
-          <p:cNvSpPr/>
-          <p:nvPr/>
-        </p:nvSpPr>
-        <p:spPr>
-          <a:xfrm>
-            <a:off x="640080" y="2295144"/>
-            <a:ext cx="274320" cy="274320"/>
-          </a:xfrm>
-          <a:prstGeom prst="rect">
-            <a:avLst/>
-          </a:prstGeom>
-          <a:solidFill>
-            <a:srgbClr val="FFFFFF"/>
-          </a:solidFill>
-          <a:ln>
-            <a:solidFill>
-              <a:srgbClr val="333333"/>
-            </a:solidFill>
-          </a:ln>
-        </p:spPr>
-        <p:style>
-          <a:lnRef idx="1">
-            <a:schemeClr val="accent1"/>
-          </a:lnRef>
-          <a:fillRef idx="3">
-            <a:schemeClr val="accent1"/>
-          </a:fillRef>
-          <a:effectRef idx="2">
-            <a:schemeClr val="accent1"/>
-          </a:effectRef>
-          <a:fontRef idx="minor">
-            <a:schemeClr val="lt1"/>
-          </a:fontRef>
-        </p:style>
-        <p:txBody>
-          <a:bodyPr rtlCol="0" anchor="ctr"/>
-          <a:lstStyle/>
-          <a:p>
-            <a:pPr algn="ctr"/>
-          </a:p>
-        </p:txBody>
-      </p:sp>
-      <p:sp>
-        <p:nvSpPr>
-          <p:cNvPr id="12" name="Rectangle 11"/>
-          <p:cNvSpPr/>
-          <p:nvPr/>
-        </p:nvSpPr>
-        <p:spPr>
-          <a:xfrm>
-            <a:off x="640080" y="2295144"/>
-            <a:ext cx="73152" cy="274320"/>
-          </a:xfrm>
-          <a:prstGeom prst="rect">
-            <a:avLst/>
-          </a:prstGeom>
-          <a:solidFill>
-            <a:srgbClr val="269CCB"/>
-          </a:solidFill>
-          <a:ln>
-            <a:noFill/>
-          </a:ln>
-        </p:spPr>
-        <p:style>
-          <a:lnRef idx="1">
-            <a:schemeClr val="accent1"/>
-          </a:lnRef>
-          <a:fillRef idx="3">
-            <a:schemeClr val="accent1"/>
-          </a:fillRef>
-          <a:effectRef idx="2">
-            <a:schemeClr val="accent1"/>
-          </a:effectRef>
-          <a:fontRef idx="minor">
-            <a:schemeClr val="lt1"/>
-          </a:fontRef>
-        </p:style>
-        <p:txBody>
-          <a:bodyPr rtlCol="0" anchor="ctr"/>
-          <a:lstStyle/>
-          <a:p>
-            <a:pPr algn="ctr"/>
-          </a:p>
-        </p:txBody>
-      </p:sp>
-      <p:sp>
-        <p:nvSpPr>
-          <p:cNvPr id="13" name="TextBox 12"/>
-          <p:cNvSpPr txBox="1"/>
-          <p:nvPr/>
-        </p:nvSpPr>
-        <p:spPr>
-          <a:xfrm>
-            <a:off x="1097280" y="2240279"/>
-            <a:ext cx="10362895" cy="402336"/>
-          </a:xfrm>
-          <a:prstGeom prst="rect">
-            <a:avLst/>
-          </a:prstGeom>
-          <a:noFill/>
-        </p:spPr>
-        <p:txBody>
-          <a:bodyPr wrap="square" anchor="ctr"/>
-          <a:lstStyle/>
-          <a:p>
-            <a:r>
-              <a:rPr sz="1500" b="1" i="0">
-                <a:solidFill>
-                  <a:srgbClr val="333333"/>
-                </a:solidFill>
-                <a:latin typeface="Calibri"/>
-              </a:rPr>
-              <a:t>TRES ANTECEDENTES FICHADOS</a:t>
-            </a:r>
-            <a:r>
-              <a:rPr sz="1500" b="0" i="0">
-                <a:solidFill>
-                  <a:srgbClr val="333333"/>
-                </a:solidFill>
-                <a:latin typeface="Calibri"/>
-              </a:rPr>
-              <a:t> — Tres fichas con los seis campos: </a:t>
-            </a:r>
-            <a:r>
-              <a:rPr sz="1500" b="1" i="0">
-                <a:solidFill>
-                  <a:srgbClr val="333333"/>
-                </a:solidFill>
-                <a:latin typeface="Calibri"/>
-              </a:rPr>
-              <a:t>autor o responsable · año · dónde · qué hace · qué le falta para nuestro caso · enlace</a:t>
-            </a:r>
-            <a:r>
-              <a:rPr sz="1500" b="0" i="0">
-                <a:solidFill>
-                  <a:srgbClr val="333333"/>
-                </a:solidFill>
-                <a:latin typeface="Calibri"/>
-              </a:rPr>
-              <a:t>. Al menos una fuente académica o normativa.</a:t>
-            </a:r>
-          </a:p>
-        </p:txBody>
-      </p:sp>
-      <p:sp>
-        <p:nvSpPr>
-          <p:cNvPr id="14" name="Rounded Rectangle 13"/>
-          <p:cNvSpPr/>
-          <p:nvPr/>
-        </p:nvSpPr>
-        <p:spPr>
-          <a:xfrm>
-            <a:off x="457200" y="2825496"/>
-            <a:ext cx="11277295" cy="566928"/>
-          </a:xfrm>
-          <a:prstGeom prst="roundRect">
-            <a:avLst>
-              <a:gd name="adj" fmla="val 12000"/>
-            </a:avLst>
-          </a:prstGeom>
-          <a:solidFill>
-            <a:srgbClr val="F2F2F2"/>
-          </a:solidFill>
-          <a:ln>
-            <a:noFill/>
-          </a:ln>
-        </p:spPr>
-        <p:style>
-          <a:lnRef idx="1">
-            <a:schemeClr val="accent1"/>
-          </a:lnRef>
-          <a:fillRef idx="3">
-            <a:schemeClr val="accent1"/>
-          </a:fillRef>
-          <a:effectRef idx="2">
-            <a:schemeClr val="accent1"/>
-          </a:effectRef>
-          <a:fontRef idx="minor">
-            <a:schemeClr val="lt1"/>
-          </a:fontRef>
-        </p:style>
-        <p:txBody>
-          <a:bodyPr rtlCol="0" anchor="ctr"/>
-          <a:lstStyle/>
-          <a:p>
-            <a:pPr algn="ctr"/>
-          </a:p>
-        </p:txBody>
-      </p:sp>
-      <p:sp>
-        <p:nvSpPr>
-          <p:cNvPr id="15" name="Rectangle 14"/>
-          <p:cNvSpPr/>
-          <p:nvPr/>
-        </p:nvSpPr>
-        <p:spPr>
-          <a:xfrm>
-            <a:off x="640080" y="2971800"/>
-            <a:ext cx="274320" cy="274320"/>
-          </a:xfrm>
-          <a:prstGeom prst="rect">
-            <a:avLst/>
-          </a:prstGeom>
-          <a:solidFill>
-            <a:srgbClr val="FFFFFF"/>
-          </a:solidFill>
-          <a:ln>
-            <a:solidFill>
-              <a:srgbClr val="333333"/>
-            </a:solidFill>
-          </a:ln>
-        </p:spPr>
-        <p:style>
-          <a:lnRef idx="1">
-            <a:schemeClr val="accent1"/>
-          </a:lnRef>
-          <a:fillRef idx="3">
-            <a:schemeClr val="accent1"/>
-          </a:fillRef>
-          <a:effectRef idx="2">
-            <a:schemeClr val="accent1"/>
-          </a:effectRef>
-          <a:fontRef idx="minor">
-            <a:schemeClr val="lt1"/>
-          </a:fontRef>
-        </p:style>
-        <p:txBody>
-          <a:bodyPr rtlCol="0" anchor="ctr"/>
-          <a:lstStyle/>
-          <a:p>
-            <a:pPr algn="ctr"/>
-          </a:p>
-        </p:txBody>
-      </p:sp>
-      <p:sp>
-        <p:nvSpPr>
-          <p:cNvPr id="16" name="Rectangle 15"/>
-          <p:cNvSpPr/>
-          <p:nvPr/>
-        </p:nvSpPr>
-        <p:spPr>
-          <a:xfrm>
-            <a:off x="640080" y="2971800"/>
-            <a:ext cx="73152" cy="274320"/>
-          </a:xfrm>
-          <a:prstGeom prst="rect">
-            <a:avLst/>
-          </a:prstGeom>
-          <a:solidFill>
-            <a:srgbClr val="269CCB"/>
-          </a:solidFill>
-          <a:ln>
-            <a:noFill/>
-          </a:ln>
-        </p:spPr>
-        <p:style>
-          <a:lnRef idx="1">
-            <a:schemeClr val="accent1"/>
-          </a:lnRef>
-          <a:fillRef idx="3">
-            <a:schemeClr val="accent1"/>
-          </a:fillRef>
-          <a:effectRef idx="2">
-            <a:schemeClr val="accent1"/>
-          </a:effectRef>
-          <a:fontRef idx="minor">
-            <a:schemeClr val="lt1"/>
-          </a:fontRef>
-        </p:style>
-        <p:txBody>
-          <a:bodyPr rtlCol="0" anchor="ctr"/>
-          <a:lstStyle/>
-          <a:p>
-            <a:pPr algn="ctr"/>
-          </a:p>
-        </p:txBody>
-      </p:sp>
-      <p:sp>
-        <p:nvSpPr>
-          <p:cNvPr id="17" name="TextBox 16"/>
-          <p:cNvSpPr txBox="1"/>
-          <p:nvPr/>
-        </p:nvSpPr>
-        <p:spPr>
-          <a:xfrm>
-            <a:off x="1097280" y="2916936"/>
-            <a:ext cx="10362895" cy="402336"/>
-          </a:xfrm>
-          <a:prstGeom prst="rect">
-            <a:avLst/>
-          </a:prstGeom>
-          <a:noFill/>
-        </p:spPr>
-        <p:txBody>
-          <a:bodyPr wrap="square" anchor="ctr"/>
-          <a:lstStyle/>
-          <a:p>
-            <a:r>
-              <a:rPr sz="1500" b="1" i="0">
-                <a:solidFill>
-                  <a:srgbClr val="333333"/>
-                </a:solidFill>
-                <a:latin typeface="Calibri"/>
-              </a:rPr>
-              <a:t>QUÉ BUSCAMOS Y NO ENCONTRAMOS</a:t>
-            </a:r>
-            <a:r>
-              <a:rPr sz="1500" b="0" i="0">
-                <a:solidFill>
-                  <a:srgbClr val="333333"/>
-                </a:solidFill>
-                <a:latin typeface="Calibri"/>
-              </a:rPr>
-              <a:t> — Qué buscaron, con qué términos, en qué sitios, y </a:t>
-            </a:r>
-            <a:r>
-              <a:rPr sz="1500" b="1" i="0">
-                <a:solidFill>
-                  <a:srgbClr val="333333"/>
-                </a:solidFill>
-                <a:latin typeface="Calibri"/>
-              </a:rPr>
-              <a:t>qué fue lo más cercano</a:t>
-            </a:r>
-            <a:r>
-              <a:rPr sz="1500" b="0" i="0">
-                <a:solidFill>
-                  <a:srgbClr val="333333"/>
-                </a:solidFill>
-                <a:latin typeface="Calibri"/>
-              </a:rPr>
-              <a:t> que apareció. «No encontramos nada» bien escrito es un hallazgo.</a:t>
-            </a:r>
-          </a:p>
-        </p:txBody>
-      </p:sp>
-      <p:sp>
-        <p:nvSpPr>
-          <p:cNvPr id="18" name="Rounded Rectangle 17"/>
-          <p:cNvSpPr/>
-          <p:nvPr/>
-        </p:nvSpPr>
-        <p:spPr>
-          <a:xfrm>
-            <a:off x="457200" y="3502152"/>
-            <a:ext cx="11277295" cy="566928"/>
-          </a:xfrm>
-          <a:prstGeom prst="roundRect">
-            <a:avLst>
-              <a:gd name="adj" fmla="val 12000"/>
-            </a:avLst>
-          </a:prstGeom>
-          <a:solidFill>
-            <a:srgbClr val="F2F2F2"/>
-          </a:solidFill>
-          <a:ln>
-            <a:noFill/>
-          </a:ln>
-        </p:spPr>
-        <p:style>
-          <a:lnRef idx="1">
-            <a:schemeClr val="accent1"/>
-          </a:lnRef>
-          <a:fillRef idx="3">
-            <a:schemeClr val="accent1"/>
-          </a:fillRef>
-          <a:effectRef idx="2">
-            <a:schemeClr val="accent1"/>
-          </a:effectRef>
-          <a:fontRef idx="minor">
-            <a:schemeClr val="lt1"/>
-          </a:fontRef>
-        </p:style>
-        <p:txBody>
-          <a:bodyPr rtlCol="0" anchor="ctr"/>
-          <a:lstStyle/>
-          <a:p>
-            <a:pPr algn="ctr"/>
-          </a:p>
-        </p:txBody>
-      </p:sp>
-      <p:sp>
-        <p:nvSpPr>
-          <p:cNvPr id="19" name="Rectangle 18"/>
-          <p:cNvSpPr/>
-          <p:nvPr/>
-        </p:nvSpPr>
-        <p:spPr>
-          <a:xfrm>
-            <a:off x="640080" y="3648456"/>
-            <a:ext cx="274320" cy="274320"/>
-          </a:xfrm>
-          <a:prstGeom prst="rect">
-            <a:avLst/>
-          </a:prstGeom>
-          <a:solidFill>
-            <a:srgbClr val="FFFFFF"/>
-          </a:solidFill>
-          <a:ln>
-            <a:solidFill>
-              <a:srgbClr val="333333"/>
-            </a:solidFill>
-          </a:ln>
-        </p:spPr>
-        <p:style>
-          <a:lnRef idx="1">
-            <a:schemeClr val="accent1"/>
-          </a:lnRef>
-          <a:fillRef idx="3">
-            <a:schemeClr val="accent1"/>
-          </a:fillRef>
-          <a:effectRef idx="2">
-            <a:schemeClr val="accent1"/>
-          </a:effectRef>
-          <a:fontRef idx="minor">
-            <a:schemeClr val="lt1"/>
-          </a:fontRef>
-        </p:style>
-        <p:txBody>
-          <a:bodyPr rtlCol="0" anchor="ctr"/>
-          <a:lstStyle/>
-          <a:p>
-            <a:pPr algn="ctr"/>
-          </a:p>
-        </p:txBody>
-      </p:sp>
-      <p:sp>
-        <p:nvSpPr>
-          <p:cNvPr id="20" name="Rectangle 19"/>
-          <p:cNvSpPr/>
-          <p:nvPr/>
-        </p:nvSpPr>
-        <p:spPr>
-          <a:xfrm>
-            <a:off x="640080" y="3648456"/>
-            <a:ext cx="73152" cy="274320"/>
-          </a:xfrm>
-          <a:prstGeom prst="rect">
-            <a:avLst/>
-          </a:prstGeom>
-          <a:solidFill>
-            <a:srgbClr val="269CCB"/>
-          </a:solidFill>
-          <a:ln>
-            <a:noFill/>
-          </a:ln>
-        </p:spPr>
-        <p:style>
-          <a:lnRef idx="1">
-            <a:schemeClr val="accent1"/>
-          </a:lnRef>
-          <a:fillRef idx="3">
-            <a:schemeClr val="accent1"/>
-          </a:fillRef>
-          <a:effectRef idx="2">
-            <a:schemeClr val="accent1"/>
-          </a:effectRef>
-          <a:fontRef idx="minor">
-            <a:schemeClr val="lt1"/>
-          </a:fontRef>
-        </p:style>
-        <p:txBody>
-          <a:bodyPr rtlCol="0" anchor="ctr"/>
-          <a:lstStyle/>
-          <a:p>
-            <a:pPr algn="ctr"/>
-          </a:p>
-        </p:txBody>
-      </p:sp>
-      <p:sp>
-        <p:nvSpPr>
-          <p:cNvPr id="21" name="TextBox 20"/>
-          <p:cNvSpPr txBox="1"/>
-          <p:nvPr/>
-        </p:nvSpPr>
-        <p:spPr>
-          <a:xfrm>
-            <a:off x="1097280" y="3593592"/>
-            <a:ext cx="10362895" cy="402336"/>
-          </a:xfrm>
-          <a:prstGeom prst="rect">
-            <a:avLst/>
-          </a:prstGeom>
-          <a:noFill/>
-        </p:spPr>
-        <p:txBody>
-          <a:bodyPr wrap="square" anchor="ctr"/>
-          <a:lstStyle/>
-          <a:p>
-            <a:r>
-              <a:rPr sz="1500" b="1" i="0">
-                <a:solidFill>
-                  <a:srgbClr val="333333"/>
-                </a:solidFill>
-                <a:latin typeface="Calibri"/>
-              </a:rPr>
-              <a:t>LA PROPUESTA DE MEJORA</a:t>
-            </a:r>
-            <a:r>
-              <a:rPr sz="1500" b="0" i="0">
-                <a:solidFill>
-                  <a:srgbClr val="333333"/>
-                </a:solidFill>
-                <a:latin typeface="Calibri"/>
-              </a:rPr>
-              <a:t> — Qué van a hacer distinto respecto a lo fichado, </a:t>
-            </a:r>
-            <a:r>
-              <a:rPr sz="1500" b="1" i="0">
-                <a:solidFill>
-                  <a:srgbClr val="333333"/>
-                </a:solidFill>
-                <a:latin typeface="Calibri"/>
-              </a:rPr>
-              <a:t>con cuál de las cuatro operaciones</a:t>
-            </a:r>
-            <a:r>
-              <a:rPr sz="1500" b="0" i="0">
-                <a:solidFill>
-                  <a:srgbClr val="333333"/>
-                </a:solidFill>
-                <a:latin typeface="Calibri"/>
-              </a:rPr>
-              <a:t> (quitar, combinar, invertir, adaptar), y por qué eso importa en su contexto.</a:t>
-            </a:r>
-          </a:p>
-        </p:txBody>
-      </p:sp>
-      <p:sp>
-        <p:nvSpPr>
-          <p:cNvPr id="22" name="Rounded Rectangle 21"/>
-          <p:cNvSpPr/>
-          <p:nvPr/>
-        </p:nvSpPr>
-        <p:spPr>
-          <a:xfrm>
-            <a:off x="457200" y="4178808"/>
-            <a:ext cx="11277295" cy="566928"/>
-          </a:xfrm>
-          <a:prstGeom prst="roundRect">
-            <a:avLst>
-              <a:gd name="adj" fmla="val 12000"/>
-            </a:avLst>
-          </a:prstGeom>
-          <a:solidFill>
-            <a:srgbClr val="F2F2F2"/>
-          </a:solidFill>
-          <a:ln>
-            <a:noFill/>
-          </a:ln>
-        </p:spPr>
-        <p:style>
-          <a:lnRef idx="1">
-            <a:schemeClr val="accent1"/>
-          </a:lnRef>
-          <a:fillRef idx="3">
-            <a:schemeClr val="accent1"/>
-          </a:fillRef>
-          <a:effectRef idx="2">
-            <a:schemeClr val="accent1"/>
-          </a:effectRef>
-          <a:fontRef idx="minor">
-            <a:schemeClr val="lt1"/>
-          </a:fontRef>
-        </p:style>
-        <p:txBody>
-          <a:bodyPr rtlCol="0" anchor="ctr"/>
-          <a:lstStyle/>
-          <a:p>
-            <a:pPr algn="ctr"/>
-          </a:p>
-        </p:txBody>
-      </p:sp>
-      <p:sp>
-        <p:nvSpPr>
-          <p:cNvPr id="23" name="Rectangle 22"/>
-          <p:cNvSpPr/>
-          <p:nvPr/>
-        </p:nvSpPr>
-        <p:spPr>
-          <a:xfrm>
-            <a:off x="640080" y="4325112"/>
-            <a:ext cx="274320" cy="274320"/>
-          </a:xfrm>
-          <a:prstGeom prst="rect">
-            <a:avLst/>
-          </a:prstGeom>
-          <a:solidFill>
-            <a:srgbClr val="FFFFFF"/>
-          </a:solidFill>
-          <a:ln>
-            <a:solidFill>
-              <a:srgbClr val="333333"/>
-            </a:solidFill>
-          </a:ln>
-        </p:spPr>
-        <p:style>
-          <a:lnRef idx="1">
-            <a:schemeClr val="accent1"/>
-          </a:lnRef>
-          <a:fillRef idx="3">
-            <a:schemeClr val="accent1"/>
-          </a:fillRef>
-          <a:effectRef idx="2">
-            <a:schemeClr val="accent1"/>
-          </a:effectRef>
-          <a:fontRef idx="minor">
-            <a:schemeClr val="lt1"/>
-          </a:fontRef>
-        </p:style>
-        <p:txBody>
-          <a:bodyPr rtlCol="0" anchor="ctr"/>
-          <a:lstStyle/>
-          <a:p>
-            <a:pPr algn="ctr"/>
-          </a:p>
-        </p:txBody>
-      </p:sp>
-      <p:sp>
-        <p:nvSpPr>
-          <p:cNvPr id="24" name="Rectangle 23"/>
-          <p:cNvSpPr/>
-          <p:nvPr/>
-        </p:nvSpPr>
-        <p:spPr>
-          <a:xfrm>
-            <a:off x="640080" y="4325112"/>
-            <a:ext cx="73152" cy="274320"/>
-          </a:xfrm>
-          <a:prstGeom prst="rect">
-            <a:avLst/>
-          </a:prstGeom>
-          <a:solidFill>
-            <a:srgbClr val="269CCB"/>
-          </a:solidFill>
-          <a:ln>
-            <a:noFill/>
-          </a:ln>
-        </p:spPr>
-        <p:style>
-          <a:lnRef idx="1">
-            <a:schemeClr val="accent1"/>
-          </a:lnRef>
-          <a:fillRef idx="3">
-            <a:schemeClr val="accent1"/>
-          </a:fillRef>
-          <a:effectRef idx="2">
-            <a:schemeClr val="accent1"/>
-          </a:effectRef>
-          <a:fontRef idx="minor">
-            <a:schemeClr val="lt1"/>
-          </a:fontRef>
-        </p:style>
-        <p:txBody>
-          <a:bodyPr rtlCol="0" anchor="ctr"/>
-          <a:lstStyle/>
-          <a:p>
-            <a:pPr algn="ctr"/>
-          </a:p>
-        </p:txBody>
-      </p:sp>
-      <p:sp>
-        <p:nvSpPr>
-          <p:cNvPr id="25" name="TextBox 24"/>
-          <p:cNvSpPr txBox="1"/>
-          <p:nvPr/>
-        </p:nvSpPr>
-        <p:spPr>
-          <a:xfrm>
-            <a:off x="1097280" y="4270248"/>
-            <a:ext cx="10362895" cy="402336"/>
-          </a:xfrm>
-          <a:prstGeom prst="rect">
-            <a:avLst/>
-          </a:prstGeom>
-          <a:noFill/>
-        </p:spPr>
-        <p:txBody>
-          <a:bodyPr wrap="square" anchor="ctr"/>
-          <a:lstStyle/>
-          <a:p>
-            <a:r>
-              <a:rPr sz="1500" b="1" i="0">
-                <a:solidFill>
-                  <a:srgbClr val="333333"/>
-                </a:solidFill>
-                <a:latin typeface="Calibri"/>
-              </a:rPr>
-              <a:t>LO QUE VAMOS A REUSAR</a:t>
-            </a:r>
-            <a:r>
-              <a:rPr sz="1500" b="0" i="0">
-                <a:solidFill>
-                  <a:srgbClr val="333333"/>
-                </a:solidFill>
-                <a:latin typeface="Calibri"/>
-              </a:rPr>
-              <a:t> — Qué de lo que ya existe piensan aprovechar: una idea de diseño, una forma de organizar los datos, una herramienta, una lista de errores conocidos.</a:t>
-            </a:r>
-          </a:p>
-        </p:txBody>
-      </p:sp>
-      <p:sp>
-        <p:nvSpPr>
-          <p:cNvPr id="26" name="TextBox 25"/>
-          <p:cNvSpPr txBox="1"/>
-          <p:nvPr/>
-        </p:nvSpPr>
-        <p:spPr>
-          <a:xfrm>
-            <a:off x="11185855" y="6473952"/>
-            <a:ext cx="640080" cy="274320"/>
-          </a:xfrm>
-          <a:prstGeom prst="rect">
-            <a:avLst/>
-          </a:prstGeom>
-          <a:noFill/>
-        </p:spPr>
-        <p:txBody>
-          <a:bodyPr wrap="square">
-            <a:spAutoFit/>
-          </a:bodyPr>
-          <a:lstStyle/>
-          <a:p>
-            <a:pPr algn="r"/>
-            <a:r>
-              <a:rPr sz="1100" b="0" i="0">
-                <a:solidFill>
-                  <a:srgbClr val="666666"/>
-                </a:solidFill>
-                <a:latin typeface="Calibri"/>
-              </a:rPr>
-              <a:t>13</a:t>
-            </a:r>
-          </a:p>
-        </p:txBody>
-      </p:sp>
-    </p:spTree>
-  </p:cSld>
-  <p:clrMapOvr>
-    <a:masterClrMapping/>
-  </p:clrMapOvr>
-</p:sld>
-</file>
-
-<file path=ppt/slides/slide14.xml><?xml version="1.0" encoding="utf-8"?>
-<p:sld xmlns:a="http://schemas.openxmlformats.org/drawingml/2006/main" xmlns:p="http://schemas.openxmlformats.org/presentationml/2006/main" xmlns:r="http://schemas.openxmlformats.org/officeDocument/2006/relationships">
-  <p:cSld>
-    <p:bg>
-      <p:bgPr>
-        <a:solidFill>
-          <a:srgbClr val="FFFFFF"/>
-        </a:solidFill>
-        <a:effectLst/>
-      </p:bgPr>
-    </p:bg>
-    <p:spTree>
-      <p:nvGrpSpPr>
-        <p:cNvPr id="1" name=""/>
-        <p:cNvGrpSpPr/>
-        <p:nvPr/>
-      </p:nvGrpSpPr>
-      <p:grpSpPr/>
-      <p:sp>
-        <p:nvSpPr>
-          <p:cNvPr id="2" name="Rectangle 1"/>
-          <p:cNvSpPr/>
-          <p:nvPr/>
-        </p:nvSpPr>
-        <p:spPr>
-          <a:xfrm>
-            <a:off x="0" y="0"/>
-            <a:ext cx="12191695" cy="1170432"/>
-          </a:xfrm>
-          <a:prstGeom prst="rect">
-            <a:avLst/>
-          </a:prstGeom>
-          <a:solidFill>
-            <a:srgbClr val="095292"/>
-          </a:solidFill>
-          <a:ln>
-            <a:noFill/>
-          </a:ln>
-        </p:spPr>
-        <p:style>
-          <a:lnRef idx="1">
-            <a:schemeClr val="accent1"/>
-          </a:lnRef>
-          <a:fillRef idx="3">
-            <a:schemeClr val="accent1"/>
-          </a:fillRef>
-          <a:effectRef idx="2">
-            <a:schemeClr val="accent1"/>
-          </a:effectRef>
-          <a:fontRef idx="minor">
-            <a:schemeClr val="lt1"/>
-          </a:fontRef>
-        </p:style>
-        <p:txBody>
-          <a:bodyPr rtlCol="0" anchor="ctr"/>
-          <a:lstStyle/>
-          <a:p>
-            <a:pPr algn="ctr"/>
-          </a:p>
-        </p:txBody>
-      </p:sp>
-      <p:sp>
-        <p:nvSpPr>
-          <p:cNvPr id="3" name="Rectangle 2"/>
-          <p:cNvSpPr/>
-          <p:nvPr/>
-        </p:nvSpPr>
-        <p:spPr>
-          <a:xfrm>
-            <a:off x="0" y="1170432"/>
-            <a:ext cx="12191695" cy="41148"/>
-          </a:xfrm>
-          <a:prstGeom prst="rect">
-            <a:avLst/>
-          </a:prstGeom>
-          <a:solidFill>
-            <a:srgbClr val="FFD000"/>
-          </a:solidFill>
-          <a:ln>
-            <a:noFill/>
-          </a:ln>
-        </p:spPr>
-        <p:style>
-          <a:lnRef idx="1">
-            <a:schemeClr val="accent1"/>
-          </a:lnRef>
-          <a:fillRef idx="3">
-            <a:schemeClr val="accent1"/>
-          </a:fillRef>
-          <a:effectRef idx="2">
-            <a:schemeClr val="accent1"/>
-          </a:effectRef>
-          <a:fontRef idx="minor">
-            <a:schemeClr val="lt1"/>
-          </a:fontRef>
-        </p:style>
-        <p:txBody>
-          <a:bodyPr rtlCol="0" anchor="ctr"/>
-          <a:lstStyle/>
-          <a:p>
-            <a:pPr algn="ctr"/>
-          </a:p>
-        </p:txBody>
-      </p:sp>
-      <p:sp>
-        <p:nvSpPr>
-          <p:cNvPr id="4" name="TextBox 3"/>
-          <p:cNvSpPr txBox="1"/>
-          <p:nvPr/>
-        </p:nvSpPr>
-        <p:spPr>
-          <a:xfrm>
-            <a:off x="457200" y="164592"/>
-            <a:ext cx="11277295" cy="384048"/>
-          </a:xfrm>
-          <a:prstGeom prst="rect">
-            <a:avLst/>
-          </a:prstGeom>
-          <a:noFill/>
-        </p:spPr>
-        <p:txBody>
-          <a:bodyPr wrap="square">
-            <a:spAutoFit/>
-          </a:bodyPr>
-          <a:lstStyle/>
-          <a:p>
-            <a:r>
-              <a:rPr sz="2600" b="1" i="0">
-                <a:solidFill>
-                  <a:srgbClr val="FFFFFF"/>
-                </a:solidFill>
-                <a:latin typeface="Calibri"/>
-              </a:rPr>
-              <a:t>Cómo se expone en 3 minutos</a:t>
-            </a:r>
-          </a:p>
-        </p:txBody>
-      </p:sp>
-      <p:sp>
-        <p:nvSpPr>
-          <p:cNvPr id="5" name="TextBox 4"/>
-          <p:cNvSpPr txBox="1"/>
-          <p:nvPr/>
-        </p:nvSpPr>
-        <p:spPr>
-          <a:xfrm>
-            <a:off x="457200" y="566928"/>
-            <a:ext cx="11277295" cy="411480"/>
-          </a:xfrm>
-          <a:prstGeom prst="rect">
-            <a:avLst/>
-          </a:prstGeom>
-          <a:noFill/>
-        </p:spPr>
-        <p:txBody>
-          <a:bodyPr wrap="square">
-            <a:spAutoFit/>
-          </a:bodyPr>
-          <a:lstStyle/>
-          <a:p>
-            <a:r>
-              <a:rPr sz="1400" b="0" i="0">
-                <a:solidFill>
-                  <a:srgbClr val="B8D8EE"/>
-                </a:solidFill>
-                <a:latin typeface="Calibri"/>
-              </a:rPr>
-              <a:t>Habla el vocero con la pantalla ya compartida · cronómetro en pantalla · se corta al llegar a cero</a:t>
-            </a:r>
-          </a:p>
-        </p:txBody>
-      </p:sp>
-      <p:sp>
-        <p:nvSpPr>
-          <p:cNvPr id="6" name="Rounded Rectangle 5"/>
-          <p:cNvSpPr/>
-          <p:nvPr/>
-        </p:nvSpPr>
-        <p:spPr>
-          <a:xfrm>
-            <a:off x="457200" y="1444752"/>
-            <a:ext cx="11277295" cy="908913"/>
-          </a:xfrm>
-          <a:prstGeom prst="roundRect">
-            <a:avLst>
-              <a:gd name="adj" fmla="val 12000"/>
-            </a:avLst>
-          </a:prstGeom>
-          <a:solidFill>
-            <a:srgbClr val="F2F2F2"/>
-          </a:solidFill>
-          <a:ln>
-            <a:noFill/>
-          </a:ln>
-        </p:spPr>
-        <p:style>
-          <a:lnRef idx="1">
-            <a:schemeClr val="accent1"/>
-          </a:lnRef>
-          <a:fillRef idx="3">
-            <a:schemeClr val="accent1"/>
-          </a:fillRef>
-          <a:effectRef idx="2">
-            <a:schemeClr val="accent1"/>
-          </a:effectRef>
-          <a:fontRef idx="minor">
-            <a:schemeClr val="lt1"/>
-          </a:fontRef>
-        </p:style>
-        <p:txBody>
-          <a:bodyPr rtlCol="0" anchor="ctr"/>
-          <a:lstStyle/>
-          <a:p>
-            <a:pPr algn="ctr"/>
-          </a:p>
-        </p:txBody>
-      </p:sp>
-      <p:sp>
-        <p:nvSpPr>
-          <p:cNvPr id="7" name="Rounded Rectangle 6"/>
-          <p:cNvSpPr/>
-          <p:nvPr/>
-        </p:nvSpPr>
-        <p:spPr>
-          <a:xfrm>
-            <a:off x="594360" y="1679752"/>
-            <a:ext cx="438912" cy="438912"/>
-          </a:xfrm>
-          <a:prstGeom prst="roundRect">
-            <a:avLst>
-              <a:gd name="adj" fmla="val 12000"/>
-            </a:avLst>
-          </a:prstGeom>
-          <a:solidFill>
-            <a:srgbClr val="095292"/>
-          </a:solidFill>
-          <a:ln>
-            <a:noFill/>
-          </a:ln>
-        </p:spPr>
-        <p:style>
-          <a:lnRef idx="1">
-            <a:schemeClr val="accent1"/>
-          </a:lnRef>
-          <a:fillRef idx="3">
-            <a:schemeClr val="accent1"/>
-          </a:fillRef>
-          <a:effectRef idx="2">
-            <a:schemeClr val="accent1"/>
-          </a:effectRef>
-          <a:fontRef idx="minor">
-            <a:schemeClr val="lt1"/>
-          </a:fontRef>
-        </p:style>
-        <p:txBody>
-          <a:bodyPr rtlCol="0" anchor="ctr"/>
-          <a:lstStyle/>
-          <a:p>
-            <a:pPr algn="ctr"/>
-          </a:p>
-        </p:txBody>
-      </p:sp>
-      <p:sp>
-        <p:nvSpPr>
-          <p:cNvPr id="8" name="TextBox 7"/>
-          <p:cNvSpPr txBox="1"/>
-          <p:nvPr/>
-        </p:nvSpPr>
-        <p:spPr>
-          <a:xfrm>
-            <a:off x="594360" y="1679752"/>
-            <a:ext cx="438912" cy="438912"/>
-          </a:xfrm>
-          <a:prstGeom prst="rect">
-            <a:avLst/>
-          </a:prstGeom>
-          <a:noFill/>
-        </p:spPr>
-        <p:txBody>
-          <a:bodyPr wrap="square" anchor="ctr"/>
-          <a:lstStyle/>
-          <a:p>
-            <a:pPr algn="ctr"/>
-            <a:r>
-              <a:rPr sz="1600" b="1" i="0">
-                <a:solidFill>
-                  <a:srgbClr val="FFFFFF"/>
-                </a:solidFill>
-                <a:latin typeface="Calibri"/>
-              </a:rPr>
-              <a:t>1</a:t>
-            </a:r>
-          </a:p>
-        </p:txBody>
-      </p:sp>
-      <p:sp>
-        <p:nvSpPr>
-          <p:cNvPr id="9" name="TextBox 8"/>
-          <p:cNvSpPr txBox="1"/>
-          <p:nvPr/>
-        </p:nvSpPr>
-        <p:spPr>
-          <a:xfrm>
-            <a:off x="1188720" y="1536192"/>
-            <a:ext cx="10271455" cy="744321"/>
-          </a:xfrm>
-          <a:prstGeom prst="rect">
-            <a:avLst/>
-          </a:prstGeom>
-          <a:noFill/>
-        </p:spPr>
-        <p:txBody>
-          <a:bodyPr wrap="square" anchor="ctr"/>
-          <a:lstStyle/>
-          <a:p>
-            <a:r>
-              <a:rPr sz="1500" b="1" i="0">
-                <a:solidFill>
-                  <a:srgbClr val="095292"/>
-                </a:solidFill>
-                <a:latin typeface="Calibri"/>
-              </a:rPr>
-              <a:t>25 s · La pregunta de búsqueda</a:t>
-            </a:r>
-          </a:p>
-          <a:p>
-            <a:pPr>
-              <a:spcBef>
-                <a:spcPts val="200"/>
-              </a:spcBef>
-            </a:pPr>
-            <a:r>
-              <a:rPr sz="1300" b="0" i="0">
-                <a:solidFill>
-                  <a:srgbClr val="333333"/>
-                </a:solidFill>
-                <a:latin typeface="Calibri"/>
-              </a:rPr>
-              <a:t>Leída tal cual, con un término en inglés.</a:t>
-            </a:r>
-          </a:p>
-        </p:txBody>
-      </p:sp>
-      <p:sp>
-        <p:nvSpPr>
-          <p:cNvPr id="10" name="Rounded Rectangle 9"/>
-          <p:cNvSpPr/>
-          <p:nvPr/>
-        </p:nvSpPr>
-        <p:spPr>
-          <a:xfrm>
-            <a:off x="457200" y="2445105"/>
-            <a:ext cx="11277295" cy="908913"/>
-          </a:xfrm>
-          <a:prstGeom prst="roundRect">
-            <a:avLst>
-              <a:gd name="adj" fmla="val 12000"/>
-            </a:avLst>
-          </a:prstGeom>
-          <a:solidFill>
-            <a:srgbClr val="E8F4FA"/>
-          </a:solidFill>
-          <a:ln>
-            <a:noFill/>
-          </a:ln>
-        </p:spPr>
-        <p:style>
-          <a:lnRef idx="1">
-            <a:schemeClr val="accent1"/>
-          </a:lnRef>
-          <a:fillRef idx="3">
-            <a:schemeClr val="accent1"/>
-          </a:fillRef>
-          <a:effectRef idx="2">
-            <a:schemeClr val="accent1"/>
-          </a:effectRef>
-          <a:fontRef idx="minor">
-            <a:schemeClr val="lt1"/>
-          </a:fontRef>
-        </p:style>
-        <p:txBody>
-          <a:bodyPr rtlCol="0" anchor="ctr"/>
-          <a:lstStyle/>
-          <a:p>
-            <a:pPr algn="ctr"/>
-          </a:p>
-        </p:txBody>
-      </p:sp>
-      <p:sp>
-        <p:nvSpPr>
-          <p:cNvPr id="11" name="Rounded Rectangle 10"/>
-          <p:cNvSpPr/>
-          <p:nvPr/>
-        </p:nvSpPr>
-        <p:spPr>
-          <a:xfrm>
-            <a:off x="594360" y="2680106"/>
-            <a:ext cx="438912" cy="438912"/>
-          </a:xfrm>
-          <a:prstGeom prst="roundRect">
-            <a:avLst>
-              <a:gd name="adj" fmla="val 12000"/>
-            </a:avLst>
-          </a:prstGeom>
-          <a:solidFill>
-            <a:srgbClr val="095292"/>
-          </a:solidFill>
-          <a:ln>
-            <a:noFill/>
-          </a:ln>
-        </p:spPr>
-        <p:style>
-          <a:lnRef idx="1">
-            <a:schemeClr val="accent1"/>
-          </a:lnRef>
-          <a:fillRef idx="3">
-            <a:schemeClr val="accent1"/>
-          </a:fillRef>
-          <a:effectRef idx="2">
-            <a:schemeClr val="accent1"/>
-          </a:effectRef>
-          <a:fontRef idx="minor">
-            <a:schemeClr val="lt1"/>
-          </a:fontRef>
-        </p:style>
-        <p:txBody>
-          <a:bodyPr rtlCol="0" anchor="ctr"/>
-          <a:lstStyle/>
-          <a:p>
-            <a:pPr algn="ctr"/>
-          </a:p>
-        </p:txBody>
-      </p:sp>
-      <p:sp>
-        <p:nvSpPr>
-          <p:cNvPr id="12" name="TextBox 11"/>
-          <p:cNvSpPr txBox="1"/>
-          <p:nvPr/>
-        </p:nvSpPr>
-        <p:spPr>
-          <a:xfrm>
-            <a:off x="594360" y="2680106"/>
-            <a:ext cx="438912" cy="438912"/>
-          </a:xfrm>
-          <a:prstGeom prst="rect">
-            <a:avLst/>
-          </a:prstGeom>
-          <a:noFill/>
-        </p:spPr>
-        <p:txBody>
-          <a:bodyPr wrap="square" anchor="ctr"/>
-          <a:lstStyle/>
-          <a:p>
-            <a:pPr algn="ctr"/>
-            <a:r>
-              <a:rPr sz="1600" b="1" i="0">
-                <a:solidFill>
-                  <a:srgbClr val="FFFFFF"/>
-                </a:solidFill>
-                <a:latin typeface="Calibri"/>
-              </a:rPr>
-              <a:t>2</a:t>
-            </a:r>
-          </a:p>
-        </p:txBody>
-      </p:sp>
-      <p:sp>
-        <p:nvSpPr>
-          <p:cNvPr id="13" name="TextBox 12"/>
-          <p:cNvSpPr txBox="1"/>
-          <p:nvPr/>
-        </p:nvSpPr>
-        <p:spPr>
-          <a:xfrm>
-            <a:off x="1188720" y="2536545"/>
-            <a:ext cx="10271455" cy="744321"/>
-          </a:xfrm>
-          <a:prstGeom prst="rect">
-            <a:avLst/>
-          </a:prstGeom>
-          <a:noFill/>
-        </p:spPr>
-        <p:txBody>
-          <a:bodyPr wrap="square" anchor="ctr"/>
-          <a:lstStyle/>
-          <a:p>
-            <a:r>
-              <a:rPr sz="1500" b="1" i="0">
-                <a:solidFill>
-                  <a:srgbClr val="095292"/>
-                </a:solidFill>
-                <a:latin typeface="Calibri"/>
-              </a:rPr>
-              <a:t>50 s · El antecedente más útil</a:t>
-            </a:r>
-          </a:p>
-          <a:p>
-            <a:pPr>
-              <a:spcBef>
-                <a:spcPts val="200"/>
-              </a:spcBef>
-            </a:pPr>
-            <a:r>
-              <a:rPr sz="1300" b="0" i="0">
-                <a:solidFill>
-                  <a:srgbClr val="333333"/>
-                </a:solidFill>
-                <a:latin typeface="Calibri"/>
-              </a:rPr>
-              <a:t>Cuál es, de qué año, y </a:t>
-            </a:r>
-            <a:r>
-              <a:rPr sz="1300" b="1" i="0">
-                <a:solidFill>
-                  <a:srgbClr val="333333"/>
-                </a:solidFill>
-                <a:latin typeface="Calibri"/>
-              </a:rPr>
-              <a:t>muéstrenlo en pantalla</a:t>
-            </a:r>
-            <a:r>
-              <a:rPr sz="1300" b="0" i="0">
-                <a:solidFill>
-                  <a:srgbClr val="333333"/>
-                </a:solidFill>
-                <a:latin typeface="Calibri"/>
-              </a:rPr>
-              <a:t>.</a:t>
-            </a:r>
-          </a:p>
-        </p:txBody>
-      </p:sp>
-      <p:sp>
-        <p:nvSpPr>
-          <p:cNvPr id="14" name="Rounded Rectangle 13"/>
-          <p:cNvSpPr/>
-          <p:nvPr/>
-        </p:nvSpPr>
-        <p:spPr>
-          <a:xfrm>
-            <a:off x="457200" y="3445459"/>
-            <a:ext cx="11277295" cy="908913"/>
-          </a:xfrm>
-          <a:prstGeom prst="roundRect">
-            <a:avLst>
-              <a:gd name="adj" fmla="val 12000"/>
-            </a:avLst>
-          </a:prstGeom>
-          <a:solidFill>
-            <a:srgbClr val="F2F2F2"/>
-          </a:solidFill>
-          <a:ln>
-            <a:noFill/>
-          </a:ln>
-        </p:spPr>
-        <p:style>
-          <a:lnRef idx="1">
-            <a:schemeClr val="accent1"/>
-          </a:lnRef>
-          <a:fillRef idx="3">
-            <a:schemeClr val="accent1"/>
-          </a:fillRef>
-          <a:effectRef idx="2">
-            <a:schemeClr val="accent1"/>
-          </a:effectRef>
-          <a:fontRef idx="minor">
-            <a:schemeClr val="lt1"/>
-          </a:fontRef>
-        </p:style>
-        <p:txBody>
-          <a:bodyPr rtlCol="0" anchor="ctr"/>
-          <a:lstStyle/>
-          <a:p>
-            <a:pPr algn="ctr"/>
-          </a:p>
-        </p:txBody>
-      </p:sp>
-      <p:sp>
-        <p:nvSpPr>
-          <p:cNvPr id="15" name="Rounded Rectangle 14"/>
-          <p:cNvSpPr/>
-          <p:nvPr/>
-        </p:nvSpPr>
-        <p:spPr>
-          <a:xfrm>
-            <a:off x="594360" y="3680460"/>
-            <a:ext cx="438912" cy="438912"/>
-          </a:xfrm>
-          <a:prstGeom prst="roundRect">
-            <a:avLst>
-              <a:gd name="adj" fmla="val 12000"/>
-            </a:avLst>
-          </a:prstGeom>
-          <a:solidFill>
-            <a:srgbClr val="095292"/>
-          </a:solidFill>
-          <a:ln>
-            <a:noFill/>
-          </a:ln>
-        </p:spPr>
-        <p:style>
-          <a:lnRef idx="1">
-            <a:schemeClr val="accent1"/>
-          </a:lnRef>
-          <a:fillRef idx="3">
-            <a:schemeClr val="accent1"/>
-          </a:fillRef>
-          <a:effectRef idx="2">
-            <a:schemeClr val="accent1"/>
-          </a:effectRef>
-          <a:fontRef idx="minor">
-            <a:schemeClr val="lt1"/>
-          </a:fontRef>
-        </p:style>
-        <p:txBody>
-          <a:bodyPr rtlCol="0" anchor="ctr"/>
-          <a:lstStyle/>
-          <a:p>
-            <a:pPr algn="ctr"/>
-          </a:p>
-        </p:txBody>
-      </p:sp>
-      <p:sp>
-        <p:nvSpPr>
-          <p:cNvPr id="16" name="TextBox 15"/>
-          <p:cNvSpPr txBox="1"/>
-          <p:nvPr/>
-        </p:nvSpPr>
-        <p:spPr>
-          <a:xfrm>
-            <a:off x="594360" y="3680460"/>
-            <a:ext cx="438912" cy="438912"/>
-          </a:xfrm>
-          <a:prstGeom prst="rect">
-            <a:avLst/>
-          </a:prstGeom>
-          <a:noFill/>
-        </p:spPr>
-        <p:txBody>
-          <a:bodyPr wrap="square" anchor="ctr"/>
-          <a:lstStyle/>
-          <a:p>
-            <a:pPr algn="ctr"/>
-            <a:r>
-              <a:rPr sz="1600" b="1" i="0">
-                <a:solidFill>
-                  <a:srgbClr val="FFFFFF"/>
-                </a:solidFill>
-                <a:latin typeface="Calibri"/>
-              </a:rPr>
-              <a:t>3</a:t>
-            </a:r>
-          </a:p>
-        </p:txBody>
-      </p:sp>
-      <p:sp>
-        <p:nvSpPr>
-          <p:cNvPr id="17" name="TextBox 16"/>
-          <p:cNvSpPr txBox="1"/>
-          <p:nvPr/>
-        </p:nvSpPr>
-        <p:spPr>
-          <a:xfrm>
-            <a:off x="1188720" y="3536899"/>
-            <a:ext cx="10271455" cy="744321"/>
-          </a:xfrm>
-          <a:prstGeom prst="rect">
-            <a:avLst/>
-          </a:prstGeom>
-          <a:noFill/>
-        </p:spPr>
-        <p:txBody>
-          <a:bodyPr wrap="square" anchor="ctr"/>
-          <a:lstStyle/>
-          <a:p>
-            <a:r>
-              <a:rPr sz="1500" b="1" i="0">
-                <a:solidFill>
-                  <a:srgbClr val="095292"/>
-                </a:solidFill>
-                <a:latin typeface="Calibri"/>
-              </a:rPr>
-              <a:t>50 s · Qué le falta</a:t>
-            </a:r>
-          </a:p>
-          <a:p>
-            <a:pPr>
-              <a:spcBef>
-                <a:spcPts val="200"/>
-              </a:spcBef>
-            </a:pPr>
-            <a:r>
-              <a:rPr sz="1300" b="0" i="0">
-                <a:solidFill>
-                  <a:srgbClr val="333333"/>
-                </a:solidFill>
-                <a:latin typeface="Calibri"/>
-              </a:rPr>
-              <a:t>La brecha respecto a su caso. Es el minuto obligatorio.</a:t>
-            </a:r>
-          </a:p>
-        </p:txBody>
-      </p:sp>
-      <p:sp>
-        <p:nvSpPr>
-          <p:cNvPr id="18" name="Rounded Rectangle 17"/>
-          <p:cNvSpPr/>
-          <p:nvPr/>
-        </p:nvSpPr>
-        <p:spPr>
-          <a:xfrm>
-            <a:off x="457200" y="4445812"/>
-            <a:ext cx="11277295" cy="908913"/>
-          </a:xfrm>
-          <a:prstGeom prst="roundRect">
-            <a:avLst>
-              <a:gd name="adj" fmla="val 12000"/>
-            </a:avLst>
-          </a:prstGeom>
-          <a:solidFill>
-            <a:srgbClr val="E8F4FA"/>
-          </a:solidFill>
-          <a:ln>
-            <a:noFill/>
-          </a:ln>
-        </p:spPr>
-        <p:style>
-          <a:lnRef idx="1">
-            <a:schemeClr val="accent1"/>
-          </a:lnRef>
-          <a:fillRef idx="3">
-            <a:schemeClr val="accent1"/>
-          </a:fillRef>
-          <a:effectRef idx="2">
-            <a:schemeClr val="accent1"/>
-          </a:effectRef>
-          <a:fontRef idx="minor">
-            <a:schemeClr val="lt1"/>
-          </a:fontRef>
-        </p:style>
-        <p:txBody>
-          <a:bodyPr rtlCol="0" anchor="ctr"/>
-          <a:lstStyle/>
-          <a:p>
-            <a:pPr algn="ctr"/>
-          </a:p>
-        </p:txBody>
-      </p:sp>
-      <p:sp>
-        <p:nvSpPr>
-          <p:cNvPr id="19" name="Rounded Rectangle 18"/>
-          <p:cNvSpPr/>
-          <p:nvPr/>
-        </p:nvSpPr>
-        <p:spPr>
-          <a:xfrm>
-            <a:off x="594360" y="4680813"/>
-            <a:ext cx="438912" cy="438912"/>
-          </a:xfrm>
-          <a:prstGeom prst="roundRect">
-            <a:avLst>
-              <a:gd name="adj" fmla="val 12000"/>
-            </a:avLst>
-          </a:prstGeom>
-          <a:solidFill>
-            <a:srgbClr val="095292"/>
-          </a:solidFill>
-          <a:ln>
-            <a:noFill/>
-          </a:ln>
-        </p:spPr>
-        <p:style>
-          <a:lnRef idx="1">
-            <a:schemeClr val="accent1"/>
-          </a:lnRef>
-          <a:fillRef idx="3">
-            <a:schemeClr val="accent1"/>
-          </a:fillRef>
-          <a:effectRef idx="2">
-            <a:schemeClr val="accent1"/>
-          </a:effectRef>
-          <a:fontRef idx="minor">
-            <a:schemeClr val="lt1"/>
-          </a:fontRef>
-        </p:style>
-        <p:txBody>
-          <a:bodyPr rtlCol="0" anchor="ctr"/>
-          <a:lstStyle/>
-          <a:p>
-            <a:pPr algn="ctr"/>
-          </a:p>
-        </p:txBody>
-      </p:sp>
-      <p:sp>
-        <p:nvSpPr>
-          <p:cNvPr id="20" name="TextBox 19"/>
-          <p:cNvSpPr txBox="1"/>
-          <p:nvPr/>
-        </p:nvSpPr>
-        <p:spPr>
-          <a:xfrm>
-            <a:off x="594360" y="4680813"/>
-            <a:ext cx="438912" cy="438912"/>
-          </a:xfrm>
-          <a:prstGeom prst="rect">
-            <a:avLst/>
-          </a:prstGeom>
-          <a:noFill/>
-        </p:spPr>
-        <p:txBody>
-          <a:bodyPr wrap="square" anchor="ctr"/>
-          <a:lstStyle/>
-          <a:p>
-            <a:pPr algn="ctr"/>
-            <a:r>
-              <a:rPr sz="1600" b="1" i="0">
-                <a:solidFill>
-                  <a:srgbClr val="FFFFFF"/>
-                </a:solidFill>
-                <a:latin typeface="Calibri"/>
-              </a:rPr>
-              <a:t>4</a:t>
-            </a:r>
-          </a:p>
-        </p:txBody>
-      </p:sp>
-      <p:sp>
-        <p:nvSpPr>
-          <p:cNvPr id="21" name="TextBox 20"/>
-          <p:cNvSpPr txBox="1"/>
-          <p:nvPr/>
-        </p:nvSpPr>
-        <p:spPr>
-          <a:xfrm>
-            <a:off x="1188720" y="4537252"/>
-            <a:ext cx="10271455" cy="744321"/>
-          </a:xfrm>
-          <a:prstGeom prst="rect">
-            <a:avLst/>
-          </a:prstGeom>
-          <a:noFill/>
-        </p:spPr>
-        <p:txBody>
-          <a:bodyPr wrap="square" anchor="ctr"/>
-          <a:lstStyle/>
-          <a:p>
-            <a:r>
-              <a:rPr sz="1500" b="1" i="0">
-                <a:solidFill>
-                  <a:srgbClr val="095292"/>
-                </a:solidFill>
-                <a:latin typeface="Calibri"/>
-              </a:rPr>
-              <a:t>40 s · La propuesta de mejora</a:t>
-            </a:r>
-          </a:p>
-          <a:p>
-            <a:pPr>
-              <a:spcBef>
-                <a:spcPts val="200"/>
-              </a:spcBef>
-            </a:pPr>
-            <a:r>
-              <a:rPr sz="1300" b="0" i="0">
-                <a:solidFill>
-                  <a:srgbClr val="333333"/>
-                </a:solidFill>
-                <a:latin typeface="Calibri"/>
-              </a:rPr>
-              <a:t>Qué hacen distinto y con cuál de las cuatro operaciones.</a:t>
-            </a:r>
-          </a:p>
-        </p:txBody>
-      </p:sp>
-      <p:sp>
-        <p:nvSpPr>
-          <p:cNvPr id="22" name="Rounded Rectangle 21"/>
-          <p:cNvSpPr/>
-          <p:nvPr/>
-        </p:nvSpPr>
-        <p:spPr>
-          <a:xfrm>
-            <a:off x="457200" y="5446166"/>
-            <a:ext cx="11277295" cy="908913"/>
-          </a:xfrm>
-          <a:prstGeom prst="roundRect">
-            <a:avLst>
-              <a:gd name="adj" fmla="val 12000"/>
-            </a:avLst>
-          </a:prstGeom>
-          <a:solidFill>
-            <a:srgbClr val="F2F2F2"/>
-          </a:solidFill>
-          <a:ln>
-            <a:noFill/>
-          </a:ln>
-        </p:spPr>
-        <p:style>
-          <a:lnRef idx="1">
-            <a:schemeClr val="accent1"/>
-          </a:lnRef>
-          <a:fillRef idx="3">
-            <a:schemeClr val="accent1"/>
-          </a:fillRef>
-          <a:effectRef idx="2">
-            <a:schemeClr val="accent1"/>
-          </a:effectRef>
-          <a:fontRef idx="minor">
-            <a:schemeClr val="lt1"/>
-          </a:fontRef>
-        </p:style>
-        <p:txBody>
-          <a:bodyPr rtlCol="0" anchor="ctr"/>
-          <a:lstStyle/>
-          <a:p>
-            <a:pPr algn="ctr"/>
-          </a:p>
-        </p:txBody>
-      </p:sp>
-      <p:sp>
-        <p:nvSpPr>
-          <p:cNvPr id="23" name="Rounded Rectangle 22"/>
-          <p:cNvSpPr/>
-          <p:nvPr/>
-        </p:nvSpPr>
-        <p:spPr>
-          <a:xfrm>
-            <a:off x="594360" y="5681167"/>
-            <a:ext cx="438912" cy="438912"/>
-          </a:xfrm>
-          <a:prstGeom prst="roundRect">
-            <a:avLst>
-              <a:gd name="adj" fmla="val 12000"/>
-            </a:avLst>
-          </a:prstGeom>
-          <a:solidFill>
-            <a:srgbClr val="095292"/>
-          </a:solidFill>
-          <a:ln>
-            <a:noFill/>
-          </a:ln>
-        </p:spPr>
-        <p:style>
-          <a:lnRef idx="1">
-            <a:schemeClr val="accent1"/>
-          </a:lnRef>
-          <a:fillRef idx="3">
-            <a:schemeClr val="accent1"/>
-          </a:fillRef>
-          <a:effectRef idx="2">
-            <a:schemeClr val="accent1"/>
-          </a:effectRef>
-          <a:fontRef idx="minor">
-            <a:schemeClr val="lt1"/>
-          </a:fontRef>
-        </p:style>
-        <p:txBody>
-          <a:bodyPr rtlCol="0" anchor="ctr"/>
-          <a:lstStyle/>
-          <a:p>
-            <a:pPr algn="ctr"/>
-          </a:p>
-        </p:txBody>
-      </p:sp>
-      <p:sp>
-        <p:nvSpPr>
-          <p:cNvPr id="24" name="TextBox 23"/>
-          <p:cNvSpPr txBox="1"/>
-          <p:nvPr/>
-        </p:nvSpPr>
-        <p:spPr>
-          <a:xfrm>
-            <a:off x="594360" y="5681167"/>
-            <a:ext cx="438912" cy="438912"/>
-          </a:xfrm>
-          <a:prstGeom prst="rect">
-            <a:avLst/>
-          </a:prstGeom>
-          <a:noFill/>
-        </p:spPr>
-        <p:txBody>
-          <a:bodyPr wrap="square" anchor="ctr"/>
-          <a:lstStyle/>
-          <a:p>
-            <a:pPr algn="ctr"/>
-            <a:r>
-              <a:rPr sz="1600" b="1" i="0">
-                <a:solidFill>
-                  <a:srgbClr val="FFFFFF"/>
-                </a:solidFill>
-                <a:latin typeface="Calibri"/>
-              </a:rPr>
-              <a:t>5</a:t>
-            </a:r>
-          </a:p>
-        </p:txBody>
-      </p:sp>
-      <p:sp>
-        <p:nvSpPr>
-          <p:cNvPr id="25" name="TextBox 24"/>
-          <p:cNvSpPr txBox="1"/>
-          <p:nvPr/>
-        </p:nvSpPr>
-        <p:spPr>
-          <a:xfrm>
-            <a:off x="1188720" y="5537606"/>
-            <a:ext cx="10271455" cy="744321"/>
-          </a:xfrm>
-          <a:prstGeom prst="rect">
-            <a:avLst/>
-          </a:prstGeom>
-          <a:noFill/>
-        </p:spPr>
-        <p:txBody>
-          <a:bodyPr wrap="square" anchor="ctr"/>
-          <a:lstStyle/>
-          <a:p>
-            <a:r>
-              <a:rPr sz="1500" b="1" i="0">
-                <a:solidFill>
-                  <a:srgbClr val="095292"/>
-                </a:solidFill>
-                <a:latin typeface="Calibri"/>
-              </a:rPr>
-              <a:t>15 s · Qué reusan</a:t>
-            </a:r>
-          </a:p>
-          <a:p>
-            <a:pPr>
-              <a:spcBef>
-                <a:spcPts val="200"/>
-              </a:spcBef>
-            </a:pPr>
-            <a:r>
-              <a:rPr sz="1300" b="0" i="0">
-                <a:solidFill>
-                  <a:srgbClr val="333333"/>
-                </a:solidFill>
-                <a:latin typeface="Calibri"/>
-              </a:rPr>
-              <a:t>Una cosa concreta que aprovechan de lo que ya existe.</a:t>
-            </a:r>
-          </a:p>
-        </p:txBody>
-      </p:sp>
-      <p:sp>
-        <p:nvSpPr>
-          <p:cNvPr id="26" name="TextBox 25"/>
-          <p:cNvSpPr txBox="1"/>
-          <p:nvPr/>
-        </p:nvSpPr>
-        <p:spPr>
-          <a:xfrm>
-            <a:off x="11185855" y="6473952"/>
-            <a:ext cx="640080" cy="274320"/>
-          </a:xfrm>
-          <a:prstGeom prst="rect">
-            <a:avLst/>
-          </a:prstGeom>
-          <a:noFill/>
-        </p:spPr>
-        <p:txBody>
-          <a:bodyPr wrap="square">
-            <a:spAutoFit/>
-          </a:bodyPr>
-          <a:lstStyle/>
-          <a:p>
-            <a:pPr algn="r"/>
-            <a:r>
-              <a:rPr sz="1100" b="0" i="0">
-                <a:solidFill>
-                  <a:srgbClr val="666666"/>
-                </a:solidFill>
-                <a:latin typeface="Calibri"/>
-              </a:rPr>
-              <a:t>14</a:t>
-            </a:r>
-          </a:p>
-        </p:txBody>
-      </p:sp>
-    </p:spTree>
-  </p:cSld>
-  <p:clrMapOvr>
-    <a:masterClrMapping/>
-  </p:clrMapOvr>
-</p:sld>
-</file>
-
-<file path=ppt/slides/slide15.xml><?xml version="1.0" encoding="utf-8"?>
-<p:sld xmlns:a="http://schemas.openxmlformats.org/drawingml/2006/main" xmlns:p="http://schemas.openxmlformats.org/presentationml/2006/main" xmlns:r="http://schemas.openxmlformats.org/officeDocument/2006/relationships">
-  <p:cSld>
-    <p:bg>
-      <p:bgPr>
-        <a:solidFill>
-          <a:srgbClr val="FFFFFF"/>
-        </a:solidFill>
-        <a:effectLst/>
-      </p:bgPr>
-    </p:bg>
-    <p:spTree>
-      <p:nvGrpSpPr>
-        <p:cNvPr id="1" name=""/>
-        <p:cNvGrpSpPr/>
-        <p:nvPr/>
-      </p:nvGrpSpPr>
-      <p:grpSpPr/>
-      <p:sp>
-        <p:nvSpPr>
-          <p:cNvPr id="2" name="Rectangle 1"/>
-          <p:cNvSpPr/>
-          <p:nvPr/>
-        </p:nvSpPr>
-        <p:spPr>
-          <a:xfrm>
-            <a:off x="0" y="0"/>
-            <a:ext cx="12191695" cy="960120"/>
-          </a:xfrm>
-          <a:prstGeom prst="rect">
-            <a:avLst/>
-          </a:prstGeom>
-          <a:solidFill>
-            <a:srgbClr val="095292"/>
-          </a:solidFill>
-          <a:ln>
-            <a:noFill/>
-          </a:ln>
-        </p:spPr>
-        <p:style>
-          <a:lnRef idx="1">
-            <a:schemeClr val="accent1"/>
-          </a:lnRef>
-          <a:fillRef idx="3">
-            <a:schemeClr val="accent1"/>
-          </a:fillRef>
-          <a:effectRef idx="2">
-            <a:schemeClr val="accent1"/>
-          </a:effectRef>
-          <a:fontRef idx="minor">
-            <a:schemeClr val="lt1"/>
-          </a:fontRef>
-        </p:style>
-        <p:txBody>
-          <a:bodyPr rtlCol="0" anchor="ctr"/>
-          <a:lstStyle/>
-          <a:p>
-            <a:pPr algn="ctr"/>
-          </a:p>
-        </p:txBody>
-      </p:sp>
-      <p:sp>
-        <p:nvSpPr>
-          <p:cNvPr id="3" name="Rectangle 2"/>
-          <p:cNvSpPr/>
-          <p:nvPr/>
-        </p:nvSpPr>
-        <p:spPr>
-          <a:xfrm>
-            <a:off x="0" y="960120"/>
-            <a:ext cx="12191695" cy="41148"/>
-          </a:xfrm>
-          <a:prstGeom prst="rect">
-            <a:avLst/>
-          </a:prstGeom>
-          <a:solidFill>
-            <a:srgbClr val="FFD000"/>
-          </a:solidFill>
-          <a:ln>
-            <a:noFill/>
-          </a:ln>
-        </p:spPr>
-        <p:style>
-          <a:lnRef idx="1">
-            <a:schemeClr val="accent1"/>
-          </a:lnRef>
-          <a:fillRef idx="3">
-            <a:schemeClr val="accent1"/>
-          </a:fillRef>
-          <a:effectRef idx="2">
-            <a:schemeClr val="accent1"/>
-          </a:effectRef>
-          <a:fontRef idx="minor">
-            <a:schemeClr val="lt1"/>
-          </a:fontRef>
-        </p:style>
-        <p:txBody>
-          <a:bodyPr rtlCol="0" anchor="ctr"/>
-          <a:lstStyle/>
-          <a:p>
-            <a:pPr algn="ctr"/>
-          </a:p>
-        </p:txBody>
-      </p:sp>
-      <p:sp>
-        <p:nvSpPr>
-          <p:cNvPr id="4" name="TextBox 3"/>
-          <p:cNvSpPr txBox="1"/>
-          <p:nvPr/>
-        </p:nvSpPr>
-        <p:spPr>
-          <a:xfrm>
-            <a:off x="457200" y="164592"/>
-            <a:ext cx="11277295" cy="502920"/>
-          </a:xfrm>
-          <a:prstGeom prst="rect">
-            <a:avLst/>
-          </a:prstGeom>
-          <a:noFill/>
-        </p:spPr>
-        <p:txBody>
-          <a:bodyPr wrap="square">
-            <a:spAutoFit/>
-          </a:bodyPr>
-          <a:lstStyle/>
-          <a:p>
-            <a:r>
-              <a:rPr sz="2600" b="1" i="0">
-                <a:solidFill>
-                  <a:srgbClr val="FFFFFF"/>
-                </a:solidFill>
-                <a:latin typeface="Calibri"/>
-              </a:rPr>
-              <a:t>Para la Clase 10</a:t>
-            </a:r>
-          </a:p>
-        </p:txBody>
-      </p:sp>
-      <p:sp>
-        <p:nvSpPr>
-          <p:cNvPr id="5" name="TextBox 4"/>
-          <p:cNvSpPr txBox="1"/>
-          <p:nvPr/>
-        </p:nvSpPr>
-        <p:spPr>
-          <a:xfrm>
-            <a:off x="457200" y="1170432"/>
-            <a:ext cx="11277295" cy="5230368"/>
-          </a:xfrm>
-          <a:prstGeom prst="rect">
-            <a:avLst/>
-          </a:prstGeom>
-          <a:noFill/>
-        </p:spPr>
-        <p:txBody>
-          <a:bodyPr wrap="square">
-            <a:spAutoFit/>
-          </a:bodyPr>
-          <a:lstStyle/>
-          <a:p>
-            <a:pPr>
-              <a:spcAft>
-                <a:spcPts val="800"/>
-              </a:spcAft>
-            </a:pPr>
-            <a:r>
-              <a:rPr sz="2000" b="0" i="0">
-                <a:solidFill>
-                  <a:srgbClr val="333333"/>
-                </a:solidFill>
-                <a:latin typeface="Calibri"/>
-              </a:rPr>
-              <a:t>–   </a:t>
-            </a:r>
-            <a:r>
-              <a:rPr sz="2000" b="1" i="0">
-                <a:solidFill>
-                  <a:srgbClr val="333333"/>
-                </a:solidFill>
-                <a:latin typeface="Calibri"/>
-              </a:rPr>
-              <a:t>Trabajo dirigido:</a:t>
-            </a:r>
-            <a:r>
-              <a:rPr sz="2000" b="0" i="0">
-                <a:solidFill>
-                  <a:srgbClr val="333333"/>
-                </a:solidFill>
-                <a:latin typeface="Calibri"/>
-              </a:rPr>
-              <a:t> Revisión bibliográfica — completar las tres fichas con los seis campos y </a:t>
-            </a:r>
-            <a:r>
-              <a:rPr sz="2000" b="1" i="0">
-                <a:solidFill>
-                  <a:srgbClr val="333333"/>
-                </a:solidFill>
-                <a:latin typeface="Calibri"/>
-              </a:rPr>
-              <a:t>abrir cada enlace</a:t>
-            </a:r>
-            <a:r>
-              <a:rPr sz="2000" b="0" i="0">
-                <a:solidFill>
-                  <a:srgbClr val="333333"/>
-                </a:solidFill>
-                <a:latin typeface="Calibri"/>
-              </a:rPr>
-              <a:t> para confirmar que sirve, anotando la fecha de consulta.</a:t>
-            </a:r>
-          </a:p>
-          <a:p>
-            <a:pPr>
-              <a:spcAft>
-                <a:spcPts val="800"/>
-              </a:spcAft>
-            </a:pPr>
-            <a:r>
-              <a:rPr sz="2000" b="0" i="0">
-                <a:solidFill>
-                  <a:srgbClr val="333333"/>
-                </a:solidFill>
-                <a:latin typeface="Calibri"/>
-              </a:rPr>
-              <a:t>–   </a:t>
-            </a:r>
-            <a:r>
-              <a:rPr sz="2000" b="1" i="0">
-                <a:solidFill>
-                  <a:srgbClr val="333333"/>
-                </a:solidFill>
-                <a:latin typeface="Calibri"/>
-              </a:rPr>
-              <a:t>Trabajo independiente:</a:t>
-            </a:r>
-            <a:r>
-              <a:rPr sz="2000" b="0" i="0">
-                <a:solidFill>
-                  <a:srgbClr val="333333"/>
-                </a:solidFill>
-                <a:latin typeface="Calibri"/>
-              </a:rPr>
-              <a:t> Propuesta de mejora escrita en el documento del equipo: la brecha, la operación usada y por qué importa en su contexto. Máximo una página.</a:t>
-            </a:r>
-          </a:p>
-          <a:p>
-            <a:pPr>
-              <a:spcAft>
-                <a:spcPts val="800"/>
-              </a:spcAft>
-            </a:pPr>
-            <a:r>
-              <a:rPr sz="2000" b="0" i="0">
-                <a:solidFill>
-                  <a:srgbClr val="333333"/>
-                </a:solidFill>
-                <a:latin typeface="Calibri"/>
-              </a:rPr>
-              <a:t>–   </a:t>
-            </a:r>
-            <a:r>
-              <a:rPr sz="2000" b="1" i="0">
-                <a:solidFill>
-                  <a:srgbClr val="333333"/>
-                </a:solidFill>
-                <a:latin typeface="Calibri"/>
-              </a:rPr>
-              <a:t>Clase 10 · Herramientas digitales aplicadas a la Ingeniería</a:t>
-            </a:r>
-            <a:r>
-              <a:rPr sz="2000" b="0" i="0">
-                <a:solidFill>
-                  <a:srgbClr val="333333"/>
-                </a:solidFill>
-                <a:latin typeface="Calibri"/>
-              </a:rPr>
-              <a:t> — </a:t>
-            </a:r>
-            <a:r>
-              <a:rPr sz="2000" b="1" i="0">
-                <a:solidFill>
-                  <a:srgbClr val="333333"/>
-                </a:solidFill>
-                <a:latin typeface="Calibri"/>
-              </a:rPr>
-              <a:t>prototipado</a:t>
-            </a:r>
-            <a:r>
-              <a:rPr sz="2000" b="0" i="0">
-                <a:solidFill>
-                  <a:srgbClr val="333333"/>
-                </a:solidFill>
-                <a:latin typeface="Calibri"/>
-              </a:rPr>
-              <a:t>: qué es un prototipo y qué no, los niveles de fidelidad, y por qué el dibujo a mano da mejor retroalimentación que la pantalla terminada.</a:t>
-            </a:r>
-          </a:p>
-          <a:p>
-            <a:pPr>
-              <a:spcAft>
-                <a:spcPts val="800"/>
-              </a:spcAft>
-            </a:pPr>
-            <a:r>
-              <a:rPr sz="2000" b="0" i="0">
-                <a:solidFill>
-                  <a:srgbClr val="333333"/>
-                </a:solidFill>
-                <a:latin typeface="Calibri"/>
-              </a:rPr>
-              <a:t>–   </a:t>
-            </a:r>
-            <a:r>
-              <a:rPr sz="2000" b="1" i="0">
-                <a:solidFill>
-                  <a:srgbClr val="333333"/>
-                </a:solidFill>
-                <a:latin typeface="Calibri"/>
-              </a:rPr>
-              <a:t>Aviso:</a:t>
-            </a:r>
-            <a:r>
-              <a:rPr sz="2000" b="0" i="0">
-                <a:solidFill>
-                  <a:srgbClr val="333333"/>
-                </a:solidFill>
-                <a:latin typeface="Calibri"/>
-              </a:rPr>
-              <a:t> Para la sesión 10 traigan la propuesta de mejora escrita y el </a:t>
-            </a:r>
-            <a:r>
-              <a:rPr sz="2000" b="1" i="0">
-                <a:solidFill>
-                  <a:srgbClr val="333333"/>
-                </a:solidFill>
-                <a:latin typeface="Calibri"/>
-              </a:rPr>
-              <a:t>alcance mínimo de la sesión 8</a:t>
-            </a:r>
-            <a:r>
-              <a:rPr sz="2000" b="0" i="0">
-                <a:solidFill>
-                  <a:srgbClr val="333333"/>
-                </a:solidFill>
-                <a:latin typeface="Calibri"/>
-              </a:rPr>
-              <a:t> a la vista. Se van a dibujar las tres pantallas o pasos del flujo principal, y de las fichas de hoy sale el diseño.</a:t>
-            </a:r>
-          </a:p>
-          <a:p>
-            <a:pPr>
-              <a:spcAft>
-                <a:spcPts val="800"/>
-              </a:spcAft>
-            </a:pPr>
-            <a:r>
-              <a:rPr sz="2000" b="0" i="0">
-                <a:solidFill>
-                  <a:srgbClr val="333333"/>
-                </a:solidFill>
-                <a:latin typeface="Calibri"/>
-              </a:rPr>
-              <a:t>–   </a:t>
-            </a:r>
-            <a:r>
-              <a:rPr sz="2000" b="1" i="0">
-                <a:solidFill>
-                  <a:srgbClr val="333333"/>
-                </a:solidFill>
-                <a:latin typeface="Calibri"/>
-              </a:rPr>
-              <a:t>Antes de salir:</a:t>
-            </a:r>
-            <a:r>
-              <a:rPr sz="2000" b="0" i="0">
-                <a:solidFill>
-                  <a:srgbClr val="333333"/>
-                </a:solidFill>
-                <a:latin typeface="Calibri"/>
-              </a:rPr>
-              <a:t> el enlace del documento del equipo en el chat, con permiso de lectura para el docente, y el nombre del vocero de hoy.</a:t>
-            </a:r>
-          </a:p>
-        </p:txBody>
-      </p:sp>
-      <p:sp>
-        <p:nvSpPr>
-          <p:cNvPr id="6" name="TextBox 5"/>
-          <p:cNvSpPr txBox="1"/>
-          <p:nvPr/>
-        </p:nvSpPr>
-        <p:spPr>
-          <a:xfrm>
-            <a:off x="11185855" y="6473952"/>
-            <a:ext cx="640080" cy="274320"/>
-          </a:xfrm>
-          <a:prstGeom prst="rect">
-            <a:avLst/>
-          </a:prstGeom>
-          <a:noFill/>
-        </p:spPr>
-        <p:txBody>
-          <a:bodyPr wrap="square">
-            <a:spAutoFit/>
-          </a:bodyPr>
-          <a:lstStyle/>
-          <a:p>
-            <a:pPr algn="r"/>
-            <a:r>
-              <a:rPr sz="1100" b="0" i="0">
-                <a:solidFill>
-                  <a:srgbClr val="666666"/>
-                </a:solidFill>
-                <a:latin typeface="Calibri"/>
-              </a:rPr>
-              <a:t>15</a:t>
-            </a:r>
-          </a:p>
-        </p:txBody>
-      </p:sp>
-    </p:spTree>
-  </p:cSld>
-  <p:clrMapOvr>
-    <a:masterClrMapping/>
-  </p:clrMapOvr>
-</p:sld>
-</file>
-
-<file path=ppt/slides/slide16.xml><?xml version="1.0" encoding="utf-8"?>
-<p:sld xmlns:a="http://schemas.openxmlformats.org/drawingml/2006/main" xmlns:p="http://schemas.openxmlformats.org/presentationml/2006/main" xmlns:r="http://schemas.openxmlformats.org/officeDocument/2006/relationships">
-  <p:cSld>
-    <p:bg>
-      <p:bgPr>
-        <a:solidFill>
-          <a:srgbClr val="FFFFFF"/>
-        </a:solidFill>
-        <a:effectLst/>
-      </p:bgPr>
-    </p:bg>
-    <p:spTree>
-      <p:nvGrpSpPr>
-        <p:cNvPr id="1" name=""/>
-        <p:cNvGrpSpPr/>
-        <p:nvPr/>
-      </p:nvGrpSpPr>
-      <p:grpSpPr/>
-      <p:sp>
-        <p:nvSpPr>
-          <p:cNvPr id="2" name="Rectangle 1"/>
-          <p:cNvSpPr/>
-          <p:nvPr/>
-        </p:nvSpPr>
-        <p:spPr>
-          <a:xfrm>
-            <a:off x="0" y="0"/>
             <a:ext cx="12191695" cy="164592"/>
           </a:xfrm>
           <a:prstGeom prst="rect">
@@ -10547,7 +7871,7 @@
                 </a:solidFill>
                 <a:latin typeface="Calibri"/>
               </a:rPr>
-              <a:t>Taller — tres antecedentes fichados y la propuesta de mejora</a:t>
+              <a:t>Práctica en equipos (opcional · la guía está en la carpeta de la clase)</a:t>
             </a:r>
           </a:p>
         </p:txBody>
@@ -10662,7 +7986,7 @@
                 </a:solidFill>
                 <a:latin typeface="Calibri"/>
               </a:rPr>
-              <a:t>5 equipos × 3 min — el antecedente más útil y qué van a hacer distinto</a:t>
+              <a:t>Socialización de la práctica, si se hizo</a:t>
             </a:r>
           </a:p>
         </p:txBody>

--- a/Introduccion a la Ingenieria/Clases/Clase 9 - Estrategias de innovacion en Ingenieria/Presentacion.pptx
+++ b/Introduccion a la Ingenieria/Clases/Clase 9 - Estrategias de innovacion en Ingenieria/Presentacion.pptx
@@ -6905,7 +6905,7 @@
                 </a:solidFill>
                 <a:latin typeface="Calibri"/>
               </a:rPr>
-              <a:t> Se anota qué se buscó, con qué términos, en qué sitios, y qué se encontró de lo más cercano. Eso es un hallazgo y se califica. Lo que no se acepta es rellenar el vacío con fuentes de adorno que nadie leyó.</a:t>
+              <a:t> Se anota qué se buscó, con qué términos, en qué sitios, y qué se encontró de lo más cercano. Eso es un hallazgo y vale tanto como una fuente. Lo que no se acepta es rellenar el vacío con fuentes de adorno que nadie leyó.</a:t>
             </a:r>
           </a:p>
         </p:txBody>

--- a/Introduccion a la Ingenieria/Clases/Clase 9 - Estrategias de innovacion en Ingenieria/Presentacion.pptx
+++ b/Introduccion a la Ingenieria/Clases/Clase 9 - Estrategias de innovacion en Ingenieria/Presentacion.pptx
@@ -4767,16 +4767,16 @@
         </p:nvSpPr>
         <p:spPr>
           <a:xfrm>
-            <a:off x="457200" y="1234440"/>
-            <a:ext cx="11277295" cy="950976"/>
+            <a:off x="5803166" y="1188719"/>
+            <a:ext cx="5998464" cy="4828032"/>
           </a:xfrm>
           <a:prstGeom prst="roundRect">
             <a:avLst>
-              <a:gd name="adj" fmla="val 12000"/>
+              <a:gd name="adj" fmla="val 4000"/>
             </a:avLst>
           </a:prstGeom>
           <a:solidFill>
-            <a:srgbClr val="F2F2F2"/>
+            <a:srgbClr val="E8EEF4"/>
           </a:solidFill>
           <a:ln>
             <a:noFill/>
@@ -4804,561 +4804,134 @@
           </a:p>
         </p:txBody>
       </p:sp>
-      <p:sp>
-        <p:nvSpPr>
-          <p:cNvPr id="6" name="Rounded Rectangle 5"/>
-          <p:cNvSpPr/>
-          <p:nvPr/>
-        </p:nvSpPr>
-        <p:spPr>
-          <a:xfrm>
-            <a:off x="594360" y="1490472"/>
-            <a:ext cx="438912" cy="438912"/>
-          </a:xfrm>
-          <a:prstGeom prst="roundRect">
-            <a:avLst>
-              <a:gd name="adj" fmla="val 12000"/>
-            </a:avLst>
-          </a:prstGeom>
-          <a:solidFill>
-            <a:srgbClr val="095292"/>
-          </a:solidFill>
-          <a:ln>
-            <a:noFill/>
-          </a:ln>
-        </p:spPr>
-        <p:style>
-          <a:lnRef idx="1">
-            <a:schemeClr val="accent1"/>
-          </a:lnRef>
-          <a:fillRef idx="3">
-            <a:schemeClr val="accent1"/>
-          </a:fillRef>
-          <a:effectRef idx="2">
-            <a:schemeClr val="accent1"/>
-          </a:effectRef>
-          <a:fontRef idx="minor">
-            <a:schemeClr val="lt1"/>
-          </a:fontRef>
-        </p:style>
-        <p:txBody>
-          <a:bodyPr rtlCol="0" anchor="ctr"/>
+      <p:pic>
+        <p:nvPicPr>
+          <p:cNvPr id="6" name="Picture 5" descr="busqueda-antecedente-paso1.png"/>
+          <p:cNvPicPr>
+            <a:picLocks noChangeAspect="1"/>
+          </p:cNvPicPr>
+          <p:nvPr/>
+        </p:nvPicPr>
+        <p:blipFill>
+          <a:blip r:embed="rId2"/>
+          <a:stretch>
+            <a:fillRect/>
+          </a:stretch>
+        </p:blipFill>
+        <p:spPr>
+          <a:xfrm>
+            <a:off x="5876318" y="1261872"/>
+            <a:ext cx="5852160" cy="4681728"/>
+          </a:xfrm>
+          <a:prstGeom prst="rect">
+            <a:avLst/>
+          </a:prstGeom>
+        </p:spPr>
+      </p:pic>
+      <p:pic>
+        <p:nvPicPr>
+          <p:cNvPr id="7" name="Picture 6" descr="busqueda-antecedente-paso2.png"/>
+          <p:cNvPicPr>
+            <a:picLocks noChangeAspect="1"/>
+          </p:cNvPicPr>
+          <p:nvPr/>
+        </p:nvPicPr>
+        <p:blipFill>
+          <a:blip r:embed="rId3"/>
+          <a:stretch>
+            <a:fillRect/>
+          </a:stretch>
+        </p:blipFill>
+        <p:spPr>
+          <a:xfrm>
+            <a:off x="5876318" y="1261872"/>
+            <a:ext cx="5852160" cy="4681728"/>
+          </a:xfrm>
+          <a:prstGeom prst="rect">
+            <a:avLst/>
+          </a:prstGeom>
+        </p:spPr>
+      </p:pic>
+      <p:pic>
+        <p:nvPicPr>
+          <p:cNvPr id="8" name="Picture 7" descr="busqueda-antecedente-paso3.png"/>
+          <p:cNvPicPr>
+            <a:picLocks noChangeAspect="1"/>
+          </p:cNvPicPr>
+          <p:nvPr/>
+        </p:nvPicPr>
+        <p:blipFill>
+          <a:blip r:embed="rId4"/>
+          <a:stretch>
+            <a:fillRect/>
+          </a:stretch>
+        </p:blipFill>
+        <p:spPr>
+          <a:xfrm>
+            <a:off x="5876318" y="1261872"/>
+            <a:ext cx="5852160" cy="4681728"/>
+          </a:xfrm>
+          <a:prstGeom prst="rect">
+            <a:avLst/>
+          </a:prstGeom>
+        </p:spPr>
+      </p:pic>
+      <p:pic>
+        <p:nvPicPr>
+          <p:cNvPr id="9" name="Picture 8" descr="busqueda-antecedente-paso4.png"/>
+          <p:cNvPicPr>
+            <a:picLocks noChangeAspect="1"/>
+          </p:cNvPicPr>
+          <p:nvPr/>
+        </p:nvPicPr>
+        <p:blipFill>
+          <a:blip r:embed="rId5"/>
+          <a:stretch>
+            <a:fillRect/>
+          </a:stretch>
+        </p:blipFill>
+        <p:spPr>
+          <a:xfrm>
+            <a:off x="5876318" y="1261872"/>
+            <a:ext cx="5852160" cy="4681728"/>
+          </a:xfrm>
+          <a:prstGeom prst="rect">
+            <a:avLst/>
+          </a:prstGeom>
+        </p:spPr>
+      </p:pic>
+      <p:sp>
+        <p:nvSpPr>
+          <p:cNvPr id="18" name="TextBox 17"/>
+          <p:cNvSpPr txBox="1"/>
+          <p:nvPr/>
+        </p:nvSpPr>
+        <p:spPr>
+          <a:xfrm>
+            <a:off x="5870301" y="5961888"/>
+            <a:ext cx="5864193" cy="320040"/>
+          </a:xfrm>
+          <a:prstGeom prst="rect">
+            <a:avLst/>
+          </a:prstGeom>
+          <a:noFill/>
+        </p:spPr>
+        <p:txBody>
+          <a:bodyPr wrap="square">
+            <a:spAutoFit/>
+          </a:bodyPr>
           <a:lstStyle/>
           <a:p>
             <a:pPr algn="ctr"/>
-          </a:p>
-        </p:txBody>
-      </p:sp>
-      <p:sp>
-        <p:nvSpPr>
-          <p:cNvPr id="7" name="TextBox 6"/>
-          <p:cNvSpPr txBox="1"/>
-          <p:nvPr/>
-        </p:nvSpPr>
-        <p:spPr>
-          <a:xfrm>
-            <a:off x="594360" y="1490472"/>
-            <a:ext cx="438912" cy="438912"/>
-          </a:xfrm>
-          <a:prstGeom prst="rect">
-            <a:avLst/>
-          </a:prstGeom>
-          <a:noFill/>
-        </p:spPr>
-        <p:txBody>
-          <a:bodyPr wrap="square" anchor="ctr"/>
-          <a:lstStyle/>
-          <a:p>
-            <a:pPr algn="ctr"/>
-            <a:r>
-              <a:rPr sz="1600" b="1" i="0">
-                <a:solidFill>
-                  <a:srgbClr val="FFFFFF"/>
-                </a:solidFill>
-                <a:latin typeface="Calibri"/>
-              </a:rPr>
-              <a:t>1</a:t>
-            </a:r>
-          </a:p>
-        </p:txBody>
-      </p:sp>
-      <p:sp>
-        <p:nvSpPr>
-          <p:cNvPr id="8" name="TextBox 7"/>
-          <p:cNvSpPr txBox="1"/>
-          <p:nvPr/>
-        </p:nvSpPr>
-        <p:spPr>
-          <a:xfrm>
-            <a:off x="1188720" y="1325880"/>
-            <a:ext cx="10271455" cy="786384"/>
-          </a:xfrm>
-          <a:prstGeom prst="rect">
-            <a:avLst/>
-          </a:prstGeom>
-          <a:noFill/>
-        </p:spPr>
-        <p:txBody>
-          <a:bodyPr wrap="square" anchor="ctr"/>
-          <a:lstStyle/>
-          <a:p>
-            <a:r>
-              <a:rPr sz="1500" b="1" i="0">
-                <a:solidFill>
-                  <a:srgbClr val="095292"/>
-                </a:solidFill>
-                <a:latin typeface="Calibri"/>
-              </a:rPr>
-              <a:t>1 · Pregunta</a:t>
-            </a:r>
-          </a:p>
-          <a:p>
-            <a:pPr>
-              <a:spcBef>
-                <a:spcPts val="200"/>
-              </a:spcBef>
-            </a:pPr>
-            <a:r>
-              <a:rPr sz="1300" b="0" i="0">
-                <a:solidFill>
-                  <a:srgbClr val="333333"/>
-                </a:solidFill>
-                <a:latin typeface="Calibri"/>
-              </a:rPr>
-              <a:t>¿Cómo manejan los turnos los negocios pequeños que no tienen sistema?</a:t>
-            </a:r>
-          </a:p>
-        </p:txBody>
-      </p:sp>
-      <p:sp>
-        <p:nvSpPr>
-          <p:cNvPr id="9" name="Rounded Rectangle 8"/>
-          <p:cNvSpPr/>
-          <p:nvPr/>
-        </p:nvSpPr>
-        <p:spPr>
-          <a:xfrm>
-            <a:off x="457200" y="2276856"/>
-            <a:ext cx="11277295" cy="950976"/>
-          </a:xfrm>
-          <a:prstGeom prst="roundRect">
-            <a:avLst>
-              <a:gd name="adj" fmla="val 12000"/>
-            </a:avLst>
-          </a:prstGeom>
-          <a:solidFill>
-            <a:srgbClr val="E8F4FA"/>
-          </a:solidFill>
-          <a:ln>
-            <a:noFill/>
-          </a:ln>
-        </p:spPr>
-        <p:style>
-          <a:lnRef idx="1">
-            <a:schemeClr val="accent1"/>
-          </a:lnRef>
-          <a:fillRef idx="3">
-            <a:schemeClr val="accent1"/>
-          </a:fillRef>
-          <a:effectRef idx="2">
-            <a:schemeClr val="accent1"/>
-          </a:effectRef>
-          <a:fontRef idx="minor">
-            <a:schemeClr val="lt1"/>
-          </a:fontRef>
-        </p:style>
-        <p:txBody>
-          <a:bodyPr rtlCol="0" anchor="ctr"/>
-          <a:lstStyle/>
-          <a:p>
-            <a:pPr algn="ctr"/>
-          </a:p>
-        </p:txBody>
-      </p:sp>
-      <p:sp>
-        <p:nvSpPr>
-          <p:cNvPr id="10" name="Rounded Rectangle 9"/>
-          <p:cNvSpPr/>
-          <p:nvPr/>
-        </p:nvSpPr>
-        <p:spPr>
-          <a:xfrm>
-            <a:off x="594360" y="2532888"/>
-            <a:ext cx="438912" cy="438912"/>
-          </a:xfrm>
-          <a:prstGeom prst="roundRect">
-            <a:avLst>
-              <a:gd name="adj" fmla="val 12000"/>
-            </a:avLst>
-          </a:prstGeom>
-          <a:solidFill>
-            <a:srgbClr val="095292"/>
-          </a:solidFill>
-          <a:ln>
-            <a:noFill/>
-          </a:ln>
-        </p:spPr>
-        <p:style>
-          <a:lnRef idx="1">
-            <a:schemeClr val="accent1"/>
-          </a:lnRef>
-          <a:fillRef idx="3">
-            <a:schemeClr val="accent1"/>
-          </a:fillRef>
-          <a:effectRef idx="2">
-            <a:schemeClr val="accent1"/>
-          </a:effectRef>
-          <a:fontRef idx="minor">
-            <a:schemeClr val="lt1"/>
-          </a:fontRef>
-        </p:style>
-        <p:txBody>
-          <a:bodyPr rtlCol="0" anchor="ctr"/>
-          <a:lstStyle/>
-          <a:p>
-            <a:pPr algn="ctr"/>
-          </a:p>
-        </p:txBody>
-      </p:sp>
-      <p:sp>
-        <p:nvSpPr>
-          <p:cNvPr id="11" name="TextBox 10"/>
-          <p:cNvSpPr txBox="1"/>
-          <p:nvPr/>
-        </p:nvSpPr>
-        <p:spPr>
-          <a:xfrm>
-            <a:off x="594360" y="2532888"/>
-            <a:ext cx="438912" cy="438912"/>
-          </a:xfrm>
-          <a:prstGeom prst="rect">
-            <a:avLst/>
-          </a:prstGeom>
-          <a:noFill/>
-        </p:spPr>
-        <p:txBody>
-          <a:bodyPr wrap="square" anchor="ctr"/>
-          <a:lstStyle/>
-          <a:p>
-            <a:pPr algn="ctr"/>
-            <a:r>
-              <a:rPr sz="1600" b="1" i="0">
-                <a:solidFill>
-                  <a:srgbClr val="FFFFFF"/>
-                </a:solidFill>
-                <a:latin typeface="Calibri"/>
-              </a:rPr>
-              <a:t>2</a:t>
-            </a:r>
-          </a:p>
-        </p:txBody>
-      </p:sp>
-      <p:sp>
-        <p:nvSpPr>
-          <p:cNvPr id="12" name="TextBox 11"/>
-          <p:cNvSpPr txBox="1"/>
-          <p:nvPr/>
-        </p:nvSpPr>
-        <p:spPr>
-          <a:xfrm>
-            <a:off x="1188720" y="2368296"/>
-            <a:ext cx="10271455" cy="786384"/>
-          </a:xfrm>
-          <a:prstGeom prst="rect">
-            <a:avLst/>
-          </a:prstGeom>
-          <a:noFill/>
-        </p:spPr>
-        <p:txBody>
-          <a:bodyPr wrap="square" anchor="ctr"/>
-          <a:lstStyle/>
-          <a:p>
-            <a:r>
-              <a:rPr sz="1500" b="1" i="0">
-                <a:solidFill>
-                  <a:srgbClr val="095292"/>
-                </a:solidFill>
-                <a:latin typeface="Calibri"/>
-              </a:rPr>
-              <a:t>2 · Términos</a:t>
-            </a:r>
-          </a:p>
-          <a:p>
-            <a:pPr>
-              <a:spcBef>
-                <a:spcPts val="200"/>
-              </a:spcBef>
-            </a:pPr>
-            <a:r>
-              <a:rPr sz="1300" b="0" i="0">
-                <a:solidFill>
-                  <a:srgbClr val="333333"/>
-                </a:solidFill>
-                <a:latin typeface="Calibri"/>
-              </a:rPr>
-              <a:t>«turnos virtuales», «gestión de filas», «queue management small business».</a:t>
-            </a:r>
-          </a:p>
-        </p:txBody>
-      </p:sp>
-      <p:sp>
-        <p:nvSpPr>
-          <p:cNvPr id="13" name="Rounded Rectangle 12"/>
-          <p:cNvSpPr/>
-          <p:nvPr/>
-        </p:nvSpPr>
-        <p:spPr>
-          <a:xfrm>
-            <a:off x="457200" y="3319272"/>
-            <a:ext cx="11277295" cy="950976"/>
-          </a:xfrm>
-          <a:prstGeom prst="roundRect">
-            <a:avLst>
-              <a:gd name="adj" fmla="val 12000"/>
-            </a:avLst>
-          </a:prstGeom>
-          <a:solidFill>
-            <a:srgbClr val="F2F2F2"/>
-          </a:solidFill>
-          <a:ln>
-            <a:noFill/>
-          </a:ln>
-        </p:spPr>
-        <p:style>
-          <a:lnRef idx="1">
-            <a:schemeClr val="accent1"/>
-          </a:lnRef>
-          <a:fillRef idx="3">
-            <a:schemeClr val="accent1"/>
-          </a:fillRef>
-          <a:effectRef idx="2">
-            <a:schemeClr val="accent1"/>
-          </a:effectRef>
-          <a:fontRef idx="minor">
-            <a:schemeClr val="lt1"/>
-          </a:fontRef>
-        </p:style>
-        <p:txBody>
-          <a:bodyPr rtlCol="0" anchor="ctr"/>
-          <a:lstStyle/>
-          <a:p>
-            <a:pPr algn="ctr"/>
-          </a:p>
-        </p:txBody>
-      </p:sp>
-      <p:sp>
-        <p:nvSpPr>
-          <p:cNvPr id="14" name="Rounded Rectangle 13"/>
-          <p:cNvSpPr/>
-          <p:nvPr/>
-        </p:nvSpPr>
-        <p:spPr>
-          <a:xfrm>
-            <a:off x="594360" y="3575304"/>
-            <a:ext cx="438912" cy="438912"/>
-          </a:xfrm>
-          <a:prstGeom prst="roundRect">
-            <a:avLst>
-              <a:gd name="adj" fmla="val 12000"/>
-            </a:avLst>
-          </a:prstGeom>
-          <a:solidFill>
-            <a:srgbClr val="095292"/>
-          </a:solidFill>
-          <a:ln>
-            <a:noFill/>
-          </a:ln>
-        </p:spPr>
-        <p:style>
-          <a:lnRef idx="1">
-            <a:schemeClr val="accent1"/>
-          </a:lnRef>
-          <a:fillRef idx="3">
-            <a:schemeClr val="accent1"/>
-          </a:fillRef>
-          <a:effectRef idx="2">
-            <a:schemeClr val="accent1"/>
-          </a:effectRef>
-          <a:fontRef idx="minor">
-            <a:schemeClr val="lt1"/>
-          </a:fontRef>
-        </p:style>
-        <p:txBody>
-          <a:bodyPr rtlCol="0" anchor="ctr"/>
-          <a:lstStyle/>
-          <a:p>
-            <a:pPr algn="ctr"/>
-          </a:p>
-        </p:txBody>
-      </p:sp>
-      <p:sp>
-        <p:nvSpPr>
-          <p:cNvPr id="15" name="TextBox 14"/>
-          <p:cNvSpPr txBox="1"/>
-          <p:nvPr/>
-        </p:nvSpPr>
-        <p:spPr>
-          <a:xfrm>
-            <a:off x="594360" y="3575304"/>
-            <a:ext cx="438912" cy="438912"/>
-          </a:xfrm>
-          <a:prstGeom prst="rect">
-            <a:avLst/>
-          </a:prstGeom>
-          <a:noFill/>
-        </p:spPr>
-        <p:txBody>
-          <a:bodyPr wrap="square" anchor="ctr"/>
-          <a:lstStyle/>
-          <a:p>
-            <a:pPr algn="ctr"/>
-            <a:r>
-              <a:rPr sz="1600" b="1" i="0">
-                <a:solidFill>
-                  <a:srgbClr val="FFFFFF"/>
-                </a:solidFill>
-                <a:latin typeface="Calibri"/>
-              </a:rPr>
-              <a:t>3</a:t>
-            </a:r>
-          </a:p>
-        </p:txBody>
-      </p:sp>
-      <p:sp>
-        <p:nvSpPr>
-          <p:cNvPr id="16" name="TextBox 15"/>
-          <p:cNvSpPr txBox="1"/>
-          <p:nvPr/>
-        </p:nvSpPr>
-        <p:spPr>
-          <a:xfrm>
-            <a:off x="1188720" y="3410712"/>
-            <a:ext cx="10271455" cy="786384"/>
-          </a:xfrm>
-          <a:prstGeom prst="rect">
-            <a:avLst/>
-          </a:prstGeom>
-          <a:noFill/>
-        </p:spPr>
-        <p:txBody>
-          <a:bodyPr wrap="square" anchor="ctr"/>
-          <a:lstStyle/>
-          <a:p>
-            <a:r>
-              <a:rPr sz="1500" b="1" i="0">
-                <a:solidFill>
-                  <a:srgbClr val="095292"/>
-                </a:solidFill>
-                <a:latin typeface="Calibri"/>
-              </a:rPr>
-              <a:t>3 · Sitios</a:t>
-            </a:r>
-          </a:p>
-          <a:p>
-            <a:pPr>
-              <a:spcBef>
-                <a:spcPts val="200"/>
-              </a:spcBef>
-            </a:pPr>
-            <a:r>
-              <a:rPr sz="1300" b="0" i="0">
-                <a:solidFill>
-                  <a:srgbClr val="333333"/>
-                </a:solidFill>
-                <a:latin typeface="Calibri"/>
-              </a:rPr>
-              <a:t>Google Scholar, el repositorio de una universidad, y apps de turnos que ya existen.</a:t>
-            </a:r>
-          </a:p>
-        </p:txBody>
-      </p:sp>
-      <p:sp>
-        <p:nvSpPr>
-          <p:cNvPr id="17" name="Rounded Rectangle 16"/>
-          <p:cNvSpPr/>
-          <p:nvPr/>
-        </p:nvSpPr>
-        <p:spPr>
-          <a:xfrm>
-            <a:off x="457200" y="4361688"/>
-            <a:ext cx="11277295" cy="950976"/>
-          </a:xfrm>
-          <a:prstGeom prst="roundRect">
-            <a:avLst>
-              <a:gd name="adj" fmla="val 12000"/>
-            </a:avLst>
-          </a:prstGeom>
-          <a:solidFill>
-            <a:srgbClr val="E8F4FA"/>
-          </a:solidFill>
-          <a:ln>
-            <a:noFill/>
-          </a:ln>
-        </p:spPr>
-        <p:style>
-          <a:lnRef idx="1">
-            <a:schemeClr val="accent1"/>
-          </a:lnRef>
-          <a:fillRef idx="3">
-            <a:schemeClr val="accent1"/>
-          </a:fillRef>
-          <a:effectRef idx="2">
-            <a:schemeClr val="accent1"/>
-          </a:effectRef>
-          <a:fontRef idx="minor">
-            <a:schemeClr val="lt1"/>
-          </a:fontRef>
-        </p:style>
-        <p:txBody>
-          <a:bodyPr rtlCol="0" anchor="ctr"/>
-          <a:lstStyle/>
-          <a:p>
-            <a:pPr algn="ctr"/>
-          </a:p>
-        </p:txBody>
-      </p:sp>
-      <p:sp>
-        <p:nvSpPr>
-          <p:cNvPr id="18" name="Rounded Rectangle 17"/>
-          <p:cNvSpPr/>
-          <p:nvPr/>
-        </p:nvSpPr>
-        <p:spPr>
-          <a:xfrm>
-            <a:off x="594360" y="4617720"/>
-            <a:ext cx="438912" cy="438912"/>
-          </a:xfrm>
-          <a:prstGeom prst="roundRect">
-            <a:avLst>
-              <a:gd name="adj" fmla="val 12000"/>
-            </a:avLst>
-          </a:prstGeom>
-          <a:solidFill>
-            <a:srgbClr val="095292"/>
-          </a:solidFill>
-          <a:ln>
-            <a:noFill/>
-          </a:ln>
-        </p:spPr>
-        <p:style>
-          <a:lnRef idx="1">
-            <a:schemeClr val="accent1"/>
-          </a:lnRef>
-          <a:fillRef idx="3">
-            <a:schemeClr val="accent1"/>
-          </a:fillRef>
-          <a:effectRef idx="2">
-            <a:schemeClr val="accent1"/>
-          </a:effectRef>
-          <a:fontRef idx="minor">
-            <a:schemeClr val="lt1"/>
-          </a:fontRef>
-        </p:style>
-        <p:txBody>
-          <a:bodyPr rtlCol="0" anchor="ctr"/>
-          <a:lstStyle/>
-          <a:p>
-            <a:pPr algn="ctr"/>
+            <a:r>
+              <a:rPr sz="1100" b="0" i="1">
+                <a:solidFill>
+                  <a:srgbClr val="666666"/>
+                </a:solidFill>
+                <a:latin typeface="Calibri"/>
+              </a:rPr>
+              <a:t>Clic para avanzar la animación</a:t>
+            </a:r>
           </a:p>
         </p:txBody>
       </p:sp>
@@ -5370,8 +4943,8 @@
         </p:nvSpPr>
         <p:spPr>
           <a:xfrm>
-            <a:off x="594360" y="4617720"/>
-            <a:ext cx="438912" cy="438912"/>
+            <a:off x="457200" y="1353312"/>
+            <a:ext cx="5093061" cy="5047488"/>
           </a:xfrm>
           <a:prstGeom prst="rect">
             <a:avLst/>
@@ -5379,18 +4952,144 @@
           <a:noFill/>
         </p:spPr>
         <p:txBody>
-          <a:bodyPr wrap="square" anchor="ctr"/>
-          <a:lstStyle/>
-          <a:p>
-            <a:pPr algn="ctr"/>
-            <a:r>
-              <a:rPr sz="1600" b="1" i="0">
-                <a:solidFill>
-                  <a:srgbClr val="FFFFFF"/>
-                </a:solidFill>
-                <a:latin typeface="Calibri"/>
-              </a:rPr>
-              <a:t>4</a:t>
+          <a:bodyPr wrap="square">
+            <a:spAutoFit/>
+          </a:bodyPr>
+          <a:lstStyle/>
+          <a:p>
+            <a:pPr>
+              <a:spcAft>
+                <a:spcPts val="800"/>
+              </a:spcAft>
+            </a:pPr>
+            <a:r>
+              <a:rPr sz="2000" b="0" i="0">
+                <a:solidFill>
+                  <a:srgbClr val="333333"/>
+                </a:solidFill>
+                <a:latin typeface="Calibri"/>
+              </a:rPr>
+              <a:t>–   </a:t>
+            </a:r>
+            <a:r>
+              <a:rPr sz="2000" b="1" i="0">
+                <a:solidFill>
+                  <a:srgbClr val="333333"/>
+                </a:solidFill>
+                <a:latin typeface="Calibri"/>
+              </a:rPr>
+              <a:t>1 · Pregunta:</a:t>
+            </a:r>
+            <a:r>
+              <a:rPr sz="2000" b="0" i="0">
+                <a:solidFill>
+                  <a:srgbClr val="333333"/>
+                </a:solidFill>
+                <a:latin typeface="Calibri"/>
+              </a:rPr>
+              <a:t> ¿Cómo manejan los turnos los negocios pequeños que no tienen sistema?</a:t>
+            </a:r>
+          </a:p>
+          <a:p>
+            <a:pPr>
+              <a:spcAft>
+                <a:spcPts val="800"/>
+              </a:spcAft>
+            </a:pPr>
+            <a:r>
+              <a:rPr sz="2000" b="0" i="0">
+                <a:solidFill>
+                  <a:srgbClr val="333333"/>
+                </a:solidFill>
+                <a:latin typeface="Calibri"/>
+              </a:rPr>
+              <a:t>–   </a:t>
+            </a:r>
+            <a:r>
+              <a:rPr sz="2000" b="1" i="0">
+                <a:solidFill>
+                  <a:srgbClr val="333333"/>
+                </a:solidFill>
+                <a:latin typeface="Calibri"/>
+              </a:rPr>
+              <a:t>2 · Términos:</a:t>
+            </a:r>
+            <a:r>
+              <a:rPr sz="2000" b="0" i="0">
+                <a:solidFill>
+                  <a:srgbClr val="333333"/>
+                </a:solidFill>
+                <a:latin typeface="Calibri"/>
+              </a:rPr>
+              <a:t> «turnos virtuales», «gestión de filas», «queue management small business».</a:t>
+            </a:r>
+          </a:p>
+          <a:p>
+            <a:pPr>
+              <a:spcAft>
+                <a:spcPts val="800"/>
+              </a:spcAft>
+            </a:pPr>
+            <a:r>
+              <a:rPr sz="2000" b="0" i="0">
+                <a:solidFill>
+                  <a:srgbClr val="333333"/>
+                </a:solidFill>
+                <a:latin typeface="Calibri"/>
+              </a:rPr>
+              <a:t>–   </a:t>
+            </a:r>
+            <a:r>
+              <a:rPr sz="2000" b="1" i="0">
+                <a:solidFill>
+                  <a:srgbClr val="333333"/>
+                </a:solidFill>
+                <a:latin typeface="Calibri"/>
+              </a:rPr>
+              <a:t>3 · Sitios:</a:t>
+            </a:r>
+            <a:r>
+              <a:rPr sz="2000" b="0" i="0">
+                <a:solidFill>
+                  <a:srgbClr val="333333"/>
+                </a:solidFill>
+                <a:latin typeface="Calibri"/>
+              </a:rPr>
+              <a:t> Google Scholar, el repositorio de una universidad, y apps de turnos que ya existen.</a:t>
+            </a:r>
+          </a:p>
+          <a:p>
+            <a:pPr>
+              <a:spcAft>
+                <a:spcPts val="800"/>
+              </a:spcAft>
+            </a:pPr>
+            <a:r>
+              <a:rPr sz="2000" b="0" i="0">
+                <a:solidFill>
+                  <a:srgbClr val="333333"/>
+                </a:solidFill>
+                <a:latin typeface="Calibri"/>
+              </a:rPr>
+              <a:t>–   </a:t>
+            </a:r>
+            <a:r>
+              <a:rPr sz="2000" b="1" i="0">
+                <a:solidFill>
+                  <a:srgbClr val="333333"/>
+                </a:solidFill>
+                <a:latin typeface="Calibri"/>
+              </a:rPr>
+              <a:t>4 · Filtro:</a:t>
+            </a:r>
+            <a:r>
+              <a:rPr sz="2000" b="0" i="0">
+                <a:solidFill>
+                  <a:srgbClr val="333333"/>
+                </a:solidFill>
+                <a:latin typeface="Calibri"/>
+              </a:rPr>
+              <a:t> Se descarta un blog sin autor; se queda una tesis de 2021 sobre filas en droguerías.</a:t>
             </a:r>
           </a:p>
         </p:txBody>
@@ -5398,225 +5097,6 @@
       <p:sp>
         <p:nvSpPr>
           <p:cNvPr id="20" name="TextBox 19"/>
-          <p:cNvSpPr txBox="1"/>
-          <p:nvPr/>
-        </p:nvSpPr>
-        <p:spPr>
-          <a:xfrm>
-            <a:off x="1188720" y="4453128"/>
-            <a:ext cx="10271455" cy="786384"/>
-          </a:xfrm>
-          <a:prstGeom prst="rect">
-            <a:avLst/>
-          </a:prstGeom>
-          <a:noFill/>
-        </p:spPr>
-        <p:txBody>
-          <a:bodyPr wrap="square" anchor="ctr"/>
-          <a:lstStyle/>
-          <a:p>
-            <a:r>
-              <a:rPr sz="1500" b="1" i="0">
-                <a:solidFill>
-                  <a:srgbClr val="095292"/>
-                </a:solidFill>
-                <a:latin typeface="Calibri"/>
-              </a:rPr>
-              <a:t>4 · Filtro</a:t>
-            </a:r>
-          </a:p>
-          <a:p>
-            <a:pPr>
-              <a:spcBef>
-                <a:spcPts val="200"/>
-              </a:spcBef>
-            </a:pPr>
-            <a:r>
-              <a:rPr sz="1300" b="0" i="0">
-                <a:solidFill>
-                  <a:srgbClr val="333333"/>
-                </a:solidFill>
-                <a:latin typeface="Calibri"/>
-              </a:rPr>
-              <a:t>Se descarta un blog sin autor; se queda una tesis de 2021 sobre filas en droguerías.</a:t>
-            </a:r>
-          </a:p>
-        </p:txBody>
-      </p:sp>
-      <p:sp>
-        <p:nvSpPr>
-          <p:cNvPr id="21" name="Rounded Rectangle 20"/>
-          <p:cNvSpPr/>
-          <p:nvPr/>
-        </p:nvSpPr>
-        <p:spPr>
-          <a:xfrm>
-            <a:off x="457200" y="5404104"/>
-            <a:ext cx="11277295" cy="950976"/>
-          </a:xfrm>
-          <a:prstGeom prst="roundRect">
-            <a:avLst>
-              <a:gd name="adj" fmla="val 12000"/>
-            </a:avLst>
-          </a:prstGeom>
-          <a:solidFill>
-            <a:srgbClr val="F2F2F2"/>
-          </a:solidFill>
-          <a:ln>
-            <a:noFill/>
-          </a:ln>
-        </p:spPr>
-        <p:style>
-          <a:lnRef idx="1">
-            <a:schemeClr val="accent1"/>
-          </a:lnRef>
-          <a:fillRef idx="3">
-            <a:schemeClr val="accent1"/>
-          </a:fillRef>
-          <a:effectRef idx="2">
-            <a:schemeClr val="accent1"/>
-          </a:effectRef>
-          <a:fontRef idx="minor">
-            <a:schemeClr val="lt1"/>
-          </a:fontRef>
-        </p:style>
-        <p:txBody>
-          <a:bodyPr rtlCol="0" anchor="ctr"/>
-          <a:lstStyle/>
-          <a:p>
-            <a:pPr algn="ctr"/>
-          </a:p>
-        </p:txBody>
-      </p:sp>
-      <p:sp>
-        <p:nvSpPr>
-          <p:cNvPr id="22" name="Rounded Rectangle 21"/>
-          <p:cNvSpPr/>
-          <p:nvPr/>
-        </p:nvSpPr>
-        <p:spPr>
-          <a:xfrm>
-            <a:off x="594360" y="5660136"/>
-            <a:ext cx="438912" cy="438912"/>
-          </a:xfrm>
-          <a:prstGeom prst="roundRect">
-            <a:avLst>
-              <a:gd name="adj" fmla="val 12000"/>
-            </a:avLst>
-          </a:prstGeom>
-          <a:solidFill>
-            <a:srgbClr val="095292"/>
-          </a:solidFill>
-          <a:ln>
-            <a:noFill/>
-          </a:ln>
-        </p:spPr>
-        <p:style>
-          <a:lnRef idx="1">
-            <a:schemeClr val="accent1"/>
-          </a:lnRef>
-          <a:fillRef idx="3">
-            <a:schemeClr val="accent1"/>
-          </a:fillRef>
-          <a:effectRef idx="2">
-            <a:schemeClr val="accent1"/>
-          </a:effectRef>
-          <a:fontRef idx="minor">
-            <a:schemeClr val="lt1"/>
-          </a:fontRef>
-        </p:style>
-        <p:txBody>
-          <a:bodyPr rtlCol="0" anchor="ctr"/>
-          <a:lstStyle/>
-          <a:p>
-            <a:pPr algn="ctr"/>
-          </a:p>
-        </p:txBody>
-      </p:sp>
-      <p:sp>
-        <p:nvSpPr>
-          <p:cNvPr id="23" name="TextBox 22"/>
-          <p:cNvSpPr txBox="1"/>
-          <p:nvPr/>
-        </p:nvSpPr>
-        <p:spPr>
-          <a:xfrm>
-            <a:off x="594360" y="5660136"/>
-            <a:ext cx="438912" cy="438912"/>
-          </a:xfrm>
-          <a:prstGeom prst="rect">
-            <a:avLst/>
-          </a:prstGeom>
-          <a:noFill/>
-        </p:spPr>
-        <p:txBody>
-          <a:bodyPr wrap="square" anchor="ctr"/>
-          <a:lstStyle/>
-          <a:p>
-            <a:pPr algn="ctr"/>
-            <a:r>
-              <a:rPr sz="1600" b="1" i="0">
-                <a:solidFill>
-                  <a:srgbClr val="FFFFFF"/>
-                </a:solidFill>
-                <a:latin typeface="Calibri"/>
-              </a:rPr>
-              <a:t>5</a:t>
-            </a:r>
-          </a:p>
-        </p:txBody>
-      </p:sp>
-      <p:sp>
-        <p:nvSpPr>
-          <p:cNvPr id="24" name="TextBox 23"/>
-          <p:cNvSpPr txBox="1"/>
-          <p:nvPr/>
-        </p:nvSpPr>
-        <p:spPr>
-          <a:xfrm>
-            <a:off x="1188720" y="5495544"/>
-            <a:ext cx="10271455" cy="786384"/>
-          </a:xfrm>
-          <a:prstGeom prst="rect">
-            <a:avLst/>
-          </a:prstGeom>
-          <a:noFill/>
-        </p:spPr>
-        <p:txBody>
-          <a:bodyPr wrap="square" anchor="ctr"/>
-          <a:lstStyle/>
-          <a:p>
-            <a:r>
-              <a:rPr sz="1500" b="1" i="0">
-                <a:solidFill>
-                  <a:srgbClr val="095292"/>
-                </a:solidFill>
-                <a:latin typeface="Calibri"/>
-              </a:rPr>
-              <a:t>5 · Ficha</a:t>
-            </a:r>
-          </a:p>
-          <a:p>
-            <a:pPr>
-              <a:spcBef>
-                <a:spcPts val="200"/>
-              </a:spcBef>
-            </a:pPr>
-            <a:r>
-              <a:rPr sz="1300" b="0" i="0">
-                <a:solidFill>
-                  <a:srgbClr val="333333"/>
-                </a:solidFill>
-                <a:latin typeface="Calibri"/>
-              </a:rPr>
-              <a:t>Autor, año, enlace, qué hace y qué le falta: «exige que el cliente instale una app».</a:t>
-            </a:r>
-          </a:p>
-        </p:txBody>
-      </p:sp>
-      <p:sp>
-        <p:nvSpPr>
-          <p:cNvPr id="25" name="TextBox 24"/>
           <p:cNvSpPr txBox="1"/>
           <p:nvPr/>
         </p:nvSpPr>
@@ -5654,6 +5134,195 @@
   <p:clrMapOvr>
     <a:masterClrMapping/>
   </p:clrMapOvr>
+  <p:timing>
+    <p:tnLst>
+      <p:par>
+        <p:cTn id="1" dur="indefinite" restart="never" nodeType="tmRoot">
+          <p:childTnLst>
+            <p:seq concurrent="1" nextAc="seek">
+              <p:cTn id="2" dur="indefinite" nodeType="mainSeq">
+                <p:childTnLst>
+                  <p:par>
+                    <p:cTn id="3" fill="hold">
+                      <p:stCondLst>
+                        <p:cond delay="indefinite"/>
+                      </p:stCondLst>
+                      <p:childTnLst>
+                        <p:par>
+                          <p:cTn id="4" fill="hold">
+                            <p:stCondLst>
+                              <p:cond delay="0"/>
+                            </p:stCondLst>
+                            <p:childTnLst>
+                              <p:par>
+                                <p:cTn id="5" presetID="10" presetClass="entr" presetSubtype="0" fill="hold" nodeType="clickEffect">
+                                  <p:stCondLst>
+                                    <p:cond delay="0"/>
+                                  </p:stCondLst>
+                                  <p:childTnLst>
+                                    <p:set>
+                                      <p:cBhvr>
+                                        <p:cTn id="6" dur="1" fill="hold">
+                                          <p:stCondLst>
+                                            <p:cond delay="0"/>
+                                          </p:stCondLst>
+                                        </p:cTn>
+                                        <p:tgtEl>
+                                          <p:spTgt spid="7"/>
+                                        </p:tgtEl>
+                                        <p:attrNameLst>
+                                          <p:attrName>style.visibility</p:attrName>
+                                        </p:attrNameLst>
+                                      </p:cBhvr>
+                                      <p:to>
+                                        <p:strVal val="visible"/>
+                                      </p:to>
+                                    </p:set>
+                                    <p:animEffect transition="in" filter="fade">
+                                      <p:cBhvr>
+                                        <p:cTn id="7" dur="450"/>
+                                        <p:tgtEl>
+                                          <p:spTgt spid="7"/>
+                                        </p:tgtEl>
+                                      </p:cBhvr>
+                                    </p:animEffect>
+                                  </p:childTnLst>
+                                </p:cTn>
+                              </p:par>
+                            </p:childTnLst>
+                          </p:cTn>
+                        </p:par>
+                      </p:childTnLst>
+                    </p:cTn>
+                  </p:par>
+                  <p:par>
+                    <p:cTn id="8" fill="hold">
+                      <p:stCondLst>
+                        <p:cond delay="indefinite"/>
+                      </p:stCondLst>
+                      <p:childTnLst>
+                        <p:par>
+                          <p:cTn id="9" fill="hold">
+                            <p:stCondLst>
+                              <p:cond delay="0"/>
+                            </p:stCondLst>
+                            <p:childTnLst>
+                              <p:par>
+                                <p:cTn id="10" presetID="10" presetClass="entr" presetSubtype="0" fill="hold" nodeType="clickEffect">
+                                  <p:stCondLst>
+                                    <p:cond delay="0"/>
+                                  </p:stCondLst>
+                                  <p:childTnLst>
+                                    <p:set>
+                                      <p:cBhvr>
+                                        <p:cTn id="11" dur="1" fill="hold">
+                                          <p:stCondLst>
+                                            <p:cond delay="0"/>
+                                          </p:stCondLst>
+                                        </p:cTn>
+                                        <p:tgtEl>
+                                          <p:spTgt spid="8"/>
+                                        </p:tgtEl>
+                                        <p:attrNameLst>
+                                          <p:attrName>style.visibility</p:attrName>
+                                        </p:attrNameLst>
+                                      </p:cBhvr>
+                                      <p:to>
+                                        <p:strVal val="visible"/>
+                                      </p:to>
+                                    </p:set>
+                                    <p:animEffect transition="in" filter="fade">
+                                      <p:cBhvr>
+                                        <p:cTn id="12" dur="450"/>
+                                        <p:tgtEl>
+                                          <p:spTgt spid="8"/>
+                                        </p:tgtEl>
+                                      </p:cBhvr>
+                                    </p:animEffect>
+                                  </p:childTnLst>
+                                </p:cTn>
+                              </p:par>
+                            </p:childTnLst>
+                          </p:cTn>
+                        </p:par>
+                      </p:childTnLst>
+                    </p:cTn>
+                  </p:par>
+                  <p:par>
+                    <p:cTn id="13" fill="hold">
+                      <p:stCondLst>
+                        <p:cond delay="indefinite"/>
+                      </p:stCondLst>
+                      <p:childTnLst>
+                        <p:par>
+                          <p:cTn id="14" fill="hold">
+                            <p:stCondLst>
+                              <p:cond delay="0"/>
+                            </p:stCondLst>
+                            <p:childTnLst>
+                              <p:par>
+                                <p:cTn id="15" presetID="10" presetClass="entr" presetSubtype="0" fill="hold" nodeType="clickEffect">
+                                  <p:stCondLst>
+                                    <p:cond delay="0"/>
+                                  </p:stCondLst>
+                                  <p:childTnLst>
+                                    <p:set>
+                                      <p:cBhvr>
+                                        <p:cTn id="16" dur="1" fill="hold">
+                                          <p:stCondLst>
+                                            <p:cond delay="0"/>
+                                          </p:stCondLst>
+                                        </p:cTn>
+                                        <p:tgtEl>
+                                          <p:spTgt spid="9"/>
+                                        </p:tgtEl>
+                                        <p:attrNameLst>
+                                          <p:attrName>style.visibility</p:attrName>
+                                        </p:attrNameLst>
+                                      </p:cBhvr>
+                                      <p:to>
+                                        <p:strVal val="visible"/>
+                                      </p:to>
+                                    </p:set>
+                                    <p:animEffect transition="in" filter="fade">
+                                      <p:cBhvr>
+                                        <p:cTn id="17" dur="450"/>
+                                        <p:tgtEl>
+                                          <p:spTgt spid="9"/>
+                                        </p:tgtEl>
+                                      </p:cBhvr>
+                                    </p:animEffect>
+                                  </p:childTnLst>
+                                </p:cTn>
+                              </p:par>
+                            </p:childTnLst>
+                          </p:cTn>
+                        </p:par>
+                      </p:childTnLst>
+                    </p:cTn>
+                  </p:par>
+                </p:childTnLst>
+              </p:cTn>
+              <p:prevCondLst>
+                <p:cond evt="onPrev" delay="0">
+                  <p:tgtEl>
+                    <p:sldTgt/>
+                  </p:tgtEl>
+                </p:cond>
+              </p:prevCondLst>
+              <p:nextCondLst>
+                <p:cond evt="onNext" delay="0">
+                  <p:tgtEl>
+                    <p:sldTgt/>
+                  </p:tgtEl>
+                </p:cond>
+              </p:nextCondLst>
+            </p:seq>
+          </p:childTnLst>
+        </p:cTn>
+      </p:par>
+    </p:tnLst>
+  </p:timing>
 </p:sld>
 </file>
 
@@ -8342,14 +8011,118 @@
       </p:sp>
       <p:sp>
         <p:nvSpPr>
-          <p:cNvPr id="5" name="TextBox 4"/>
+          <p:cNvPr id="5" name="Rounded Rectangle 4"/>
+          <p:cNvSpPr/>
+          <p:nvPr/>
+        </p:nvSpPr>
+        <p:spPr>
+          <a:xfrm>
+            <a:off x="5797149" y="1573813"/>
+            <a:ext cx="6010497" cy="4057845"/>
+          </a:xfrm>
+          <a:prstGeom prst="roundRect">
+            <a:avLst>
+              <a:gd name="adj" fmla="val 4000"/>
+            </a:avLst>
+          </a:prstGeom>
+          <a:solidFill>
+            <a:srgbClr val="E8EEF4"/>
+          </a:solidFill>
+          <a:ln>
+            <a:noFill/>
+          </a:ln>
+        </p:spPr>
+        <p:style>
+          <a:lnRef idx="1">
+            <a:schemeClr val="accent1"/>
+          </a:lnRef>
+          <a:fillRef idx="3">
+            <a:schemeClr val="accent1"/>
+          </a:fillRef>
+          <a:effectRef idx="2">
+            <a:schemeClr val="accent1"/>
+          </a:effectRef>
+          <a:fontRef idx="minor">
+            <a:schemeClr val="lt1"/>
+          </a:fontRef>
+        </p:style>
+        <p:txBody>
+          <a:bodyPr rtlCol="0" anchor="ctr"/>
+          <a:lstStyle/>
+          <a:p>
+            <a:pPr algn="ctr"/>
+          </a:p>
+        </p:txBody>
+      </p:sp>
+      <p:pic>
+        <p:nvPicPr>
+          <p:cNvPr id="6" name="Picture 5" descr="students-learning-laptops-classroom.jpg"/>
+          <p:cNvPicPr>
+            <a:picLocks noChangeAspect="1"/>
+          </p:cNvPicPr>
+          <p:nvPr/>
+        </p:nvPicPr>
+        <p:blipFill>
+          <a:blip r:embed="rId2"/>
+          <a:stretch>
+            <a:fillRect/>
+          </a:stretch>
+        </p:blipFill>
+        <p:spPr>
+          <a:xfrm>
+            <a:off x="5870301" y="1646965"/>
+            <a:ext cx="5864193" cy="3911541"/>
+          </a:xfrm>
+          <a:prstGeom prst="rect">
+            <a:avLst/>
+          </a:prstGeom>
+        </p:spPr>
+      </p:pic>
+      <p:sp>
+        <p:nvSpPr>
+          <p:cNvPr id="7" name="TextBox 6"/>
           <p:cNvSpPr txBox="1"/>
           <p:nvPr/>
         </p:nvSpPr>
         <p:spPr>
           <a:xfrm>
-            <a:off x="457200" y="1170432"/>
-            <a:ext cx="11277295" cy="5230368"/>
+            <a:off x="5870301" y="5961888"/>
+            <a:ext cx="5864193" cy="320040"/>
+          </a:xfrm>
+          <a:prstGeom prst="rect">
+            <a:avLst/>
+          </a:prstGeom>
+          <a:noFill/>
+        </p:spPr>
+        <p:txBody>
+          <a:bodyPr wrap="square">
+            <a:spAutoFit/>
+          </a:bodyPr>
+          <a:lstStyle/>
+          <a:p>
+            <a:pPr algn="ctr"/>
+            <a:r>
+              <a:rPr sz="1100" b="0" i="1">
+                <a:solidFill>
+                  <a:srgbClr val="666666"/>
+                </a:solidFill>
+                <a:latin typeface="Calibri"/>
+              </a:rPr>
+              <a:t>Foto: Mikhail Nilov · Pexels</a:t>
+            </a:r>
+          </a:p>
+        </p:txBody>
+      </p:sp>
+      <p:sp>
+        <p:nvSpPr>
+          <p:cNvPr id="8" name="TextBox 7"/>
+          <p:cNvSpPr txBox="1"/>
+          <p:nvPr/>
+        </p:nvSpPr>
+        <p:spPr>
+          <a:xfrm>
+            <a:off x="457200" y="1353312"/>
+            <a:ext cx="5093061" cy="5047488"/>
           </a:xfrm>
           <a:prstGeom prst="rect">
             <a:avLst/>
@@ -8519,7 +8292,7 @@
       </p:sp>
       <p:sp>
         <p:nvSpPr>
-          <p:cNvPr id="6" name="TextBox 5"/>
+          <p:cNvPr id="9" name="TextBox 8"/>
           <p:cNvSpPr txBox="1"/>
           <p:nvPr/>
         </p:nvSpPr>
@@ -10330,9 +10103,57 @@
           </a:p>
         </p:txBody>
       </p:sp>
-      <p:sp>
-        <p:nvSpPr>
-          <p:cNvPr id="13" name="TextBox 12"/>
+      <p:pic>
+        <p:nvPicPr>
+          <p:cNvPr id="13" name="Picture 12" descr="sello_mal.png"/>
+          <p:cNvPicPr>
+            <a:picLocks noChangeAspect="1"/>
+          </p:cNvPicPr>
+          <p:nvPr/>
+        </p:nvPicPr>
+        <p:blipFill>
+          <a:blip r:embed="rId2"/>
+          <a:stretch>
+            <a:fillRect/>
+          </a:stretch>
+        </p:blipFill>
+        <p:spPr>
+          <a:xfrm>
+            <a:off x="566928" y="1316736"/>
+            <a:ext cx="393192" cy="393192"/>
+          </a:xfrm>
+          <a:prstGeom prst="rect">
+            <a:avLst/>
+          </a:prstGeom>
+        </p:spPr>
+      </p:pic>
+      <p:pic>
+        <p:nvPicPr>
+          <p:cNvPr id="14" name="Picture 13" descr="sello_bien.png"/>
+          <p:cNvPicPr>
+            <a:picLocks noChangeAspect="1"/>
+          </p:cNvPicPr>
+          <p:nvPr/>
+        </p:nvPicPr>
+        <p:blipFill>
+          <a:blip r:embed="rId3"/>
+          <a:stretch>
+            <a:fillRect/>
+          </a:stretch>
+        </p:blipFill>
+        <p:spPr>
+          <a:xfrm>
+            <a:off x="6365595" y="1316736"/>
+            <a:ext cx="393192" cy="393192"/>
+          </a:xfrm>
+          <a:prstGeom prst="rect">
+            <a:avLst/>
+          </a:prstGeom>
+        </p:spPr>
+      </p:pic>
+      <p:sp>
+        <p:nvSpPr>
+          <p:cNvPr id="15" name="TextBox 14"/>
           <p:cNvSpPr txBox="1"/>
           <p:nvPr/>
         </p:nvSpPr>
@@ -10553,16 +10374,16 @@
         </p:nvSpPr>
         <p:spPr>
           <a:xfrm>
-            <a:off x="457200" y="1659636"/>
-            <a:ext cx="11277295" cy="1051560"/>
+            <a:off x="5934611" y="1399031"/>
+            <a:ext cx="5735574" cy="4617720"/>
           </a:xfrm>
           <a:prstGeom prst="roundRect">
             <a:avLst>
-              <a:gd name="adj" fmla="val 12000"/>
+              <a:gd name="adj" fmla="val 4000"/>
             </a:avLst>
           </a:prstGeom>
           <a:solidFill>
-            <a:srgbClr val="F2F2F2"/>
+            <a:srgbClr val="E8EEF4"/>
           </a:solidFill>
           <a:ln>
             <a:noFill/>
@@ -10590,61 +10411,147 @@
           </a:p>
         </p:txBody>
       </p:sp>
-      <p:sp>
-        <p:nvSpPr>
-          <p:cNvPr id="7" name="Rounded Rectangle 6"/>
-          <p:cNvSpPr/>
-          <p:nvPr/>
-        </p:nvSpPr>
-        <p:spPr>
-          <a:xfrm>
-            <a:off x="594360" y="1965960"/>
-            <a:ext cx="438912" cy="438912"/>
-          </a:xfrm>
-          <a:prstGeom prst="roundRect">
-            <a:avLst>
-              <a:gd name="adj" fmla="val 12000"/>
-            </a:avLst>
-          </a:prstGeom>
-          <a:solidFill>
-            <a:srgbClr val="095292"/>
-          </a:solidFill>
-          <a:ln>
-            <a:noFill/>
-          </a:ln>
-        </p:spPr>
-        <p:style>
-          <a:lnRef idx="1">
-            <a:schemeClr val="accent1"/>
-          </a:lnRef>
-          <a:fillRef idx="3">
-            <a:schemeClr val="accent1"/>
-          </a:fillRef>
-          <a:effectRef idx="2">
-            <a:schemeClr val="accent1"/>
-          </a:effectRef>
-          <a:fontRef idx="minor">
-            <a:schemeClr val="lt1"/>
-          </a:fontRef>
-        </p:style>
-        <p:txBody>
-          <a:bodyPr rtlCol="0" anchor="ctr"/>
+      <p:pic>
+        <p:nvPicPr>
+          <p:cNvPr id="7" name="Picture 6" descr="cuatro-maneras-paso1.png"/>
+          <p:cNvPicPr>
+            <a:picLocks noChangeAspect="1"/>
+          </p:cNvPicPr>
+          <p:nvPr/>
+        </p:nvPicPr>
+        <p:blipFill>
+          <a:blip r:embed="rId2"/>
+          <a:stretch>
+            <a:fillRect/>
+          </a:stretch>
+        </p:blipFill>
+        <p:spPr>
+          <a:xfrm>
+            <a:off x="6007763" y="1472184"/>
+            <a:ext cx="5589270" cy="4471416"/>
+          </a:xfrm>
+          <a:prstGeom prst="rect">
+            <a:avLst/>
+          </a:prstGeom>
+        </p:spPr>
+      </p:pic>
+      <p:pic>
+        <p:nvPicPr>
+          <p:cNvPr id="8" name="Picture 7" descr="cuatro-maneras-paso2.png"/>
+          <p:cNvPicPr>
+            <a:picLocks noChangeAspect="1"/>
+          </p:cNvPicPr>
+          <p:nvPr/>
+        </p:nvPicPr>
+        <p:blipFill>
+          <a:blip r:embed="rId3"/>
+          <a:stretch>
+            <a:fillRect/>
+          </a:stretch>
+        </p:blipFill>
+        <p:spPr>
+          <a:xfrm>
+            <a:off x="6007763" y="1472184"/>
+            <a:ext cx="5589270" cy="4471416"/>
+          </a:xfrm>
+          <a:prstGeom prst="rect">
+            <a:avLst/>
+          </a:prstGeom>
+        </p:spPr>
+      </p:pic>
+      <p:pic>
+        <p:nvPicPr>
+          <p:cNvPr id="9" name="Picture 8" descr="cuatro-maneras-paso3.png"/>
+          <p:cNvPicPr>
+            <a:picLocks noChangeAspect="1"/>
+          </p:cNvPicPr>
+          <p:nvPr/>
+        </p:nvPicPr>
+        <p:blipFill>
+          <a:blip r:embed="rId4"/>
+          <a:stretch>
+            <a:fillRect/>
+          </a:stretch>
+        </p:blipFill>
+        <p:spPr>
+          <a:xfrm>
+            <a:off x="6007763" y="1472184"/>
+            <a:ext cx="5589270" cy="4471416"/>
+          </a:xfrm>
+          <a:prstGeom prst="rect">
+            <a:avLst/>
+          </a:prstGeom>
+        </p:spPr>
+      </p:pic>
+      <p:pic>
+        <p:nvPicPr>
+          <p:cNvPr id="10" name="Picture 9" descr="cuatro-maneras-paso4.png"/>
+          <p:cNvPicPr>
+            <a:picLocks noChangeAspect="1"/>
+          </p:cNvPicPr>
+          <p:nvPr/>
+        </p:nvPicPr>
+        <p:blipFill>
+          <a:blip r:embed="rId5"/>
+          <a:stretch>
+            <a:fillRect/>
+          </a:stretch>
+        </p:blipFill>
+        <p:spPr>
+          <a:xfrm>
+            <a:off x="6007763" y="1472184"/>
+            <a:ext cx="5589270" cy="4471416"/>
+          </a:xfrm>
+          <a:prstGeom prst="rect">
+            <a:avLst/>
+          </a:prstGeom>
+        </p:spPr>
+      </p:pic>
+      <p:sp>
+        <p:nvSpPr>
+          <p:cNvPr id="18" name="TextBox 17"/>
+          <p:cNvSpPr txBox="1"/>
+          <p:nvPr/>
+        </p:nvSpPr>
+        <p:spPr>
+          <a:xfrm>
+            <a:off x="5870301" y="5961888"/>
+            <a:ext cx="5864193" cy="320040"/>
+          </a:xfrm>
+          <a:prstGeom prst="rect">
+            <a:avLst/>
+          </a:prstGeom>
+          <a:noFill/>
+        </p:spPr>
+        <p:txBody>
+          <a:bodyPr wrap="square">
+            <a:spAutoFit/>
+          </a:bodyPr>
           <a:lstStyle/>
           <a:p>
             <a:pPr algn="ctr"/>
-          </a:p>
-        </p:txBody>
-      </p:sp>
-      <p:sp>
-        <p:nvSpPr>
-          <p:cNvPr id="8" name="TextBox 7"/>
+            <a:r>
+              <a:rPr sz="1100" b="0" i="1">
+                <a:solidFill>
+                  <a:srgbClr val="666666"/>
+                </a:solidFill>
+                <a:latin typeface="Calibri"/>
+              </a:rPr>
+              <a:t>Clic para avanzar la animación</a:t>
+            </a:r>
+          </a:p>
+        </p:txBody>
+      </p:sp>
+      <p:sp>
+        <p:nvSpPr>
+          <p:cNvPr id="19" name="TextBox 18"/>
           <p:cNvSpPr txBox="1"/>
           <p:nvPr/>
         </p:nvSpPr>
         <p:spPr>
           <a:xfrm>
-            <a:off x="594360" y="1965960"/>
-            <a:ext cx="438912" cy="438912"/>
+            <a:off x="457200" y="1563624"/>
+            <a:ext cx="5093061" cy="4837176"/>
           </a:xfrm>
           <a:prstGeom prst="rect">
             <a:avLst/>
@@ -10652,604 +10559,151 @@
           <a:noFill/>
         </p:spPr>
         <p:txBody>
-          <a:bodyPr wrap="square" anchor="ctr"/>
-          <a:lstStyle/>
-          <a:p>
-            <a:pPr algn="ctr"/>
-            <a:r>
-              <a:rPr sz="1600" b="1" i="0">
-                <a:solidFill>
-                  <a:srgbClr val="FFFFFF"/>
-                </a:solidFill>
-                <a:latin typeface="Calibri"/>
-              </a:rPr>
-              <a:t>1</a:t>
-            </a:r>
-          </a:p>
-        </p:txBody>
-      </p:sp>
-      <p:sp>
-        <p:nvSpPr>
-          <p:cNvPr id="9" name="TextBox 8"/>
-          <p:cNvSpPr txBox="1"/>
-          <p:nvPr/>
-        </p:nvSpPr>
-        <p:spPr>
-          <a:xfrm>
-            <a:off x="1188720" y="1751076"/>
-            <a:ext cx="10271455" cy="886968"/>
-          </a:xfrm>
-          <a:prstGeom prst="rect">
-            <a:avLst/>
-          </a:prstGeom>
-          <a:noFill/>
-        </p:spPr>
-        <p:txBody>
-          <a:bodyPr wrap="square" anchor="ctr"/>
-          <a:lstStyle/>
-          <a:p>
-            <a:r>
-              <a:rPr sz="1500" b="1" i="0">
-                <a:solidFill>
-                  <a:srgbClr val="095292"/>
-                </a:solidFill>
-                <a:latin typeface="Calibri"/>
-              </a:rPr>
-              <a:t>QUITAR</a:t>
-            </a:r>
-          </a:p>
+          <a:bodyPr wrap="square">
+            <a:spAutoFit/>
+          </a:bodyPr>
+          <a:lstStyle/>
           <a:p>
             <a:pPr>
-              <a:spcBef>
-                <a:spcPts val="200"/>
-              </a:spcBef>
+              <a:spcAft>
+                <a:spcPts val="800"/>
+              </a:spcAft>
             </a:pPr>
             <a:r>
-              <a:rPr sz="1300" b="0" i="0">
+              <a:rPr sz="2000" b="0" i="0">
                 <a:solidFill>
                   <a:srgbClr val="333333"/>
                 </a:solidFill>
                 <a:latin typeface="Calibri"/>
               </a:rPr>
-              <a:t>Sacar un paso, un requisito o un dato. </a:t>
-            </a:r>
-            <a:r>
-              <a:rPr sz="1300" b="1" i="0">
+              <a:t>–   </a:t>
+            </a:r>
+            <a:r>
+              <a:rPr sz="2000" b="1" i="0">
                 <a:solidFill>
                   <a:srgbClr val="333333"/>
                 </a:solidFill>
                 <a:latin typeface="Calibri"/>
               </a:rPr>
-              <a:t>Es la más subestimada y la más efectiva</a:t>
-            </a:r>
-            <a:r>
-              <a:rPr sz="1300" b="0" i="0">
+              <a:t>QUITAR:</a:t>
+            </a:r>
+            <a:r>
+              <a:rPr sz="2000" b="0" i="0">
                 <a:solidFill>
                   <a:srgbClr val="333333"/>
                 </a:solidFill>
                 <a:latin typeface="Calibri"/>
               </a:rPr>
-              <a:t>: quitar el registro previo, quitar la contraseña, quitar la visita presencial.</a:t>
-            </a:r>
-          </a:p>
-        </p:txBody>
-      </p:sp>
-      <p:sp>
-        <p:nvSpPr>
-          <p:cNvPr id="10" name="Rounded Rectangle 9"/>
-          <p:cNvSpPr/>
-          <p:nvPr/>
-        </p:nvSpPr>
-        <p:spPr>
-          <a:xfrm>
-            <a:off x="457200" y="2802636"/>
-            <a:ext cx="11277295" cy="1051560"/>
-          </a:xfrm>
-          <a:prstGeom prst="roundRect">
-            <a:avLst>
-              <a:gd name="adj" fmla="val 12000"/>
-            </a:avLst>
-          </a:prstGeom>
-          <a:solidFill>
-            <a:srgbClr val="E8F4FA"/>
-          </a:solidFill>
-          <a:ln>
-            <a:noFill/>
-          </a:ln>
-        </p:spPr>
-        <p:style>
-          <a:lnRef idx="1">
-            <a:schemeClr val="accent1"/>
-          </a:lnRef>
-          <a:fillRef idx="3">
-            <a:schemeClr val="accent1"/>
-          </a:fillRef>
-          <a:effectRef idx="2">
-            <a:schemeClr val="accent1"/>
-          </a:effectRef>
-          <a:fontRef idx="minor">
-            <a:schemeClr val="lt1"/>
-          </a:fontRef>
-        </p:style>
-        <p:txBody>
-          <a:bodyPr rtlCol="0" anchor="ctr"/>
-          <a:lstStyle/>
-          <a:p>
-            <a:pPr algn="ctr"/>
-          </a:p>
-        </p:txBody>
-      </p:sp>
-      <p:sp>
-        <p:nvSpPr>
-          <p:cNvPr id="11" name="Rounded Rectangle 10"/>
-          <p:cNvSpPr/>
-          <p:nvPr/>
-        </p:nvSpPr>
-        <p:spPr>
-          <a:xfrm>
-            <a:off x="594360" y="3108960"/>
-            <a:ext cx="438912" cy="438912"/>
-          </a:xfrm>
-          <a:prstGeom prst="roundRect">
-            <a:avLst>
-              <a:gd name="adj" fmla="val 12000"/>
-            </a:avLst>
-          </a:prstGeom>
-          <a:solidFill>
-            <a:srgbClr val="095292"/>
-          </a:solidFill>
-          <a:ln>
-            <a:noFill/>
-          </a:ln>
-        </p:spPr>
-        <p:style>
-          <a:lnRef idx="1">
-            <a:schemeClr val="accent1"/>
-          </a:lnRef>
-          <a:fillRef idx="3">
-            <a:schemeClr val="accent1"/>
-          </a:fillRef>
-          <a:effectRef idx="2">
-            <a:schemeClr val="accent1"/>
-          </a:effectRef>
-          <a:fontRef idx="minor">
-            <a:schemeClr val="lt1"/>
-          </a:fontRef>
-        </p:style>
-        <p:txBody>
-          <a:bodyPr rtlCol="0" anchor="ctr"/>
-          <a:lstStyle/>
-          <a:p>
-            <a:pPr algn="ctr"/>
-          </a:p>
-        </p:txBody>
-      </p:sp>
-      <p:sp>
-        <p:nvSpPr>
-          <p:cNvPr id="12" name="TextBox 11"/>
-          <p:cNvSpPr txBox="1"/>
-          <p:nvPr/>
-        </p:nvSpPr>
-        <p:spPr>
-          <a:xfrm>
-            <a:off x="594360" y="3108960"/>
-            <a:ext cx="438912" cy="438912"/>
-          </a:xfrm>
-          <a:prstGeom prst="rect">
-            <a:avLst/>
-          </a:prstGeom>
-          <a:noFill/>
-        </p:spPr>
-        <p:txBody>
-          <a:bodyPr wrap="square" anchor="ctr"/>
-          <a:lstStyle/>
-          <a:p>
-            <a:pPr algn="ctr"/>
-            <a:r>
-              <a:rPr sz="1600" b="1" i="0">
-                <a:solidFill>
-                  <a:srgbClr val="FFFFFF"/>
-                </a:solidFill>
-                <a:latin typeface="Calibri"/>
-              </a:rPr>
-              <a:t>2</a:t>
-            </a:r>
-          </a:p>
-        </p:txBody>
-      </p:sp>
-      <p:sp>
-        <p:nvSpPr>
-          <p:cNvPr id="13" name="TextBox 12"/>
-          <p:cNvSpPr txBox="1"/>
-          <p:nvPr/>
-        </p:nvSpPr>
-        <p:spPr>
-          <a:xfrm>
-            <a:off x="1188720" y="2894076"/>
-            <a:ext cx="10271455" cy="886968"/>
-          </a:xfrm>
-          <a:prstGeom prst="rect">
-            <a:avLst/>
-          </a:prstGeom>
-          <a:noFill/>
-        </p:spPr>
-        <p:txBody>
-          <a:bodyPr wrap="square" anchor="ctr"/>
-          <a:lstStyle/>
-          <a:p>
-            <a:r>
-              <a:rPr sz="1500" b="1" i="0">
-                <a:solidFill>
-                  <a:srgbClr val="095292"/>
-                </a:solidFill>
-                <a:latin typeface="Calibri"/>
-              </a:rPr>
-              <a:t>COMBINAR</a:t>
+              <a:t> Sacar un paso, un requisito o un dato.</a:t>
             </a:r>
           </a:p>
           <a:p>
             <a:pPr>
-              <a:spcBef>
-                <a:spcPts val="200"/>
-              </a:spcBef>
+              <a:spcAft>
+                <a:spcPts val="800"/>
+              </a:spcAft>
             </a:pPr>
             <a:r>
-              <a:rPr sz="1300" b="0" i="0">
+              <a:rPr sz="2000" b="0" i="0">
                 <a:solidFill>
                   <a:srgbClr val="333333"/>
                 </a:solidFill>
                 <a:latin typeface="Calibri"/>
               </a:rPr>
-              <a:t>Juntar dos cosas que ya existen y que nadie había juntado en este contexto: una lista pública + un mensaje automático.</a:t>
-            </a:r>
-          </a:p>
-        </p:txBody>
-      </p:sp>
-      <p:sp>
-        <p:nvSpPr>
-          <p:cNvPr id="14" name="Rounded Rectangle 13"/>
-          <p:cNvSpPr/>
-          <p:nvPr/>
-        </p:nvSpPr>
-        <p:spPr>
-          <a:xfrm>
-            <a:off x="457200" y="3945636"/>
-            <a:ext cx="11277295" cy="1051560"/>
-          </a:xfrm>
-          <a:prstGeom prst="roundRect">
-            <a:avLst>
-              <a:gd name="adj" fmla="val 12000"/>
-            </a:avLst>
-          </a:prstGeom>
-          <a:solidFill>
-            <a:srgbClr val="F2F2F2"/>
-          </a:solidFill>
-          <a:ln>
-            <a:noFill/>
-          </a:ln>
-        </p:spPr>
-        <p:style>
-          <a:lnRef idx="1">
-            <a:schemeClr val="accent1"/>
-          </a:lnRef>
-          <a:fillRef idx="3">
-            <a:schemeClr val="accent1"/>
-          </a:fillRef>
-          <a:effectRef idx="2">
-            <a:schemeClr val="accent1"/>
-          </a:effectRef>
-          <a:fontRef idx="minor">
-            <a:schemeClr val="lt1"/>
-          </a:fontRef>
-        </p:style>
-        <p:txBody>
-          <a:bodyPr rtlCol="0" anchor="ctr"/>
-          <a:lstStyle/>
-          <a:p>
-            <a:pPr algn="ctr"/>
-          </a:p>
-        </p:txBody>
-      </p:sp>
-      <p:sp>
-        <p:nvSpPr>
-          <p:cNvPr id="15" name="Rounded Rectangle 14"/>
-          <p:cNvSpPr/>
-          <p:nvPr/>
-        </p:nvSpPr>
-        <p:spPr>
-          <a:xfrm>
-            <a:off x="594360" y="4251960"/>
-            <a:ext cx="438912" cy="438912"/>
-          </a:xfrm>
-          <a:prstGeom prst="roundRect">
-            <a:avLst>
-              <a:gd name="adj" fmla="val 12000"/>
-            </a:avLst>
-          </a:prstGeom>
-          <a:solidFill>
-            <a:srgbClr val="095292"/>
-          </a:solidFill>
-          <a:ln>
-            <a:noFill/>
-          </a:ln>
-        </p:spPr>
-        <p:style>
-          <a:lnRef idx="1">
-            <a:schemeClr val="accent1"/>
-          </a:lnRef>
-          <a:fillRef idx="3">
-            <a:schemeClr val="accent1"/>
-          </a:fillRef>
-          <a:effectRef idx="2">
-            <a:schemeClr val="accent1"/>
-          </a:effectRef>
-          <a:fontRef idx="minor">
-            <a:schemeClr val="lt1"/>
-          </a:fontRef>
-        </p:style>
-        <p:txBody>
-          <a:bodyPr rtlCol="0" anchor="ctr"/>
-          <a:lstStyle/>
-          <a:p>
-            <a:pPr algn="ctr"/>
-          </a:p>
-        </p:txBody>
-      </p:sp>
-      <p:sp>
-        <p:nvSpPr>
-          <p:cNvPr id="16" name="TextBox 15"/>
-          <p:cNvSpPr txBox="1"/>
-          <p:nvPr/>
-        </p:nvSpPr>
-        <p:spPr>
-          <a:xfrm>
-            <a:off x="594360" y="4251960"/>
-            <a:ext cx="438912" cy="438912"/>
-          </a:xfrm>
-          <a:prstGeom prst="rect">
-            <a:avLst/>
-          </a:prstGeom>
-          <a:noFill/>
-        </p:spPr>
-        <p:txBody>
-          <a:bodyPr wrap="square" anchor="ctr"/>
-          <a:lstStyle/>
-          <a:p>
-            <a:pPr algn="ctr"/>
-            <a:r>
-              <a:rPr sz="1600" b="1" i="0">
-                <a:solidFill>
-                  <a:srgbClr val="FFFFFF"/>
-                </a:solidFill>
-                <a:latin typeface="Calibri"/>
-              </a:rPr>
-              <a:t>3</a:t>
-            </a:r>
-          </a:p>
-        </p:txBody>
-      </p:sp>
-      <p:sp>
-        <p:nvSpPr>
-          <p:cNvPr id="17" name="TextBox 16"/>
-          <p:cNvSpPr txBox="1"/>
-          <p:nvPr/>
-        </p:nvSpPr>
-        <p:spPr>
-          <a:xfrm>
-            <a:off x="1188720" y="4037076"/>
-            <a:ext cx="10271455" cy="886968"/>
-          </a:xfrm>
-          <a:prstGeom prst="rect">
-            <a:avLst/>
-          </a:prstGeom>
-          <a:noFill/>
-        </p:spPr>
-        <p:txBody>
-          <a:bodyPr wrap="square" anchor="ctr"/>
-          <a:lstStyle/>
-          <a:p>
-            <a:r>
-              <a:rPr sz="1500" b="1" i="0">
-                <a:solidFill>
-                  <a:srgbClr val="095292"/>
-                </a:solidFill>
-                <a:latin typeface="Calibri"/>
-              </a:rPr>
-              <a:t>INVERTIR</a:t>
+              <a:t>–   </a:t>
+            </a:r>
+            <a:r>
+              <a:rPr sz="2000" b="1" i="0">
+                <a:solidFill>
+                  <a:srgbClr val="333333"/>
+                </a:solidFill>
+                <a:latin typeface="Calibri"/>
+              </a:rPr>
+              <a:t>COMBINAR:</a:t>
+            </a:r>
+            <a:r>
+              <a:rPr sz="2000" b="0" i="0">
+                <a:solidFill>
+                  <a:srgbClr val="333333"/>
+                </a:solidFill>
+                <a:latin typeface="Calibri"/>
+              </a:rPr>
+              <a:t> Juntar dos cosas que ya existen y que nadie había juntado en este contexto: una lista pública + un mensaje automático.</a:t>
             </a:r>
           </a:p>
           <a:p>
             <a:pPr>
-              <a:spcBef>
-                <a:spcPts val="200"/>
-              </a:spcBef>
+              <a:spcAft>
+                <a:spcPts val="800"/>
+              </a:spcAft>
             </a:pPr>
             <a:r>
-              <a:rPr sz="1300" b="0" i="0">
+              <a:rPr sz="2000" b="0" i="0">
                 <a:solidFill>
                   <a:srgbClr val="333333"/>
                 </a:solidFill>
                 <a:latin typeface="Calibri"/>
               </a:rPr>
-              <a:t>Dar vuelta a quién hace el trabajo o cuándo se hace: que el usuario consulte en vez de que alguien responda; que el dato se cargue al cerrar y no en el momento.</a:t>
-            </a:r>
-          </a:p>
-        </p:txBody>
-      </p:sp>
-      <p:sp>
-        <p:nvSpPr>
-          <p:cNvPr id="18" name="Rounded Rectangle 17"/>
-          <p:cNvSpPr/>
-          <p:nvPr/>
-        </p:nvSpPr>
-        <p:spPr>
-          <a:xfrm>
-            <a:off x="457200" y="5088636"/>
-            <a:ext cx="11277295" cy="1051560"/>
-          </a:xfrm>
-          <a:prstGeom prst="roundRect">
-            <a:avLst>
-              <a:gd name="adj" fmla="val 12000"/>
-            </a:avLst>
-          </a:prstGeom>
-          <a:solidFill>
-            <a:srgbClr val="E8F4FA"/>
-          </a:solidFill>
-          <a:ln>
-            <a:noFill/>
-          </a:ln>
-        </p:spPr>
-        <p:style>
-          <a:lnRef idx="1">
-            <a:schemeClr val="accent1"/>
-          </a:lnRef>
-          <a:fillRef idx="3">
-            <a:schemeClr val="accent1"/>
-          </a:fillRef>
-          <a:effectRef idx="2">
-            <a:schemeClr val="accent1"/>
-          </a:effectRef>
-          <a:fontRef idx="minor">
-            <a:schemeClr val="lt1"/>
-          </a:fontRef>
-        </p:style>
-        <p:txBody>
-          <a:bodyPr rtlCol="0" anchor="ctr"/>
-          <a:lstStyle/>
-          <a:p>
-            <a:pPr algn="ctr"/>
-          </a:p>
-        </p:txBody>
-      </p:sp>
-      <p:sp>
-        <p:nvSpPr>
-          <p:cNvPr id="19" name="Rounded Rectangle 18"/>
-          <p:cNvSpPr/>
-          <p:nvPr/>
-        </p:nvSpPr>
-        <p:spPr>
-          <a:xfrm>
-            <a:off x="594360" y="5394960"/>
-            <a:ext cx="438912" cy="438912"/>
-          </a:xfrm>
-          <a:prstGeom prst="roundRect">
-            <a:avLst>
-              <a:gd name="adj" fmla="val 12000"/>
-            </a:avLst>
-          </a:prstGeom>
-          <a:solidFill>
-            <a:srgbClr val="095292"/>
-          </a:solidFill>
-          <a:ln>
-            <a:noFill/>
-          </a:ln>
-        </p:spPr>
-        <p:style>
-          <a:lnRef idx="1">
-            <a:schemeClr val="accent1"/>
-          </a:lnRef>
-          <a:fillRef idx="3">
-            <a:schemeClr val="accent1"/>
-          </a:fillRef>
-          <a:effectRef idx="2">
-            <a:schemeClr val="accent1"/>
-          </a:effectRef>
-          <a:fontRef idx="minor">
-            <a:schemeClr val="lt1"/>
-          </a:fontRef>
-        </p:style>
-        <p:txBody>
-          <a:bodyPr rtlCol="0" anchor="ctr"/>
-          <a:lstStyle/>
-          <a:p>
-            <a:pPr algn="ctr"/>
+              <a:t>–   </a:t>
+            </a:r>
+            <a:r>
+              <a:rPr sz="2000" b="1" i="0">
+                <a:solidFill>
+                  <a:srgbClr val="333333"/>
+                </a:solidFill>
+                <a:latin typeface="Calibri"/>
+              </a:rPr>
+              <a:t>INVERTIR:</a:t>
+            </a:r>
+            <a:r>
+              <a:rPr sz="2000" b="0" i="0">
+                <a:solidFill>
+                  <a:srgbClr val="333333"/>
+                </a:solidFill>
+                <a:latin typeface="Calibri"/>
+              </a:rPr>
+              <a:t> Dar vuelta a quién hace el trabajo o cuándo se hace: que el usuario consulte en vez de que alguien responda;</a:t>
+            </a:r>
+          </a:p>
+          <a:p>
+            <a:pPr>
+              <a:spcAft>
+                <a:spcPts val="800"/>
+              </a:spcAft>
+            </a:pPr>
+            <a:r>
+              <a:rPr sz="2000" b="0" i="0">
+                <a:solidFill>
+                  <a:srgbClr val="333333"/>
+                </a:solidFill>
+                <a:latin typeface="Calibri"/>
+              </a:rPr>
+              <a:t>–   </a:t>
+            </a:r>
+            <a:r>
+              <a:rPr sz="2000" b="1" i="0">
+                <a:solidFill>
+                  <a:srgbClr val="333333"/>
+                </a:solidFill>
+                <a:latin typeface="Calibri"/>
+              </a:rPr>
+              <a:t>ADAPTAR DE OTRO DOMINIO:</a:t>
+            </a:r>
+            <a:r>
+              <a:rPr sz="2000" b="0" i="0">
+                <a:solidFill>
+                  <a:srgbClr val="333333"/>
+                </a:solidFill>
+                <a:latin typeface="Calibri"/>
+              </a:rPr>
+              <a:t> Traer una solución que funciona en otro campo.</a:t>
+            </a:r>
           </a:p>
         </p:txBody>
       </p:sp>
       <p:sp>
         <p:nvSpPr>
           <p:cNvPr id="20" name="TextBox 19"/>
-          <p:cNvSpPr txBox="1"/>
-          <p:nvPr/>
-        </p:nvSpPr>
-        <p:spPr>
-          <a:xfrm>
-            <a:off x="594360" y="5394960"/>
-            <a:ext cx="438912" cy="438912"/>
-          </a:xfrm>
-          <a:prstGeom prst="rect">
-            <a:avLst/>
-          </a:prstGeom>
-          <a:noFill/>
-        </p:spPr>
-        <p:txBody>
-          <a:bodyPr wrap="square" anchor="ctr"/>
-          <a:lstStyle/>
-          <a:p>
-            <a:pPr algn="ctr"/>
-            <a:r>
-              <a:rPr sz="1600" b="1" i="0">
-                <a:solidFill>
-                  <a:srgbClr val="FFFFFF"/>
-                </a:solidFill>
-                <a:latin typeface="Calibri"/>
-              </a:rPr>
-              <a:t>4</a:t>
-            </a:r>
-          </a:p>
-        </p:txBody>
-      </p:sp>
-      <p:sp>
-        <p:nvSpPr>
-          <p:cNvPr id="21" name="TextBox 20"/>
-          <p:cNvSpPr txBox="1"/>
-          <p:nvPr/>
-        </p:nvSpPr>
-        <p:spPr>
-          <a:xfrm>
-            <a:off x="1188720" y="5180076"/>
-            <a:ext cx="10271455" cy="886968"/>
-          </a:xfrm>
-          <a:prstGeom prst="rect">
-            <a:avLst/>
-          </a:prstGeom>
-          <a:noFill/>
-        </p:spPr>
-        <p:txBody>
-          <a:bodyPr wrap="square" anchor="ctr"/>
-          <a:lstStyle/>
-          <a:p>
-            <a:r>
-              <a:rPr sz="1500" b="1" i="0">
-                <a:solidFill>
-                  <a:srgbClr val="095292"/>
-                </a:solidFill>
-                <a:latin typeface="Calibri"/>
-              </a:rPr>
-              <a:t>ADAPTAR DE OTRO DOMINIO</a:t>
-            </a:r>
-          </a:p>
-          <a:p>
-            <a:pPr>
-              <a:spcBef>
-                <a:spcPts val="200"/>
-              </a:spcBef>
-            </a:pPr>
-            <a:r>
-              <a:rPr sz="1300" b="0" i="0">
-                <a:solidFill>
-                  <a:srgbClr val="333333"/>
-                </a:solidFill>
-                <a:latin typeface="Calibri"/>
-              </a:rPr>
-              <a:t>Traer una solución que funciona en otro campo. La disponibilidad de un libro y la de una mesa en un restaurante son el mismo problema.</a:t>
-            </a:r>
-          </a:p>
-        </p:txBody>
-      </p:sp>
-      <p:sp>
-        <p:nvSpPr>
-          <p:cNvPr id="22" name="TextBox 21"/>
           <p:cNvSpPr txBox="1"/>
           <p:nvPr/>
         </p:nvSpPr>
@@ -11287,6 +10741,195 @@
   <p:clrMapOvr>
     <a:masterClrMapping/>
   </p:clrMapOvr>
+  <p:timing>
+    <p:tnLst>
+      <p:par>
+        <p:cTn id="1" dur="indefinite" restart="never" nodeType="tmRoot">
+          <p:childTnLst>
+            <p:seq concurrent="1" nextAc="seek">
+              <p:cTn id="2" dur="indefinite" nodeType="mainSeq">
+                <p:childTnLst>
+                  <p:par>
+                    <p:cTn id="3" fill="hold">
+                      <p:stCondLst>
+                        <p:cond delay="indefinite"/>
+                      </p:stCondLst>
+                      <p:childTnLst>
+                        <p:par>
+                          <p:cTn id="4" fill="hold">
+                            <p:stCondLst>
+                              <p:cond delay="0"/>
+                            </p:stCondLst>
+                            <p:childTnLst>
+                              <p:par>
+                                <p:cTn id="5" presetID="10" presetClass="entr" presetSubtype="0" fill="hold" nodeType="clickEffect">
+                                  <p:stCondLst>
+                                    <p:cond delay="0"/>
+                                  </p:stCondLst>
+                                  <p:childTnLst>
+                                    <p:set>
+                                      <p:cBhvr>
+                                        <p:cTn id="6" dur="1" fill="hold">
+                                          <p:stCondLst>
+                                            <p:cond delay="0"/>
+                                          </p:stCondLst>
+                                        </p:cTn>
+                                        <p:tgtEl>
+                                          <p:spTgt spid="8"/>
+                                        </p:tgtEl>
+                                        <p:attrNameLst>
+                                          <p:attrName>style.visibility</p:attrName>
+                                        </p:attrNameLst>
+                                      </p:cBhvr>
+                                      <p:to>
+                                        <p:strVal val="visible"/>
+                                      </p:to>
+                                    </p:set>
+                                    <p:animEffect transition="in" filter="fade">
+                                      <p:cBhvr>
+                                        <p:cTn id="7" dur="450"/>
+                                        <p:tgtEl>
+                                          <p:spTgt spid="8"/>
+                                        </p:tgtEl>
+                                      </p:cBhvr>
+                                    </p:animEffect>
+                                  </p:childTnLst>
+                                </p:cTn>
+                              </p:par>
+                            </p:childTnLst>
+                          </p:cTn>
+                        </p:par>
+                      </p:childTnLst>
+                    </p:cTn>
+                  </p:par>
+                  <p:par>
+                    <p:cTn id="8" fill="hold">
+                      <p:stCondLst>
+                        <p:cond delay="indefinite"/>
+                      </p:stCondLst>
+                      <p:childTnLst>
+                        <p:par>
+                          <p:cTn id="9" fill="hold">
+                            <p:stCondLst>
+                              <p:cond delay="0"/>
+                            </p:stCondLst>
+                            <p:childTnLst>
+                              <p:par>
+                                <p:cTn id="10" presetID="10" presetClass="entr" presetSubtype="0" fill="hold" nodeType="clickEffect">
+                                  <p:stCondLst>
+                                    <p:cond delay="0"/>
+                                  </p:stCondLst>
+                                  <p:childTnLst>
+                                    <p:set>
+                                      <p:cBhvr>
+                                        <p:cTn id="11" dur="1" fill="hold">
+                                          <p:stCondLst>
+                                            <p:cond delay="0"/>
+                                          </p:stCondLst>
+                                        </p:cTn>
+                                        <p:tgtEl>
+                                          <p:spTgt spid="9"/>
+                                        </p:tgtEl>
+                                        <p:attrNameLst>
+                                          <p:attrName>style.visibility</p:attrName>
+                                        </p:attrNameLst>
+                                      </p:cBhvr>
+                                      <p:to>
+                                        <p:strVal val="visible"/>
+                                      </p:to>
+                                    </p:set>
+                                    <p:animEffect transition="in" filter="fade">
+                                      <p:cBhvr>
+                                        <p:cTn id="12" dur="450"/>
+                                        <p:tgtEl>
+                                          <p:spTgt spid="9"/>
+                                        </p:tgtEl>
+                                      </p:cBhvr>
+                                    </p:animEffect>
+                                  </p:childTnLst>
+                                </p:cTn>
+                              </p:par>
+                            </p:childTnLst>
+                          </p:cTn>
+                        </p:par>
+                      </p:childTnLst>
+                    </p:cTn>
+                  </p:par>
+                  <p:par>
+                    <p:cTn id="13" fill="hold">
+                      <p:stCondLst>
+                        <p:cond delay="indefinite"/>
+                      </p:stCondLst>
+                      <p:childTnLst>
+                        <p:par>
+                          <p:cTn id="14" fill="hold">
+                            <p:stCondLst>
+                              <p:cond delay="0"/>
+                            </p:stCondLst>
+                            <p:childTnLst>
+                              <p:par>
+                                <p:cTn id="15" presetID="10" presetClass="entr" presetSubtype="0" fill="hold" nodeType="clickEffect">
+                                  <p:stCondLst>
+                                    <p:cond delay="0"/>
+                                  </p:stCondLst>
+                                  <p:childTnLst>
+                                    <p:set>
+                                      <p:cBhvr>
+                                        <p:cTn id="16" dur="1" fill="hold">
+                                          <p:stCondLst>
+                                            <p:cond delay="0"/>
+                                          </p:stCondLst>
+                                        </p:cTn>
+                                        <p:tgtEl>
+                                          <p:spTgt spid="10"/>
+                                        </p:tgtEl>
+                                        <p:attrNameLst>
+                                          <p:attrName>style.visibility</p:attrName>
+                                        </p:attrNameLst>
+                                      </p:cBhvr>
+                                      <p:to>
+                                        <p:strVal val="visible"/>
+                                      </p:to>
+                                    </p:set>
+                                    <p:animEffect transition="in" filter="fade">
+                                      <p:cBhvr>
+                                        <p:cTn id="17" dur="450"/>
+                                        <p:tgtEl>
+                                          <p:spTgt spid="10"/>
+                                        </p:tgtEl>
+                                      </p:cBhvr>
+                                    </p:animEffect>
+                                  </p:childTnLst>
+                                </p:cTn>
+                              </p:par>
+                            </p:childTnLst>
+                          </p:cTn>
+                        </p:par>
+                      </p:childTnLst>
+                    </p:cTn>
+                  </p:par>
+                </p:childTnLst>
+              </p:cTn>
+              <p:prevCondLst>
+                <p:cond evt="onPrev" delay="0">
+                  <p:tgtEl>
+                    <p:sldTgt/>
+                  </p:tgtEl>
+                </p:cond>
+              </p:prevCondLst>
+              <p:nextCondLst>
+                <p:cond evt="onNext" delay="0">
+                  <p:tgtEl>
+                    <p:sldTgt/>
+                  </p:tgtEl>
+                </p:cond>
+              </p:nextCondLst>
+            </p:seq>
+          </p:childTnLst>
+        </p:cTn>
+      </p:par>
+    </p:tnLst>
+  </p:timing>
 </p:sld>
 </file>
 

--- a/Introduccion a la Ingenieria/Clases/Clase 9 - Estrategias de innovacion en Ingenieria/Presentacion.pptx
+++ b/Introduccion a la Ingenieria/Clases/Clase 9 - Estrategias de innovacion en Ingenieria/Presentacion.pptx
@@ -8011,118 +8011,14 @@
       </p:sp>
       <p:sp>
         <p:nvSpPr>
-          <p:cNvPr id="5" name="Rounded Rectangle 4"/>
-          <p:cNvSpPr/>
-          <p:nvPr/>
-        </p:nvSpPr>
-        <p:spPr>
-          <a:xfrm>
-            <a:off x="5797149" y="1573813"/>
-            <a:ext cx="6010497" cy="4057845"/>
-          </a:xfrm>
-          <a:prstGeom prst="roundRect">
-            <a:avLst>
-              <a:gd name="adj" fmla="val 4000"/>
-            </a:avLst>
-          </a:prstGeom>
-          <a:solidFill>
-            <a:srgbClr val="E8EEF4"/>
-          </a:solidFill>
-          <a:ln>
-            <a:noFill/>
-          </a:ln>
-        </p:spPr>
-        <p:style>
-          <a:lnRef idx="1">
-            <a:schemeClr val="accent1"/>
-          </a:lnRef>
-          <a:fillRef idx="3">
-            <a:schemeClr val="accent1"/>
-          </a:fillRef>
-          <a:effectRef idx="2">
-            <a:schemeClr val="accent1"/>
-          </a:effectRef>
-          <a:fontRef idx="minor">
-            <a:schemeClr val="lt1"/>
-          </a:fontRef>
-        </p:style>
-        <p:txBody>
-          <a:bodyPr rtlCol="0" anchor="ctr"/>
-          <a:lstStyle/>
-          <a:p>
-            <a:pPr algn="ctr"/>
-          </a:p>
-        </p:txBody>
-      </p:sp>
-      <p:pic>
-        <p:nvPicPr>
-          <p:cNvPr id="6" name="Picture 5" descr="students-learning-laptops-classroom.jpg"/>
-          <p:cNvPicPr>
-            <a:picLocks noChangeAspect="1"/>
-          </p:cNvPicPr>
-          <p:nvPr/>
-        </p:nvPicPr>
-        <p:blipFill>
-          <a:blip r:embed="rId2"/>
-          <a:stretch>
-            <a:fillRect/>
-          </a:stretch>
-        </p:blipFill>
-        <p:spPr>
-          <a:xfrm>
-            <a:off x="5870301" y="1646965"/>
-            <a:ext cx="5864193" cy="3911541"/>
-          </a:xfrm>
-          <a:prstGeom prst="rect">
-            <a:avLst/>
-          </a:prstGeom>
-        </p:spPr>
-      </p:pic>
-      <p:sp>
-        <p:nvSpPr>
-          <p:cNvPr id="7" name="TextBox 6"/>
+          <p:cNvPr id="5" name="TextBox 4"/>
           <p:cNvSpPr txBox="1"/>
           <p:nvPr/>
         </p:nvSpPr>
         <p:spPr>
           <a:xfrm>
-            <a:off x="5870301" y="5961888"/>
-            <a:ext cx="5864193" cy="320040"/>
-          </a:xfrm>
-          <a:prstGeom prst="rect">
-            <a:avLst/>
-          </a:prstGeom>
-          <a:noFill/>
-        </p:spPr>
-        <p:txBody>
-          <a:bodyPr wrap="square">
-            <a:spAutoFit/>
-          </a:bodyPr>
-          <a:lstStyle/>
-          <a:p>
-            <a:pPr algn="ctr"/>
-            <a:r>
-              <a:rPr sz="1100" b="0" i="1">
-                <a:solidFill>
-                  <a:srgbClr val="666666"/>
-                </a:solidFill>
-                <a:latin typeface="Calibri"/>
-              </a:rPr>
-              <a:t>Foto: Mikhail Nilov · Pexels</a:t>
-            </a:r>
-          </a:p>
-        </p:txBody>
-      </p:sp>
-      <p:sp>
-        <p:nvSpPr>
-          <p:cNvPr id="8" name="TextBox 7"/>
-          <p:cNvSpPr txBox="1"/>
-          <p:nvPr/>
-        </p:nvSpPr>
-        <p:spPr>
-          <a:xfrm>
-            <a:off x="457200" y="1353312"/>
-            <a:ext cx="5093061" cy="5047488"/>
+            <a:off x="457200" y="1170432"/>
+            <a:ext cx="11277295" cy="5230368"/>
           </a:xfrm>
           <a:prstGeom prst="rect">
             <a:avLst/>
@@ -8292,7 +8188,7 @@
       </p:sp>
       <p:sp>
         <p:nvSpPr>
-          <p:cNvPr id="9" name="TextBox 8"/>
+          <p:cNvPr id="6" name="TextBox 5"/>
           <p:cNvSpPr txBox="1"/>
           <p:nvPr/>
         </p:nvSpPr>

--- a/Introduccion a la Ingenieria/Clases/Clase 9 - Estrategias de innovacion en Ingenieria/Presentacion.pptx
+++ b/Introduccion a la Ingenieria/Clases/Clase 9 - Estrategias de innovacion en Ingenieria/Presentacion.pptx
@@ -4900,9 +4900,33 @@
           </a:prstGeom>
         </p:spPr>
       </p:pic>
-      <p:sp>
-        <p:nvSpPr>
-          <p:cNvPr id="18" name="TextBox 17"/>
+      <p:pic>
+        <p:nvPicPr>
+          <p:cNvPr id="10" name="Picture 9" descr="busqueda-antecedente-paso5.png"/>
+          <p:cNvPicPr>
+            <a:picLocks noChangeAspect="1"/>
+          </p:cNvPicPr>
+          <p:nvPr/>
+        </p:nvPicPr>
+        <p:blipFill>
+          <a:blip r:embed="rId6"/>
+          <a:stretch>
+            <a:fillRect/>
+          </a:stretch>
+        </p:blipFill>
+        <p:spPr>
+          <a:xfrm>
+            <a:off x="5876318" y="1261872"/>
+            <a:ext cx="5852160" cy="4681728"/>
+          </a:xfrm>
+          <a:prstGeom prst="rect">
+            <a:avLst/>
+          </a:prstGeom>
+        </p:spPr>
+      </p:pic>
+      <p:sp>
+        <p:nvSpPr>
+          <p:cNvPr id="23" name="TextBox 22"/>
           <p:cNvSpPr txBox="1"/>
           <p:nvPr/>
         </p:nvSpPr>
@@ -4937,7 +4961,7 @@
       </p:sp>
       <p:sp>
         <p:nvSpPr>
-          <p:cNvPr id="19" name="TextBox 18"/>
+          <p:cNvPr id="24" name="TextBox 23"/>
           <p:cNvSpPr txBox="1"/>
           <p:nvPr/>
         </p:nvSpPr>
@@ -5096,7 +5120,7 @@
       </p:sp>
       <p:sp>
         <p:nvSpPr>
-          <p:cNvPr id="20" name="TextBox 19"/>
+          <p:cNvPr id="25" name="TextBox 24"/>
           <p:cNvSpPr txBox="1"/>
           <p:nvPr/>
         </p:nvSpPr>
@@ -5289,6 +5313,59 @@
                                         <p:cTn id="17" dur="450"/>
                                         <p:tgtEl>
                                           <p:spTgt spid="9"/>
+                                        </p:tgtEl>
+                                      </p:cBhvr>
+                                    </p:animEffect>
+                                  </p:childTnLst>
+                                </p:cTn>
+                              </p:par>
+                            </p:childTnLst>
+                          </p:cTn>
+                        </p:par>
+                      </p:childTnLst>
+                    </p:cTn>
+                  </p:par>
+                  <p:par>
+                    <p:cTn id="18" fill="hold">
+                      <p:stCondLst>
+                        <p:cond delay="indefinite"/>
+                      </p:stCondLst>
+                      <p:childTnLst>
+                        <p:par>
+                          <p:cTn id="19" fill="hold">
+                            <p:stCondLst>
+                              <p:cond delay="0"/>
+                            </p:stCondLst>
+                            <p:childTnLst>
+                              <p:par>
+                                <p:cTn id="20" presetID="10" presetClass="entr" presetSubtype="0" fill="hold" nodeType="clickEffect">
+                                  <p:stCondLst>
+                                    <p:cond delay="0"/>
+                                  </p:stCondLst>
+                                  <p:childTnLst>
+                                    <p:set>
+                                      <p:cBhvr>
+                                        <p:cTn id="21" dur="1" fill="hold">
+                                          <p:stCondLst>
+                                            <p:cond delay="0"/>
+                                          </p:stCondLst>
+                                        </p:cTn>
+                                        <p:tgtEl>
+                                          <p:spTgt spid="10"/>
+                                        </p:tgtEl>
+                                        <p:attrNameLst>
+                                          <p:attrName>style.visibility</p:attrName>
+                                        </p:attrNameLst>
+                                      </p:cBhvr>
+                                      <p:to>
+                                        <p:strVal val="visible"/>
+                                      </p:to>
+                                    </p:set>
+                                    <p:animEffect transition="in" filter="fade">
+                                      <p:cBhvr>
+                                        <p:cTn id="22" dur="450"/>
+                                        <p:tgtEl>
+                                          <p:spTgt spid="10"/>
                                         </p:tgtEl>
                                       </p:cBhvr>
                                     </p:animEffect>

--- a/Introduccion a la Ingenieria/Clases/Clase 9 - Estrategias de innovacion en Ingenieria/Presentacion.pptx
+++ b/Introduccion a la Ingenieria/Clases/Clase 9 - Estrategias de innovacion en Ingenieria/Presentacion.pptx
@@ -736,7 +736,7 @@
           <a:p/>
           <a:p>
             <a:r>
-              <a:t>Lo que hay que evitar es que el grupo lo lea como un desaire. El encuadre que funciona: buscar antecedentes no le quita mérito al proyecto, le da argumento. Un equipo que dice «esto no existe» está apostando; un equipo que dice «existen estas tres soluciones, ninguna funciona sin computador en el mostrador, y nosotros resolvemos justamente eso» tiene una posición defendible ante cualquiera. La segunda frase es la que se califica en la Clase 15.</a:t>
+              <a:t>Lo que hay que evitar es que el grupo lo lea como una ofensa. El encuadre que funciona: buscar antecedentes no le quita mérito al proyecto, le da argumento. Un equipo que dice «esto no existe» está apostando; un equipo que dice «existen estas tres soluciones, ninguna funciona sin computador en el mostrador, y nosotros resolvemos justamente eso» tiene una posición defendible ante cualquiera. La segunda frase es la que se califica en la Clase 15.</a:t>
             </a:r>
           </a:p>
           <a:p/>
@@ -1130,7 +1130,7 @@
           <a:p/>
           <a:p>
             <a:r>
-              <a:t>El asistente de IA merece su propia fila y hay que ser preciso, porque este curso lo autoriza en dos sesiones y lo prohíbe en el resto. Sirve para buscar —pistas, sinónimos, el término en inglés que uno no conoce— y no sirve para citar. La razón técnica hay que decirla explícitamente: un modelo de lenguaje genera texto plausible, y una referencia bibliográfica plausible tiene autor, título, revista y año con formato perfecto aunque no exista. Ha habido abogados sancionados por presentar ante un juez citas de jurisprudencia generadas así. La regla del curso es simple y verificable: si no puede abrir el enlace y ver el documento, no lo cite.</a:t>
+              <a:t>El asistente de IA merece su propia fila y hay que ser preciso, porque este curso lo autoriza en dos sesiones y lo prohíbe en el resto. Sirve para buscar —pistas, sinónimos, el término en inglés que uno no conoce— y no sirve para citar. La razón técnica hay que decirla explícitamente: un modelo de lenguaje genera texto que suena creíble, y una referencia bibliográfica que suena creíble tiene autor, título, revista y año con formato perfecto aunque no exista. Ha habido abogados sancionados por presentar ante un juez citas de jurisprudencia generadas así. La regla del curso es simple y verificable: si no puede abrir el enlace y ver el documento, no lo cite.</a:t>
             </a:r>
           </a:p>
           <a:p/>
@@ -1224,7 +1224,7 @@
           <a:p/>
           <a:p>
             <a:r>
-              <a:t>El asistente de IA merece su propia fila y hay que ser preciso, porque este curso lo autoriza en dos sesiones y lo prohíbe en el resto. Sirve para buscar —pistas, sinónimos, el término en inglés que uno no conoce— y no sirve para citar. La razón técnica hay que decirla explícitamente: un modelo de lenguaje genera texto plausible, y una referencia bibliográfica plausible tiene autor, título, revista y año con formato perfecto aunque no exista. Ha habido abogados sancionados por presentar ante un juez citas de jurisprudencia generadas así. La regla del curso es simple y verificable: si no puede abrir el enlace y ver el documento, no lo cite.</a:t>
+              <a:t>El asistente de IA merece su propia fila y hay que ser preciso, porque este curso lo autoriza en dos sesiones y lo prohíbe en el resto. Sirve para buscar —pistas, sinónimos, el término en inglés que uno no conoce— y no sirve para citar. La razón técnica hay que decirla explícitamente: un modelo de lenguaje genera texto que suena creíble, y una referencia bibliográfica que suena creíble tiene autor, título, revista y año con formato perfecto aunque no exista. Ha habido abogados sancionados por presentar ante un juez citas de jurisprudencia generadas así. La regla del curso es simple y verificable: si no puede abrir el enlace y ver el documento, no lo cite.</a:t>
             </a:r>
           </a:p>
           <a:p/>
